--- a/documentacion/presentacion_defensa.pptx
+++ b/documentacion/presentacion_defensa.pptx
@@ -1658,7 +1658,7 @@
     <p:bg>
       <p:bgPr>
         <a:solidFill>
-          <a:srgbClr val="212529"/>
+          <a:srgbClr val="1A1D20"/>
         </a:solidFill>
       </p:bgPr>
     </p:bg>
@@ -1684,16 +1684,21 @@
         </p:nvSpPr>
         <p:spPr>
           <a:xfrm>
-            <a:off x="914400" y="731520"/>
-            <a:ext cx="2286000" cy="73152"/>
+            <a:off x="822960" y="731520"/>
+            <a:ext cx="5303520" cy="329184"/>
           </a:xfrm>
           <a:prstGeom prst="rect">
             <a:avLst/>
           </a:prstGeom>
           <a:solidFill>
-            <a:srgbClr val="FF922B"/>
+            <a:srgbClr val="2D3238"/>
           </a:solidFill>
-          <a:ln/>
+          <a:ln w="12700">
+            <a:solidFill>
+              <a:srgbClr val="FF922B"/>
+            </a:solidFill>
+            <a:prstDash val="solid"/>
+          </a:ln>
         </p:spPr>
       </p:sp>
       <p:sp>
@@ -1704,8 +1709,8 @@
         </p:nvSpPr>
         <p:spPr>
           <a:xfrm>
-            <a:off x="914400" y="1005840"/>
-            <a:ext cx="10332720" cy="731520"/>
+            <a:off x="914400" y="749808"/>
+            <a:ext cx="5120640" cy="292608"/>
           </a:xfrm>
           <a:prstGeom prst="rect">
             <a:avLst/>
@@ -1717,11 +1722,11 @@
           <a:bodyPr wrap="square" rtlCol="0" anchor="ctr"/>
           <a:lstStyle/>
           <a:p>
-            <a:pPr algn="l" indent="0" marL="0">
-              <a:buNone/>
-            </a:pPr>
-            <a:r>
-              <a:rPr lang="en-US" sz="1400" b="1" dirty="0">
+            <a:pPr algn="ctr" indent="0" marL="0">
+              <a:buNone/>
+            </a:pPr>
+            <a:r>
+              <a:rPr lang="en-US" sz="1050" b="1" dirty="0">
                 <a:solidFill>
                   <a:srgbClr val="FF922B"/>
                 </a:solidFill>
@@ -1729,26 +1734,9 @@
                 <a:ea typeface="Arial" pitchFamily="34" charset="-122"/>
                 <a:cs typeface="Arial" pitchFamily="34" charset="-120"/>
               </a:rPr>
-              <a:t>BACHILLERATO TÉCNICO HUMANÍSTICO (BTH) - SISTEMAS INFORMÁTICOS</a:t>
-            </a:r>
-            <a:endParaRPr lang="en-US" sz="1400" dirty="0"/>
-          </a:p>
-          <a:p>
-            <a:pPr algn="l" indent="0" marL="0">
-              <a:buNone/>
-            </a:pPr>
-            <a:r>
-              <a:rPr lang="en-US" sz="1400" b="1" dirty="0">
-                <a:solidFill>
-                  <a:srgbClr val="FF922B"/>
-                </a:solidFill>
-                <a:latin typeface="Arial" pitchFamily="34" charset="0"/>
-                <a:ea typeface="Arial" pitchFamily="34" charset="-122"/>
-                <a:cs typeface="Arial" pitchFamily="34" charset="-120"/>
-              </a:rPr>
-              <a:t>NÚCLEO EDUCATIVO "LAS GAMAS"</a:t>
-            </a:r>
-            <a:endParaRPr lang="en-US" sz="1400" dirty="0"/>
+              <a:t>BACHILLERATO TÉCNICO HUMANÍSTICO • SISTEMAS INFORMÁTICOS</a:t>
+            </a:r>
+            <a:endParaRPr lang="en-US" sz="1050" dirty="0"/>
           </a:p>
         </p:txBody>
       </p:sp>
@@ -1760,8 +1748,8 @@
         </p:nvSpPr>
         <p:spPr>
           <a:xfrm>
-            <a:off x="914400" y="1737360"/>
-            <a:ext cx="10332720" cy="1005840"/>
+            <a:off x="822960" y="1234440"/>
+            <a:ext cx="10515600" cy="1005840"/>
           </a:xfrm>
           <a:prstGeom prst="rect">
             <a:avLst/>
@@ -1773,7 +1761,7 @@
           <a:bodyPr wrap="square" rtlCol="0" anchor="ctr"/>
           <a:lstStyle/>
           <a:p>
-            <a:pPr algn="l" indent="0" marL="0">
+            <a:pPr indent="0" marL="0">
               <a:buNone/>
             </a:pPr>
             <a:r>
@@ -1799,8 +1787,8 @@
         </p:nvSpPr>
         <p:spPr>
           <a:xfrm>
-            <a:off x="914400" y="2743200"/>
-            <a:ext cx="10332720" cy="548640"/>
+            <a:off x="822960" y="2240280"/>
+            <a:ext cx="10515600" cy="457200"/>
           </a:xfrm>
           <a:prstGeom prst="rect">
             <a:avLst/>
@@ -1812,11 +1800,11 @@
           <a:bodyPr wrap="square" rtlCol="0" anchor="ctr"/>
           <a:lstStyle/>
           <a:p>
-            <a:pPr algn="l" indent="0" marL="0">
-              <a:buNone/>
-            </a:pPr>
-            <a:r>
-              <a:rPr lang="en-US" sz="2000" b="1" dirty="0">
+            <a:pPr indent="0" marL="0">
+              <a:buNone/>
+            </a:pPr>
+            <a:r>
+              <a:rPr lang="en-US" sz="1800" b="1" dirty="0">
                 <a:solidFill>
                   <a:srgbClr val="1098AD"/>
                 </a:solidFill>
@@ -1826,7 +1814,7 @@
               </a:rPr>
               <a:t>Plataforma Web Responsive para el Reporte y Búsqueda de Mascotas Perdidas</a:t>
             </a:r>
-            <a:endParaRPr lang="en-US" sz="2000" dirty="0"/>
+            <a:endParaRPr lang="en-US" sz="1800" dirty="0"/>
           </a:p>
         </p:txBody>
       </p:sp>
@@ -1838,14 +1826,14 @@
         </p:nvSpPr>
         <p:spPr>
           <a:xfrm>
-            <a:off x="914400" y="3657600"/>
-            <a:ext cx="10332720" cy="2377440"/>
+            <a:off x="822960" y="3108960"/>
+            <a:ext cx="5120640" cy="2560320"/>
           </a:xfrm>
           <a:prstGeom prst="rect">
             <a:avLst/>
           </a:prstGeom>
           <a:solidFill>
-            <a:srgbClr val="2B3035"/>
+            <a:srgbClr val="252A2E"/>
           </a:solidFill>
           <a:ln w="12700">
             <a:solidFill>
@@ -1863,8 +1851,8 @@
         </p:nvSpPr>
         <p:spPr>
           <a:xfrm>
-            <a:off x="1188720" y="3794760"/>
-            <a:ext cx="9784080" cy="2103120"/>
+            <a:off x="1097280" y="3291840"/>
+            <a:ext cx="4572000" cy="274320"/>
           </a:xfrm>
           <a:prstGeom prst="rect">
             <a:avLst/>
@@ -1873,14 +1861,14 @@
           <a:ln/>
         </p:spPr>
         <p:txBody>
-          <a:bodyPr wrap="square" rtlCol="0" anchor="t"/>
+          <a:bodyPr wrap="square" rtlCol="0" anchor="ctr"/>
           <a:lstStyle/>
           <a:p>
-            <a:pPr algn="l" indent="0" marL="0">
-              <a:buNone/>
-            </a:pPr>
-            <a:r>
-              <a:rPr lang="en-US" sz="1300" b="1" dirty="0">
+            <a:pPr indent="0" marL="0">
+              <a:buNone/>
+            </a:pPr>
+            <a:r>
+              <a:rPr lang="en-US" sz="1200" b="1" dirty="0">
                 <a:solidFill>
                   <a:srgbClr val="FF922B"/>
                 </a:solidFill>
@@ -1888,14 +1876,68 @@
                 <a:ea typeface="Arial" pitchFamily="34" charset="-122"/>
                 <a:cs typeface="Arial" pitchFamily="34" charset="-120"/>
               </a:rPr>
-              <a:t>POSTULANTES:
+              <a:t>👥 EQUIPO DE POSTULANTES:</a:t>
+            </a:r>
+            <a:endParaRPr lang="en-US" sz="1200" dirty="0"/>
+          </a:p>
+        </p:txBody>
+      </p:sp>
+      <p:sp>
+        <p:nvSpPr>
+          <p:cNvPr id="8" name="Text 6"/>
+          <p:cNvSpPr/>
+          <p:nvPr/>
+        </p:nvSpPr>
+        <p:spPr>
+          <a:xfrm>
+            <a:off x="1097280" y="3657600"/>
+            <a:ext cx="4572000" cy="1828800"/>
+          </a:xfrm>
+          <a:prstGeom prst="rect">
+            <a:avLst/>
+          </a:prstGeom>
+          <a:noFill/>
+          <a:ln/>
+        </p:spPr>
+        <p:txBody>
+          <a:bodyPr wrap="square" rtlCol="0" anchor="ctr"/>
+          <a:lstStyle/>
+          <a:p>
+            <a:pPr indent="0" marL="0">
+              <a:buNone/>
+            </a:pPr>
+            <a:r>
+              <a:rPr lang="en-US" sz="1500" b="1" dirty="0">
+                <a:solidFill>
+                  <a:srgbClr val="FFFFFF"/>
+                </a:solidFill>
+                <a:latin typeface="Arial" pitchFamily="34" charset="0"/>
+                <a:ea typeface="Arial" pitchFamily="34" charset="-122"/>
+                <a:cs typeface="Arial" pitchFamily="34" charset="-120"/>
+              </a:rPr>
+              <a:t>• Leon Justiniano
 </a:t>
             </a:r>
-            <a:pPr algn="l" indent="0" marL="0">
-              <a:buNone/>
-            </a:pPr>
-            <a:r>
-              <a:rPr lang="en-US" sz="1400" b="1" dirty="0">
+            <a:pPr indent="0" marL="0">
+              <a:buNone/>
+            </a:pPr>
+            <a:r>
+              <a:rPr lang="en-US" sz="1150" dirty="0">
+                <a:solidFill>
+                  <a:srgbClr val="868E96"/>
+                </a:solidFill>
+                <a:latin typeface="Arial" pitchFamily="34" charset="0"/>
+                <a:ea typeface="Arial" pitchFamily="34" charset="-122"/>
+                <a:cs typeface="Arial" pitchFamily="34" charset="-120"/>
+              </a:rPr>
+              <a:t>  Desarrollo Full-Stack y Pruebas Técnicas
+</a:t>
+            </a:r>
+            <a:pPr indent="0" marL="0">
+              <a:buNone/>
+            </a:pPr>
+            <a:r>
+              <a:rPr lang="en-US" sz="1500" b="1" dirty="0">
                 <a:solidFill>
                   <a:srgbClr val="FFFFFF"/>
                 </a:solidFill>
@@ -1903,15 +1945,78 @@
                 <a:ea typeface="Arial" pitchFamily="34" charset="-122"/>
                 <a:cs typeface="Arial" pitchFamily="34" charset="-120"/>
               </a:rPr>
-              <a:t>• Leon Justiniano
-• Yimmy Lijeron Mejia
+              <a:t>• Yimmy Lijeron Mejia
 </a:t>
             </a:r>
-            <a:pPr algn="l" indent="0" marL="0">
-              <a:buNone/>
-            </a:pPr>
-            <a:r>
-              <a:rPr lang="en-US" sz="1300" b="1" dirty="0">
+            <a:pPr indent="0" marL="0">
+              <a:buNone/>
+            </a:pPr>
+            <a:r>
+              <a:rPr lang="en-US" sz="1150" dirty="0">
+                <a:solidFill>
+                  <a:srgbClr val="868E96"/>
+                </a:solidFill>
+                <a:latin typeface="Arial" pitchFamily="34" charset="0"/>
+                <a:ea typeface="Arial" pitchFamily="34" charset="-122"/>
+                <a:cs typeface="Arial" pitchFamily="34" charset="-120"/>
+              </a:rPr>
+              <a:t>  Diseño UI/UX, Análisis y Documentación</a:t>
+            </a:r>
+            <a:endParaRPr lang="en-US" sz="1500" dirty="0"/>
+          </a:p>
+        </p:txBody>
+      </p:sp>
+      <p:sp>
+        <p:nvSpPr>
+          <p:cNvPr id="9" name="Shape 7"/>
+          <p:cNvSpPr/>
+          <p:nvPr/>
+        </p:nvSpPr>
+        <p:spPr>
+          <a:xfrm>
+            <a:off x="6217920" y="3108960"/>
+            <a:ext cx="5120640" cy="2560320"/>
+          </a:xfrm>
+          <a:prstGeom prst="rect">
+            <a:avLst/>
+          </a:prstGeom>
+          <a:solidFill>
+            <a:srgbClr val="252A2E"/>
+          </a:solidFill>
+          <a:ln w="12700">
+            <a:solidFill>
+              <a:srgbClr val="343A40"/>
+            </a:solidFill>
+            <a:prstDash val="solid"/>
+          </a:ln>
+        </p:spPr>
+      </p:sp>
+      <p:sp>
+        <p:nvSpPr>
+          <p:cNvPr id="10" name="Text 8"/>
+          <p:cNvSpPr/>
+          <p:nvPr/>
+        </p:nvSpPr>
+        <p:spPr>
+          <a:xfrm>
+            <a:off x="6492240" y="3291840"/>
+            <a:ext cx="4572000" cy="274320"/>
+          </a:xfrm>
+          <a:prstGeom prst="rect">
+            <a:avLst/>
+          </a:prstGeom>
+          <a:noFill/>
+          <a:ln/>
+        </p:spPr>
+        <p:txBody>
+          <a:bodyPr wrap="square" rtlCol="0" anchor="ctr"/>
+          <a:lstStyle/>
+          <a:p>
+            <a:pPr indent="0" marL="0">
+              <a:buNone/>
+            </a:pPr>
+            <a:r>
+              <a:rPr lang="en-US" sz="1200" b="1" dirty="0">
                 <a:solidFill>
                   <a:srgbClr val="FF922B"/>
                 </a:solidFill>
@@ -1919,13 +2024,52 @@
                 <a:ea typeface="Arial" pitchFamily="34" charset="-122"/>
                 <a:cs typeface="Arial" pitchFamily="34" charset="-120"/>
               </a:rPr>
-              <a:t>DOCENTE TUTOR: </a:t>
-            </a:r>
-            <a:pPr algn="l" indent="0" marL="0">
-              <a:buNone/>
-            </a:pPr>
-            <a:r>
-              <a:rPr lang="en-US" sz="1300" dirty="0">
+              <a:t>🏛️ ASESORÍA Y UNIDAD EDUCATIVA:</a:t>
+            </a:r>
+            <a:endParaRPr lang="en-US" sz="1200" dirty="0"/>
+          </a:p>
+        </p:txBody>
+      </p:sp>
+      <p:sp>
+        <p:nvSpPr>
+          <p:cNvPr id="11" name="Text 9"/>
+          <p:cNvSpPr/>
+          <p:nvPr/>
+        </p:nvSpPr>
+        <p:spPr>
+          <a:xfrm>
+            <a:off x="6492240" y="3657600"/>
+            <a:ext cx="4572000" cy="1828800"/>
+          </a:xfrm>
+          <a:prstGeom prst="rect">
+            <a:avLst/>
+          </a:prstGeom>
+          <a:noFill/>
+          <a:ln/>
+        </p:spPr>
+        <p:txBody>
+          <a:bodyPr wrap="square" rtlCol="0" anchor="ctr"/>
+          <a:lstStyle/>
+          <a:p>
+            <a:pPr indent="0" marL="0">
+              <a:buNone/>
+            </a:pPr>
+            <a:r>
+              <a:rPr lang="en-US" sz="1250" b="1" dirty="0">
+                <a:solidFill>
+                  <a:srgbClr val="1098AD"/>
+                </a:solidFill>
+                <a:latin typeface="Arial" pitchFamily="34" charset="0"/>
+                <a:ea typeface="Arial" pitchFamily="34" charset="-122"/>
+                <a:cs typeface="Arial" pitchFamily="34" charset="-120"/>
+              </a:rPr>
+              <a:t>Docente Tutor: </a:t>
+            </a:r>
+            <a:pPr indent="0" marL="0">
+              <a:buNone/>
+            </a:pPr>
+            <a:r>
+              <a:rPr lang="en-US" sz="1250" dirty="0">
                 <a:solidFill>
                   <a:srgbClr val="FFFFFF"/>
                 </a:solidFill>
@@ -1936,25 +2080,25 @@
               <a:t>Lic. Ronald Silver Quino Torrez
 </a:t>
             </a:r>
-            <a:pPr algn="l" indent="0" marL="0">
-              <a:buNone/>
-            </a:pPr>
-            <a:r>
-              <a:rPr lang="en-US" sz="1300" b="1" dirty="0">
-                <a:solidFill>
-                  <a:srgbClr val="FF922B"/>
-                </a:solidFill>
-                <a:latin typeface="Arial" pitchFamily="34" charset="0"/>
-                <a:ea typeface="Arial" pitchFamily="34" charset="-122"/>
-                <a:cs typeface="Arial" pitchFamily="34" charset="-120"/>
-              </a:rPr>
-              <a:t>DOCENTE DE ESPECIALIDAD: </a:t>
-            </a:r>
-            <a:pPr algn="l" indent="0" marL="0">
-              <a:buNone/>
-            </a:pPr>
-            <a:r>
-              <a:rPr lang="en-US" sz="1300" dirty="0">
+            <a:pPr indent="0" marL="0">
+              <a:buNone/>
+            </a:pPr>
+            <a:r>
+              <a:rPr lang="en-US" sz="1250" b="1" dirty="0">
+                <a:solidFill>
+                  <a:srgbClr val="1098AD"/>
+                </a:solidFill>
+                <a:latin typeface="Arial" pitchFamily="34" charset="0"/>
+                <a:ea typeface="Arial" pitchFamily="34" charset="-122"/>
+                <a:cs typeface="Arial" pitchFamily="34" charset="-120"/>
+              </a:rPr>
+              <a:t>Docente de Especialidad: </a:t>
+            </a:r>
+            <a:pPr indent="0" marL="0">
+              <a:buNone/>
+            </a:pPr>
+            <a:r>
+              <a:rPr lang="en-US" sz="1250" dirty="0">
                 <a:solidFill>
                   <a:srgbClr val="FFFFFF"/>
                 </a:solidFill>
@@ -1965,25 +2109,25 @@
               <a:t>Lic. Ana Gabriela Paz Arauz
 </a:t>
             </a:r>
-            <a:pPr algn="l" indent="0" marL="0">
-              <a:buNone/>
-            </a:pPr>
-            <a:r>
-              <a:rPr lang="en-US" sz="1300" b="1" dirty="0">
-                <a:solidFill>
-                  <a:srgbClr val="FF922B"/>
-                </a:solidFill>
-                <a:latin typeface="Arial" pitchFamily="34" charset="0"/>
-                <a:ea typeface="Arial" pitchFamily="34" charset="-122"/>
-                <a:cs typeface="Arial" pitchFamily="34" charset="-120"/>
-              </a:rPr>
-              <a:t>PRESIDENTE DE COMITÉ BTH: </a:t>
-            </a:r>
-            <a:pPr algn="l" indent="0" marL="0">
-              <a:buNone/>
-            </a:pPr>
-            <a:r>
-              <a:rPr lang="en-US" sz="1300" dirty="0">
+            <a:pPr indent="0" marL="0">
+              <a:buNone/>
+            </a:pPr>
+            <a:r>
+              <a:rPr lang="en-US" sz="1250" b="1" dirty="0">
+                <a:solidFill>
+                  <a:srgbClr val="1098AD"/>
+                </a:solidFill>
+                <a:latin typeface="Arial" pitchFamily="34" charset="0"/>
+                <a:ea typeface="Arial" pitchFamily="34" charset="-122"/>
+                <a:cs typeface="Arial" pitchFamily="34" charset="-120"/>
+              </a:rPr>
+              <a:t>Presidente Comité BTH: </a:t>
+            </a:r>
+            <a:pPr indent="0" marL="0">
+              <a:buNone/>
+            </a:pPr>
+            <a:r>
+              <a:rPr lang="en-US" sz="1250" dirty="0">
                 <a:solidFill>
                   <a:srgbClr val="FFFFFF"/>
                 </a:solidFill>
@@ -1991,9 +2135,24 @@
                 <a:ea typeface="Arial" pitchFamily="34" charset="-122"/>
                 <a:cs typeface="Arial" pitchFamily="34" charset="-120"/>
               </a:rPr>
-              <a:t>Lic. Edwin Eliseo Huayllani Silvestre</a:t>
-            </a:r>
-            <a:endParaRPr lang="en-US" sz="1300" dirty="0"/>
+              <a:t>Lic. Edwin Eliseo Huayllani Silvestre
+</a:t>
+            </a:r>
+            <a:pPr indent="0" marL="0">
+              <a:buNone/>
+            </a:pPr>
+            <a:r>
+              <a:rPr lang="en-US" sz="1100" b="1" dirty="0">
+                <a:solidFill>
+                  <a:srgbClr val="868E96"/>
+                </a:solidFill>
+                <a:latin typeface="Arial" pitchFamily="34" charset="0"/>
+                <a:ea typeface="Arial" pitchFamily="34" charset="-122"/>
+                <a:cs typeface="Arial" pitchFamily="34" charset="-120"/>
+              </a:rPr>
+              <a:t>Núcleo Educativo Las Gamas • Warnes, Santa Cruz (2026)</a:t>
+            </a:r>
+            <a:endParaRPr lang="en-US" sz="1250" dirty="0"/>
           </a:p>
         </p:txBody>
       </p:sp>
@@ -2011,7 +2170,7 @@
     <p:bg>
       <p:bgPr>
         <a:solidFill>
-          <a:srgbClr val="212529"/>
+          <a:srgbClr val="1A1D20"/>
         </a:solidFill>
       </p:bgPr>
     </p:bg>
@@ -2038,7 +2197,7 @@
         <p:spPr>
           <a:xfrm>
             <a:off x="914400" y="1645920"/>
-            <a:ext cx="10332720" cy="914400"/>
+            <a:ext cx="10360152" cy="914400"/>
           </a:xfrm>
           <a:prstGeom prst="rect">
             <a:avLst/>
@@ -2054,7 +2213,7 @@
               <a:buNone/>
             </a:pPr>
             <a:r>
-              <a:rPr lang="en-US" sz="4000" b="1" dirty="0">
+              <a:rPr lang="en-US" sz="3800" b="1" dirty="0">
                 <a:solidFill>
                   <a:srgbClr val="FFFFFF"/>
                 </a:solidFill>
@@ -2064,7 +2223,7 @@
               </a:rPr>
               <a:t>¡Muchas Gracias por su Atención!</a:t>
             </a:r>
-            <a:endParaRPr lang="en-US" sz="4000" dirty="0"/>
+            <a:endParaRPr lang="en-US" sz="3800" dirty="0"/>
           </a:p>
         </p:txBody>
       </p:sp>
@@ -2097,7 +2256,7 @@
         <p:spPr>
           <a:xfrm>
             <a:off x="914400" y="2926080"/>
-            <a:ext cx="10332720" cy="731520"/>
+            <a:ext cx="10360152" cy="731520"/>
           </a:xfrm>
           <a:prstGeom prst="rect">
             <a:avLst/>
@@ -2136,7 +2295,7 @@
         <p:spPr>
           <a:xfrm>
             <a:off x="914400" y="4114800"/>
-            <a:ext cx="10332720" cy="1828800"/>
+            <a:ext cx="10360152" cy="1828800"/>
           </a:xfrm>
           <a:prstGeom prst="rect">
             <a:avLst/>
@@ -2154,7 +2313,7 @@
             <a:r>
               <a:rPr lang="en-US" sz="1500" dirty="0">
                 <a:solidFill>
-                  <a:srgbClr val="495057"/>
+                  <a:srgbClr val="868E96"/>
                 </a:solidFill>
                 <a:latin typeface="Arial" pitchFamily="34" charset="0"/>
                 <a:ea typeface="Arial" pitchFamily="34" charset="-122"/>
@@ -2174,45 +2333,45 @@
                 <a:ea typeface="Arial" pitchFamily="34" charset="-122"/>
                 <a:cs typeface="Arial" pitchFamily="34" charset="-120"/>
               </a:rPr>
-              <a:t>Leon Justiniano  |  Yimmy Lijeron Mejia
+              <a:t>Leon Justiniano   |   Yimmy Lijeron Mejia
 </a:t>
             </a:r>
             <a:pPr algn="ctr" indent="0" marL="0">
               <a:buNone/>
             </a:pPr>
             <a:r>
+              <a:rPr lang="en-US" sz="1350" dirty="0">
+                <a:solidFill>
+                  <a:srgbClr val="868E96"/>
+                </a:solidFill>
+                <a:latin typeface="Arial" pitchFamily="34" charset="0"/>
+                <a:ea typeface="Arial" pitchFamily="34" charset="-122"/>
+                <a:cs typeface="Arial" pitchFamily="34" charset="-120"/>
+              </a:rPr>
+              <a:t>Especialidad: </a:t>
+            </a:r>
+            <a:pPr algn="ctr" indent="0" marL="0">
+              <a:buNone/>
+            </a:pPr>
+            <a:r>
               <a:rPr lang="en-US" sz="1400" dirty="0">
                 <a:solidFill>
-                  <a:srgbClr val="495057"/>
-                </a:solidFill>
-                <a:latin typeface="Arial" pitchFamily="34" charset="0"/>
-                <a:ea typeface="Arial" pitchFamily="34" charset="-122"/>
-                <a:cs typeface="Arial" pitchFamily="34" charset="-120"/>
-              </a:rPr>
-              <a:t>Especialidad: </a:t>
+                  <a:srgbClr val="1098AD"/>
+                </a:solidFill>
+                <a:latin typeface="Arial" pitchFamily="34" charset="0"/>
+                <a:ea typeface="Arial" pitchFamily="34" charset="-122"/>
+                <a:cs typeface="Arial" pitchFamily="34" charset="-120"/>
+              </a:rPr>
+              <a:t>Sistemas Informáticos — BTH Núcleo Las Gamas
+</a:t>
             </a:r>
             <a:pPr algn="ctr" indent="0" marL="0">
               <a:buNone/>
             </a:pPr>
             <a:r>
-              <a:rPr lang="en-US" sz="1400" dirty="0">
-                <a:solidFill>
-                  <a:srgbClr val="1098AD"/>
-                </a:solidFill>
-                <a:latin typeface="Arial" pitchFamily="34" charset="0"/>
-                <a:ea typeface="Arial" pitchFamily="34" charset="-122"/>
-                <a:cs typeface="Arial" pitchFamily="34" charset="-120"/>
-              </a:rPr>
-              <a:t>Sistemas Informáticos — BTH Las Gamas
-</a:t>
-            </a:r>
-            <a:pPr algn="ctr" indent="0" marL="0">
-              <a:buNone/>
-            </a:pPr>
-            <a:r>
-              <a:rPr lang="en-US" sz="1300" i="1" dirty="0">
-                <a:solidFill>
-                  <a:srgbClr val="495057"/>
+              <a:rPr lang="en-US" sz="1250" i="1" dirty="0">
+                <a:solidFill>
+                  <a:srgbClr val="868E96"/>
                 </a:solidFill>
                 <a:latin typeface="Arial" pitchFamily="34" charset="0"/>
                 <a:ea typeface="Arial" pitchFamily="34" charset="-122"/>
@@ -2238,7 +2397,7 @@
     <p:bg>
       <p:bgPr>
         <a:solidFill>
-          <a:srgbClr val="F8F9FA"/>
+          <a:srgbClr val="F4F6F8"/>
         </a:solidFill>
       </p:bgPr>
     </p:bg>
@@ -2265,7 +2424,7 @@
         <p:spPr>
           <a:xfrm>
             <a:off x="0" y="0"/>
-            <a:ext cx="9144000" cy="1005840"/>
+            <a:ext cx="12191695" cy="1051560"/>
           </a:xfrm>
           <a:prstGeom prst="rect">
             <a:avLst/>
@@ -2275,7 +2434,7 @@
           </a:solidFill>
           <a:ln w="12700">
             <a:solidFill>
-              <a:srgbClr val="DEE2E6"/>
+              <a:srgbClr val="E2E8F0"/>
             </a:solidFill>
             <a:prstDash val="solid"/>
           </a:ln>
@@ -2289,8 +2448,8 @@
         </p:nvSpPr>
         <p:spPr>
           <a:xfrm>
-            <a:off x="0" y="0"/>
-            <a:ext cx="228600" cy="1005840"/>
+            <a:off x="731520" y="256032"/>
+            <a:ext cx="91440" cy="530352"/>
           </a:xfrm>
           <a:prstGeom prst="rect">
             <a:avLst/>
@@ -2309,8 +2468,8 @@
         </p:nvSpPr>
         <p:spPr>
           <a:xfrm>
-            <a:off x="548640" y="137160"/>
-            <a:ext cx="10972800" cy="274320"/>
+            <a:off x="960120" y="201168"/>
+            <a:ext cx="10058400" cy="228600"/>
           </a:xfrm>
           <a:prstGeom prst="rect">
             <a:avLst/>
@@ -2326,7 +2485,7 @@
               <a:buNone/>
             </a:pPr>
             <a:r>
-              <a:rPr lang="en-US" sz="1100" b="1" dirty="0">
+              <a:rPr lang="en-US" sz="1050" b="1" dirty="0">
                 <a:solidFill>
                   <a:srgbClr val="FF922B"/>
                 </a:solidFill>
@@ -2336,7 +2495,7 @@
               </a:rPr>
               <a:t>CAPÍTULO 1</a:t>
             </a:r>
-            <a:endParaRPr lang="en-US" sz="1100" dirty="0"/>
+            <a:endParaRPr lang="en-US" sz="1050" dirty="0"/>
           </a:p>
         </p:txBody>
       </p:sp>
@@ -2348,8 +2507,8 @@
         </p:nvSpPr>
         <p:spPr>
           <a:xfrm>
-            <a:off x="548640" y="411480"/>
-            <a:ext cx="10972800" cy="502920"/>
+            <a:off x="960120" y="429768"/>
+            <a:ext cx="10058400" cy="457200"/>
           </a:xfrm>
           <a:prstGeom prst="rect">
             <a:avLst/>
@@ -2365,7 +2524,7 @@
               <a:buNone/>
             </a:pPr>
             <a:r>
-              <a:rPr lang="en-US" sz="2400" b="1" dirty="0">
+              <a:rPr lang="en-US" sz="2200" b="1" dirty="0">
                 <a:solidFill>
                   <a:srgbClr val="212529"/>
                 </a:solidFill>
@@ -2375,7 +2534,7 @@
               </a:rPr>
               <a:t>1. Planteamiento del Problema</a:t>
             </a:r>
-            <a:endParaRPr lang="en-US" sz="2400" dirty="0"/>
+            <a:endParaRPr lang="en-US" sz="2200" dirty="0"/>
           </a:p>
         </p:txBody>
       </p:sp>
@@ -2387,8 +2546,8 @@
         </p:nvSpPr>
         <p:spPr>
           <a:xfrm>
-            <a:off x="731520" y="1280160"/>
-            <a:ext cx="5212080" cy="5029200"/>
+            <a:off x="731520" y="1325880"/>
+            <a:ext cx="5212080" cy="4983480"/>
           </a:xfrm>
           <a:prstGeom prst="rect">
             <a:avLst/>
@@ -2396,9 +2555,9 @@
           <a:solidFill>
             <a:srgbClr val="FFFFFF"/>
           </a:solidFill>
-          <a:ln w="19050">
+          <a:ln w="12700">
             <a:solidFill>
-              <a:srgbClr val="DEE2E6"/>
+              <a:srgbClr val="E2E8F0"/>
             </a:solidFill>
             <a:prstDash val="solid"/>
           </a:ln>
@@ -2406,14 +2565,34 @@
       </p:sp>
       <p:sp>
         <p:nvSpPr>
-          <p:cNvPr id="7" name="Text 5"/>
-          <p:cNvSpPr/>
-          <p:nvPr/>
-        </p:nvSpPr>
-        <p:spPr>
-          <a:xfrm>
-            <a:off x="960120" y="1463040"/>
-            <a:ext cx="4754880" cy="365760"/>
+          <p:cNvPr id="7" name="Shape 5"/>
+          <p:cNvSpPr/>
+          <p:nvPr/>
+        </p:nvSpPr>
+        <p:spPr>
+          <a:xfrm>
+            <a:off x="777240" y="1325880"/>
+            <a:ext cx="5120640" cy="73152"/>
+          </a:xfrm>
+          <a:prstGeom prst="rect">
+            <a:avLst/>
+          </a:prstGeom>
+          <a:solidFill>
+            <a:srgbClr val="1098AD"/>
+          </a:solidFill>
+          <a:ln/>
+        </p:spPr>
+      </p:sp>
+      <p:sp>
+        <p:nvSpPr>
+          <p:cNvPr id="8" name="Text 6"/>
+          <p:cNvSpPr/>
+          <p:nvPr/>
+        </p:nvSpPr>
+        <p:spPr>
+          <a:xfrm>
+            <a:off x="1005840" y="1527048"/>
+            <a:ext cx="4663440" cy="347472"/>
           </a:xfrm>
           <a:prstGeom prst="rect">
             <a:avLst/>
@@ -2429,7 +2608,7 @@
               <a:buNone/>
             </a:pPr>
             <a:r>
-              <a:rPr lang="en-US" sz="1600" b="1" dirty="0">
+              <a:rPr lang="en-US" sz="1450" b="1" dirty="0">
                 <a:solidFill>
                   <a:srgbClr val="0B7285"/>
                 </a:solidFill>
@@ -2439,20 +2618,20 @@
               </a:rPr>
               <a:t>1.1. Diagnóstico y Descripción de la Realidad</a:t>
             </a:r>
-            <a:endParaRPr lang="en-US" sz="1600" dirty="0"/>
+            <a:endParaRPr lang="en-US" sz="1450" dirty="0"/>
           </a:p>
         </p:txBody>
       </p:sp>
       <p:sp>
         <p:nvSpPr>
-          <p:cNvPr id="8" name="Text 6"/>
-          <p:cNvSpPr/>
-          <p:nvPr/>
-        </p:nvSpPr>
-        <p:spPr>
-          <a:xfrm>
-            <a:off x="960120" y="1874520"/>
-            <a:ext cx="4754880" cy="4251960"/>
+          <p:cNvPr id="9" name="Text 7"/>
+          <p:cNvSpPr/>
+          <p:nvPr/>
+        </p:nvSpPr>
+        <p:spPr>
+          <a:xfrm>
+            <a:off x="1005840" y="1920240"/>
+            <a:ext cx="4663440" cy="2560320"/>
           </a:xfrm>
           <a:prstGeom prst="rect">
             <a:avLst/>
@@ -2461,17 +2640,14 @@
           <a:ln/>
         </p:spPr>
         <p:txBody>
-          <a:bodyPr wrap="square" rtlCol="0" anchor="t"/>
+          <a:bodyPr wrap="square" rtlCol="0" anchor="ctr"/>
           <a:lstStyle/>
           <a:p>
-            <a:pPr algn="l" indent="0" marL="0">
-              <a:spcAft>
-                <a:spcPts val="400"/>
-              </a:spcAft>
-              <a:buNone/>
-            </a:pPr>
-            <a:r>
-              <a:rPr lang="en-US" sz="1300" b="1" dirty="0">
+            <a:pPr indent="0" marL="0">
+              <a:buNone/>
+            </a:pPr>
+            <a:r>
+              <a:rPr lang="en-US" sz="1250" b="1" dirty="0">
                 <a:solidFill>
                   <a:srgbClr val="212529"/>
                 </a:solidFill>
@@ -2479,17 +2655,14 @@
                 <a:ea typeface="Arial" pitchFamily="34" charset="-122"/>
                 <a:cs typeface="Arial" pitchFamily="34" charset="-120"/>
               </a:rPr>
-              <a:t>Realidad Comunitaria:
+              <a:t>Contexto Comunitario:
 </a:t>
             </a:r>
-            <a:pPr algn="l" indent="0" marL="0">
-              <a:spcAft>
-                <a:spcPts val="400"/>
-              </a:spcAft>
-              <a:buNone/>
-            </a:pPr>
-            <a:r>
-              <a:rPr lang="en-US" sz="1250" dirty="0">
+            <a:pPr indent="0" marL="0">
+              <a:buNone/>
+            </a:pPr>
+            <a:r>
+              <a:rPr lang="en-US" sz="1150" dirty="0">
                 <a:solidFill>
                   <a:srgbClr val="495057"/>
                 </a:solidFill>
@@ -2497,17 +2670,14 @@
                 <a:ea typeface="Arial" pitchFamily="34" charset="-122"/>
                 <a:cs typeface="Arial" pitchFamily="34" charset="-120"/>
               </a:rPr>
-              <a:t>El extravío de animales domésticos en nuestro entorno urbano genera alta angustia y desmovilización familiar.
+              <a:t>En Warnes y nuestra comunidad escolar, el extravío de mascotas causa gran angustia y pérdidas económicas familiares.
 </a:t>
             </a:r>
-            <a:pPr algn="l" indent="0" marL="0">
-              <a:spcAft>
-                <a:spcPts val="400"/>
-              </a:spcAft>
-              <a:buNone/>
-            </a:pPr>
-            <a:r>
-              <a:rPr lang="en-US" sz="1300" b="1" dirty="0">
+            <a:pPr indent="0" marL="0">
+              <a:buNone/>
+            </a:pPr>
+            <a:r>
+              <a:rPr lang="en-US" sz="1250" b="1" dirty="0">
                 <a:solidFill>
                   <a:srgbClr val="212529"/>
                 </a:solidFill>
@@ -2515,17 +2685,14 @@
                 <a:ea typeface="Arial" pitchFamily="34" charset="-122"/>
                 <a:cs typeface="Arial" pitchFamily="34" charset="-120"/>
               </a:rPr>
-              <a:t>Métodos Tradicionales Ineficaces:
+              <a:t>Canales Actuales Deficientes:
 </a:t>
             </a:r>
-            <a:pPr algn="l" indent="0" marL="0">
-              <a:spcAft>
-                <a:spcPts val="400"/>
-              </a:spcAft>
-              <a:buNone/>
-            </a:pPr>
-            <a:r>
-              <a:rPr lang="en-US" sz="1250" dirty="0">
+            <a:pPr indent="0" marL="0">
+              <a:buNone/>
+            </a:pPr>
+            <a:r>
+              <a:rPr lang="en-US" sz="1150" dirty="0">
                 <a:solidFill>
                   <a:srgbClr val="495057"/>
                 </a:solidFill>
@@ -2533,18 +2700,15 @@
                 <a:ea typeface="Arial" pitchFamily="34" charset="-122"/>
                 <a:cs typeface="Arial" pitchFamily="34" charset="-120"/>
               </a:rPr>
-              <a:t>• Afiches impresos en postes que se destruyen con la lluvia y tienen bajo alcance.
-• Publicaciones en grupos de Facebook/WhatsApp que se pierden en horas sin posibilidad de filtrado.
+              <a:t>• Afiches físicos que se destruyen con la lluvia y tienen bajo alcance.
+• Grupos de redes sociales donde los avisos se pierden en horas.
 </a:t>
             </a:r>
-            <a:pPr algn="l" indent="0" marL="0">
-              <a:spcAft>
-                <a:spcPts val="400"/>
-              </a:spcAft>
-              <a:buNone/>
-            </a:pPr>
-            <a:r>
-              <a:rPr lang="en-US" sz="1300" b="1" dirty="0">
+            <a:pPr indent="0" marL="0">
+              <a:buNone/>
+            </a:pPr>
+            <a:r>
+              <a:rPr lang="en-US" sz="1250" b="1" dirty="0">
                 <a:solidFill>
                   <a:srgbClr val="0B7285"/>
                 </a:solidFill>
@@ -2552,60 +2716,228 @@
                 <a:ea typeface="Arial" pitchFamily="34" charset="-122"/>
                 <a:cs typeface="Arial" pitchFamily="34" charset="-120"/>
               </a:rPr>
-              <a:t>📊 Datos de Encuesta Local (40 vecinos):
-</a:t>
-            </a:r>
-            <a:pPr algn="l" indent="0" marL="0">
-              <a:spcAft>
-                <a:spcPts val="400"/>
-              </a:spcAft>
-              <a:buNone/>
-            </a:pPr>
-            <a:r>
-              <a:rPr lang="en-US" sz="1250" b="1" dirty="0">
-                <a:solidFill>
-                  <a:srgbClr val="212529"/>
-                </a:solidFill>
-                <a:latin typeface="Arial" pitchFamily="34" charset="0"/>
-                <a:ea typeface="Arial" pitchFamily="34" charset="-122"/>
-                <a:cs typeface="Arial" pitchFamily="34" charset="-120"/>
-              </a:rPr>
-              <a:t>• 65% sufrió la pérdida de una mascota en el último año.</a:t>
-            </a:r>
-            <a:endParaRPr lang="en-US" sz="1300" dirty="0"/>
-          </a:p>
-          <a:p>
-            <a:pPr algn="l" indent="0" marL="0">
-              <a:spcAft>
-                <a:spcPts val="400"/>
-              </a:spcAft>
-              <a:buNone/>
-            </a:pPr>
-            <a:r>
-              <a:rPr lang="en-US" sz="1250" b="1" dirty="0">
-                <a:solidFill>
-                  <a:srgbClr val="212529"/>
-                </a:solidFill>
-                <a:latin typeface="Arial" pitchFamily="34" charset="0"/>
-                <a:ea typeface="Arial" pitchFamily="34" charset="-122"/>
-                <a:cs typeface="Arial" pitchFamily="34" charset="-120"/>
-              </a:rPr>
-              <a:t>• 80% considera ineficiente buscar en redes sociales genéricas.</a:t>
-            </a:r>
-            <a:endParaRPr lang="en-US" sz="1300" dirty="0"/>
+              <a:t>📊 Sondeo Diagnóstico (40 Familias del Barrio):</a:t>
+            </a:r>
+            <a:endParaRPr lang="en-US" sz="1250" dirty="0"/>
           </a:p>
         </p:txBody>
       </p:sp>
       <p:sp>
         <p:nvSpPr>
-          <p:cNvPr id="9" name="Shape 7"/>
-          <p:cNvSpPr/>
-          <p:nvPr/>
-        </p:nvSpPr>
-        <p:spPr>
-          <a:xfrm>
-            <a:off x="6217920" y="1280160"/>
-            <a:ext cx="5212080" cy="5029200"/>
+          <p:cNvPr id="10" name="Shape 8"/>
+          <p:cNvSpPr/>
+          <p:nvPr/>
+        </p:nvSpPr>
+        <p:spPr>
+          <a:xfrm>
+            <a:off x="1005840" y="4663440"/>
+            <a:ext cx="2194560" cy="1325880"/>
+          </a:xfrm>
+          <a:prstGeom prst="rect">
+            <a:avLst/>
+          </a:prstGeom>
+          <a:solidFill>
+            <a:srgbClr val="E6FCF5"/>
+          </a:solidFill>
+          <a:ln w="12700">
+            <a:solidFill>
+              <a:srgbClr val="1098AD"/>
+            </a:solidFill>
+            <a:prstDash val="solid"/>
+          </a:ln>
+        </p:spPr>
+      </p:sp>
+      <p:sp>
+        <p:nvSpPr>
+          <p:cNvPr id="11" name="Text 9"/>
+          <p:cNvSpPr/>
+          <p:nvPr/>
+        </p:nvSpPr>
+        <p:spPr>
+          <a:xfrm>
+            <a:off x="1005840" y="4736592"/>
+            <a:ext cx="2194560" cy="548640"/>
+          </a:xfrm>
+          <a:prstGeom prst="rect">
+            <a:avLst/>
+          </a:prstGeom>
+          <a:noFill/>
+          <a:ln/>
+        </p:spPr>
+        <p:txBody>
+          <a:bodyPr wrap="square" rtlCol="0" anchor="ctr"/>
+          <a:lstStyle/>
+          <a:p>
+            <a:pPr algn="ctr" indent="0" marL="0">
+              <a:buNone/>
+            </a:pPr>
+            <a:r>
+              <a:rPr lang="en-US" sz="2600" b="1" dirty="0">
+                <a:solidFill>
+                  <a:srgbClr val="0B7285"/>
+                </a:solidFill>
+                <a:latin typeface="Arial" pitchFamily="34" charset="0"/>
+                <a:ea typeface="Arial" pitchFamily="34" charset="-122"/>
+                <a:cs typeface="Arial" pitchFamily="34" charset="-120"/>
+              </a:rPr>
+              <a:t>65%</a:t>
+            </a:r>
+            <a:endParaRPr lang="en-US" sz="2600" dirty="0"/>
+          </a:p>
+        </p:txBody>
+      </p:sp>
+      <p:sp>
+        <p:nvSpPr>
+          <p:cNvPr id="12" name="Text 10"/>
+          <p:cNvSpPr/>
+          <p:nvPr/>
+        </p:nvSpPr>
+        <p:spPr>
+          <a:xfrm>
+            <a:off x="1097280" y="5257800"/>
+            <a:ext cx="2011680" cy="640080"/>
+          </a:xfrm>
+          <a:prstGeom prst="rect">
+            <a:avLst/>
+          </a:prstGeom>
+          <a:noFill/>
+          <a:ln/>
+        </p:spPr>
+        <p:txBody>
+          <a:bodyPr wrap="square" rtlCol="0" anchor="ctr"/>
+          <a:lstStyle/>
+          <a:p>
+            <a:pPr algn="ctr" indent="0" marL="0">
+              <a:buNone/>
+            </a:pPr>
+            <a:r>
+              <a:rPr lang="en-US" sz="1000" dirty="0">
+                <a:solidFill>
+                  <a:srgbClr val="495057"/>
+                </a:solidFill>
+                <a:latin typeface="Arial" pitchFamily="34" charset="0"/>
+                <a:ea typeface="Arial" pitchFamily="34" charset="-122"/>
+                <a:cs typeface="Arial" pitchFamily="34" charset="-120"/>
+              </a:rPr>
+              <a:t>Perdió una mascota en el último año</a:t>
+            </a:r>
+            <a:endParaRPr lang="en-US" sz="1000" dirty="0"/>
+          </a:p>
+        </p:txBody>
+      </p:sp>
+      <p:sp>
+        <p:nvSpPr>
+          <p:cNvPr id="13" name="Shape 11"/>
+          <p:cNvSpPr/>
+          <p:nvPr/>
+        </p:nvSpPr>
+        <p:spPr>
+          <a:xfrm>
+            <a:off x="3474720" y="4663440"/>
+            <a:ext cx="2194560" cy="1325880"/>
+          </a:xfrm>
+          <a:prstGeom prst="rect">
+            <a:avLst/>
+          </a:prstGeom>
+          <a:solidFill>
+            <a:srgbClr val="FFF4E6"/>
+          </a:solidFill>
+          <a:ln w="12700">
+            <a:solidFill>
+              <a:srgbClr val="FF922B"/>
+            </a:solidFill>
+            <a:prstDash val="solid"/>
+          </a:ln>
+        </p:spPr>
+      </p:sp>
+      <p:sp>
+        <p:nvSpPr>
+          <p:cNvPr id="14" name="Text 12"/>
+          <p:cNvSpPr/>
+          <p:nvPr/>
+        </p:nvSpPr>
+        <p:spPr>
+          <a:xfrm>
+            <a:off x="3474720" y="4736592"/>
+            <a:ext cx="2194560" cy="548640"/>
+          </a:xfrm>
+          <a:prstGeom prst="rect">
+            <a:avLst/>
+          </a:prstGeom>
+          <a:noFill/>
+          <a:ln/>
+        </p:spPr>
+        <p:txBody>
+          <a:bodyPr wrap="square" rtlCol="0" anchor="ctr"/>
+          <a:lstStyle/>
+          <a:p>
+            <a:pPr algn="ctr" indent="0" marL="0">
+              <a:buNone/>
+            </a:pPr>
+            <a:r>
+              <a:rPr lang="en-US" sz="2600" b="1" dirty="0">
+                <a:solidFill>
+                  <a:srgbClr val="FF922B"/>
+                </a:solidFill>
+                <a:latin typeface="Arial" pitchFamily="34" charset="0"/>
+                <a:ea typeface="Arial" pitchFamily="34" charset="-122"/>
+                <a:cs typeface="Arial" pitchFamily="34" charset="-120"/>
+              </a:rPr>
+              <a:t>80%</a:t>
+            </a:r>
+            <a:endParaRPr lang="en-US" sz="2600" dirty="0"/>
+          </a:p>
+        </p:txBody>
+      </p:sp>
+      <p:sp>
+        <p:nvSpPr>
+          <p:cNvPr id="15" name="Text 13"/>
+          <p:cNvSpPr/>
+          <p:nvPr/>
+        </p:nvSpPr>
+        <p:spPr>
+          <a:xfrm>
+            <a:off x="3566160" y="5257800"/>
+            <a:ext cx="2011680" cy="640080"/>
+          </a:xfrm>
+          <a:prstGeom prst="rect">
+            <a:avLst/>
+          </a:prstGeom>
+          <a:noFill/>
+          <a:ln/>
+        </p:spPr>
+        <p:txBody>
+          <a:bodyPr wrap="square" rtlCol="0" anchor="ctr"/>
+          <a:lstStyle/>
+          <a:p>
+            <a:pPr algn="ctr" indent="0" marL="0">
+              <a:buNone/>
+            </a:pPr>
+            <a:r>
+              <a:rPr lang="en-US" sz="1000" dirty="0">
+                <a:solidFill>
+                  <a:srgbClr val="495057"/>
+                </a:solidFill>
+                <a:latin typeface="Arial" pitchFamily="34" charset="0"/>
+                <a:ea typeface="Arial" pitchFamily="34" charset="-122"/>
+                <a:cs typeface="Arial" pitchFamily="34" charset="-120"/>
+              </a:rPr>
+              <a:t>Afirma que redes sociales no son efectivas</a:t>
+            </a:r>
+            <a:endParaRPr lang="en-US" sz="1000" dirty="0"/>
+          </a:p>
+        </p:txBody>
+      </p:sp>
+      <p:sp>
+        <p:nvSpPr>
+          <p:cNvPr id="16" name="Shape 14"/>
+          <p:cNvSpPr/>
+          <p:nvPr/>
+        </p:nvSpPr>
+        <p:spPr>
+          <a:xfrm>
+            <a:off x="6217920" y="1325880"/>
+            <a:ext cx="5212080" cy="4983480"/>
           </a:xfrm>
           <a:prstGeom prst="rect">
             <a:avLst/>
@@ -2613,9 +2945,9 @@
           <a:solidFill>
             <a:srgbClr val="FFFFFF"/>
           </a:solidFill>
-          <a:ln w="19050">
+          <a:ln w="12700">
             <a:solidFill>
-              <a:srgbClr val="DEE2E6"/>
+              <a:srgbClr val="E2E8F0"/>
             </a:solidFill>
             <a:prstDash val="solid"/>
           </a:ln>
@@ -2623,14 +2955,34 @@
       </p:sp>
       <p:sp>
         <p:nvSpPr>
-          <p:cNvPr id="10" name="Text 8"/>
-          <p:cNvSpPr/>
-          <p:nvPr/>
-        </p:nvSpPr>
-        <p:spPr>
-          <a:xfrm>
-            <a:off x="6446520" y="1463040"/>
-            <a:ext cx="4754880" cy="365760"/>
+          <p:cNvPr id="17" name="Shape 15"/>
+          <p:cNvSpPr/>
+          <p:nvPr/>
+        </p:nvSpPr>
+        <p:spPr>
+          <a:xfrm>
+            <a:off x="6263640" y="1325880"/>
+            <a:ext cx="5120640" cy="73152"/>
+          </a:xfrm>
+          <a:prstGeom prst="rect">
+            <a:avLst/>
+          </a:prstGeom>
+          <a:solidFill>
+            <a:srgbClr val="E03131"/>
+          </a:solidFill>
+          <a:ln/>
+        </p:spPr>
+      </p:sp>
+      <p:sp>
+        <p:nvSpPr>
+          <p:cNvPr id="18" name="Text 16"/>
+          <p:cNvSpPr/>
+          <p:nvPr/>
+        </p:nvSpPr>
+        <p:spPr>
+          <a:xfrm>
+            <a:off x="6492240" y="1527048"/>
+            <a:ext cx="4663440" cy="347472"/>
           </a:xfrm>
           <a:prstGeom prst="rect">
             <a:avLst/>
@@ -2646,9 +2998,9 @@
               <a:buNone/>
             </a:pPr>
             <a:r>
-              <a:rPr lang="en-US" sz="1600" b="1" dirty="0">
-                <a:solidFill>
-                  <a:srgbClr val="0B7285"/>
+              <a:rPr lang="en-US" sz="1450" b="1" dirty="0">
+                <a:solidFill>
+                  <a:srgbClr val="E03131"/>
                 </a:solidFill>
                 <a:latin typeface="Arial" pitchFamily="34" charset="0"/>
                 <a:ea typeface="Arial" pitchFamily="34" charset="-122"/>
@@ -2656,20 +3008,45 @@
               </a:rPr>
               <a:t>1.2. Identificación del Problema</a:t>
             </a:r>
-            <a:endParaRPr lang="en-US" sz="1600" dirty="0"/>
+            <a:endParaRPr lang="en-US" sz="1450" dirty="0"/>
           </a:p>
         </p:txBody>
       </p:sp>
       <p:sp>
         <p:nvSpPr>
-          <p:cNvPr id="11" name="Text 9"/>
-          <p:cNvSpPr/>
-          <p:nvPr/>
-        </p:nvSpPr>
-        <p:spPr>
-          <a:xfrm>
-            <a:off x="6446520" y="1874520"/>
-            <a:ext cx="4754880" cy="4251960"/>
+          <p:cNvPr id="19" name="Shape 17"/>
+          <p:cNvSpPr/>
+          <p:nvPr/>
+        </p:nvSpPr>
+        <p:spPr>
+          <a:xfrm>
+            <a:off x="6492240" y="1920240"/>
+            <a:ext cx="4663440" cy="1097280"/>
+          </a:xfrm>
+          <a:prstGeom prst="rect">
+            <a:avLst/>
+          </a:prstGeom>
+          <a:solidFill>
+            <a:srgbClr val="FFF5F5"/>
+          </a:solidFill>
+          <a:ln w="12700">
+            <a:solidFill>
+              <a:srgbClr val="E03131"/>
+            </a:solidFill>
+            <a:prstDash val="solid"/>
+          </a:ln>
+        </p:spPr>
+      </p:sp>
+      <p:sp>
+        <p:nvSpPr>
+          <p:cNvPr id="20" name="Text 18"/>
+          <p:cNvSpPr/>
+          <p:nvPr/>
+        </p:nvSpPr>
+        <p:spPr>
+          <a:xfrm>
+            <a:off x="6629400" y="1993392"/>
+            <a:ext cx="4389120" cy="228600"/>
           </a:xfrm>
           <a:prstGeom prst="rect">
             <a:avLst/>
@@ -2678,35 +3055,124 @@
           <a:ln/>
         </p:spPr>
         <p:txBody>
-          <a:bodyPr wrap="square" rtlCol="0" anchor="t"/>
+          <a:bodyPr wrap="square" rtlCol="0" anchor="ctr"/>
           <a:lstStyle/>
           <a:p>
-            <a:pPr algn="l" indent="0" marL="0">
-              <a:spcAft>
-                <a:spcPts val="400"/>
-              </a:spcAft>
-              <a:buNone/>
-            </a:pPr>
-            <a:r>
-              <a:rPr lang="en-US" sz="1400" b="1" dirty="0">
-                <a:solidFill>
-                  <a:srgbClr val="FA5252"/>
-                </a:solidFill>
-                <a:latin typeface="Arial" pitchFamily="34" charset="0"/>
-                <a:ea typeface="Arial" pitchFamily="34" charset="-122"/>
-                <a:cs typeface="Arial" pitchFamily="34" charset="-120"/>
-              </a:rPr>
-              <a:t>Problema Central Detectado:
+            <a:pPr indent="0" marL="0">
+              <a:buNone/>
+            </a:pPr>
+            <a:r>
+              <a:rPr lang="en-US" sz="1100" b="1" dirty="0">
+                <a:solidFill>
+                  <a:srgbClr val="E03131"/>
+                </a:solidFill>
+                <a:latin typeface="Arial" pitchFamily="34" charset="0"/>
+                <a:ea typeface="Arial" pitchFamily="34" charset="-122"/>
+                <a:cs typeface="Arial" pitchFamily="34" charset="-120"/>
+              </a:rPr>
+              <a:t>🚨 PROBLEMA CENTRAL:</a:t>
+            </a:r>
+            <a:endParaRPr lang="en-US" sz="1100" dirty="0"/>
+          </a:p>
+        </p:txBody>
+      </p:sp>
+      <p:sp>
+        <p:nvSpPr>
+          <p:cNvPr id="21" name="Text 19"/>
+          <p:cNvSpPr/>
+          <p:nvPr/>
+        </p:nvSpPr>
+        <p:spPr>
+          <a:xfrm>
+            <a:off x="6629400" y="2240280"/>
+            <a:ext cx="4389120" cy="685800"/>
+          </a:xfrm>
+          <a:prstGeom prst="rect">
+            <a:avLst/>
+          </a:prstGeom>
+          <a:noFill/>
+          <a:ln/>
+        </p:spPr>
+        <p:txBody>
+          <a:bodyPr wrap="square" rtlCol="0" anchor="ctr"/>
+          <a:lstStyle/>
+          <a:p>
+            <a:pPr indent="0" marL="0">
+              <a:buNone/>
+            </a:pPr>
+            <a:r>
+              <a:rPr lang="en-US" sz="1200" b="1" dirty="0">
+                <a:solidFill>
+                  <a:srgbClr val="212529"/>
+                </a:solidFill>
+                <a:latin typeface="Arial" pitchFamily="34" charset="0"/>
+                <a:ea typeface="Arial" pitchFamily="34" charset="-122"/>
+                <a:cs typeface="Arial" pitchFamily="34" charset="-120"/>
+              </a:rPr>
+              <a:t>Dispersión, desorganización y caducidad inmediata de los reportes de mascotas extraviadas en la comunidad.</a:t>
+            </a:r>
+            <a:endParaRPr lang="en-US" sz="1200" dirty="0"/>
+          </a:p>
+        </p:txBody>
+      </p:sp>
+      <p:sp>
+        <p:nvSpPr>
+          <p:cNvPr id="22" name="Text 20"/>
+          <p:cNvSpPr/>
+          <p:nvPr/>
+        </p:nvSpPr>
+        <p:spPr>
+          <a:xfrm>
+            <a:off x="6492240" y="3200400"/>
+            <a:ext cx="4663440" cy="2834640"/>
+          </a:xfrm>
+          <a:prstGeom prst="rect">
+            <a:avLst/>
+          </a:prstGeom>
+          <a:noFill/>
+          <a:ln/>
+        </p:spPr>
+        <p:txBody>
+          <a:bodyPr wrap="square" rtlCol="0" anchor="ctr"/>
+          <a:lstStyle/>
+          <a:p>
+            <a:pPr indent="0" marL="0">
+              <a:buNone/>
+            </a:pPr>
+            <a:r>
+              <a:rPr lang="en-US" sz="1250" b="1" dirty="0">
+                <a:solidFill>
+                  <a:srgbClr val="212529"/>
+                </a:solidFill>
+                <a:latin typeface="Arial" pitchFamily="34" charset="0"/>
+                <a:ea typeface="Arial" pitchFamily="34" charset="-122"/>
+                <a:cs typeface="Arial" pitchFamily="34" charset="-120"/>
+              </a:rPr>
+              <a:t>Causas Directas:
 </a:t>
             </a:r>
-            <a:pPr algn="l" indent="0" marL="0">
-              <a:spcAft>
-                <a:spcPts val="400"/>
-              </a:spcAft>
-              <a:buNone/>
-            </a:pPr>
-            <a:r>
-              <a:rPr lang="en-US" sz="1300" b="1" dirty="0">
+            <a:pPr indent="0" marL="0">
+              <a:buNone/>
+            </a:pPr>
+            <a:r>
+              <a:rPr lang="en-US" sz="1150" dirty="0">
+                <a:solidFill>
+                  <a:srgbClr val="495057"/>
+                </a:solidFill>
+                <a:latin typeface="Arial" pitchFamily="34" charset="0"/>
+                <a:ea typeface="Arial" pitchFamily="34" charset="-122"/>
+                <a:cs typeface="Arial" pitchFamily="34" charset="-120"/>
+              </a:rPr>
+              <a:t>• Carencia de un repositorio digital centralizado y especializado.
+• Imposibilidad de buscar por palabra clave, zona o fecha.
+• Falta de actualización cuando una mascota ya fue hallada.
+</a:t>
+            </a:r>
+            <a:pPr indent="0" marL="0">
+              <a:buNone/>
+            </a:pPr>
+            <a:r>
+              <a:rPr lang="en-US" sz="1250" b="1" dirty="0">
                 <a:solidFill>
                   <a:srgbClr val="212529"/>
                 </a:solidFill>
@@ -2714,35 +3180,14 @@
                 <a:ea typeface="Arial" pitchFamily="34" charset="-122"/>
                 <a:cs typeface="Arial" pitchFamily="34" charset="-120"/>
               </a:rPr>
-              <a:t>La dispersión, desorganización y caducidad inmediata de la información sobre mascotas perdidas en la comunidad.
+              <a:t>Efectos Negativos:
 </a:t>
             </a:r>
-            <a:pPr algn="l" indent="0" marL="0">
-              <a:spcAft>
-                <a:spcPts val="400"/>
-              </a:spcAft>
-              <a:buNone/>
-            </a:pPr>
-            <a:r>
-              <a:rPr lang="en-US" sz="1300" b="1" dirty="0">
-                <a:solidFill>
-                  <a:srgbClr val="212529"/>
-                </a:solidFill>
-                <a:latin typeface="Arial" pitchFamily="34" charset="0"/>
-                <a:ea typeface="Arial" pitchFamily="34" charset="-122"/>
-                <a:cs typeface="Arial" pitchFamily="34" charset="-120"/>
-              </a:rPr>
-              <a:t>Causas Principales:
-</a:t>
-            </a:r>
-            <a:pPr algn="l" indent="0" marL="0">
-              <a:spcAft>
-                <a:spcPts val="400"/>
-              </a:spcAft>
-              <a:buNone/>
-            </a:pPr>
-            <a:r>
-              <a:rPr lang="en-US" sz="1250" dirty="0">
+            <a:pPr indent="0" marL="0">
+              <a:buNone/>
+            </a:pPr>
+            <a:r>
+              <a:rPr lang="en-US" sz="1150" dirty="0">
                 <a:solidFill>
                   <a:srgbClr val="495057"/>
                 </a:solidFill>
@@ -2750,37 +3195,16 @@
                 <a:ea typeface="Arial" pitchFamily="34" charset="-122"/>
                 <a:cs typeface="Arial" pitchFamily="34" charset="-120"/>
               </a:rPr>
-              <a:t>• Ausencia de un portal web centralizado y especializado.
-• Falta de filtros de búsqueda por zona o estado de la mascota.
-• Pérdida de tiempo crítico en las primeras 48 horas de extravío.
-</a:t>
-            </a:r>
-            <a:pPr algn="l" indent="0" marL="0">
-              <a:spcAft>
-                <a:spcPts val="400"/>
-              </a:spcAft>
-              <a:buNone/>
-            </a:pPr>
-            <a:r>
-              <a:rPr lang="en-US" sz="1300" b="1" dirty="0">
-                <a:solidFill>
-                  <a:srgbClr val="212529"/>
-                </a:solidFill>
-                <a:latin typeface="Arial" pitchFamily="34" charset="0"/>
-                <a:ea typeface="Arial" pitchFamily="34" charset="-122"/>
-                <a:cs typeface="Arial" pitchFamily="34" charset="-120"/>
-              </a:rPr>
-              <a:t>Efectos Directos:
-</a:t>
-            </a:r>
-            <a:pPr algn="l" indent="0" marL="0">
-              <a:spcAft>
-                <a:spcPts val="400"/>
-              </a:spcAft>
-              <a:buNone/>
-            </a:pPr>
-            <a:r>
-              <a:rPr lang="en-US" sz="1250" dirty="0">
+              <a:t>• Demora crítica durante las primeras 48 horas de búsqueda.</a:t>
+            </a:r>
+            <a:endParaRPr lang="en-US" sz="1250" dirty="0"/>
+          </a:p>
+          <a:p>
+            <a:pPr indent="0" marL="0">
+              <a:buNone/>
+            </a:pPr>
+            <a:r>
+              <a:rPr lang="en-US" sz="1150" dirty="0">
                 <a:solidFill>
                   <a:srgbClr val="495057"/>
                 </a:solidFill>
@@ -2788,29 +3212,9 @@
                 <a:ea typeface="Arial" pitchFamily="34" charset="-122"/>
                 <a:cs typeface="Arial" pitchFamily="34" charset="-120"/>
               </a:rPr>
-              <a:t>• Baja tasa de reencuentro de mascotas con sus dueños.</a:t>
-            </a:r>
-            <a:endParaRPr lang="en-US" sz="1400" dirty="0"/>
-          </a:p>
-          <a:p>
-            <a:pPr algn="l" indent="0" marL="0">
-              <a:spcAft>
-                <a:spcPts val="400"/>
-              </a:spcAft>
-              <a:buNone/>
-            </a:pPr>
-            <a:r>
-              <a:rPr lang="en-US" sz="1250" dirty="0">
-                <a:solidFill>
-                  <a:srgbClr val="495057"/>
-                </a:solidFill>
-                <a:latin typeface="Arial" pitchFamily="34" charset="0"/>
-                <a:ea typeface="Arial" pitchFamily="34" charset="-122"/>
-                <a:cs typeface="Arial" pitchFamily="34" charset="-120"/>
-              </a:rPr>
-              <a:t>• Desesperación familiar y proliferación de animales en situación de calle.</a:t>
-            </a:r>
-            <a:endParaRPr lang="en-US" sz="1400" dirty="0"/>
+              <a:t>• Baja probabilidad de reencuentro y aumento de animales desprotegidos.</a:t>
+            </a:r>
+            <a:endParaRPr lang="en-US" sz="1250" dirty="0"/>
           </a:p>
         </p:txBody>
       </p:sp>
@@ -2828,7 +3232,7 @@
     <p:bg>
       <p:bgPr>
         <a:solidFill>
-          <a:srgbClr val="F8F9FA"/>
+          <a:srgbClr val="F4F6F8"/>
         </a:solidFill>
       </p:bgPr>
     </p:bg>
@@ -2855,7 +3259,7 @@
         <p:spPr>
           <a:xfrm>
             <a:off x="0" y="0"/>
-            <a:ext cx="9144000" cy="1005840"/>
+            <a:ext cx="12191695" cy="1051560"/>
           </a:xfrm>
           <a:prstGeom prst="rect">
             <a:avLst/>
@@ -2865,7 +3269,7 @@
           </a:solidFill>
           <a:ln w="12700">
             <a:solidFill>
-              <a:srgbClr val="DEE2E6"/>
+              <a:srgbClr val="E2E8F0"/>
             </a:solidFill>
             <a:prstDash val="solid"/>
           </a:ln>
@@ -2879,8 +3283,8 @@
         </p:nvSpPr>
         <p:spPr>
           <a:xfrm>
-            <a:off x="0" y="0"/>
-            <a:ext cx="228600" cy="1005840"/>
+            <a:off x="731520" y="256032"/>
+            <a:ext cx="91440" cy="530352"/>
           </a:xfrm>
           <a:prstGeom prst="rect">
             <a:avLst/>
@@ -2899,8 +3303,8 @@
         </p:nvSpPr>
         <p:spPr>
           <a:xfrm>
-            <a:off x="548640" y="137160"/>
-            <a:ext cx="10972800" cy="274320"/>
+            <a:off x="960120" y="201168"/>
+            <a:ext cx="10058400" cy="228600"/>
           </a:xfrm>
           <a:prstGeom prst="rect">
             <a:avLst/>
@@ -2916,7 +3320,7 @@
               <a:buNone/>
             </a:pPr>
             <a:r>
-              <a:rPr lang="en-US" sz="1100" b="1" dirty="0">
+              <a:rPr lang="en-US" sz="1050" b="1" dirty="0">
                 <a:solidFill>
                   <a:srgbClr val="FF922B"/>
                 </a:solidFill>
@@ -2926,7 +3330,7 @@
               </a:rPr>
               <a:t>CAPÍTULO 1</a:t>
             </a:r>
-            <a:endParaRPr lang="en-US" sz="1100" dirty="0"/>
+            <a:endParaRPr lang="en-US" sz="1050" dirty="0"/>
           </a:p>
         </p:txBody>
       </p:sp>
@@ -2938,8 +3342,8 @@
         </p:nvSpPr>
         <p:spPr>
           <a:xfrm>
-            <a:off x="548640" y="411480"/>
-            <a:ext cx="10972800" cy="502920"/>
+            <a:off x="960120" y="429768"/>
+            <a:ext cx="10058400" cy="457200"/>
           </a:xfrm>
           <a:prstGeom prst="rect">
             <a:avLst/>
@@ -2955,7 +3359,7 @@
               <a:buNone/>
             </a:pPr>
             <a:r>
-              <a:rPr lang="en-US" sz="2400" b="1" dirty="0">
+              <a:rPr lang="en-US" sz="2200" b="1" dirty="0">
                 <a:solidFill>
                   <a:srgbClr val="212529"/>
                 </a:solidFill>
@@ -2965,7 +3369,7 @@
               </a:rPr>
               <a:t>1.3. Formulación y 1.4. Objetivos</a:t>
             </a:r>
-            <a:endParaRPr lang="en-US" sz="2400" dirty="0"/>
+            <a:endParaRPr lang="en-US" sz="2200" dirty="0"/>
           </a:p>
         </p:txBody>
       </p:sp>
@@ -2977,7 +3381,7 @@
         </p:nvSpPr>
         <p:spPr>
           <a:xfrm>
-            <a:off x="731520" y="1234440"/>
+            <a:off x="731520" y="1280160"/>
             <a:ext cx="10698480" cy="1280160"/>
           </a:xfrm>
           <a:prstGeom prst="rect">
@@ -2986,7 +3390,7 @@
           <a:solidFill>
             <a:srgbClr val="FFFFFF"/>
           </a:solidFill>
-          <a:ln w="25400">
+          <a:ln w="19050">
             <a:solidFill>
               <a:srgbClr val="FF922B"/>
             </a:solidFill>
@@ -3002,8 +3406,8 @@
         </p:nvSpPr>
         <p:spPr>
           <a:xfrm>
-            <a:off x="914400" y="1325880"/>
-            <a:ext cx="10332720" cy="274320"/>
+            <a:off x="1005840" y="1389888"/>
+            <a:ext cx="10149840" cy="256032"/>
           </a:xfrm>
           <a:prstGeom prst="rect">
             <a:avLst/>
@@ -3019,7 +3423,7 @@
               <a:buNone/>
             </a:pPr>
             <a:r>
-              <a:rPr lang="en-US" sz="1200" b="1" dirty="0">
+              <a:rPr lang="en-US" sz="1150" b="1" dirty="0">
                 <a:solidFill>
                   <a:srgbClr val="FF922B"/>
                 </a:solidFill>
@@ -3029,7 +3433,7 @@
               </a:rPr>
               <a:t>1.3. FORMULACIÓN DEL PROBLEMA (PREGUNTA GUÍA):</a:t>
             </a:r>
-            <a:endParaRPr lang="en-US" sz="1200" dirty="0"/>
+            <a:endParaRPr lang="en-US" sz="1150" dirty="0"/>
           </a:p>
         </p:txBody>
       </p:sp>
@@ -3041,8 +3445,8 @@
         </p:nvSpPr>
         <p:spPr>
           <a:xfrm>
-            <a:off x="914400" y="1600200"/>
-            <a:ext cx="10332720" cy="822960"/>
+            <a:off x="1005840" y="1664208"/>
+            <a:ext cx="10149840" cy="777240"/>
           </a:xfrm>
           <a:prstGeom prst="rect">
             <a:avLst/>
@@ -3058,7 +3462,7 @@
               <a:buNone/>
             </a:pPr>
             <a:r>
-              <a:rPr lang="en-US" sz="1400" b="1" i="1" dirty="0">
+              <a:rPr lang="en-US" sz="1300" b="1" i="1" dirty="0">
                 <a:solidFill>
                   <a:srgbClr val="212529"/>
                 </a:solidFill>
@@ -3066,9 +3470,9 @@
                 <a:ea typeface="Arial" pitchFamily="34" charset="-122"/>
                 <a:cs typeface="Arial" pitchFamily="34" charset="-120"/>
               </a:rPr>
-              <a:t>¿De qué manera el desarrollo de una aplicación web responsive basada en una arquitectura cliente-servidor y base de datos relacional puede optimizar el tiempo de búsqueda, reporte y actualización de anuncios de mascotas perdidas en nuestra comunidad?</a:t>
-            </a:r>
-            <a:endParaRPr lang="en-US" sz="1400" dirty="0"/>
+              <a:t>“¿De qué manera el desarrollo de una aplicación web responsive basada en una arquitectura cliente-servidor y base de datos relacional puede optimizar el tiempo de búsqueda, reporte y actualización de anuncios de mascotas perdidas en nuestra comunidad?”</a:t>
+            </a:r>
+            <a:endParaRPr lang="en-US" sz="1300" dirty="0"/>
           </a:p>
         </p:txBody>
       </p:sp>
@@ -3080,8 +3484,8 @@
         </p:nvSpPr>
         <p:spPr>
           <a:xfrm>
-            <a:off x="731520" y="2697480"/>
-            <a:ext cx="5212080" cy="3657600"/>
+            <a:off x="731520" y="2743200"/>
+            <a:ext cx="5212080" cy="3566160"/>
           </a:xfrm>
           <a:prstGeom prst="rect">
             <a:avLst/>
@@ -3089,9 +3493,9 @@
           <a:solidFill>
             <a:srgbClr val="FFFFFF"/>
           </a:solidFill>
-          <a:ln w="19050">
+          <a:ln w="12700">
             <a:solidFill>
-              <a:srgbClr val="DEE2E6"/>
+              <a:srgbClr val="E2E8F0"/>
             </a:solidFill>
             <a:prstDash val="solid"/>
           </a:ln>
@@ -3099,14 +3503,34 @@
       </p:sp>
       <p:sp>
         <p:nvSpPr>
-          <p:cNvPr id="10" name="Text 8"/>
-          <p:cNvSpPr/>
-          <p:nvPr/>
-        </p:nvSpPr>
-        <p:spPr>
-          <a:xfrm>
-            <a:off x="960120" y="2880360"/>
-            <a:ext cx="4754880" cy="365760"/>
+          <p:cNvPr id="10" name="Shape 8"/>
+          <p:cNvSpPr/>
+          <p:nvPr/>
+        </p:nvSpPr>
+        <p:spPr>
+          <a:xfrm>
+            <a:off x="777240" y="2743200"/>
+            <a:ext cx="5120640" cy="73152"/>
+          </a:xfrm>
+          <a:prstGeom prst="rect">
+            <a:avLst/>
+          </a:prstGeom>
+          <a:solidFill>
+            <a:srgbClr val="1098AD"/>
+          </a:solidFill>
+          <a:ln/>
+        </p:spPr>
+      </p:sp>
+      <p:sp>
+        <p:nvSpPr>
+          <p:cNvPr id="11" name="Text 9"/>
+          <p:cNvSpPr/>
+          <p:nvPr/>
+        </p:nvSpPr>
+        <p:spPr>
+          <a:xfrm>
+            <a:off x="1005840" y="2944368"/>
+            <a:ext cx="4663440" cy="347472"/>
           </a:xfrm>
           <a:prstGeom prst="rect">
             <a:avLst/>
@@ -3122,7 +3546,7 @@
               <a:buNone/>
             </a:pPr>
             <a:r>
-              <a:rPr lang="en-US" sz="1600" b="1" dirty="0">
+              <a:rPr lang="en-US" sz="1450" b="1" dirty="0">
                 <a:solidFill>
                   <a:srgbClr val="0B7285"/>
                 </a:solidFill>
@@ -3132,20 +3556,20 @@
               </a:rPr>
               <a:t>1.4.1. Objetivo General</a:t>
             </a:r>
-            <a:endParaRPr lang="en-US" sz="1600" dirty="0"/>
+            <a:endParaRPr lang="en-US" sz="1450" dirty="0"/>
           </a:p>
         </p:txBody>
       </p:sp>
       <p:sp>
         <p:nvSpPr>
-          <p:cNvPr id="11" name="Text 9"/>
-          <p:cNvSpPr/>
-          <p:nvPr/>
-        </p:nvSpPr>
-        <p:spPr>
-          <a:xfrm>
-            <a:off x="960120" y="3291840"/>
-            <a:ext cx="4754880" cy="2880360"/>
+          <p:cNvPr id="12" name="Text 10"/>
+          <p:cNvSpPr/>
+          <p:nvPr/>
+        </p:nvSpPr>
+        <p:spPr>
+          <a:xfrm>
+            <a:off x="1005840" y="3429000"/>
+            <a:ext cx="4663440" cy="2651760"/>
           </a:xfrm>
           <a:prstGeom prst="rect">
             <a:avLst/>
@@ -3154,17 +3578,14 @@
           <a:ln/>
         </p:spPr>
         <p:txBody>
-          <a:bodyPr wrap="square" rtlCol="0" anchor="t"/>
+          <a:bodyPr wrap="square" rtlCol="0" anchor="ctr"/>
           <a:lstStyle/>
           <a:p>
-            <a:pPr algn="l" indent="0" marL="0">
-              <a:spcAft>
-                <a:spcPts val="800"/>
-              </a:spcAft>
-              <a:buNone/>
-            </a:pPr>
-            <a:r>
-              <a:rPr lang="en-US" sz="1300" b="1" dirty="0">
+            <a:pPr indent="0" marL="0">
+              <a:buNone/>
+            </a:pPr>
+            <a:r>
+              <a:rPr lang="en-US" sz="1250" b="1" dirty="0">
                 <a:solidFill>
                   <a:srgbClr val="212529"/>
                 </a:solidFill>
@@ -3174,20 +3595,20 @@
               </a:rPr>
               <a:t>Desarrollar una aplicación web responsive utilizando HTML5, CSS3, JavaScript Vanilla en el frontend y Node.js con SQLite en el backend, que permita reportar, buscar, comentar y actualizar publicaciones y fotografías de mascotas perdidas bajo un sistema controlado de roles de usuario, facilitando el reencuentro de animales domésticos en la comunidad.</a:t>
             </a:r>
-            <a:endParaRPr lang="en-US" sz="1300" dirty="0"/>
+            <a:endParaRPr lang="en-US" sz="1250" dirty="0"/>
           </a:p>
         </p:txBody>
       </p:sp>
       <p:sp>
         <p:nvSpPr>
-          <p:cNvPr id="12" name="Shape 10"/>
-          <p:cNvSpPr/>
-          <p:nvPr/>
-        </p:nvSpPr>
-        <p:spPr>
-          <a:xfrm>
-            <a:off x="6217920" y="2697480"/>
-            <a:ext cx="5212080" cy="3657600"/>
+          <p:cNvPr id="13" name="Shape 11"/>
+          <p:cNvSpPr/>
+          <p:nvPr/>
+        </p:nvSpPr>
+        <p:spPr>
+          <a:xfrm>
+            <a:off x="6217920" y="2743200"/>
+            <a:ext cx="5212080" cy="3566160"/>
           </a:xfrm>
           <a:prstGeom prst="rect">
             <a:avLst/>
@@ -3195,9 +3616,9 @@
           <a:solidFill>
             <a:srgbClr val="FFFFFF"/>
           </a:solidFill>
-          <a:ln w="19050">
+          <a:ln w="12700">
             <a:solidFill>
-              <a:srgbClr val="DEE2E6"/>
+              <a:srgbClr val="E2E8F0"/>
             </a:solidFill>
             <a:prstDash val="solid"/>
           </a:ln>
@@ -3205,14 +3626,34 @@
       </p:sp>
       <p:sp>
         <p:nvSpPr>
-          <p:cNvPr id="13" name="Text 11"/>
-          <p:cNvSpPr/>
-          <p:nvPr/>
-        </p:nvSpPr>
-        <p:spPr>
-          <a:xfrm>
-            <a:off x="6446520" y="2880360"/>
-            <a:ext cx="4754880" cy="365760"/>
+          <p:cNvPr id="14" name="Shape 12"/>
+          <p:cNvSpPr/>
+          <p:nvPr/>
+        </p:nvSpPr>
+        <p:spPr>
+          <a:xfrm>
+            <a:off x="6263640" y="2743200"/>
+            <a:ext cx="5120640" cy="73152"/>
+          </a:xfrm>
+          <a:prstGeom prst="rect">
+            <a:avLst/>
+          </a:prstGeom>
+          <a:solidFill>
+            <a:srgbClr val="0B7285"/>
+          </a:solidFill>
+          <a:ln/>
+        </p:spPr>
+      </p:sp>
+      <p:sp>
+        <p:nvSpPr>
+          <p:cNvPr id="15" name="Text 13"/>
+          <p:cNvSpPr/>
+          <p:nvPr/>
+        </p:nvSpPr>
+        <p:spPr>
+          <a:xfrm>
+            <a:off x="6492240" y="2944368"/>
+            <a:ext cx="4663440" cy="347472"/>
           </a:xfrm>
           <a:prstGeom prst="rect">
             <a:avLst/>
@@ -3228,7 +3669,7 @@
               <a:buNone/>
             </a:pPr>
             <a:r>
-              <a:rPr lang="en-US" sz="1600" b="1" dirty="0">
+              <a:rPr lang="en-US" sz="1450" b="1" dirty="0">
                 <a:solidFill>
                   <a:srgbClr val="0B7285"/>
                 </a:solidFill>
@@ -3238,20 +3679,20 @@
               </a:rPr>
               <a:t>1.4.2. Objetivos Específicos</a:t>
             </a:r>
-            <a:endParaRPr lang="en-US" sz="1600" dirty="0"/>
+            <a:endParaRPr lang="en-US" sz="1450" dirty="0"/>
           </a:p>
         </p:txBody>
       </p:sp>
       <p:sp>
         <p:nvSpPr>
-          <p:cNvPr id="14" name="Text 12"/>
-          <p:cNvSpPr/>
-          <p:nvPr/>
-        </p:nvSpPr>
-        <p:spPr>
-          <a:xfrm>
-            <a:off x="6446520" y="3291840"/>
-            <a:ext cx="4754880" cy="2880360"/>
+          <p:cNvPr id="16" name="Text 14"/>
+          <p:cNvSpPr/>
+          <p:nvPr/>
+        </p:nvSpPr>
+        <p:spPr>
+          <a:xfrm>
+            <a:off x="6492240" y="3337560"/>
+            <a:ext cx="4663440" cy="2834640"/>
           </a:xfrm>
           <a:prstGeom prst="rect">
             <a:avLst/>
@@ -3260,17 +3701,14 @@
           <a:ln/>
         </p:spPr>
         <p:txBody>
-          <a:bodyPr wrap="square" rtlCol="0" anchor="t"/>
+          <a:bodyPr wrap="square" rtlCol="0" anchor="ctr"/>
           <a:lstStyle/>
           <a:p>
-            <a:pPr algn="l" indent="0" marL="0">
-              <a:spcAft>
-                <a:spcPts val="200"/>
-              </a:spcAft>
-              <a:buNone/>
-            </a:pPr>
-            <a:r>
-              <a:rPr lang="en-US" b="1" dirty="0">
+            <a:pPr indent="0" marL="0">
+              <a:buNone/>
+            </a:pPr>
+            <a:r>
+              <a:rPr lang="en-US" sz="1100" b="1" dirty="0">
                 <a:solidFill>
                   <a:srgbClr val="0B7285"/>
                 </a:solidFill>
@@ -3280,14 +3718,11 @@
               </a:rPr>
               <a:t>1. Diagnosticar </a:t>
             </a:r>
-            <a:pPr algn="l" indent="0" marL="0">
-              <a:spcAft>
-                <a:spcPts val="200"/>
-              </a:spcAft>
-              <a:buNone/>
-            </a:pPr>
-            <a:r>
-              <a:rPr lang="en-US" dirty="0">
+            <a:pPr indent="0" marL="0">
+              <a:buNone/>
+            </a:pPr>
+            <a:r>
+              <a:rPr lang="en-US" sz="1100" dirty="0">
                 <a:solidFill>
                   <a:srgbClr val="495057"/>
                 </a:solidFill>
@@ -3295,17 +3730,14 @@
                 <a:ea typeface="Arial" pitchFamily="34" charset="-122"/>
                 <a:cs typeface="Arial" pitchFamily="34" charset="-120"/>
               </a:rPr>
-              <a:t>las necesidades de la comunidad mediante encuestas de campo.
+              <a:t>las necesidades comunitarias mediante encuestas directas.
 </a:t>
             </a:r>
-            <a:pPr algn="l" indent="0" marL="0">
-              <a:spcAft>
-                <a:spcPts val="200"/>
-              </a:spcAft>
-              <a:buNone/>
-            </a:pPr>
-            <a:r>
-              <a:rPr lang="en-US" b="1" dirty="0">
+            <a:pPr indent="0" marL="0">
+              <a:buNone/>
+            </a:pPr>
+            <a:r>
+              <a:rPr lang="en-US" sz="1100" b="1" dirty="0">
                 <a:solidFill>
                   <a:srgbClr val="0B7285"/>
                 </a:solidFill>
@@ -3315,14 +3747,11 @@
               </a:rPr>
               <a:t>2. Diseñar </a:t>
             </a:r>
-            <a:pPr algn="l" indent="0" marL="0">
-              <a:spcAft>
-                <a:spcPts val="200"/>
-              </a:spcAft>
-              <a:buNone/>
-            </a:pPr>
-            <a:r>
-              <a:rPr lang="en-US" dirty="0">
+            <a:pPr indent="0" marL="0">
+              <a:buNone/>
+            </a:pPr>
+            <a:r>
+              <a:rPr lang="en-US" sz="1100" dirty="0">
                 <a:solidFill>
                   <a:srgbClr val="495057"/>
                 </a:solidFill>
@@ -3330,17 +3759,14 @@
                 <a:ea typeface="Arial" pitchFamily="34" charset="-122"/>
                 <a:cs typeface="Arial" pitchFamily="34" charset="-120"/>
               </a:rPr>
-              <a:t>una interfaz intuitiva y adaptada a móviles (UI/UX).
+              <a:t>una interfaz web intuitiva, ágil y adaptada a móviles (UI/UX).
 </a:t>
             </a:r>
-            <a:pPr algn="l" indent="0" marL="0">
-              <a:spcAft>
-                <a:spcPts val="200"/>
-              </a:spcAft>
-              <a:buNone/>
-            </a:pPr>
-            <a:r>
-              <a:rPr lang="en-US" b="1" dirty="0">
+            <a:pPr indent="0" marL="0">
+              <a:buNone/>
+            </a:pPr>
+            <a:r>
+              <a:rPr lang="en-US" sz="1100" b="1" dirty="0">
                 <a:solidFill>
                   <a:srgbClr val="0B7285"/>
                 </a:solidFill>
@@ -3350,14 +3776,11 @@
               </a:rPr>
               <a:t>3. Programar </a:t>
             </a:r>
-            <a:pPr algn="l" indent="0" marL="0">
-              <a:spcAft>
-                <a:spcPts val="200"/>
-              </a:spcAft>
-              <a:buNone/>
-            </a:pPr>
-            <a:r>
-              <a:rPr lang="en-US" dirty="0">
+            <a:pPr indent="0" marL="0">
+              <a:buNone/>
+            </a:pPr>
+            <a:r>
+              <a:rPr lang="en-US" sz="1100" dirty="0">
                 <a:solidFill>
                   <a:srgbClr val="495057"/>
                 </a:solidFill>
@@ -3365,17 +3788,14 @@
                 <a:ea typeface="Arial" pitchFamily="34" charset="-122"/>
                 <a:cs typeface="Arial" pitchFamily="34" charset="-120"/>
               </a:rPr>
-              <a:t>la API REST segura en Node.js/Express y base de datos SQLite.
+              <a:t>la API REST en Node.js/Express con subida de archivos Multer.
 </a:t>
             </a:r>
-            <a:pPr algn="l" indent="0" marL="0">
-              <a:spcAft>
-                <a:spcPts val="200"/>
-              </a:spcAft>
-              <a:buNone/>
-            </a:pPr>
-            <a:r>
-              <a:rPr lang="en-US" b="1" dirty="0">
+            <a:pPr indent="0" marL="0">
+              <a:buNone/>
+            </a:pPr>
+            <a:r>
+              <a:rPr lang="en-US" sz="1100" b="1" dirty="0">
                 <a:solidFill>
                   <a:srgbClr val="0B7285"/>
                 </a:solidFill>
@@ -3383,16 +3803,13 @@
                 <a:ea typeface="Arial" pitchFamily="34" charset="-122"/>
                 <a:cs typeface="Arial" pitchFamily="34" charset="-120"/>
               </a:rPr>
-              <a:t>4. Implementar </a:t>
-            </a:r>
-            <a:pPr algn="l" indent="0" marL="0">
-              <a:spcAft>
-                <a:spcPts val="200"/>
-              </a:spcAft>
-              <a:buNone/>
-            </a:pPr>
-            <a:r>
-              <a:rPr lang="en-US" dirty="0">
+              <a:t>4. Construir </a:t>
+            </a:r>
+            <a:pPr indent="0" marL="0">
+              <a:buNone/>
+            </a:pPr>
+            <a:r>
+              <a:rPr lang="en-US" sz="1100" dirty="0">
                 <a:solidFill>
                   <a:srgbClr val="495057"/>
                 </a:solidFill>
@@ -3400,17 +3817,14 @@
                 <a:ea typeface="Arial" pitchFamily="34" charset="-122"/>
                 <a:cs typeface="Arial" pitchFamily="34" charset="-120"/>
               </a:rPr>
-              <a:t>autenticación con tokens JWT y claves encriptadas en Bcrypt.
+              <a:t>la base de datos relacional SQLite con integridad referencial.
 </a:t>
             </a:r>
-            <a:pPr algn="l" indent="0" marL="0">
-              <a:spcAft>
-                <a:spcPts val="200"/>
-              </a:spcAft>
-              <a:buNone/>
-            </a:pPr>
-            <a:r>
-              <a:rPr lang="en-US" b="1" dirty="0">
+            <a:pPr indent="0" marL="0">
+              <a:buNone/>
+            </a:pPr>
+            <a:r>
+              <a:rPr lang="en-US" sz="1100" b="1" dirty="0">
                 <a:solidFill>
                   <a:srgbClr val="0B7285"/>
                 </a:solidFill>
@@ -3418,16 +3832,13 @@
                 <a:ea typeface="Arial" pitchFamily="34" charset="-122"/>
                 <a:cs typeface="Arial" pitchFamily="34" charset="-120"/>
               </a:rPr>
-              <a:t>5. Desarrollar </a:t>
-            </a:r>
-            <a:pPr algn="l" indent="0" marL="0">
-              <a:spcAft>
-                <a:spcPts val="200"/>
-              </a:spcAft>
-              <a:buNone/>
-            </a:pPr>
-            <a:r>
-              <a:rPr lang="en-US" dirty="0">
+              <a:t>5. Implementar </a:t>
+            </a:r>
+            <a:pPr indent="0" marL="0">
+              <a:buNone/>
+            </a:pPr>
+            <a:r>
+              <a:rPr lang="en-US" sz="1100" dirty="0">
                 <a:solidFill>
                   <a:srgbClr val="495057"/>
                 </a:solidFill>
@@ -3435,17 +3846,14 @@
                 <a:ea typeface="Arial" pitchFamily="34" charset="-122"/>
                 <a:cs typeface="Arial" pitchFamily="34" charset="-120"/>
               </a:rPr>
-              <a:t>la edición activa de anuncios, fotos (FileReader) y limpieza de disco.
+              <a:t>autenticación segura con JWT y contraseñas Bcrypt.
 </a:t>
             </a:r>
-            <a:pPr algn="l" indent="0" marL="0">
-              <a:spcAft>
-                <a:spcPts val="200"/>
-              </a:spcAft>
-              <a:buNone/>
-            </a:pPr>
-            <a:r>
-              <a:rPr lang="en-US" b="1" dirty="0">
+            <a:pPr indent="0" marL="0">
+              <a:buNone/>
+            </a:pPr>
+            <a:r>
+              <a:rPr lang="en-US" sz="1100" b="1" dirty="0">
                 <a:solidFill>
                   <a:srgbClr val="0B7285"/>
                 </a:solidFill>
@@ -3453,16 +3861,13 @@
                 <a:ea typeface="Arial" pitchFamily="34" charset="-122"/>
                 <a:cs typeface="Arial" pitchFamily="34" charset="-120"/>
               </a:rPr>
-              <a:t>6. Validar </a:t>
-            </a:r>
-            <a:pPr algn="l" indent="0" marL="0">
-              <a:spcAft>
-                <a:spcPts val="200"/>
-              </a:spcAft>
-              <a:buNone/>
-            </a:pPr>
-            <a:r>
-              <a:rPr lang="en-US" dirty="0">
+              <a:t>6. Desarrollar </a:t>
+            </a:r>
+            <a:pPr indent="0" marL="0">
+              <a:buNone/>
+            </a:pPr>
+            <a:r>
+              <a:rPr lang="en-US" sz="1100" dirty="0">
                 <a:solidFill>
                   <a:srgbClr val="495057"/>
                 </a:solidFill>
@@ -3470,9 +3875,38 @@
                 <a:ea typeface="Arial" pitchFamily="34" charset="-122"/>
                 <a:cs typeface="Arial" pitchFamily="34" charset="-120"/>
               </a:rPr>
-              <a:t>el funcionamiento mediante pruebas piloto de usabilidad.</a:t>
-            </a:r>
-            <a:endParaRPr lang="en-US" dirty="0"/>
+              <a:t>edición de anuncios, cambio de foto y limpieza en servidor.
+</a:t>
+            </a:r>
+            <a:pPr indent="0" marL="0">
+              <a:buNone/>
+            </a:pPr>
+            <a:r>
+              <a:rPr lang="en-US" sz="1100" b="1" dirty="0">
+                <a:solidFill>
+                  <a:srgbClr val="0B7285"/>
+                </a:solidFill>
+                <a:latin typeface="Arial" pitchFamily="34" charset="0"/>
+                <a:ea typeface="Arial" pitchFamily="34" charset="-122"/>
+                <a:cs typeface="Arial" pitchFamily="34" charset="-120"/>
+              </a:rPr>
+              <a:t>7. Validar </a:t>
+            </a:r>
+            <a:pPr indent="0" marL="0">
+              <a:buNone/>
+            </a:pPr>
+            <a:r>
+              <a:rPr lang="en-US" sz="1100" dirty="0">
+                <a:solidFill>
+                  <a:srgbClr val="495057"/>
+                </a:solidFill>
+                <a:latin typeface="Arial" pitchFamily="34" charset="0"/>
+                <a:ea typeface="Arial" pitchFamily="34" charset="-122"/>
+                <a:cs typeface="Arial" pitchFamily="34" charset="-120"/>
+              </a:rPr>
+              <a:t>el sistema mediante pruebas de usabilidad y rendimiento móvil.</a:t>
+            </a:r>
+            <a:endParaRPr lang="en-US" sz="1100" dirty="0"/>
           </a:p>
         </p:txBody>
       </p:sp>
@@ -3490,7 +3924,7 @@
     <p:bg>
       <p:bgPr>
         <a:solidFill>
-          <a:srgbClr val="F8F9FA"/>
+          <a:srgbClr val="F4F6F8"/>
         </a:solidFill>
       </p:bgPr>
     </p:bg>
@@ -3517,7 +3951,7 @@
         <p:spPr>
           <a:xfrm>
             <a:off x="0" y="0"/>
-            <a:ext cx="9144000" cy="1005840"/>
+            <a:ext cx="12191695" cy="1051560"/>
           </a:xfrm>
           <a:prstGeom prst="rect">
             <a:avLst/>
@@ -3527,7 +3961,7 @@
           </a:solidFill>
           <a:ln w="12700">
             <a:solidFill>
-              <a:srgbClr val="DEE2E6"/>
+              <a:srgbClr val="E2E8F0"/>
             </a:solidFill>
             <a:prstDash val="solid"/>
           </a:ln>
@@ -3541,8 +3975,8 @@
         </p:nvSpPr>
         <p:spPr>
           <a:xfrm>
-            <a:off x="0" y="0"/>
-            <a:ext cx="228600" cy="1005840"/>
+            <a:off x="731520" y="256032"/>
+            <a:ext cx="91440" cy="530352"/>
           </a:xfrm>
           <a:prstGeom prst="rect">
             <a:avLst/>
@@ -3561,8 +3995,8 @@
         </p:nvSpPr>
         <p:spPr>
           <a:xfrm>
-            <a:off x="548640" y="137160"/>
-            <a:ext cx="10972800" cy="274320"/>
+            <a:off x="960120" y="201168"/>
+            <a:ext cx="10058400" cy="228600"/>
           </a:xfrm>
           <a:prstGeom prst="rect">
             <a:avLst/>
@@ -3578,7 +4012,7 @@
               <a:buNone/>
             </a:pPr>
             <a:r>
-              <a:rPr lang="en-US" sz="1100" b="1" dirty="0">
+              <a:rPr lang="en-US" sz="1050" b="1" dirty="0">
                 <a:solidFill>
                   <a:srgbClr val="FF922B"/>
                 </a:solidFill>
@@ -3588,7 +4022,7 @@
               </a:rPr>
               <a:t>CAPÍTULO 2</a:t>
             </a:r>
-            <a:endParaRPr lang="en-US" sz="1100" dirty="0"/>
+            <a:endParaRPr lang="en-US" sz="1050" dirty="0"/>
           </a:p>
         </p:txBody>
       </p:sp>
@@ -3600,8 +4034,8 @@
         </p:nvSpPr>
         <p:spPr>
           <a:xfrm>
-            <a:off x="548640" y="411480"/>
-            <a:ext cx="10972800" cy="502920"/>
+            <a:off x="960120" y="429768"/>
+            <a:ext cx="10058400" cy="457200"/>
           </a:xfrm>
           <a:prstGeom prst="rect">
             <a:avLst/>
@@ -3617,7 +4051,7 @@
               <a:buNone/>
             </a:pPr>
             <a:r>
-              <a:rPr lang="en-US" sz="2400" b="1" dirty="0">
+              <a:rPr lang="en-US" sz="2200" b="1" dirty="0">
                 <a:solidFill>
                   <a:srgbClr val="212529"/>
                 </a:solidFill>
@@ -3627,7 +4061,7 @@
               </a:rPr>
               <a:t>2. Planificación / 2.1. Cronograma de Actividades</a:t>
             </a:r>
-            <a:endParaRPr lang="en-US" sz="2400" dirty="0"/>
+            <a:endParaRPr lang="en-US" sz="2200" dirty="0"/>
           </a:p>
         </p:txBody>
       </p:sp>
@@ -3646,7 +4080,7 @@
           </p:nvPr>
         </p:nvGraphicFramePr>
         <p:xfrm>
-          <a:off x="731520" y="1234440"/>
+          <a:off x="731520" y="1280160"/>
           <a:ext cx="10698480" cy="5029200"/>
         </p:xfrm>
         <a:graphic>
@@ -3654,9 +4088,9 @@
             <a:tbl>
               <a:tblPr/>
               <a:tblGrid>
-                <a:gridCol w="5029200"/>
-                <a:gridCol w="2286000"/>
-                <a:gridCol w="3383280"/>
+                <a:gridCol w="4754880"/>
+                <a:gridCol w="1828800"/>
+                <a:gridCol w="4114800"/>
               </a:tblGrid>
               <a:tr h="457200">
                 <a:tc>
@@ -3664,11 +4098,11 @@
                     <a:bodyPr/>
                     <a:lstStyle/>
                     <a:p>
-                      <a:pPr algn="l" indent="0" marL="0">
+                      <a:pPr indent="0" marL="0">
                         <a:buNone/>
                       </a:pPr>
                       <a:r>
-                        <a:rPr lang="en-US" sz="1200" b="1" dirty="0">
+                        <a:rPr lang="en-US" sz="1100" b="1" dirty="0">
                           <a:solidFill>
                             <a:srgbClr val="FFFFFF"/>
                           </a:solidFill>
@@ -3676,9 +4110,9 @@
                           <a:ea typeface="Arial" pitchFamily="34" charset="-122"/>
                           <a:cs typeface="Arial" pitchFamily="34" charset="-120"/>
                         </a:rPr>
-                        <a:t>Fase / Actividad Desarrollada</a:t>
+                        <a:t>Fase / Actividad del Proyecto</a:t>
                       </a:r>
-                      <a:endParaRPr lang="en-US" sz="1200" dirty="0">
+                      <a:endParaRPr lang="en-US" sz="1100" dirty="0">
                         <a:latin typeface="Arial" charset="0"/>
                         <a:ea typeface="Arial" charset="0"/>
                         <a:cs typeface="Arial" charset="0"/>
@@ -3686,36 +4120,36 @@
                     </a:p>
                   </a:txBody>
                   <a:tcPr marL="91440" marR="91440" marT="45720" marB="45720" anchor="ctr">
-                    <a:lnL w="12700" cap="flat" cmpd="sng" algn="ctr">
-                      <a:solidFill>
-                        <a:srgbClr val="DEE2E6"/>
+                    <a:lnL w="10160" cap="flat" cmpd="sng" algn="ctr">
+                      <a:solidFill>
+                        <a:srgbClr val="E2E8F0"/>
                       </a:solidFill>
                       <a:prstDash val="solid"/>
                       <a:round/>
                       <a:headEnd type="none" w="med" len="med"/>
                       <a:tailEnd type="none" w="med" len="med"/>
                     </a:lnL>
-                    <a:lnR w="12700" cap="flat" cmpd="sng" algn="ctr">
-                      <a:solidFill>
-                        <a:srgbClr val="DEE2E6"/>
+                    <a:lnR w="10160" cap="flat" cmpd="sng" algn="ctr">
+                      <a:solidFill>
+                        <a:srgbClr val="E2E8F0"/>
                       </a:solidFill>
                       <a:prstDash val="solid"/>
                       <a:round/>
                       <a:headEnd type="none" w="med" len="med"/>
                       <a:tailEnd type="none" w="med" len="med"/>
                     </a:lnR>
-                    <a:lnT w="12700" cap="flat" cmpd="sng" algn="ctr">
-                      <a:solidFill>
-                        <a:srgbClr val="DEE2E6"/>
+                    <a:lnT w="10160" cap="flat" cmpd="sng" algn="ctr">
+                      <a:solidFill>
+                        <a:srgbClr val="E2E8F0"/>
                       </a:solidFill>
                       <a:prstDash val="solid"/>
                       <a:round/>
                       <a:headEnd type="none" w="med" len="med"/>
                       <a:tailEnd type="none" w="med" len="med"/>
                     </a:lnT>
-                    <a:lnB w="12700" cap="flat" cmpd="sng" algn="ctr">
-                      <a:solidFill>
-                        <a:srgbClr val="DEE2E6"/>
+                    <a:lnB w="10160" cap="flat" cmpd="sng" algn="ctr">
+                      <a:solidFill>
+                        <a:srgbClr val="E2E8F0"/>
                       </a:solidFill>
                       <a:prstDash val="solid"/>
                       <a:round/>
@@ -3723,7 +4157,7 @@
                       <a:tailEnd type="none" w="med" len="med"/>
                     </a:lnB>
                     <a:solidFill>
-                      <a:srgbClr val="1098AD"/>
+                      <a:srgbClr val="0B7285"/>
                     </a:solidFill>
                   </a:tcPr>
                 </a:tc>
@@ -3732,11 +4166,11 @@
                     <a:bodyPr/>
                     <a:lstStyle/>
                     <a:p>
-                      <a:pPr algn="l" indent="0" marL="0">
+                      <a:pPr algn="ctr" indent="0" marL="0">
                         <a:buNone/>
                       </a:pPr>
                       <a:r>
-                        <a:rPr lang="en-US" sz="1200" b="1" dirty="0">
+                        <a:rPr lang="en-US" sz="1100" b="1" dirty="0">
                           <a:solidFill>
                             <a:srgbClr val="FFFFFF"/>
                           </a:solidFill>
@@ -3744,9 +4178,9 @@
                           <a:ea typeface="Arial" pitchFamily="34" charset="-122"/>
                           <a:cs typeface="Arial" pitchFamily="34" charset="-120"/>
                         </a:rPr>
-                        <a:t>Tiempo Estimado</a:t>
+                        <a:t>Tiempo</a:t>
                       </a:r>
-                      <a:endParaRPr lang="en-US" sz="1200" dirty="0">
+                      <a:endParaRPr lang="en-US" sz="1100" dirty="0">
                         <a:latin typeface="Arial" charset="0"/>
                         <a:ea typeface="Arial" charset="0"/>
                         <a:cs typeface="Arial" charset="0"/>
@@ -3754,36 +4188,36 @@
                     </a:p>
                   </a:txBody>
                   <a:tcPr marL="91440" marR="91440" marT="45720" marB="45720" anchor="ctr">
-                    <a:lnL w="12700" cap="flat" cmpd="sng" algn="ctr">
-                      <a:solidFill>
-                        <a:srgbClr val="DEE2E6"/>
+                    <a:lnL w="10160" cap="flat" cmpd="sng" algn="ctr">
+                      <a:solidFill>
+                        <a:srgbClr val="E2E8F0"/>
                       </a:solidFill>
                       <a:prstDash val="solid"/>
                       <a:round/>
                       <a:headEnd type="none" w="med" len="med"/>
                       <a:tailEnd type="none" w="med" len="med"/>
                     </a:lnL>
-                    <a:lnR w="12700" cap="flat" cmpd="sng" algn="ctr">
-                      <a:solidFill>
-                        <a:srgbClr val="DEE2E6"/>
+                    <a:lnR w="10160" cap="flat" cmpd="sng" algn="ctr">
+                      <a:solidFill>
+                        <a:srgbClr val="E2E8F0"/>
                       </a:solidFill>
                       <a:prstDash val="solid"/>
                       <a:round/>
                       <a:headEnd type="none" w="med" len="med"/>
                       <a:tailEnd type="none" w="med" len="med"/>
                     </a:lnR>
-                    <a:lnT w="12700" cap="flat" cmpd="sng" algn="ctr">
-                      <a:solidFill>
-                        <a:srgbClr val="DEE2E6"/>
+                    <a:lnT w="10160" cap="flat" cmpd="sng" algn="ctr">
+                      <a:solidFill>
+                        <a:srgbClr val="E2E8F0"/>
                       </a:solidFill>
                       <a:prstDash val="solid"/>
                       <a:round/>
                       <a:headEnd type="none" w="med" len="med"/>
                       <a:tailEnd type="none" w="med" len="med"/>
                     </a:lnT>
-                    <a:lnB w="12700" cap="flat" cmpd="sng" algn="ctr">
-                      <a:solidFill>
-                        <a:srgbClr val="DEE2E6"/>
+                    <a:lnB w="10160" cap="flat" cmpd="sng" algn="ctr">
+                      <a:solidFill>
+                        <a:srgbClr val="E2E8F0"/>
                       </a:solidFill>
                       <a:prstDash val="solid"/>
                       <a:round/>
@@ -3791,7 +4225,7 @@
                       <a:tailEnd type="none" w="med" len="med"/>
                     </a:lnB>
                     <a:solidFill>
-                      <a:srgbClr val="1098AD"/>
+                      <a:srgbClr val="0B7285"/>
                     </a:solidFill>
                   </a:tcPr>
                 </a:tc>
@@ -3800,11 +4234,11 @@
                     <a:bodyPr/>
                     <a:lstStyle/>
                     <a:p>
-                      <a:pPr algn="l" indent="0" marL="0">
+                      <a:pPr indent="0" marL="0">
                         <a:buNone/>
                       </a:pPr>
                       <a:r>
-                        <a:rPr lang="en-US" sz="1200" b="1" dirty="0">
+                        <a:rPr lang="en-US" sz="1100" b="1" dirty="0">
                           <a:solidFill>
                             <a:srgbClr val="FFFFFF"/>
                           </a:solidFill>
@@ -3812,9 +4246,9 @@
                           <a:ea typeface="Arial" pitchFamily="34" charset="-122"/>
                           <a:cs typeface="Arial" pitchFamily="34" charset="-120"/>
                         </a:rPr>
-                        <a:t>Resultado Obtenido</a:t>
+                        <a:t>Entregable / Logro Alcanzado</a:t>
                       </a:r>
-                      <a:endParaRPr lang="en-US" sz="1200" dirty="0">
+                      <a:endParaRPr lang="en-US" sz="1100" dirty="0">
                         <a:latin typeface="Arial" charset="0"/>
                         <a:ea typeface="Arial" charset="0"/>
                         <a:cs typeface="Arial" charset="0"/>
@@ -3822,36 +4256,36 @@
                     </a:p>
                   </a:txBody>
                   <a:tcPr marL="91440" marR="91440" marT="45720" marB="45720" anchor="ctr">
-                    <a:lnL w="12700" cap="flat" cmpd="sng" algn="ctr">
-                      <a:solidFill>
-                        <a:srgbClr val="DEE2E6"/>
+                    <a:lnL w="10160" cap="flat" cmpd="sng" algn="ctr">
+                      <a:solidFill>
+                        <a:srgbClr val="E2E8F0"/>
                       </a:solidFill>
                       <a:prstDash val="solid"/>
                       <a:round/>
                       <a:headEnd type="none" w="med" len="med"/>
                       <a:tailEnd type="none" w="med" len="med"/>
                     </a:lnL>
-                    <a:lnR w="12700" cap="flat" cmpd="sng" algn="ctr">
-                      <a:solidFill>
-                        <a:srgbClr val="DEE2E6"/>
+                    <a:lnR w="10160" cap="flat" cmpd="sng" algn="ctr">
+                      <a:solidFill>
+                        <a:srgbClr val="E2E8F0"/>
                       </a:solidFill>
                       <a:prstDash val="solid"/>
                       <a:round/>
                       <a:headEnd type="none" w="med" len="med"/>
                       <a:tailEnd type="none" w="med" len="med"/>
                     </a:lnR>
-                    <a:lnT w="12700" cap="flat" cmpd="sng" algn="ctr">
-                      <a:solidFill>
-                        <a:srgbClr val="DEE2E6"/>
+                    <a:lnT w="10160" cap="flat" cmpd="sng" algn="ctr">
+                      <a:solidFill>
+                        <a:srgbClr val="E2E8F0"/>
                       </a:solidFill>
                       <a:prstDash val="solid"/>
                       <a:round/>
                       <a:headEnd type="none" w="med" len="med"/>
                       <a:tailEnd type="none" w="med" len="med"/>
                     </a:lnT>
-                    <a:lnB w="12700" cap="flat" cmpd="sng" algn="ctr">
-                      <a:solidFill>
-                        <a:srgbClr val="DEE2E6"/>
+                    <a:lnB w="10160" cap="flat" cmpd="sng" algn="ctr">
+                      <a:solidFill>
+                        <a:srgbClr val="E2E8F0"/>
                       </a:solidFill>
                       <a:prstDash val="solid"/>
                       <a:round/>
@@ -3859,7 +4293,7 @@
                       <a:tailEnd type="none" w="med" len="med"/>
                     </a:lnB>
                     <a:solidFill>
-                      <a:srgbClr val="1098AD"/>
+                      <a:srgbClr val="0B7285"/>
                     </a:solidFill>
                   </a:tcPr>
                 </a:tc>
@@ -3870,11 +4304,11 @@
                     <a:bodyPr/>
                     <a:lstStyle/>
                     <a:p>
-                      <a:pPr algn="l" indent="0" marL="0">
+                      <a:pPr indent="0" marL="0">
                         <a:buNone/>
                       </a:pPr>
                       <a:r>
-                        <a:rPr lang="en-US" sz="1050" dirty="0">
+                        <a:rPr lang="en-US" sz="1000" dirty="0">
                           <a:solidFill>
                             <a:srgbClr val="000000"/>
                           </a:solidFill>
@@ -3882,9 +4316,9 @@
                           <a:ea typeface="Arial" pitchFamily="34" charset="-122"/>
                           <a:cs typeface="Arial" pitchFamily="34" charset="-120"/>
                         </a:rPr>
-                        <a:t>1. Reunión inicial con el tutor y definición del tema</a:t>
+                        <a:t>1. Reunión inicial con tutor y definición del tema</a:t>
                       </a:r>
-                      <a:endParaRPr lang="en-US" sz="1050" dirty="0">
+                      <a:endParaRPr lang="en-US" sz="1000" dirty="0">
                         <a:latin typeface="Arial" charset="0"/>
                         <a:ea typeface="Arial" charset="0"/>
                         <a:cs typeface="Arial" charset="0"/>
@@ -3892,36 +4326,36 @@
                     </a:p>
                   </a:txBody>
                   <a:tcPr marL="91440" marR="91440" marT="45720" marB="45720" anchor="ctr">
-                    <a:lnL w="12700" cap="flat" cmpd="sng" algn="ctr">
-                      <a:solidFill>
-                        <a:srgbClr val="DEE2E6"/>
+                    <a:lnL w="10160" cap="flat" cmpd="sng" algn="ctr">
+                      <a:solidFill>
+                        <a:srgbClr val="E2E8F0"/>
                       </a:solidFill>
                       <a:prstDash val="solid"/>
                       <a:round/>
                       <a:headEnd type="none" w="med" len="med"/>
                       <a:tailEnd type="none" w="med" len="med"/>
                     </a:lnL>
-                    <a:lnR w="12700" cap="flat" cmpd="sng" algn="ctr">
-                      <a:solidFill>
-                        <a:srgbClr val="DEE2E6"/>
+                    <a:lnR w="10160" cap="flat" cmpd="sng" algn="ctr">
+                      <a:solidFill>
+                        <a:srgbClr val="E2E8F0"/>
                       </a:solidFill>
                       <a:prstDash val="solid"/>
                       <a:round/>
                       <a:headEnd type="none" w="med" len="med"/>
                       <a:tailEnd type="none" w="med" len="med"/>
                     </a:lnR>
-                    <a:lnT w="12700" cap="flat" cmpd="sng" algn="ctr">
-                      <a:solidFill>
-                        <a:srgbClr val="DEE2E6"/>
+                    <a:lnT w="10160" cap="flat" cmpd="sng" algn="ctr">
+                      <a:solidFill>
+                        <a:srgbClr val="E2E8F0"/>
                       </a:solidFill>
                       <a:prstDash val="solid"/>
                       <a:round/>
                       <a:headEnd type="none" w="med" len="med"/>
                       <a:tailEnd type="none" w="med" len="med"/>
                     </a:lnT>
-                    <a:lnB w="12700" cap="flat" cmpd="sng" algn="ctr">
-                      <a:solidFill>
-                        <a:srgbClr val="DEE2E6"/>
+                    <a:lnB w="10160" cap="flat" cmpd="sng" algn="ctr">
+                      <a:solidFill>
+                        <a:srgbClr val="E2E8F0"/>
                       </a:solidFill>
                       <a:prstDash val="solid"/>
                       <a:round/>
@@ -3938,11 +4372,11 @@
                     <a:bodyPr/>
                     <a:lstStyle/>
                     <a:p>
-                      <a:pPr algn="l" indent="0" marL="0">
+                      <a:pPr algn="ctr" indent="0" marL="0">
                         <a:buNone/>
                       </a:pPr>
                       <a:r>
-                        <a:rPr lang="en-US" sz="1050" dirty="0">
+                        <a:rPr lang="en-US" sz="1000" b="1" dirty="0">
                           <a:solidFill>
                             <a:srgbClr val="000000"/>
                           </a:solidFill>
@@ -3952,7 +4386,7 @@
                         </a:rPr>
                         <a:t>Semana 1</a:t>
                       </a:r>
-                      <a:endParaRPr lang="en-US" sz="1050" dirty="0">
+                      <a:endParaRPr lang="en-US" sz="1000" dirty="0">
                         <a:latin typeface="Arial" charset="0"/>
                         <a:ea typeface="Arial" charset="0"/>
                         <a:cs typeface="Arial" charset="0"/>
@@ -3960,36 +4394,36 @@
                     </a:p>
                   </a:txBody>
                   <a:tcPr marL="91440" marR="91440" marT="45720" marB="45720" anchor="ctr">
-                    <a:lnL w="12700" cap="flat" cmpd="sng" algn="ctr">
-                      <a:solidFill>
-                        <a:srgbClr val="DEE2E6"/>
+                    <a:lnL w="10160" cap="flat" cmpd="sng" algn="ctr">
+                      <a:solidFill>
+                        <a:srgbClr val="E2E8F0"/>
                       </a:solidFill>
                       <a:prstDash val="solid"/>
                       <a:round/>
                       <a:headEnd type="none" w="med" len="med"/>
                       <a:tailEnd type="none" w="med" len="med"/>
                     </a:lnL>
-                    <a:lnR w="12700" cap="flat" cmpd="sng" algn="ctr">
-                      <a:solidFill>
-                        <a:srgbClr val="DEE2E6"/>
+                    <a:lnR w="10160" cap="flat" cmpd="sng" algn="ctr">
+                      <a:solidFill>
+                        <a:srgbClr val="E2E8F0"/>
                       </a:solidFill>
                       <a:prstDash val="solid"/>
                       <a:round/>
                       <a:headEnd type="none" w="med" len="med"/>
                       <a:tailEnd type="none" w="med" len="med"/>
                     </a:lnR>
-                    <a:lnT w="12700" cap="flat" cmpd="sng" algn="ctr">
-                      <a:solidFill>
-                        <a:srgbClr val="DEE2E6"/>
+                    <a:lnT w="10160" cap="flat" cmpd="sng" algn="ctr">
+                      <a:solidFill>
+                        <a:srgbClr val="E2E8F0"/>
                       </a:solidFill>
                       <a:prstDash val="solid"/>
                       <a:round/>
                       <a:headEnd type="none" w="med" len="med"/>
                       <a:tailEnd type="none" w="med" len="med"/>
                     </a:lnT>
-                    <a:lnB w="12700" cap="flat" cmpd="sng" algn="ctr">
-                      <a:solidFill>
-                        <a:srgbClr val="DEE2E6"/>
+                    <a:lnB w="10160" cap="flat" cmpd="sng" algn="ctr">
+                      <a:solidFill>
+                        <a:srgbClr val="E2E8F0"/>
                       </a:solidFill>
                       <a:prstDash val="solid"/>
                       <a:round/>
@@ -4006,11 +4440,11 @@
                     <a:bodyPr/>
                     <a:lstStyle/>
                     <a:p>
-                      <a:pPr algn="l" indent="0" marL="0">
+                      <a:pPr indent="0" marL="0">
                         <a:buNone/>
                       </a:pPr>
                       <a:r>
-                        <a:rPr lang="en-US" sz="1050" dirty="0">
+                        <a:rPr lang="en-US" sz="1000" dirty="0">
                           <a:solidFill>
                             <a:srgbClr val="000000"/>
                           </a:solidFill>
@@ -4018,9 +4452,9 @@
                           <a:ea typeface="Arial" pitchFamily="34" charset="-122"/>
                           <a:cs typeface="Arial" pitchFamily="34" charset="-120"/>
                         </a:rPr>
-                        <a:t>Tema formalizado</a:t>
+                        <a:t>Idea y alcance del proyecto formalizados</a:t>
                       </a:r>
-                      <a:endParaRPr lang="en-US" sz="1050" dirty="0">
+                      <a:endParaRPr lang="en-US" sz="1000" dirty="0">
                         <a:latin typeface="Arial" charset="0"/>
                         <a:ea typeface="Arial" charset="0"/>
                         <a:cs typeface="Arial" charset="0"/>
@@ -4028,36 +4462,36 @@
                     </a:p>
                   </a:txBody>
                   <a:tcPr marL="91440" marR="91440" marT="45720" marB="45720" anchor="ctr">
-                    <a:lnL w="12700" cap="flat" cmpd="sng" algn="ctr">
-                      <a:solidFill>
-                        <a:srgbClr val="DEE2E6"/>
+                    <a:lnL w="10160" cap="flat" cmpd="sng" algn="ctr">
+                      <a:solidFill>
+                        <a:srgbClr val="E2E8F0"/>
                       </a:solidFill>
                       <a:prstDash val="solid"/>
                       <a:round/>
                       <a:headEnd type="none" w="med" len="med"/>
                       <a:tailEnd type="none" w="med" len="med"/>
                     </a:lnL>
-                    <a:lnR w="12700" cap="flat" cmpd="sng" algn="ctr">
-                      <a:solidFill>
-                        <a:srgbClr val="DEE2E6"/>
+                    <a:lnR w="10160" cap="flat" cmpd="sng" algn="ctr">
+                      <a:solidFill>
+                        <a:srgbClr val="E2E8F0"/>
                       </a:solidFill>
                       <a:prstDash val="solid"/>
                       <a:round/>
                       <a:headEnd type="none" w="med" len="med"/>
                       <a:tailEnd type="none" w="med" len="med"/>
                     </a:lnR>
-                    <a:lnT w="12700" cap="flat" cmpd="sng" algn="ctr">
-                      <a:solidFill>
-                        <a:srgbClr val="DEE2E6"/>
+                    <a:lnT w="10160" cap="flat" cmpd="sng" algn="ctr">
+                      <a:solidFill>
+                        <a:srgbClr val="E2E8F0"/>
                       </a:solidFill>
                       <a:prstDash val="solid"/>
                       <a:round/>
                       <a:headEnd type="none" w="med" len="med"/>
                       <a:tailEnd type="none" w="med" len="med"/>
                     </a:lnT>
-                    <a:lnB w="12700" cap="flat" cmpd="sng" algn="ctr">
-                      <a:solidFill>
-                        <a:srgbClr val="DEE2E6"/>
+                    <a:lnB w="10160" cap="flat" cmpd="sng" algn="ctr">
+                      <a:solidFill>
+                        <a:srgbClr val="E2E8F0"/>
                       </a:solidFill>
                       <a:prstDash val="solid"/>
                       <a:round/>
@@ -4076,11 +4510,11 @@
                     <a:bodyPr/>
                     <a:lstStyle/>
                     <a:p>
-                      <a:pPr algn="l" indent="0" marL="0">
+                      <a:pPr indent="0" marL="0">
                         <a:buNone/>
                       </a:pPr>
                       <a:r>
-                        <a:rPr lang="en-US" sz="1050" dirty="0">
+                        <a:rPr lang="en-US" sz="1000" dirty="0">
                           <a:solidFill>
                             <a:srgbClr val="000000"/>
                           </a:solidFill>
@@ -4090,7 +4524,7 @@
                         </a:rPr>
                         <a:t>2. Diagnóstico de la realidad y encuestas a vecinos</a:t>
                       </a:r>
-                      <a:endParaRPr lang="en-US" sz="1050" dirty="0">
+                      <a:endParaRPr lang="en-US" sz="1000" dirty="0">
                         <a:latin typeface="Arial" charset="0"/>
                         <a:ea typeface="Arial" charset="0"/>
                         <a:cs typeface="Arial" charset="0"/>
@@ -4098,36 +4532,36 @@
                     </a:p>
                   </a:txBody>
                   <a:tcPr marL="91440" marR="91440" marT="45720" marB="45720" anchor="ctr">
-                    <a:lnL w="12700" cap="flat" cmpd="sng" algn="ctr">
-                      <a:solidFill>
-                        <a:srgbClr val="DEE2E6"/>
+                    <a:lnL w="10160" cap="flat" cmpd="sng" algn="ctr">
+                      <a:solidFill>
+                        <a:srgbClr val="E2E8F0"/>
                       </a:solidFill>
                       <a:prstDash val="solid"/>
                       <a:round/>
                       <a:headEnd type="none" w="med" len="med"/>
                       <a:tailEnd type="none" w="med" len="med"/>
                     </a:lnL>
-                    <a:lnR w="12700" cap="flat" cmpd="sng" algn="ctr">
-                      <a:solidFill>
-                        <a:srgbClr val="DEE2E6"/>
+                    <a:lnR w="10160" cap="flat" cmpd="sng" algn="ctr">
+                      <a:solidFill>
+                        <a:srgbClr val="E2E8F0"/>
                       </a:solidFill>
                       <a:prstDash val="solid"/>
                       <a:round/>
                       <a:headEnd type="none" w="med" len="med"/>
                       <a:tailEnd type="none" w="med" len="med"/>
                     </a:lnR>
-                    <a:lnT w="12700" cap="flat" cmpd="sng" algn="ctr">
-                      <a:solidFill>
-                        <a:srgbClr val="DEE2E6"/>
+                    <a:lnT w="10160" cap="flat" cmpd="sng" algn="ctr">
+                      <a:solidFill>
+                        <a:srgbClr val="E2E8F0"/>
                       </a:solidFill>
                       <a:prstDash val="solid"/>
                       <a:round/>
                       <a:headEnd type="none" w="med" len="med"/>
                       <a:tailEnd type="none" w="med" len="med"/>
                     </a:lnT>
-                    <a:lnB w="12700" cap="flat" cmpd="sng" algn="ctr">
-                      <a:solidFill>
-                        <a:srgbClr val="DEE2E6"/>
+                    <a:lnB w="10160" cap="flat" cmpd="sng" algn="ctr">
+                      <a:solidFill>
+                        <a:srgbClr val="E2E8F0"/>
                       </a:solidFill>
                       <a:prstDash val="solid"/>
                       <a:round/>
@@ -4144,11 +4578,11 @@
                     <a:bodyPr/>
                     <a:lstStyle/>
                     <a:p>
-                      <a:pPr algn="l" indent="0" marL="0">
+                      <a:pPr algn="ctr" indent="0" marL="0">
                         <a:buNone/>
                       </a:pPr>
                       <a:r>
-                        <a:rPr lang="en-US" sz="1050" dirty="0">
+                        <a:rPr lang="en-US" sz="1000" b="1" dirty="0">
                           <a:solidFill>
                             <a:srgbClr val="000000"/>
                           </a:solidFill>
@@ -4158,7 +4592,7 @@
                         </a:rPr>
                         <a:t>Semana 2 – 3</a:t>
                       </a:r>
-                      <a:endParaRPr lang="en-US" sz="1050" dirty="0">
+                      <a:endParaRPr lang="en-US" sz="1000" dirty="0">
                         <a:latin typeface="Arial" charset="0"/>
                         <a:ea typeface="Arial" charset="0"/>
                         <a:cs typeface="Arial" charset="0"/>
@@ -4166,36 +4600,36 @@
                     </a:p>
                   </a:txBody>
                   <a:tcPr marL="91440" marR="91440" marT="45720" marB="45720" anchor="ctr">
-                    <a:lnL w="12700" cap="flat" cmpd="sng" algn="ctr">
-                      <a:solidFill>
-                        <a:srgbClr val="DEE2E6"/>
+                    <a:lnL w="10160" cap="flat" cmpd="sng" algn="ctr">
+                      <a:solidFill>
+                        <a:srgbClr val="E2E8F0"/>
                       </a:solidFill>
                       <a:prstDash val="solid"/>
                       <a:round/>
                       <a:headEnd type="none" w="med" len="med"/>
                       <a:tailEnd type="none" w="med" len="med"/>
                     </a:lnL>
-                    <a:lnR w="12700" cap="flat" cmpd="sng" algn="ctr">
-                      <a:solidFill>
-                        <a:srgbClr val="DEE2E6"/>
+                    <a:lnR w="10160" cap="flat" cmpd="sng" algn="ctr">
+                      <a:solidFill>
+                        <a:srgbClr val="E2E8F0"/>
                       </a:solidFill>
                       <a:prstDash val="solid"/>
                       <a:round/>
                       <a:headEnd type="none" w="med" len="med"/>
                       <a:tailEnd type="none" w="med" len="med"/>
                     </a:lnR>
-                    <a:lnT w="12700" cap="flat" cmpd="sng" algn="ctr">
-                      <a:solidFill>
-                        <a:srgbClr val="DEE2E6"/>
+                    <a:lnT w="10160" cap="flat" cmpd="sng" algn="ctr">
+                      <a:solidFill>
+                        <a:srgbClr val="E2E8F0"/>
                       </a:solidFill>
                       <a:prstDash val="solid"/>
                       <a:round/>
                       <a:headEnd type="none" w="med" len="med"/>
                       <a:tailEnd type="none" w="med" len="med"/>
                     </a:lnT>
-                    <a:lnB w="12700" cap="flat" cmpd="sng" algn="ctr">
-                      <a:solidFill>
-                        <a:srgbClr val="DEE2E6"/>
+                    <a:lnB w="10160" cap="flat" cmpd="sng" algn="ctr">
+                      <a:solidFill>
+                        <a:srgbClr val="E2E8F0"/>
                       </a:solidFill>
                       <a:prstDash val="solid"/>
                       <a:round/>
@@ -4212,11 +4646,11 @@
                     <a:bodyPr/>
                     <a:lstStyle/>
                     <a:p>
-                      <a:pPr algn="l" indent="0" marL="0">
+                      <a:pPr indent="0" marL="0">
                         <a:buNone/>
                       </a:pPr>
                       <a:r>
-                        <a:rPr lang="en-US" sz="1050" dirty="0">
+                        <a:rPr lang="en-US" sz="1000" dirty="0">
                           <a:solidFill>
                             <a:srgbClr val="000000"/>
                           </a:solidFill>
@@ -4224,9 +4658,9 @@
                           <a:ea typeface="Arial" pitchFamily="34" charset="-122"/>
                           <a:cs typeface="Arial" pitchFamily="34" charset="-120"/>
                         </a:rPr>
-                        <a:t>Datos estadísticos</a:t>
+                        <a:t>Muestra estadística (40 familias encuestadas)</a:t>
                       </a:r>
-                      <a:endParaRPr lang="en-US" sz="1050" dirty="0">
+                      <a:endParaRPr lang="en-US" sz="1000" dirty="0">
                         <a:latin typeface="Arial" charset="0"/>
                         <a:ea typeface="Arial" charset="0"/>
                         <a:cs typeface="Arial" charset="0"/>
@@ -4234,36 +4668,36 @@
                     </a:p>
                   </a:txBody>
                   <a:tcPr marL="91440" marR="91440" marT="45720" marB="45720" anchor="ctr">
-                    <a:lnL w="12700" cap="flat" cmpd="sng" algn="ctr">
-                      <a:solidFill>
-                        <a:srgbClr val="DEE2E6"/>
+                    <a:lnL w="10160" cap="flat" cmpd="sng" algn="ctr">
+                      <a:solidFill>
+                        <a:srgbClr val="E2E8F0"/>
                       </a:solidFill>
                       <a:prstDash val="solid"/>
                       <a:round/>
                       <a:headEnd type="none" w="med" len="med"/>
                       <a:tailEnd type="none" w="med" len="med"/>
                     </a:lnL>
-                    <a:lnR w="12700" cap="flat" cmpd="sng" algn="ctr">
-                      <a:solidFill>
-                        <a:srgbClr val="DEE2E6"/>
+                    <a:lnR w="10160" cap="flat" cmpd="sng" algn="ctr">
+                      <a:solidFill>
+                        <a:srgbClr val="E2E8F0"/>
                       </a:solidFill>
                       <a:prstDash val="solid"/>
                       <a:round/>
                       <a:headEnd type="none" w="med" len="med"/>
                       <a:tailEnd type="none" w="med" len="med"/>
                     </a:lnR>
-                    <a:lnT w="12700" cap="flat" cmpd="sng" algn="ctr">
-                      <a:solidFill>
-                        <a:srgbClr val="DEE2E6"/>
+                    <a:lnT w="10160" cap="flat" cmpd="sng" algn="ctr">
+                      <a:solidFill>
+                        <a:srgbClr val="E2E8F0"/>
                       </a:solidFill>
                       <a:prstDash val="solid"/>
                       <a:round/>
                       <a:headEnd type="none" w="med" len="med"/>
                       <a:tailEnd type="none" w="med" len="med"/>
                     </a:lnT>
-                    <a:lnB w="12700" cap="flat" cmpd="sng" algn="ctr">
-                      <a:solidFill>
-                        <a:srgbClr val="DEE2E6"/>
+                    <a:lnB w="10160" cap="flat" cmpd="sng" algn="ctr">
+                      <a:solidFill>
+                        <a:srgbClr val="E2E8F0"/>
                       </a:solidFill>
                       <a:prstDash val="solid"/>
                       <a:round/>
@@ -4282,11 +4716,11 @@
                     <a:bodyPr/>
                     <a:lstStyle/>
                     <a:p>
-                      <a:pPr algn="l" indent="0" marL="0">
+                      <a:pPr indent="0" marL="0">
                         <a:buNone/>
                       </a:pPr>
                       <a:r>
-                        <a:rPr lang="en-US" sz="1050" dirty="0">
+                        <a:rPr lang="en-US" sz="1000" dirty="0">
                           <a:solidFill>
                             <a:srgbClr val="000000"/>
                           </a:solidFill>
@@ -4294,9 +4728,9 @@
                           <a:ea typeface="Arial" pitchFamily="34" charset="-122"/>
                           <a:cs typeface="Arial" pitchFamily="34" charset="-120"/>
                         </a:rPr>
-                        <a:t>3. Planteamiento del problema y redacción de objetivos</a:t>
+                        <a:t>3. Redacción del planteamiento del problema y objetivos</a:t>
                       </a:r>
-                      <a:endParaRPr lang="en-US" sz="1050" dirty="0">
+                      <a:endParaRPr lang="en-US" sz="1000" dirty="0">
                         <a:latin typeface="Arial" charset="0"/>
                         <a:ea typeface="Arial" charset="0"/>
                         <a:cs typeface="Arial" charset="0"/>
@@ -4304,36 +4738,36 @@
                     </a:p>
                   </a:txBody>
                   <a:tcPr marL="91440" marR="91440" marT="45720" marB="45720" anchor="ctr">
-                    <a:lnL w="12700" cap="flat" cmpd="sng" algn="ctr">
-                      <a:solidFill>
-                        <a:srgbClr val="DEE2E6"/>
+                    <a:lnL w="10160" cap="flat" cmpd="sng" algn="ctr">
+                      <a:solidFill>
+                        <a:srgbClr val="E2E8F0"/>
                       </a:solidFill>
                       <a:prstDash val="solid"/>
                       <a:round/>
                       <a:headEnd type="none" w="med" len="med"/>
                       <a:tailEnd type="none" w="med" len="med"/>
                     </a:lnL>
-                    <a:lnR w="12700" cap="flat" cmpd="sng" algn="ctr">
-                      <a:solidFill>
-                        <a:srgbClr val="DEE2E6"/>
+                    <a:lnR w="10160" cap="flat" cmpd="sng" algn="ctr">
+                      <a:solidFill>
+                        <a:srgbClr val="E2E8F0"/>
                       </a:solidFill>
                       <a:prstDash val="solid"/>
                       <a:round/>
                       <a:headEnd type="none" w="med" len="med"/>
                       <a:tailEnd type="none" w="med" len="med"/>
                     </a:lnR>
-                    <a:lnT w="12700" cap="flat" cmpd="sng" algn="ctr">
-                      <a:solidFill>
-                        <a:srgbClr val="DEE2E6"/>
+                    <a:lnT w="10160" cap="flat" cmpd="sng" algn="ctr">
+                      <a:solidFill>
+                        <a:srgbClr val="E2E8F0"/>
                       </a:solidFill>
                       <a:prstDash val="solid"/>
                       <a:round/>
                       <a:headEnd type="none" w="med" len="med"/>
                       <a:tailEnd type="none" w="med" len="med"/>
                     </a:lnT>
-                    <a:lnB w="12700" cap="flat" cmpd="sng" algn="ctr">
-                      <a:solidFill>
-                        <a:srgbClr val="DEE2E6"/>
+                    <a:lnB w="10160" cap="flat" cmpd="sng" algn="ctr">
+                      <a:solidFill>
+                        <a:srgbClr val="E2E8F0"/>
                       </a:solidFill>
                       <a:prstDash val="solid"/>
                       <a:round/>
@@ -4350,11 +4784,11 @@
                     <a:bodyPr/>
                     <a:lstStyle/>
                     <a:p>
-                      <a:pPr algn="l" indent="0" marL="0">
+                      <a:pPr algn="ctr" indent="0" marL="0">
                         <a:buNone/>
                       </a:pPr>
                       <a:r>
-                        <a:rPr lang="en-US" sz="1050" dirty="0">
+                        <a:rPr lang="en-US" sz="1000" b="1" dirty="0">
                           <a:solidFill>
                             <a:srgbClr val="000000"/>
                           </a:solidFill>
@@ -4364,7 +4798,7 @@
                         </a:rPr>
                         <a:t>Semana 4</a:t>
                       </a:r>
-                      <a:endParaRPr lang="en-US" sz="1050" dirty="0">
+                      <a:endParaRPr lang="en-US" sz="1000" dirty="0">
                         <a:latin typeface="Arial" charset="0"/>
                         <a:ea typeface="Arial" charset="0"/>
                         <a:cs typeface="Arial" charset="0"/>
@@ -4372,36 +4806,36 @@
                     </a:p>
                   </a:txBody>
                   <a:tcPr marL="91440" marR="91440" marT="45720" marB="45720" anchor="ctr">
-                    <a:lnL w="12700" cap="flat" cmpd="sng" algn="ctr">
-                      <a:solidFill>
-                        <a:srgbClr val="DEE2E6"/>
+                    <a:lnL w="10160" cap="flat" cmpd="sng" algn="ctr">
+                      <a:solidFill>
+                        <a:srgbClr val="E2E8F0"/>
                       </a:solidFill>
                       <a:prstDash val="solid"/>
                       <a:round/>
                       <a:headEnd type="none" w="med" len="med"/>
                       <a:tailEnd type="none" w="med" len="med"/>
                     </a:lnL>
-                    <a:lnR w="12700" cap="flat" cmpd="sng" algn="ctr">
-                      <a:solidFill>
-                        <a:srgbClr val="DEE2E6"/>
+                    <a:lnR w="10160" cap="flat" cmpd="sng" algn="ctr">
+                      <a:solidFill>
+                        <a:srgbClr val="E2E8F0"/>
                       </a:solidFill>
                       <a:prstDash val="solid"/>
                       <a:round/>
                       <a:headEnd type="none" w="med" len="med"/>
                       <a:tailEnd type="none" w="med" len="med"/>
                     </a:lnR>
-                    <a:lnT w="12700" cap="flat" cmpd="sng" algn="ctr">
-                      <a:solidFill>
-                        <a:srgbClr val="DEE2E6"/>
+                    <a:lnT w="10160" cap="flat" cmpd="sng" algn="ctr">
+                      <a:solidFill>
+                        <a:srgbClr val="E2E8F0"/>
                       </a:solidFill>
                       <a:prstDash val="solid"/>
                       <a:round/>
                       <a:headEnd type="none" w="med" len="med"/>
                       <a:tailEnd type="none" w="med" len="med"/>
                     </a:lnT>
-                    <a:lnB w="12700" cap="flat" cmpd="sng" algn="ctr">
-                      <a:solidFill>
-                        <a:srgbClr val="DEE2E6"/>
+                    <a:lnB w="10160" cap="flat" cmpd="sng" algn="ctr">
+                      <a:solidFill>
+                        <a:srgbClr val="E2E8F0"/>
                       </a:solidFill>
                       <a:prstDash val="solid"/>
                       <a:round/>
@@ -4418,11 +4852,11 @@
                     <a:bodyPr/>
                     <a:lstStyle/>
                     <a:p>
-                      <a:pPr algn="l" indent="0" marL="0">
+                      <a:pPr indent="0" marL="0">
                         <a:buNone/>
                       </a:pPr>
                       <a:r>
-                        <a:rPr lang="en-US" sz="1050" dirty="0">
+                        <a:rPr lang="en-US" sz="1000" dirty="0">
                           <a:solidFill>
                             <a:srgbClr val="000000"/>
                           </a:solidFill>
@@ -4430,9 +4864,9 @@
                           <a:ea typeface="Arial" pitchFamily="34" charset="-122"/>
                           <a:cs typeface="Arial" pitchFamily="34" charset="-120"/>
                         </a:rPr>
-                        <a:t>Alcance definido</a:t>
+                        <a:t>Capítulo 1 y 2 de monografía aprobados</a:t>
                       </a:r>
-                      <a:endParaRPr lang="en-US" sz="1050" dirty="0">
+                      <a:endParaRPr lang="en-US" sz="1000" dirty="0">
                         <a:latin typeface="Arial" charset="0"/>
                         <a:ea typeface="Arial" charset="0"/>
                         <a:cs typeface="Arial" charset="0"/>
@@ -4440,36 +4874,36 @@
                     </a:p>
                   </a:txBody>
                   <a:tcPr marL="91440" marR="91440" marT="45720" marB="45720" anchor="ctr">
-                    <a:lnL w="12700" cap="flat" cmpd="sng" algn="ctr">
-                      <a:solidFill>
-                        <a:srgbClr val="DEE2E6"/>
+                    <a:lnL w="10160" cap="flat" cmpd="sng" algn="ctr">
+                      <a:solidFill>
+                        <a:srgbClr val="E2E8F0"/>
                       </a:solidFill>
                       <a:prstDash val="solid"/>
                       <a:round/>
                       <a:headEnd type="none" w="med" len="med"/>
                       <a:tailEnd type="none" w="med" len="med"/>
                     </a:lnL>
-                    <a:lnR w="12700" cap="flat" cmpd="sng" algn="ctr">
-                      <a:solidFill>
-                        <a:srgbClr val="DEE2E6"/>
+                    <a:lnR w="10160" cap="flat" cmpd="sng" algn="ctr">
+                      <a:solidFill>
+                        <a:srgbClr val="E2E8F0"/>
                       </a:solidFill>
                       <a:prstDash val="solid"/>
                       <a:round/>
                       <a:headEnd type="none" w="med" len="med"/>
                       <a:tailEnd type="none" w="med" len="med"/>
                     </a:lnR>
-                    <a:lnT w="12700" cap="flat" cmpd="sng" algn="ctr">
-                      <a:solidFill>
-                        <a:srgbClr val="DEE2E6"/>
+                    <a:lnT w="10160" cap="flat" cmpd="sng" algn="ctr">
+                      <a:solidFill>
+                        <a:srgbClr val="E2E8F0"/>
                       </a:solidFill>
                       <a:prstDash val="solid"/>
                       <a:round/>
                       <a:headEnd type="none" w="med" len="med"/>
                       <a:tailEnd type="none" w="med" len="med"/>
                     </a:lnT>
-                    <a:lnB w="12700" cap="flat" cmpd="sng" algn="ctr">
-                      <a:solidFill>
-                        <a:srgbClr val="DEE2E6"/>
+                    <a:lnB w="10160" cap="flat" cmpd="sng" algn="ctr">
+                      <a:solidFill>
+                        <a:srgbClr val="E2E8F0"/>
                       </a:solidFill>
                       <a:prstDash val="solid"/>
                       <a:round/>
@@ -4488,11 +4922,11 @@
                     <a:bodyPr/>
                     <a:lstStyle/>
                     <a:p>
-                      <a:pPr algn="l" indent="0" marL="0">
+                      <a:pPr indent="0" marL="0">
                         <a:buNone/>
                       </a:pPr>
                       <a:r>
-                        <a:rPr lang="en-US" sz="1050" dirty="0">
+                        <a:rPr lang="en-US" sz="1000" dirty="0">
                           <a:solidFill>
                             <a:srgbClr val="000000"/>
                           </a:solidFill>
@@ -4500,9 +4934,9 @@
                           <a:ea typeface="Arial" pitchFamily="34" charset="-122"/>
                           <a:cs typeface="Arial" pitchFamily="34" charset="-120"/>
                         </a:rPr>
-                        <a:t>4. Modelado y diseño de base de datos SQLite</a:t>
+                        <a:t>4. Modelado y diseño de base de datos SQLite relacional</a:t>
                       </a:r>
-                      <a:endParaRPr lang="en-US" sz="1050" dirty="0">
+                      <a:endParaRPr lang="en-US" sz="1000" dirty="0">
                         <a:latin typeface="Arial" charset="0"/>
                         <a:ea typeface="Arial" charset="0"/>
                         <a:cs typeface="Arial" charset="0"/>
@@ -4510,36 +4944,36 @@
                     </a:p>
                   </a:txBody>
                   <a:tcPr marL="91440" marR="91440" marT="45720" marB="45720" anchor="ctr">
-                    <a:lnL w="12700" cap="flat" cmpd="sng" algn="ctr">
-                      <a:solidFill>
-                        <a:srgbClr val="DEE2E6"/>
+                    <a:lnL w="10160" cap="flat" cmpd="sng" algn="ctr">
+                      <a:solidFill>
+                        <a:srgbClr val="E2E8F0"/>
                       </a:solidFill>
                       <a:prstDash val="solid"/>
                       <a:round/>
                       <a:headEnd type="none" w="med" len="med"/>
                       <a:tailEnd type="none" w="med" len="med"/>
                     </a:lnL>
-                    <a:lnR w="12700" cap="flat" cmpd="sng" algn="ctr">
-                      <a:solidFill>
-                        <a:srgbClr val="DEE2E6"/>
+                    <a:lnR w="10160" cap="flat" cmpd="sng" algn="ctr">
+                      <a:solidFill>
+                        <a:srgbClr val="E2E8F0"/>
                       </a:solidFill>
                       <a:prstDash val="solid"/>
                       <a:round/>
                       <a:headEnd type="none" w="med" len="med"/>
                       <a:tailEnd type="none" w="med" len="med"/>
                     </a:lnR>
-                    <a:lnT w="12700" cap="flat" cmpd="sng" algn="ctr">
-                      <a:solidFill>
-                        <a:srgbClr val="DEE2E6"/>
+                    <a:lnT w="10160" cap="flat" cmpd="sng" algn="ctr">
+                      <a:solidFill>
+                        <a:srgbClr val="E2E8F0"/>
                       </a:solidFill>
                       <a:prstDash val="solid"/>
                       <a:round/>
                       <a:headEnd type="none" w="med" len="med"/>
                       <a:tailEnd type="none" w="med" len="med"/>
                     </a:lnT>
-                    <a:lnB w="12700" cap="flat" cmpd="sng" algn="ctr">
-                      <a:solidFill>
-                        <a:srgbClr val="DEE2E6"/>
+                    <a:lnB w="10160" cap="flat" cmpd="sng" algn="ctr">
+                      <a:solidFill>
+                        <a:srgbClr val="E2E8F0"/>
                       </a:solidFill>
                       <a:prstDash val="solid"/>
                       <a:round/>
@@ -4556,11 +4990,11 @@
                     <a:bodyPr/>
                     <a:lstStyle/>
                     <a:p>
-                      <a:pPr algn="l" indent="0" marL="0">
+                      <a:pPr algn="ctr" indent="0" marL="0">
                         <a:buNone/>
                       </a:pPr>
                       <a:r>
-                        <a:rPr lang="en-US" sz="1050" dirty="0">
+                        <a:rPr lang="en-US" sz="1000" b="1" dirty="0">
                           <a:solidFill>
                             <a:srgbClr val="000000"/>
                           </a:solidFill>
@@ -4570,7 +5004,7 @@
                         </a:rPr>
                         <a:t>Semana 5 – 6</a:t>
                       </a:r>
-                      <a:endParaRPr lang="en-US" sz="1050" dirty="0">
+                      <a:endParaRPr lang="en-US" sz="1000" dirty="0">
                         <a:latin typeface="Arial" charset="0"/>
                         <a:ea typeface="Arial" charset="0"/>
                         <a:cs typeface="Arial" charset="0"/>
@@ -4578,36 +5012,36 @@
                     </a:p>
                   </a:txBody>
                   <a:tcPr marL="91440" marR="91440" marT="45720" marB="45720" anchor="ctr">
-                    <a:lnL w="12700" cap="flat" cmpd="sng" algn="ctr">
-                      <a:solidFill>
-                        <a:srgbClr val="DEE2E6"/>
+                    <a:lnL w="10160" cap="flat" cmpd="sng" algn="ctr">
+                      <a:solidFill>
+                        <a:srgbClr val="E2E8F0"/>
                       </a:solidFill>
                       <a:prstDash val="solid"/>
                       <a:round/>
                       <a:headEnd type="none" w="med" len="med"/>
                       <a:tailEnd type="none" w="med" len="med"/>
                     </a:lnL>
-                    <a:lnR w="12700" cap="flat" cmpd="sng" algn="ctr">
-                      <a:solidFill>
-                        <a:srgbClr val="DEE2E6"/>
+                    <a:lnR w="10160" cap="flat" cmpd="sng" algn="ctr">
+                      <a:solidFill>
+                        <a:srgbClr val="E2E8F0"/>
                       </a:solidFill>
                       <a:prstDash val="solid"/>
                       <a:round/>
                       <a:headEnd type="none" w="med" len="med"/>
                       <a:tailEnd type="none" w="med" len="med"/>
                     </a:lnR>
-                    <a:lnT w="12700" cap="flat" cmpd="sng" algn="ctr">
-                      <a:solidFill>
-                        <a:srgbClr val="DEE2E6"/>
+                    <a:lnT w="10160" cap="flat" cmpd="sng" algn="ctr">
+                      <a:solidFill>
+                        <a:srgbClr val="E2E8F0"/>
                       </a:solidFill>
                       <a:prstDash val="solid"/>
                       <a:round/>
                       <a:headEnd type="none" w="med" len="med"/>
                       <a:tailEnd type="none" w="med" len="med"/>
                     </a:lnT>
-                    <a:lnB w="12700" cap="flat" cmpd="sng" algn="ctr">
-                      <a:solidFill>
-                        <a:srgbClr val="DEE2E6"/>
+                    <a:lnB w="10160" cap="flat" cmpd="sng" algn="ctr">
+                      <a:solidFill>
+                        <a:srgbClr val="E2E8F0"/>
                       </a:solidFill>
                       <a:prstDash val="solid"/>
                       <a:round/>
@@ -4624,11 +5058,11 @@
                     <a:bodyPr/>
                     <a:lstStyle/>
                     <a:p>
-                      <a:pPr algn="l" indent="0" marL="0">
+                      <a:pPr indent="0" marL="0">
                         <a:buNone/>
                       </a:pPr>
                       <a:r>
-                        <a:rPr lang="en-US" sz="1050" dirty="0">
+                        <a:rPr lang="en-US" sz="1000" dirty="0">
                           <a:solidFill>
                             <a:srgbClr val="000000"/>
                           </a:solidFill>
@@ -4636,9 +5070,9 @@
                           <a:ea typeface="Arial" pitchFamily="34" charset="-122"/>
                           <a:cs typeface="Arial" pitchFamily="34" charset="-120"/>
                         </a:rPr>
-                        <a:t>Esquema relacional</a:t>
+                        <a:t>Diagrama Entidad-Relación y script db.js</a:t>
                       </a:r>
-                      <a:endParaRPr lang="en-US" sz="1050" dirty="0">
+                      <a:endParaRPr lang="en-US" sz="1000" dirty="0">
                         <a:latin typeface="Arial" charset="0"/>
                         <a:ea typeface="Arial" charset="0"/>
                         <a:cs typeface="Arial" charset="0"/>
@@ -4646,36 +5080,36 @@
                     </a:p>
                   </a:txBody>
                   <a:tcPr marL="91440" marR="91440" marT="45720" marB="45720" anchor="ctr">
-                    <a:lnL w="12700" cap="flat" cmpd="sng" algn="ctr">
-                      <a:solidFill>
-                        <a:srgbClr val="DEE2E6"/>
+                    <a:lnL w="10160" cap="flat" cmpd="sng" algn="ctr">
+                      <a:solidFill>
+                        <a:srgbClr val="E2E8F0"/>
                       </a:solidFill>
                       <a:prstDash val="solid"/>
                       <a:round/>
                       <a:headEnd type="none" w="med" len="med"/>
                       <a:tailEnd type="none" w="med" len="med"/>
                     </a:lnL>
-                    <a:lnR w="12700" cap="flat" cmpd="sng" algn="ctr">
-                      <a:solidFill>
-                        <a:srgbClr val="DEE2E6"/>
+                    <a:lnR w="10160" cap="flat" cmpd="sng" algn="ctr">
+                      <a:solidFill>
+                        <a:srgbClr val="E2E8F0"/>
                       </a:solidFill>
                       <a:prstDash val="solid"/>
                       <a:round/>
                       <a:headEnd type="none" w="med" len="med"/>
                       <a:tailEnd type="none" w="med" len="med"/>
                     </a:lnR>
-                    <a:lnT w="12700" cap="flat" cmpd="sng" algn="ctr">
-                      <a:solidFill>
-                        <a:srgbClr val="DEE2E6"/>
+                    <a:lnT w="10160" cap="flat" cmpd="sng" algn="ctr">
+                      <a:solidFill>
+                        <a:srgbClr val="E2E8F0"/>
                       </a:solidFill>
                       <a:prstDash val="solid"/>
                       <a:round/>
                       <a:headEnd type="none" w="med" len="med"/>
                       <a:tailEnd type="none" w="med" len="med"/>
                     </a:lnT>
-                    <a:lnB w="12700" cap="flat" cmpd="sng" algn="ctr">
-                      <a:solidFill>
-                        <a:srgbClr val="DEE2E6"/>
+                    <a:lnB w="10160" cap="flat" cmpd="sng" algn="ctr">
+                      <a:solidFill>
+                        <a:srgbClr val="E2E8F0"/>
                       </a:solidFill>
                       <a:prstDash val="solid"/>
                       <a:round/>
@@ -4694,11 +5128,11 @@
                     <a:bodyPr/>
                     <a:lstStyle/>
                     <a:p>
-                      <a:pPr algn="l" indent="0" marL="0">
+                      <a:pPr indent="0" marL="0">
                         <a:buNone/>
                       </a:pPr>
                       <a:r>
-                        <a:rPr lang="en-US" sz="1050" dirty="0">
+                        <a:rPr lang="en-US" sz="1000" dirty="0">
                           <a:solidFill>
                             <a:srgbClr val="000000"/>
                           </a:solidFill>
@@ -4706,9 +5140,9 @@
                           <a:ea typeface="Arial" pitchFamily="34" charset="-122"/>
                           <a:cs typeface="Arial" pitchFamily="34" charset="-120"/>
                         </a:rPr>
-                        <a:t>5. Maquetación de interfaz gráfica responsive (HTML/CSS)</a:t>
+                        <a:t>5. Maquetación UI/UX responsive (HTML5 semántico y CSS3)</a:t>
                       </a:r>
-                      <a:endParaRPr lang="en-US" sz="1050" dirty="0">
+                      <a:endParaRPr lang="en-US" sz="1000" dirty="0">
                         <a:latin typeface="Arial" charset="0"/>
                         <a:ea typeface="Arial" charset="0"/>
                         <a:cs typeface="Arial" charset="0"/>
@@ -4716,36 +5150,36 @@
                     </a:p>
                   </a:txBody>
                   <a:tcPr marL="91440" marR="91440" marT="45720" marB="45720" anchor="ctr">
-                    <a:lnL w="12700" cap="flat" cmpd="sng" algn="ctr">
-                      <a:solidFill>
-                        <a:srgbClr val="DEE2E6"/>
+                    <a:lnL w="10160" cap="flat" cmpd="sng" algn="ctr">
+                      <a:solidFill>
+                        <a:srgbClr val="E2E8F0"/>
                       </a:solidFill>
                       <a:prstDash val="solid"/>
                       <a:round/>
                       <a:headEnd type="none" w="med" len="med"/>
                       <a:tailEnd type="none" w="med" len="med"/>
                     </a:lnL>
-                    <a:lnR w="12700" cap="flat" cmpd="sng" algn="ctr">
-                      <a:solidFill>
-                        <a:srgbClr val="DEE2E6"/>
+                    <a:lnR w="10160" cap="flat" cmpd="sng" algn="ctr">
+                      <a:solidFill>
+                        <a:srgbClr val="E2E8F0"/>
                       </a:solidFill>
                       <a:prstDash val="solid"/>
                       <a:round/>
                       <a:headEnd type="none" w="med" len="med"/>
                       <a:tailEnd type="none" w="med" len="med"/>
                     </a:lnR>
-                    <a:lnT w="12700" cap="flat" cmpd="sng" algn="ctr">
-                      <a:solidFill>
-                        <a:srgbClr val="DEE2E6"/>
+                    <a:lnT w="10160" cap="flat" cmpd="sng" algn="ctr">
+                      <a:solidFill>
+                        <a:srgbClr val="E2E8F0"/>
                       </a:solidFill>
                       <a:prstDash val="solid"/>
                       <a:round/>
                       <a:headEnd type="none" w="med" len="med"/>
                       <a:tailEnd type="none" w="med" len="med"/>
                     </a:lnT>
-                    <a:lnB w="12700" cap="flat" cmpd="sng" algn="ctr">
-                      <a:solidFill>
-                        <a:srgbClr val="DEE2E6"/>
+                    <a:lnB w="10160" cap="flat" cmpd="sng" algn="ctr">
+                      <a:solidFill>
+                        <a:srgbClr val="E2E8F0"/>
                       </a:solidFill>
                       <a:prstDash val="solid"/>
                       <a:round/>
@@ -4762,11 +5196,11 @@
                     <a:bodyPr/>
                     <a:lstStyle/>
                     <a:p>
-                      <a:pPr algn="l" indent="0" marL="0">
+                      <a:pPr algn="ctr" indent="0" marL="0">
                         <a:buNone/>
                       </a:pPr>
                       <a:r>
-                        <a:rPr lang="en-US" sz="1050" dirty="0">
+                        <a:rPr lang="en-US" sz="1000" b="1" dirty="0">
                           <a:solidFill>
                             <a:srgbClr val="000000"/>
                           </a:solidFill>
@@ -4776,7 +5210,7 @@
                         </a:rPr>
                         <a:t>Semana 7</a:t>
                       </a:r>
-                      <a:endParaRPr lang="en-US" sz="1050" dirty="0">
+                      <a:endParaRPr lang="en-US" sz="1000" dirty="0">
                         <a:latin typeface="Arial" charset="0"/>
                         <a:ea typeface="Arial" charset="0"/>
                         <a:cs typeface="Arial" charset="0"/>
@@ -4784,36 +5218,36 @@
                     </a:p>
                   </a:txBody>
                   <a:tcPr marL="91440" marR="91440" marT="45720" marB="45720" anchor="ctr">
-                    <a:lnL w="12700" cap="flat" cmpd="sng" algn="ctr">
-                      <a:solidFill>
-                        <a:srgbClr val="DEE2E6"/>
+                    <a:lnL w="10160" cap="flat" cmpd="sng" algn="ctr">
+                      <a:solidFill>
+                        <a:srgbClr val="E2E8F0"/>
                       </a:solidFill>
                       <a:prstDash val="solid"/>
                       <a:round/>
                       <a:headEnd type="none" w="med" len="med"/>
                       <a:tailEnd type="none" w="med" len="med"/>
                     </a:lnL>
-                    <a:lnR w="12700" cap="flat" cmpd="sng" algn="ctr">
-                      <a:solidFill>
-                        <a:srgbClr val="DEE2E6"/>
+                    <a:lnR w="10160" cap="flat" cmpd="sng" algn="ctr">
+                      <a:solidFill>
+                        <a:srgbClr val="E2E8F0"/>
                       </a:solidFill>
                       <a:prstDash val="solid"/>
                       <a:round/>
                       <a:headEnd type="none" w="med" len="med"/>
                       <a:tailEnd type="none" w="med" len="med"/>
                     </a:lnR>
-                    <a:lnT w="12700" cap="flat" cmpd="sng" algn="ctr">
-                      <a:solidFill>
-                        <a:srgbClr val="DEE2E6"/>
+                    <a:lnT w="10160" cap="flat" cmpd="sng" algn="ctr">
+                      <a:solidFill>
+                        <a:srgbClr val="E2E8F0"/>
                       </a:solidFill>
                       <a:prstDash val="solid"/>
                       <a:round/>
                       <a:headEnd type="none" w="med" len="med"/>
                       <a:tailEnd type="none" w="med" len="med"/>
                     </a:lnT>
-                    <a:lnB w="12700" cap="flat" cmpd="sng" algn="ctr">
-                      <a:solidFill>
-                        <a:srgbClr val="DEE2E6"/>
+                    <a:lnB w="10160" cap="flat" cmpd="sng" algn="ctr">
+                      <a:solidFill>
+                        <a:srgbClr val="E2E8F0"/>
                       </a:solidFill>
                       <a:prstDash val="solid"/>
                       <a:round/>
@@ -4830,11 +5264,11 @@
                     <a:bodyPr/>
                     <a:lstStyle/>
                     <a:p>
-                      <a:pPr algn="l" indent="0" marL="0">
+                      <a:pPr indent="0" marL="0">
                         <a:buNone/>
                       </a:pPr>
                       <a:r>
-                        <a:rPr lang="en-US" sz="1050" dirty="0">
+                        <a:rPr lang="en-US" sz="1000" dirty="0">
                           <a:solidFill>
                             <a:srgbClr val="000000"/>
                           </a:solidFill>
@@ -4842,9 +5276,9 @@
                           <a:ea typeface="Arial" pitchFamily="34" charset="-122"/>
                           <a:cs typeface="Arial" pitchFamily="34" charset="-120"/>
                         </a:rPr>
-                        <a:t>Vistas móviles listas</a:t>
+                        <a:t>Vistas móviles y de escritorio maquetadas</a:t>
                       </a:r>
-                      <a:endParaRPr lang="en-US" sz="1050" dirty="0">
+                      <a:endParaRPr lang="en-US" sz="1000" dirty="0">
                         <a:latin typeface="Arial" charset="0"/>
                         <a:ea typeface="Arial" charset="0"/>
                         <a:cs typeface="Arial" charset="0"/>
@@ -4852,36 +5286,36 @@
                     </a:p>
                   </a:txBody>
                   <a:tcPr marL="91440" marR="91440" marT="45720" marB="45720" anchor="ctr">
-                    <a:lnL w="12700" cap="flat" cmpd="sng" algn="ctr">
-                      <a:solidFill>
-                        <a:srgbClr val="DEE2E6"/>
+                    <a:lnL w="10160" cap="flat" cmpd="sng" algn="ctr">
+                      <a:solidFill>
+                        <a:srgbClr val="E2E8F0"/>
                       </a:solidFill>
                       <a:prstDash val="solid"/>
                       <a:round/>
                       <a:headEnd type="none" w="med" len="med"/>
                       <a:tailEnd type="none" w="med" len="med"/>
                     </a:lnL>
-                    <a:lnR w="12700" cap="flat" cmpd="sng" algn="ctr">
-                      <a:solidFill>
-                        <a:srgbClr val="DEE2E6"/>
+                    <a:lnR w="10160" cap="flat" cmpd="sng" algn="ctr">
+                      <a:solidFill>
+                        <a:srgbClr val="E2E8F0"/>
                       </a:solidFill>
                       <a:prstDash val="solid"/>
                       <a:round/>
                       <a:headEnd type="none" w="med" len="med"/>
                       <a:tailEnd type="none" w="med" len="med"/>
                     </a:lnR>
-                    <a:lnT w="12700" cap="flat" cmpd="sng" algn="ctr">
-                      <a:solidFill>
-                        <a:srgbClr val="DEE2E6"/>
+                    <a:lnT w="10160" cap="flat" cmpd="sng" algn="ctr">
+                      <a:solidFill>
+                        <a:srgbClr val="E2E8F0"/>
                       </a:solidFill>
                       <a:prstDash val="solid"/>
                       <a:round/>
                       <a:headEnd type="none" w="med" len="med"/>
                       <a:tailEnd type="none" w="med" len="med"/>
                     </a:lnT>
-                    <a:lnB w="12700" cap="flat" cmpd="sng" algn="ctr">
-                      <a:solidFill>
-                        <a:srgbClr val="DEE2E6"/>
+                    <a:lnB w="10160" cap="flat" cmpd="sng" algn="ctr">
+                      <a:solidFill>
+                        <a:srgbClr val="E2E8F0"/>
                       </a:solidFill>
                       <a:prstDash val="solid"/>
                       <a:round/>
@@ -4900,11 +5334,11 @@
                     <a:bodyPr/>
                     <a:lstStyle/>
                     <a:p>
-                      <a:pPr algn="l" indent="0" marL="0">
+                      <a:pPr indent="0" marL="0">
                         <a:buNone/>
                       </a:pPr>
                       <a:r>
-                        <a:rPr lang="en-US" sz="1050" dirty="0">
+                        <a:rPr lang="en-US" sz="1000" dirty="0">
                           <a:solidFill>
                             <a:srgbClr val="000000"/>
                           </a:solidFill>
@@ -4912,9 +5346,9 @@
                           <a:ea typeface="Arial" pitchFamily="34" charset="-122"/>
                           <a:cs typeface="Arial" pitchFamily="34" charset="-120"/>
                         </a:rPr>
-                        <a:t>6. Programación del backend (Node.js, Express, Multer)</a:t>
+                        <a:t>6. Programación del backend API REST (Node.js + Express)</a:t>
                       </a:r>
-                      <a:endParaRPr lang="en-US" sz="1050" dirty="0">
+                      <a:endParaRPr lang="en-US" sz="1000" dirty="0">
                         <a:latin typeface="Arial" charset="0"/>
                         <a:ea typeface="Arial" charset="0"/>
                         <a:cs typeface="Arial" charset="0"/>
@@ -4922,36 +5356,36 @@
                     </a:p>
                   </a:txBody>
                   <a:tcPr marL="91440" marR="91440" marT="45720" marB="45720" anchor="ctr">
-                    <a:lnL w="12700" cap="flat" cmpd="sng" algn="ctr">
-                      <a:solidFill>
-                        <a:srgbClr val="DEE2E6"/>
+                    <a:lnL w="10160" cap="flat" cmpd="sng" algn="ctr">
+                      <a:solidFill>
+                        <a:srgbClr val="E2E8F0"/>
                       </a:solidFill>
                       <a:prstDash val="solid"/>
                       <a:round/>
                       <a:headEnd type="none" w="med" len="med"/>
                       <a:tailEnd type="none" w="med" len="med"/>
                     </a:lnL>
-                    <a:lnR w="12700" cap="flat" cmpd="sng" algn="ctr">
-                      <a:solidFill>
-                        <a:srgbClr val="DEE2E6"/>
+                    <a:lnR w="10160" cap="flat" cmpd="sng" algn="ctr">
+                      <a:solidFill>
+                        <a:srgbClr val="E2E8F0"/>
                       </a:solidFill>
                       <a:prstDash val="solid"/>
                       <a:round/>
                       <a:headEnd type="none" w="med" len="med"/>
                       <a:tailEnd type="none" w="med" len="med"/>
                     </a:lnR>
-                    <a:lnT w="12700" cap="flat" cmpd="sng" algn="ctr">
-                      <a:solidFill>
-                        <a:srgbClr val="DEE2E6"/>
+                    <a:lnT w="10160" cap="flat" cmpd="sng" algn="ctr">
+                      <a:solidFill>
+                        <a:srgbClr val="E2E8F0"/>
                       </a:solidFill>
                       <a:prstDash val="solid"/>
                       <a:round/>
                       <a:headEnd type="none" w="med" len="med"/>
                       <a:tailEnd type="none" w="med" len="med"/>
                     </a:lnT>
-                    <a:lnB w="12700" cap="flat" cmpd="sng" algn="ctr">
-                      <a:solidFill>
-                        <a:srgbClr val="DEE2E6"/>
+                    <a:lnB w="10160" cap="flat" cmpd="sng" algn="ctr">
+                      <a:solidFill>
+                        <a:srgbClr val="E2E8F0"/>
                       </a:solidFill>
                       <a:prstDash val="solid"/>
                       <a:round/>
@@ -4968,11 +5402,11 @@
                     <a:bodyPr/>
                     <a:lstStyle/>
                     <a:p>
-                      <a:pPr algn="l" indent="0" marL="0">
+                      <a:pPr algn="ctr" indent="0" marL="0">
                         <a:buNone/>
                       </a:pPr>
                       <a:r>
-                        <a:rPr lang="en-US" sz="1050" dirty="0">
+                        <a:rPr lang="en-US" sz="1000" b="1" dirty="0">
                           <a:solidFill>
                             <a:srgbClr val="000000"/>
                           </a:solidFill>
@@ -4982,7 +5416,7 @@
                         </a:rPr>
                         <a:t>Semana 8 – 9</a:t>
                       </a:r>
-                      <a:endParaRPr lang="en-US" sz="1050" dirty="0">
+                      <a:endParaRPr lang="en-US" sz="1000" dirty="0">
                         <a:latin typeface="Arial" charset="0"/>
                         <a:ea typeface="Arial" charset="0"/>
                         <a:cs typeface="Arial" charset="0"/>
@@ -4990,36 +5424,36 @@
                     </a:p>
                   </a:txBody>
                   <a:tcPr marL="91440" marR="91440" marT="45720" marB="45720" anchor="ctr">
-                    <a:lnL w="12700" cap="flat" cmpd="sng" algn="ctr">
-                      <a:solidFill>
-                        <a:srgbClr val="DEE2E6"/>
+                    <a:lnL w="10160" cap="flat" cmpd="sng" algn="ctr">
+                      <a:solidFill>
+                        <a:srgbClr val="E2E8F0"/>
                       </a:solidFill>
                       <a:prstDash val="solid"/>
                       <a:round/>
                       <a:headEnd type="none" w="med" len="med"/>
                       <a:tailEnd type="none" w="med" len="med"/>
                     </a:lnL>
-                    <a:lnR w="12700" cap="flat" cmpd="sng" algn="ctr">
-                      <a:solidFill>
-                        <a:srgbClr val="DEE2E6"/>
+                    <a:lnR w="10160" cap="flat" cmpd="sng" algn="ctr">
+                      <a:solidFill>
+                        <a:srgbClr val="E2E8F0"/>
                       </a:solidFill>
                       <a:prstDash val="solid"/>
                       <a:round/>
                       <a:headEnd type="none" w="med" len="med"/>
                       <a:tailEnd type="none" w="med" len="med"/>
                     </a:lnR>
-                    <a:lnT w="12700" cap="flat" cmpd="sng" algn="ctr">
-                      <a:solidFill>
-                        <a:srgbClr val="DEE2E6"/>
+                    <a:lnT w="10160" cap="flat" cmpd="sng" algn="ctr">
+                      <a:solidFill>
+                        <a:srgbClr val="E2E8F0"/>
                       </a:solidFill>
                       <a:prstDash val="solid"/>
                       <a:round/>
                       <a:headEnd type="none" w="med" len="med"/>
                       <a:tailEnd type="none" w="med" len="med"/>
                     </a:lnT>
-                    <a:lnB w="12700" cap="flat" cmpd="sng" algn="ctr">
-                      <a:solidFill>
-                        <a:srgbClr val="DEE2E6"/>
+                    <a:lnB w="10160" cap="flat" cmpd="sng" algn="ctr">
+                      <a:solidFill>
+                        <a:srgbClr val="E2E8F0"/>
                       </a:solidFill>
                       <a:prstDash val="solid"/>
                       <a:round/>
@@ -5036,11 +5470,11 @@
                     <a:bodyPr/>
                     <a:lstStyle/>
                     <a:p>
-                      <a:pPr algn="l" indent="0" marL="0">
+                      <a:pPr indent="0" marL="0">
                         <a:buNone/>
                       </a:pPr>
                       <a:r>
-                        <a:rPr lang="en-US" sz="1050" dirty="0">
+                        <a:rPr lang="en-US" sz="1000" dirty="0">
                           <a:solidFill>
                             <a:srgbClr val="000000"/>
                           </a:solidFill>
@@ -5048,9 +5482,9 @@
                           <a:ea typeface="Arial" pitchFamily="34" charset="-122"/>
                           <a:cs typeface="Arial" pitchFamily="34" charset="-120"/>
                         </a:rPr>
-                        <a:t>API REST operativa</a:t>
+                        <a:t>Endpoints CRUD de publicaciones y usuarios</a:t>
                       </a:r>
-                      <a:endParaRPr lang="en-US" sz="1050" dirty="0">
+                      <a:endParaRPr lang="en-US" sz="1000" dirty="0">
                         <a:latin typeface="Arial" charset="0"/>
                         <a:ea typeface="Arial" charset="0"/>
                         <a:cs typeface="Arial" charset="0"/>
@@ -5058,36 +5492,36 @@
                     </a:p>
                   </a:txBody>
                   <a:tcPr marL="91440" marR="91440" marT="45720" marB="45720" anchor="ctr">
-                    <a:lnL w="12700" cap="flat" cmpd="sng" algn="ctr">
-                      <a:solidFill>
-                        <a:srgbClr val="DEE2E6"/>
+                    <a:lnL w="10160" cap="flat" cmpd="sng" algn="ctr">
+                      <a:solidFill>
+                        <a:srgbClr val="E2E8F0"/>
                       </a:solidFill>
                       <a:prstDash val="solid"/>
                       <a:round/>
                       <a:headEnd type="none" w="med" len="med"/>
                       <a:tailEnd type="none" w="med" len="med"/>
                     </a:lnL>
-                    <a:lnR w="12700" cap="flat" cmpd="sng" algn="ctr">
-                      <a:solidFill>
-                        <a:srgbClr val="DEE2E6"/>
+                    <a:lnR w="10160" cap="flat" cmpd="sng" algn="ctr">
+                      <a:solidFill>
+                        <a:srgbClr val="E2E8F0"/>
                       </a:solidFill>
                       <a:prstDash val="solid"/>
                       <a:round/>
                       <a:headEnd type="none" w="med" len="med"/>
                       <a:tailEnd type="none" w="med" len="med"/>
                     </a:lnR>
-                    <a:lnT w="12700" cap="flat" cmpd="sng" algn="ctr">
-                      <a:solidFill>
-                        <a:srgbClr val="DEE2E6"/>
+                    <a:lnT w="10160" cap="flat" cmpd="sng" algn="ctr">
+                      <a:solidFill>
+                        <a:srgbClr val="E2E8F0"/>
                       </a:solidFill>
                       <a:prstDash val="solid"/>
                       <a:round/>
                       <a:headEnd type="none" w="med" len="med"/>
                       <a:tailEnd type="none" w="med" len="med"/>
                     </a:lnT>
-                    <a:lnB w="12700" cap="flat" cmpd="sng" algn="ctr">
-                      <a:solidFill>
-                        <a:srgbClr val="DEE2E6"/>
+                    <a:lnB w="10160" cap="flat" cmpd="sng" algn="ctr">
+                      <a:solidFill>
+                        <a:srgbClr val="E2E8F0"/>
                       </a:solidFill>
                       <a:prstDash val="solid"/>
                       <a:round/>
@@ -5106,11 +5540,11 @@
                     <a:bodyPr/>
                     <a:lstStyle/>
                     <a:p>
-                      <a:pPr algn="l" indent="0" marL="0">
+                      <a:pPr indent="0" marL="0">
                         <a:buNone/>
                       </a:pPr>
                       <a:r>
-                        <a:rPr lang="en-US" sz="1050" dirty="0">
+                        <a:rPr lang="en-US" sz="1000" dirty="0">
                           <a:solidFill>
                             <a:srgbClr val="000000"/>
                           </a:solidFill>
@@ -5118,9 +5552,9 @@
                           <a:ea typeface="Arial" pitchFamily="34" charset="-122"/>
                           <a:cs typeface="Arial" pitchFamily="34" charset="-120"/>
                         </a:rPr>
-                        <a:t>7. Autenticación segura con JWT y encriptación Bcrypt</a:t>
+                        <a:t>7. Implementación de autenticación JWT y Bcrypt</a:t>
                       </a:r>
-                      <a:endParaRPr lang="en-US" sz="1050" dirty="0">
+                      <a:endParaRPr lang="en-US" sz="1000" dirty="0">
                         <a:latin typeface="Arial" charset="0"/>
                         <a:ea typeface="Arial" charset="0"/>
                         <a:cs typeface="Arial" charset="0"/>
@@ -5128,36 +5562,36 @@
                     </a:p>
                   </a:txBody>
                   <a:tcPr marL="91440" marR="91440" marT="45720" marB="45720" anchor="ctr">
-                    <a:lnL w="12700" cap="flat" cmpd="sng" algn="ctr">
-                      <a:solidFill>
-                        <a:srgbClr val="DEE2E6"/>
+                    <a:lnL w="10160" cap="flat" cmpd="sng" algn="ctr">
+                      <a:solidFill>
+                        <a:srgbClr val="E2E8F0"/>
                       </a:solidFill>
                       <a:prstDash val="solid"/>
                       <a:round/>
                       <a:headEnd type="none" w="med" len="med"/>
                       <a:tailEnd type="none" w="med" len="med"/>
                     </a:lnL>
-                    <a:lnR w="12700" cap="flat" cmpd="sng" algn="ctr">
-                      <a:solidFill>
-                        <a:srgbClr val="DEE2E6"/>
+                    <a:lnR w="10160" cap="flat" cmpd="sng" algn="ctr">
+                      <a:solidFill>
+                        <a:srgbClr val="E2E8F0"/>
                       </a:solidFill>
                       <a:prstDash val="solid"/>
                       <a:round/>
                       <a:headEnd type="none" w="med" len="med"/>
                       <a:tailEnd type="none" w="med" len="med"/>
                     </a:lnR>
-                    <a:lnT w="12700" cap="flat" cmpd="sng" algn="ctr">
-                      <a:solidFill>
-                        <a:srgbClr val="DEE2E6"/>
+                    <a:lnT w="10160" cap="flat" cmpd="sng" algn="ctr">
+                      <a:solidFill>
+                        <a:srgbClr val="E2E8F0"/>
                       </a:solidFill>
                       <a:prstDash val="solid"/>
                       <a:round/>
                       <a:headEnd type="none" w="med" len="med"/>
                       <a:tailEnd type="none" w="med" len="med"/>
                     </a:lnT>
-                    <a:lnB w="12700" cap="flat" cmpd="sng" algn="ctr">
-                      <a:solidFill>
-                        <a:srgbClr val="DEE2E6"/>
+                    <a:lnB w="10160" cap="flat" cmpd="sng" algn="ctr">
+                      <a:solidFill>
+                        <a:srgbClr val="E2E8F0"/>
                       </a:solidFill>
                       <a:prstDash val="solid"/>
                       <a:round/>
@@ -5174,11 +5608,11 @@
                     <a:bodyPr/>
                     <a:lstStyle/>
                     <a:p>
-                      <a:pPr algn="l" indent="0" marL="0">
+                      <a:pPr algn="ctr" indent="0" marL="0">
                         <a:buNone/>
                       </a:pPr>
                       <a:r>
-                        <a:rPr lang="en-US" sz="1050" dirty="0">
+                        <a:rPr lang="en-US" sz="1000" b="1" dirty="0">
                           <a:solidFill>
                             <a:srgbClr val="000000"/>
                           </a:solidFill>
@@ -5188,7 +5622,7 @@
                         </a:rPr>
                         <a:t>Semana 10</a:t>
                       </a:r>
-                      <a:endParaRPr lang="en-US" sz="1050" dirty="0">
+                      <a:endParaRPr lang="en-US" sz="1000" dirty="0">
                         <a:latin typeface="Arial" charset="0"/>
                         <a:ea typeface="Arial" charset="0"/>
                         <a:cs typeface="Arial" charset="0"/>
@@ -5196,36 +5630,36 @@
                     </a:p>
                   </a:txBody>
                   <a:tcPr marL="91440" marR="91440" marT="45720" marB="45720" anchor="ctr">
-                    <a:lnL w="12700" cap="flat" cmpd="sng" algn="ctr">
-                      <a:solidFill>
-                        <a:srgbClr val="DEE2E6"/>
+                    <a:lnL w="10160" cap="flat" cmpd="sng" algn="ctr">
+                      <a:solidFill>
+                        <a:srgbClr val="E2E8F0"/>
                       </a:solidFill>
                       <a:prstDash val="solid"/>
                       <a:round/>
                       <a:headEnd type="none" w="med" len="med"/>
                       <a:tailEnd type="none" w="med" len="med"/>
                     </a:lnL>
-                    <a:lnR w="12700" cap="flat" cmpd="sng" algn="ctr">
-                      <a:solidFill>
-                        <a:srgbClr val="DEE2E6"/>
+                    <a:lnR w="10160" cap="flat" cmpd="sng" algn="ctr">
+                      <a:solidFill>
+                        <a:srgbClr val="E2E8F0"/>
                       </a:solidFill>
                       <a:prstDash val="solid"/>
                       <a:round/>
                       <a:headEnd type="none" w="med" len="med"/>
                       <a:tailEnd type="none" w="med" len="med"/>
                     </a:lnR>
-                    <a:lnT w="12700" cap="flat" cmpd="sng" algn="ctr">
-                      <a:solidFill>
-                        <a:srgbClr val="DEE2E6"/>
+                    <a:lnT w="10160" cap="flat" cmpd="sng" algn="ctr">
+                      <a:solidFill>
+                        <a:srgbClr val="E2E8F0"/>
                       </a:solidFill>
                       <a:prstDash val="solid"/>
                       <a:round/>
                       <a:headEnd type="none" w="med" len="med"/>
                       <a:tailEnd type="none" w="med" len="med"/>
                     </a:lnT>
-                    <a:lnB w="12700" cap="flat" cmpd="sng" algn="ctr">
-                      <a:solidFill>
-                        <a:srgbClr val="DEE2E6"/>
+                    <a:lnB w="10160" cap="flat" cmpd="sng" algn="ctr">
+                      <a:solidFill>
+                        <a:srgbClr val="E2E8F0"/>
                       </a:solidFill>
                       <a:prstDash val="solid"/>
                       <a:round/>
@@ -5242,11 +5676,11 @@
                     <a:bodyPr/>
                     <a:lstStyle/>
                     <a:p>
-                      <a:pPr algn="l" indent="0" marL="0">
+                      <a:pPr indent="0" marL="0">
                         <a:buNone/>
                       </a:pPr>
                       <a:r>
-                        <a:rPr lang="en-US" sz="1050" dirty="0">
+                        <a:rPr lang="en-US" sz="1000" dirty="0">
                           <a:solidFill>
                             <a:srgbClr val="000000"/>
                           </a:solidFill>
@@ -5254,9 +5688,9 @@
                           <a:ea typeface="Arial" pitchFamily="34" charset="-122"/>
                           <a:cs typeface="Arial" pitchFamily="34" charset="-120"/>
                         </a:rPr>
-                        <a:t>Seguridad y roles</a:t>
+                        <a:t>Control de acceso por roles y contraseñas cifradas</a:t>
                       </a:r>
-                      <a:endParaRPr lang="en-US" sz="1050" dirty="0">
+                      <a:endParaRPr lang="en-US" sz="1000" dirty="0">
                         <a:latin typeface="Arial" charset="0"/>
                         <a:ea typeface="Arial" charset="0"/>
                         <a:cs typeface="Arial" charset="0"/>
@@ -5264,36 +5698,36 @@
                     </a:p>
                   </a:txBody>
                   <a:tcPr marL="91440" marR="91440" marT="45720" marB="45720" anchor="ctr">
-                    <a:lnL w="12700" cap="flat" cmpd="sng" algn="ctr">
-                      <a:solidFill>
-                        <a:srgbClr val="DEE2E6"/>
+                    <a:lnL w="10160" cap="flat" cmpd="sng" algn="ctr">
+                      <a:solidFill>
+                        <a:srgbClr val="E2E8F0"/>
                       </a:solidFill>
                       <a:prstDash val="solid"/>
                       <a:round/>
                       <a:headEnd type="none" w="med" len="med"/>
                       <a:tailEnd type="none" w="med" len="med"/>
                     </a:lnL>
-                    <a:lnR w="12700" cap="flat" cmpd="sng" algn="ctr">
-                      <a:solidFill>
-                        <a:srgbClr val="DEE2E6"/>
+                    <a:lnR w="10160" cap="flat" cmpd="sng" algn="ctr">
+                      <a:solidFill>
+                        <a:srgbClr val="E2E8F0"/>
                       </a:solidFill>
                       <a:prstDash val="solid"/>
                       <a:round/>
                       <a:headEnd type="none" w="med" len="med"/>
                       <a:tailEnd type="none" w="med" len="med"/>
                     </a:lnR>
-                    <a:lnT w="12700" cap="flat" cmpd="sng" algn="ctr">
-                      <a:solidFill>
-                        <a:srgbClr val="DEE2E6"/>
+                    <a:lnT w="10160" cap="flat" cmpd="sng" algn="ctr">
+                      <a:solidFill>
+                        <a:srgbClr val="E2E8F0"/>
                       </a:solidFill>
                       <a:prstDash val="solid"/>
                       <a:round/>
                       <a:headEnd type="none" w="med" len="med"/>
                       <a:tailEnd type="none" w="med" len="med"/>
                     </a:lnT>
-                    <a:lnB w="12700" cap="flat" cmpd="sng" algn="ctr">
-                      <a:solidFill>
-                        <a:srgbClr val="DEE2E6"/>
+                    <a:lnB w="10160" cap="flat" cmpd="sng" algn="ctr">
+                      <a:solidFill>
+                        <a:srgbClr val="E2E8F0"/>
                       </a:solidFill>
                       <a:prstDash val="solid"/>
                       <a:round/>
@@ -5312,11 +5746,11 @@
                     <a:bodyPr/>
                     <a:lstStyle/>
                     <a:p>
-                      <a:pPr algn="l" indent="0" marL="0">
+                      <a:pPr indent="0" marL="0">
                         <a:buNone/>
                       </a:pPr>
                       <a:r>
-                        <a:rPr lang="en-US" sz="1050" dirty="0">
+                        <a:rPr lang="en-US" sz="1000" dirty="0">
                           <a:solidFill>
                             <a:srgbClr val="000000"/>
                           </a:solidFill>
@@ -5324,9 +5758,9 @@
                           <a:ea typeface="Arial" pitchFamily="34" charset="-122"/>
                           <a:cs typeface="Arial" pitchFamily="34" charset="-120"/>
                         </a:rPr>
-                        <a:t>8. Edición de anuncios, cambio de foto y limpieza de disco</a:t>
+                        <a:t>8. Módulo de edición de anuncios, fotos y limpieza de disco</a:t>
                       </a:r>
-                      <a:endParaRPr lang="en-US" sz="1050" dirty="0">
+                      <a:endParaRPr lang="en-US" sz="1000" dirty="0">
                         <a:latin typeface="Arial" charset="0"/>
                         <a:ea typeface="Arial" charset="0"/>
                         <a:cs typeface="Arial" charset="0"/>
@@ -5334,36 +5768,36 @@
                     </a:p>
                   </a:txBody>
                   <a:tcPr marL="91440" marR="91440" marT="45720" marB="45720" anchor="ctr">
-                    <a:lnL w="12700" cap="flat" cmpd="sng" algn="ctr">
-                      <a:solidFill>
-                        <a:srgbClr val="DEE2E6"/>
+                    <a:lnL w="10160" cap="flat" cmpd="sng" algn="ctr">
+                      <a:solidFill>
+                        <a:srgbClr val="E2E8F0"/>
                       </a:solidFill>
                       <a:prstDash val="solid"/>
                       <a:round/>
                       <a:headEnd type="none" w="med" len="med"/>
                       <a:tailEnd type="none" w="med" len="med"/>
                     </a:lnL>
-                    <a:lnR w="12700" cap="flat" cmpd="sng" algn="ctr">
-                      <a:solidFill>
-                        <a:srgbClr val="DEE2E6"/>
+                    <a:lnR w="10160" cap="flat" cmpd="sng" algn="ctr">
+                      <a:solidFill>
+                        <a:srgbClr val="E2E8F0"/>
                       </a:solidFill>
                       <a:prstDash val="solid"/>
                       <a:round/>
                       <a:headEnd type="none" w="med" len="med"/>
                       <a:tailEnd type="none" w="med" len="med"/>
                     </a:lnR>
-                    <a:lnT w="12700" cap="flat" cmpd="sng" algn="ctr">
-                      <a:solidFill>
-                        <a:srgbClr val="DEE2E6"/>
+                    <a:lnT w="10160" cap="flat" cmpd="sng" algn="ctr">
+                      <a:solidFill>
+                        <a:srgbClr val="E2E8F0"/>
                       </a:solidFill>
                       <a:prstDash val="solid"/>
                       <a:round/>
                       <a:headEnd type="none" w="med" len="med"/>
                       <a:tailEnd type="none" w="med" len="med"/>
                     </a:lnT>
-                    <a:lnB w="12700" cap="flat" cmpd="sng" algn="ctr">
-                      <a:solidFill>
-                        <a:srgbClr val="DEE2E6"/>
+                    <a:lnB w="10160" cap="flat" cmpd="sng" algn="ctr">
+                      <a:solidFill>
+                        <a:srgbClr val="E2E8F0"/>
                       </a:solidFill>
                       <a:prstDash val="solid"/>
                       <a:round/>
@@ -5380,11 +5814,11 @@
                     <a:bodyPr/>
                     <a:lstStyle/>
                     <a:p>
-                      <a:pPr algn="l" indent="0" marL="0">
+                      <a:pPr algn="ctr" indent="0" marL="0">
                         <a:buNone/>
                       </a:pPr>
                       <a:r>
-                        <a:rPr lang="en-US" sz="1050" dirty="0">
+                        <a:rPr lang="en-US" sz="1000" b="1" dirty="0">
                           <a:solidFill>
                             <a:srgbClr val="000000"/>
                           </a:solidFill>
@@ -5394,7 +5828,7 @@
                         </a:rPr>
                         <a:t>Semana 11 – 12</a:t>
                       </a:r>
-                      <a:endParaRPr lang="en-US" sz="1050" dirty="0">
+                      <a:endParaRPr lang="en-US" sz="1000" dirty="0">
                         <a:latin typeface="Arial" charset="0"/>
                         <a:ea typeface="Arial" charset="0"/>
                         <a:cs typeface="Arial" charset="0"/>
@@ -5402,36 +5836,36 @@
                     </a:p>
                   </a:txBody>
                   <a:tcPr marL="91440" marR="91440" marT="45720" marB="45720" anchor="ctr">
-                    <a:lnL w="12700" cap="flat" cmpd="sng" algn="ctr">
-                      <a:solidFill>
-                        <a:srgbClr val="DEE2E6"/>
+                    <a:lnL w="10160" cap="flat" cmpd="sng" algn="ctr">
+                      <a:solidFill>
+                        <a:srgbClr val="E2E8F0"/>
                       </a:solidFill>
                       <a:prstDash val="solid"/>
                       <a:round/>
                       <a:headEnd type="none" w="med" len="med"/>
                       <a:tailEnd type="none" w="med" len="med"/>
                     </a:lnL>
-                    <a:lnR w="12700" cap="flat" cmpd="sng" algn="ctr">
-                      <a:solidFill>
-                        <a:srgbClr val="DEE2E6"/>
+                    <a:lnR w="10160" cap="flat" cmpd="sng" algn="ctr">
+                      <a:solidFill>
+                        <a:srgbClr val="E2E8F0"/>
                       </a:solidFill>
                       <a:prstDash val="solid"/>
                       <a:round/>
                       <a:headEnd type="none" w="med" len="med"/>
                       <a:tailEnd type="none" w="med" len="med"/>
                     </a:lnR>
-                    <a:lnT w="12700" cap="flat" cmpd="sng" algn="ctr">
-                      <a:solidFill>
-                        <a:srgbClr val="DEE2E6"/>
+                    <a:lnT w="10160" cap="flat" cmpd="sng" algn="ctr">
+                      <a:solidFill>
+                        <a:srgbClr val="E2E8F0"/>
                       </a:solidFill>
                       <a:prstDash val="solid"/>
                       <a:round/>
                       <a:headEnd type="none" w="med" len="med"/>
                       <a:tailEnd type="none" w="med" len="med"/>
                     </a:lnT>
-                    <a:lnB w="12700" cap="flat" cmpd="sng" algn="ctr">
-                      <a:solidFill>
-                        <a:srgbClr val="DEE2E6"/>
+                    <a:lnB w="10160" cap="flat" cmpd="sng" algn="ctr">
+                      <a:solidFill>
+                        <a:srgbClr val="E2E8F0"/>
                       </a:solidFill>
                       <a:prstDash val="solid"/>
                       <a:round/>
@@ -5448,11 +5882,11 @@
                     <a:bodyPr/>
                     <a:lstStyle/>
                     <a:p>
-                      <a:pPr algn="l" indent="0" marL="0">
+                      <a:pPr indent="0" marL="0">
                         <a:buNone/>
                       </a:pPr>
                       <a:r>
-                        <a:rPr lang="en-US" sz="1050" dirty="0">
+                        <a:rPr lang="en-US" sz="1000" dirty="0">
                           <a:solidFill>
                             <a:srgbClr val="000000"/>
                           </a:solidFill>
@@ -5460,9 +5894,9 @@
                           <a:ea typeface="Arial" pitchFamily="34" charset="-122"/>
                           <a:cs typeface="Arial" pitchFamily="34" charset="-120"/>
                         </a:rPr>
-                        <a:t>Módulo multimedia</a:t>
+                        <a:t>FileReader en cliente y fs.unlinkSync en backend</a:t>
                       </a:r>
-                      <a:endParaRPr lang="en-US" sz="1050" dirty="0">
+                      <a:endParaRPr lang="en-US" sz="1000" dirty="0">
                         <a:latin typeface="Arial" charset="0"/>
                         <a:ea typeface="Arial" charset="0"/>
                         <a:cs typeface="Arial" charset="0"/>
@@ -5470,36 +5904,36 @@
                     </a:p>
                   </a:txBody>
                   <a:tcPr marL="91440" marR="91440" marT="45720" marB="45720" anchor="ctr">
-                    <a:lnL w="12700" cap="flat" cmpd="sng" algn="ctr">
-                      <a:solidFill>
-                        <a:srgbClr val="DEE2E6"/>
+                    <a:lnL w="10160" cap="flat" cmpd="sng" algn="ctr">
+                      <a:solidFill>
+                        <a:srgbClr val="E2E8F0"/>
                       </a:solidFill>
                       <a:prstDash val="solid"/>
                       <a:round/>
                       <a:headEnd type="none" w="med" len="med"/>
                       <a:tailEnd type="none" w="med" len="med"/>
                     </a:lnL>
-                    <a:lnR w="12700" cap="flat" cmpd="sng" algn="ctr">
-                      <a:solidFill>
-                        <a:srgbClr val="DEE2E6"/>
+                    <a:lnR w="10160" cap="flat" cmpd="sng" algn="ctr">
+                      <a:solidFill>
+                        <a:srgbClr val="E2E8F0"/>
                       </a:solidFill>
                       <a:prstDash val="solid"/>
                       <a:round/>
                       <a:headEnd type="none" w="med" len="med"/>
                       <a:tailEnd type="none" w="med" len="med"/>
                     </a:lnR>
-                    <a:lnT w="12700" cap="flat" cmpd="sng" algn="ctr">
-                      <a:solidFill>
-                        <a:srgbClr val="DEE2E6"/>
+                    <a:lnT w="10160" cap="flat" cmpd="sng" algn="ctr">
+                      <a:solidFill>
+                        <a:srgbClr val="E2E8F0"/>
                       </a:solidFill>
                       <a:prstDash val="solid"/>
                       <a:round/>
                       <a:headEnd type="none" w="med" len="med"/>
                       <a:tailEnd type="none" w="med" len="med"/>
                     </a:lnT>
-                    <a:lnB w="12700" cap="flat" cmpd="sng" algn="ctr">
-                      <a:solidFill>
-                        <a:srgbClr val="DEE2E6"/>
+                    <a:lnB w="10160" cap="flat" cmpd="sng" algn="ctr">
+                      <a:solidFill>
+                        <a:srgbClr val="E2E8F0"/>
                       </a:solidFill>
                       <a:prstDash val="solid"/>
                       <a:round/>
@@ -5518,11 +5952,11 @@
                     <a:bodyPr/>
                     <a:lstStyle/>
                     <a:p>
-                      <a:pPr algn="l" indent="0" marL="0">
+                      <a:pPr indent="0" marL="0">
                         <a:buNone/>
                       </a:pPr>
                       <a:r>
-                        <a:rPr lang="en-US" sz="1050" dirty="0">
+                        <a:rPr lang="en-US" sz="1000" dirty="0">
                           <a:solidFill>
                             <a:srgbClr val="000000"/>
                           </a:solidFill>
@@ -5532,7 +5966,7 @@
                         </a:rPr>
                         <a:t>9. Pruebas piloto de usabilidad y corrección de errores</a:t>
                       </a:r>
-                      <a:endParaRPr lang="en-US" sz="1050" dirty="0">
+                      <a:endParaRPr lang="en-US" sz="1000" dirty="0">
                         <a:latin typeface="Arial" charset="0"/>
                         <a:ea typeface="Arial" charset="0"/>
                         <a:cs typeface="Arial" charset="0"/>
@@ -5540,36 +5974,36 @@
                     </a:p>
                   </a:txBody>
                   <a:tcPr marL="91440" marR="91440" marT="45720" marB="45720" anchor="ctr">
-                    <a:lnL w="12700" cap="flat" cmpd="sng" algn="ctr">
-                      <a:solidFill>
-                        <a:srgbClr val="DEE2E6"/>
+                    <a:lnL w="10160" cap="flat" cmpd="sng" algn="ctr">
+                      <a:solidFill>
+                        <a:srgbClr val="E2E8F0"/>
                       </a:solidFill>
                       <a:prstDash val="solid"/>
                       <a:round/>
                       <a:headEnd type="none" w="med" len="med"/>
                       <a:tailEnd type="none" w="med" len="med"/>
                     </a:lnL>
-                    <a:lnR w="12700" cap="flat" cmpd="sng" algn="ctr">
-                      <a:solidFill>
-                        <a:srgbClr val="DEE2E6"/>
+                    <a:lnR w="10160" cap="flat" cmpd="sng" algn="ctr">
+                      <a:solidFill>
+                        <a:srgbClr val="E2E8F0"/>
                       </a:solidFill>
                       <a:prstDash val="solid"/>
                       <a:round/>
                       <a:headEnd type="none" w="med" len="med"/>
                       <a:tailEnd type="none" w="med" len="med"/>
                     </a:lnR>
-                    <a:lnT w="12700" cap="flat" cmpd="sng" algn="ctr">
-                      <a:solidFill>
-                        <a:srgbClr val="DEE2E6"/>
+                    <a:lnT w="10160" cap="flat" cmpd="sng" algn="ctr">
+                      <a:solidFill>
+                        <a:srgbClr val="E2E8F0"/>
                       </a:solidFill>
                       <a:prstDash val="solid"/>
                       <a:round/>
                       <a:headEnd type="none" w="med" len="med"/>
                       <a:tailEnd type="none" w="med" len="med"/>
                     </a:lnT>
-                    <a:lnB w="12700" cap="flat" cmpd="sng" algn="ctr">
-                      <a:solidFill>
-                        <a:srgbClr val="DEE2E6"/>
+                    <a:lnB w="10160" cap="flat" cmpd="sng" algn="ctr">
+                      <a:solidFill>
+                        <a:srgbClr val="E2E8F0"/>
                       </a:solidFill>
                       <a:prstDash val="solid"/>
                       <a:round/>
@@ -5586,11 +6020,11 @@
                     <a:bodyPr/>
                     <a:lstStyle/>
                     <a:p>
-                      <a:pPr algn="l" indent="0" marL="0">
+                      <a:pPr algn="ctr" indent="0" marL="0">
                         <a:buNone/>
                       </a:pPr>
                       <a:r>
-                        <a:rPr lang="en-US" sz="1050" dirty="0">
+                        <a:rPr lang="en-US" sz="1000" b="1" dirty="0">
                           <a:solidFill>
                             <a:srgbClr val="000000"/>
                           </a:solidFill>
@@ -5600,7 +6034,7 @@
                         </a:rPr>
                         <a:t>Semana 13 – 14</a:t>
                       </a:r>
-                      <a:endParaRPr lang="en-US" sz="1050" dirty="0">
+                      <a:endParaRPr lang="en-US" sz="1000" dirty="0">
                         <a:latin typeface="Arial" charset="0"/>
                         <a:ea typeface="Arial" charset="0"/>
                         <a:cs typeface="Arial" charset="0"/>
@@ -5608,36 +6042,36 @@
                     </a:p>
                   </a:txBody>
                   <a:tcPr marL="91440" marR="91440" marT="45720" marB="45720" anchor="ctr">
-                    <a:lnL w="12700" cap="flat" cmpd="sng" algn="ctr">
-                      <a:solidFill>
-                        <a:srgbClr val="DEE2E6"/>
+                    <a:lnL w="10160" cap="flat" cmpd="sng" algn="ctr">
+                      <a:solidFill>
+                        <a:srgbClr val="E2E8F0"/>
                       </a:solidFill>
                       <a:prstDash val="solid"/>
                       <a:round/>
                       <a:headEnd type="none" w="med" len="med"/>
                       <a:tailEnd type="none" w="med" len="med"/>
                     </a:lnL>
-                    <a:lnR w="12700" cap="flat" cmpd="sng" algn="ctr">
-                      <a:solidFill>
-                        <a:srgbClr val="DEE2E6"/>
+                    <a:lnR w="10160" cap="flat" cmpd="sng" algn="ctr">
+                      <a:solidFill>
+                        <a:srgbClr val="E2E8F0"/>
                       </a:solidFill>
                       <a:prstDash val="solid"/>
                       <a:round/>
                       <a:headEnd type="none" w="med" len="med"/>
                       <a:tailEnd type="none" w="med" len="med"/>
                     </a:lnR>
-                    <a:lnT w="12700" cap="flat" cmpd="sng" algn="ctr">
-                      <a:solidFill>
-                        <a:srgbClr val="DEE2E6"/>
+                    <a:lnT w="10160" cap="flat" cmpd="sng" algn="ctr">
+                      <a:solidFill>
+                        <a:srgbClr val="E2E8F0"/>
                       </a:solidFill>
                       <a:prstDash val="solid"/>
                       <a:round/>
                       <a:headEnd type="none" w="med" len="med"/>
                       <a:tailEnd type="none" w="med" len="med"/>
                     </a:lnT>
-                    <a:lnB w="12700" cap="flat" cmpd="sng" algn="ctr">
-                      <a:solidFill>
-                        <a:srgbClr val="DEE2E6"/>
+                    <a:lnB w="10160" cap="flat" cmpd="sng" algn="ctr">
+                      <a:solidFill>
+                        <a:srgbClr val="E2E8F0"/>
                       </a:solidFill>
                       <a:prstDash val="solid"/>
                       <a:round/>
@@ -5654,11 +6088,11 @@
                     <a:bodyPr/>
                     <a:lstStyle/>
                     <a:p>
-                      <a:pPr algn="l" indent="0" marL="0">
+                      <a:pPr indent="0" marL="0">
                         <a:buNone/>
                       </a:pPr>
                       <a:r>
-                        <a:rPr lang="en-US" sz="1050" dirty="0">
+                        <a:rPr lang="en-US" sz="1000" dirty="0">
                           <a:solidFill>
                             <a:srgbClr val="000000"/>
                           </a:solidFill>
@@ -5666,9 +6100,9 @@
                           <a:ea typeface="Arial" pitchFamily="34" charset="-122"/>
                           <a:cs typeface="Arial" pitchFamily="34" charset="-120"/>
                         </a:rPr>
-                        <a:t>Sistema validado</a:t>
+                        <a:t>Validación con usuarios y optimización móvil</a:t>
                       </a:r>
-                      <a:endParaRPr lang="en-US" sz="1050" dirty="0">
+                      <a:endParaRPr lang="en-US" sz="1000" dirty="0">
                         <a:latin typeface="Arial" charset="0"/>
                         <a:ea typeface="Arial" charset="0"/>
                         <a:cs typeface="Arial" charset="0"/>
@@ -5676,36 +6110,36 @@
                     </a:p>
                   </a:txBody>
                   <a:tcPr marL="91440" marR="91440" marT="45720" marB="45720" anchor="ctr">
-                    <a:lnL w="12700" cap="flat" cmpd="sng" algn="ctr">
-                      <a:solidFill>
-                        <a:srgbClr val="DEE2E6"/>
+                    <a:lnL w="10160" cap="flat" cmpd="sng" algn="ctr">
+                      <a:solidFill>
+                        <a:srgbClr val="E2E8F0"/>
                       </a:solidFill>
                       <a:prstDash val="solid"/>
                       <a:round/>
                       <a:headEnd type="none" w="med" len="med"/>
                       <a:tailEnd type="none" w="med" len="med"/>
                     </a:lnL>
-                    <a:lnR w="12700" cap="flat" cmpd="sng" algn="ctr">
-                      <a:solidFill>
-                        <a:srgbClr val="DEE2E6"/>
+                    <a:lnR w="10160" cap="flat" cmpd="sng" algn="ctr">
+                      <a:solidFill>
+                        <a:srgbClr val="E2E8F0"/>
                       </a:solidFill>
                       <a:prstDash val="solid"/>
                       <a:round/>
                       <a:headEnd type="none" w="med" len="med"/>
                       <a:tailEnd type="none" w="med" len="med"/>
                     </a:lnR>
-                    <a:lnT w="12700" cap="flat" cmpd="sng" algn="ctr">
-                      <a:solidFill>
-                        <a:srgbClr val="DEE2E6"/>
+                    <a:lnT w="10160" cap="flat" cmpd="sng" algn="ctr">
+                      <a:solidFill>
+                        <a:srgbClr val="E2E8F0"/>
                       </a:solidFill>
                       <a:prstDash val="solid"/>
                       <a:round/>
                       <a:headEnd type="none" w="med" len="med"/>
                       <a:tailEnd type="none" w="med" len="med"/>
                     </a:lnT>
-                    <a:lnB w="12700" cap="flat" cmpd="sng" algn="ctr">
-                      <a:solidFill>
-                        <a:srgbClr val="DEE2E6"/>
+                    <a:lnB w="10160" cap="flat" cmpd="sng" algn="ctr">
+                      <a:solidFill>
+                        <a:srgbClr val="E2E8F0"/>
                       </a:solidFill>
                       <a:prstDash val="solid"/>
                       <a:round/>
@@ -5724,11 +6158,11 @@
                     <a:bodyPr/>
                     <a:lstStyle/>
                     <a:p>
-                      <a:pPr algn="l" indent="0" marL="0">
+                      <a:pPr indent="0" marL="0">
                         <a:buNone/>
                       </a:pPr>
                       <a:r>
-                        <a:rPr lang="en-US" sz="1050" dirty="0">
+                        <a:rPr lang="en-US" sz="1000" dirty="0">
                           <a:solidFill>
                             <a:srgbClr val="000000"/>
                           </a:solidFill>
@@ -5736,9 +6170,9 @@
                           <a:ea typeface="Arial" pitchFamily="34" charset="-122"/>
                           <a:cs typeface="Arial" pitchFamily="34" charset="-120"/>
                         </a:rPr>
-                        <a:t>10. Elaboración del documento final y presentación</a:t>
+                        <a:t>10. Documento final de monografía y presentación PPTX</a:t>
                       </a:r>
-                      <a:endParaRPr lang="en-US" sz="1050" dirty="0">
+                      <a:endParaRPr lang="en-US" sz="1000" dirty="0">
                         <a:latin typeface="Arial" charset="0"/>
                         <a:ea typeface="Arial" charset="0"/>
                         <a:cs typeface="Arial" charset="0"/>
@@ -5746,36 +6180,36 @@
                     </a:p>
                   </a:txBody>
                   <a:tcPr marL="91440" marR="91440" marT="45720" marB="45720" anchor="ctr">
-                    <a:lnL w="12700" cap="flat" cmpd="sng" algn="ctr">
-                      <a:solidFill>
-                        <a:srgbClr val="DEE2E6"/>
+                    <a:lnL w="10160" cap="flat" cmpd="sng" algn="ctr">
+                      <a:solidFill>
+                        <a:srgbClr val="E2E8F0"/>
                       </a:solidFill>
                       <a:prstDash val="solid"/>
                       <a:round/>
                       <a:headEnd type="none" w="med" len="med"/>
                       <a:tailEnd type="none" w="med" len="med"/>
                     </a:lnL>
-                    <a:lnR w="12700" cap="flat" cmpd="sng" algn="ctr">
-                      <a:solidFill>
-                        <a:srgbClr val="DEE2E6"/>
+                    <a:lnR w="10160" cap="flat" cmpd="sng" algn="ctr">
+                      <a:solidFill>
+                        <a:srgbClr val="E2E8F0"/>
                       </a:solidFill>
                       <a:prstDash val="solid"/>
                       <a:round/>
                       <a:headEnd type="none" w="med" len="med"/>
                       <a:tailEnd type="none" w="med" len="med"/>
                     </a:lnR>
-                    <a:lnT w="12700" cap="flat" cmpd="sng" algn="ctr">
-                      <a:solidFill>
-                        <a:srgbClr val="DEE2E6"/>
+                    <a:lnT w="10160" cap="flat" cmpd="sng" algn="ctr">
+                      <a:solidFill>
+                        <a:srgbClr val="E2E8F0"/>
                       </a:solidFill>
                       <a:prstDash val="solid"/>
                       <a:round/>
                       <a:headEnd type="none" w="med" len="med"/>
                       <a:tailEnd type="none" w="med" len="med"/>
                     </a:lnT>
-                    <a:lnB w="12700" cap="flat" cmpd="sng" algn="ctr">
-                      <a:solidFill>
-                        <a:srgbClr val="DEE2E6"/>
+                    <a:lnB w="10160" cap="flat" cmpd="sng" algn="ctr">
+                      <a:solidFill>
+                        <a:srgbClr val="E2E8F0"/>
                       </a:solidFill>
                       <a:prstDash val="solid"/>
                       <a:round/>
@@ -5792,11 +6226,11 @@
                     <a:bodyPr/>
                     <a:lstStyle/>
                     <a:p>
-                      <a:pPr algn="l" indent="0" marL="0">
+                      <a:pPr algn="ctr" indent="0" marL="0">
                         <a:buNone/>
                       </a:pPr>
                       <a:r>
-                        <a:rPr lang="en-US" sz="1050" dirty="0">
+                        <a:rPr lang="en-US" sz="1000" b="1" dirty="0">
                           <a:solidFill>
                             <a:srgbClr val="000000"/>
                           </a:solidFill>
@@ -5806,7 +6240,7 @@
                         </a:rPr>
                         <a:t>Semana 15</a:t>
                       </a:r>
-                      <a:endParaRPr lang="en-US" sz="1050" dirty="0">
+                      <a:endParaRPr lang="en-US" sz="1000" dirty="0">
                         <a:latin typeface="Arial" charset="0"/>
                         <a:ea typeface="Arial" charset="0"/>
                         <a:cs typeface="Arial" charset="0"/>
@@ -5814,36 +6248,36 @@
                     </a:p>
                   </a:txBody>
                   <a:tcPr marL="91440" marR="91440" marT="45720" marB="45720" anchor="ctr">
-                    <a:lnL w="12700" cap="flat" cmpd="sng" algn="ctr">
-                      <a:solidFill>
-                        <a:srgbClr val="DEE2E6"/>
+                    <a:lnL w="10160" cap="flat" cmpd="sng" algn="ctr">
+                      <a:solidFill>
+                        <a:srgbClr val="E2E8F0"/>
                       </a:solidFill>
                       <a:prstDash val="solid"/>
                       <a:round/>
                       <a:headEnd type="none" w="med" len="med"/>
                       <a:tailEnd type="none" w="med" len="med"/>
                     </a:lnL>
-                    <a:lnR w="12700" cap="flat" cmpd="sng" algn="ctr">
-                      <a:solidFill>
-                        <a:srgbClr val="DEE2E6"/>
+                    <a:lnR w="10160" cap="flat" cmpd="sng" algn="ctr">
+                      <a:solidFill>
+                        <a:srgbClr val="E2E8F0"/>
                       </a:solidFill>
                       <a:prstDash val="solid"/>
                       <a:round/>
                       <a:headEnd type="none" w="med" len="med"/>
                       <a:tailEnd type="none" w="med" len="med"/>
                     </a:lnR>
-                    <a:lnT w="12700" cap="flat" cmpd="sng" algn="ctr">
-                      <a:solidFill>
-                        <a:srgbClr val="DEE2E6"/>
+                    <a:lnT w="10160" cap="flat" cmpd="sng" algn="ctr">
+                      <a:solidFill>
+                        <a:srgbClr val="E2E8F0"/>
                       </a:solidFill>
                       <a:prstDash val="solid"/>
                       <a:round/>
                       <a:headEnd type="none" w="med" len="med"/>
                       <a:tailEnd type="none" w="med" len="med"/>
                     </a:lnT>
-                    <a:lnB w="12700" cap="flat" cmpd="sng" algn="ctr">
-                      <a:solidFill>
-                        <a:srgbClr val="DEE2E6"/>
+                    <a:lnB w="10160" cap="flat" cmpd="sng" algn="ctr">
+                      <a:solidFill>
+                        <a:srgbClr val="E2E8F0"/>
                       </a:solidFill>
                       <a:prstDash val="solid"/>
                       <a:round/>
@@ -5860,11 +6294,11 @@
                     <a:bodyPr/>
                     <a:lstStyle/>
                     <a:p>
-                      <a:pPr algn="l" indent="0" marL="0">
+                      <a:pPr indent="0" marL="0">
                         <a:buNone/>
                       </a:pPr>
                       <a:r>
-                        <a:rPr lang="en-US" sz="1050" dirty="0">
+                        <a:rPr lang="en-US" sz="1000" dirty="0">
                           <a:solidFill>
                             <a:srgbClr val="000000"/>
                           </a:solidFill>
@@ -5872,9 +6306,9 @@
                           <a:ea typeface="Arial" pitchFamily="34" charset="-122"/>
                           <a:cs typeface="Arial" pitchFamily="34" charset="-120"/>
                         </a:rPr>
-                        <a:t>Monografía completa</a:t>
+                        <a:t>Monografía completa y material para defensa</a:t>
                       </a:r>
-                      <a:endParaRPr lang="en-US" sz="1050" dirty="0">
+                      <a:endParaRPr lang="en-US" sz="1000" dirty="0">
                         <a:latin typeface="Arial" charset="0"/>
                         <a:ea typeface="Arial" charset="0"/>
                         <a:cs typeface="Arial" charset="0"/>
@@ -5882,36 +6316,36 @@
                     </a:p>
                   </a:txBody>
                   <a:tcPr marL="91440" marR="91440" marT="45720" marB="45720" anchor="ctr">
-                    <a:lnL w="12700" cap="flat" cmpd="sng" algn="ctr">
-                      <a:solidFill>
-                        <a:srgbClr val="DEE2E6"/>
+                    <a:lnL w="10160" cap="flat" cmpd="sng" algn="ctr">
+                      <a:solidFill>
+                        <a:srgbClr val="E2E8F0"/>
                       </a:solidFill>
                       <a:prstDash val="solid"/>
                       <a:round/>
                       <a:headEnd type="none" w="med" len="med"/>
                       <a:tailEnd type="none" w="med" len="med"/>
                     </a:lnL>
-                    <a:lnR w="12700" cap="flat" cmpd="sng" algn="ctr">
-                      <a:solidFill>
-                        <a:srgbClr val="DEE2E6"/>
+                    <a:lnR w="10160" cap="flat" cmpd="sng" algn="ctr">
+                      <a:solidFill>
+                        <a:srgbClr val="E2E8F0"/>
                       </a:solidFill>
                       <a:prstDash val="solid"/>
                       <a:round/>
                       <a:headEnd type="none" w="med" len="med"/>
                       <a:tailEnd type="none" w="med" len="med"/>
                     </a:lnR>
-                    <a:lnT w="12700" cap="flat" cmpd="sng" algn="ctr">
-                      <a:solidFill>
-                        <a:srgbClr val="DEE2E6"/>
+                    <a:lnT w="10160" cap="flat" cmpd="sng" algn="ctr">
+                      <a:solidFill>
+                        <a:srgbClr val="E2E8F0"/>
                       </a:solidFill>
                       <a:prstDash val="solid"/>
                       <a:round/>
                       <a:headEnd type="none" w="med" len="med"/>
                       <a:tailEnd type="none" w="med" len="med"/>
                     </a:lnT>
-                    <a:lnB w="12700" cap="flat" cmpd="sng" algn="ctr">
-                      <a:solidFill>
-                        <a:srgbClr val="DEE2E6"/>
+                    <a:lnB w="10160" cap="flat" cmpd="sng" algn="ctr">
+                      <a:solidFill>
+                        <a:srgbClr val="E2E8F0"/>
                       </a:solidFill>
                       <a:prstDash val="solid"/>
                       <a:round/>
@@ -5942,7 +6376,7 @@
     <p:bg>
       <p:bgPr>
         <a:solidFill>
-          <a:srgbClr val="F8F9FA"/>
+          <a:srgbClr val="F4F6F8"/>
         </a:solidFill>
       </p:bgPr>
     </p:bg>
@@ -5969,7 +6403,7 @@
         <p:spPr>
           <a:xfrm>
             <a:off x="0" y="0"/>
-            <a:ext cx="9144000" cy="1005840"/>
+            <a:ext cx="12191695" cy="1051560"/>
           </a:xfrm>
           <a:prstGeom prst="rect">
             <a:avLst/>
@@ -5979,7 +6413,7 @@
           </a:solidFill>
           <a:ln w="12700">
             <a:solidFill>
-              <a:srgbClr val="DEE2E6"/>
+              <a:srgbClr val="E2E8F0"/>
             </a:solidFill>
             <a:prstDash val="solid"/>
           </a:ln>
@@ -5993,8 +6427,8 @@
         </p:nvSpPr>
         <p:spPr>
           <a:xfrm>
-            <a:off x="0" y="0"/>
-            <a:ext cx="228600" cy="1005840"/>
+            <a:off x="731520" y="256032"/>
+            <a:ext cx="91440" cy="530352"/>
           </a:xfrm>
           <a:prstGeom prst="rect">
             <a:avLst/>
@@ -6013,8 +6447,8 @@
         </p:nvSpPr>
         <p:spPr>
           <a:xfrm>
-            <a:off x="548640" y="137160"/>
-            <a:ext cx="10972800" cy="274320"/>
+            <a:off x="960120" y="201168"/>
+            <a:ext cx="10058400" cy="228600"/>
           </a:xfrm>
           <a:prstGeom prst="rect">
             <a:avLst/>
@@ -6030,7 +6464,7 @@
               <a:buNone/>
             </a:pPr>
             <a:r>
-              <a:rPr lang="en-US" sz="1100" b="1" dirty="0">
+              <a:rPr lang="en-US" sz="1050" b="1" dirty="0">
                 <a:solidFill>
                   <a:srgbClr val="FF922B"/>
                 </a:solidFill>
@@ -6040,7 +6474,7 @@
               </a:rPr>
               <a:t>CAPÍTULO 2</a:t>
             </a:r>
-            <a:endParaRPr lang="en-US" sz="1100" dirty="0"/>
+            <a:endParaRPr lang="en-US" sz="1050" dirty="0"/>
           </a:p>
         </p:txBody>
       </p:sp>
@@ -6052,8 +6486,8 @@
         </p:nvSpPr>
         <p:spPr>
           <a:xfrm>
-            <a:off x="548640" y="411480"/>
-            <a:ext cx="10972800" cy="502920"/>
+            <a:off x="960120" y="429768"/>
+            <a:ext cx="10058400" cy="457200"/>
           </a:xfrm>
           <a:prstGeom prst="rect">
             <a:avLst/>
@@ -6069,7 +6503,7 @@
               <a:buNone/>
             </a:pPr>
             <a:r>
-              <a:rPr lang="en-US" sz="2400" b="1" dirty="0">
+              <a:rPr lang="en-US" sz="2200" b="1" dirty="0">
                 <a:solidFill>
                   <a:srgbClr val="212529"/>
                 </a:solidFill>
@@ -6079,7 +6513,7 @@
               </a:rPr>
               <a:t>2.2. Recursos del Proyecto</a:t>
             </a:r>
-            <a:endParaRPr lang="en-US" sz="2400" dirty="0"/>
+            <a:endParaRPr lang="en-US" sz="2200" dirty="0"/>
           </a:p>
         </p:txBody>
       </p:sp>
@@ -6091,8 +6525,8 @@
         </p:nvSpPr>
         <p:spPr>
           <a:xfrm>
-            <a:off x="731520" y="1280160"/>
-            <a:ext cx="3383280" cy="5029200"/>
+            <a:off x="731520" y="1325880"/>
+            <a:ext cx="3364992" cy="4983480"/>
           </a:xfrm>
           <a:prstGeom prst="rect">
             <a:avLst/>
@@ -6100,9 +6534,9 @@
           <a:solidFill>
             <a:srgbClr val="FFFFFF"/>
           </a:solidFill>
-          <a:ln w="19050">
+          <a:ln w="12700">
             <a:solidFill>
-              <a:srgbClr val="DEE2E6"/>
+              <a:srgbClr val="E2E8F0"/>
             </a:solidFill>
             <a:prstDash val="solid"/>
           </a:ln>
@@ -6110,14 +6544,34 @@
       </p:sp>
       <p:sp>
         <p:nvSpPr>
-          <p:cNvPr id="7" name="Text 5"/>
-          <p:cNvSpPr/>
-          <p:nvPr/>
-        </p:nvSpPr>
-        <p:spPr>
-          <a:xfrm>
-            <a:off x="960120" y="1463040"/>
-            <a:ext cx="2926080" cy="365760"/>
+          <p:cNvPr id="7" name="Shape 5"/>
+          <p:cNvSpPr/>
+          <p:nvPr/>
+        </p:nvSpPr>
+        <p:spPr>
+          <a:xfrm>
+            <a:off x="777240" y="1325880"/>
+            <a:ext cx="3273552" cy="73152"/>
+          </a:xfrm>
+          <a:prstGeom prst="rect">
+            <a:avLst/>
+          </a:prstGeom>
+          <a:solidFill>
+            <a:srgbClr val="1098AD"/>
+          </a:solidFill>
+          <a:ln/>
+        </p:spPr>
+      </p:sp>
+      <p:sp>
+        <p:nvSpPr>
+          <p:cNvPr id="8" name="Text 6"/>
+          <p:cNvSpPr/>
+          <p:nvPr/>
+        </p:nvSpPr>
+        <p:spPr>
+          <a:xfrm>
+            <a:off x="1005840" y="1527048"/>
+            <a:ext cx="2816352" cy="347472"/>
           </a:xfrm>
           <a:prstGeom prst="rect">
             <a:avLst/>
@@ -6133,7 +6587,7 @@
               <a:buNone/>
             </a:pPr>
             <a:r>
-              <a:rPr lang="en-US" sz="1600" b="1" dirty="0">
+              <a:rPr lang="en-US" sz="1450" b="1" dirty="0">
                 <a:solidFill>
                   <a:srgbClr val="0B7285"/>
                 </a:solidFill>
@@ -6143,20 +6597,20 @@
               </a:rPr>
               <a:t>2.2.1. Recursos Humanos</a:t>
             </a:r>
-            <a:endParaRPr lang="en-US" sz="1600" dirty="0"/>
+            <a:endParaRPr lang="en-US" sz="1450" dirty="0"/>
           </a:p>
         </p:txBody>
       </p:sp>
       <p:sp>
         <p:nvSpPr>
-          <p:cNvPr id="8" name="Text 6"/>
-          <p:cNvSpPr/>
-          <p:nvPr/>
-        </p:nvSpPr>
-        <p:spPr>
-          <a:xfrm>
-            <a:off x="960120" y="1874520"/>
-            <a:ext cx="2926080" cy="4251960"/>
+          <p:cNvPr id="9" name="Text 7"/>
+          <p:cNvSpPr/>
+          <p:nvPr/>
+        </p:nvSpPr>
+        <p:spPr>
+          <a:xfrm>
+            <a:off x="960120" y="1920240"/>
+            <a:ext cx="2907792" cy="4206240"/>
           </a:xfrm>
           <a:prstGeom prst="rect">
             <a:avLst/>
@@ -6165,31 +6619,43 @@
           <a:ln/>
         </p:spPr>
         <p:txBody>
-          <a:bodyPr wrap="square" rtlCol="0" anchor="t"/>
+          <a:bodyPr wrap="square" rtlCol="0" anchor="ctr"/>
           <a:lstStyle/>
           <a:p>
-            <a:pPr algn="l" indent="0" marL="0">
-              <a:spcAft>
-                <a:spcPts val="800"/>
-              </a:spcAft>
-              <a:buNone/>
-            </a:pPr>
-            <a:r>
-              <a:rPr lang="en-US" sz="1300" b="1" dirty="0">
-                <a:solidFill>
-                  <a:srgbClr val="0B7285"/>
-                </a:solidFill>
-                <a:latin typeface="Arial" pitchFamily="34" charset="0"/>
-                <a:ea typeface="Arial" pitchFamily="34" charset="-122"/>
-                <a:cs typeface="Arial" pitchFamily="34" charset="-120"/>
-              </a:rPr>
-              <a:t>Equipo Postulante:
+            <a:pPr indent="0" marL="0">
+              <a:buNone/>
+            </a:pPr>
+            <a:r>
+              <a:rPr lang="en-US" sz="1200" b="1" dirty="0">
+                <a:solidFill>
+                  <a:srgbClr val="212529"/>
+                </a:solidFill>
+                <a:latin typeface="Arial" pitchFamily="34" charset="0"/>
+                <a:ea typeface="Arial" pitchFamily="34" charset="-122"/>
+                <a:cs typeface="Arial" pitchFamily="34" charset="-120"/>
+              </a:rPr>
+              <a:t>Estudiantes Postulantes:
 </a:t>
             </a:r>
-            <a:pPr algn="l" indent="0" marL="0">
-              <a:spcAft>
-                <a:spcPts val="800"/>
-              </a:spcAft>
+            <a:pPr indent="0" marL="0">
+              <a:buNone/>
+            </a:pPr>
+            <a:r>
+              <a:rPr lang="en-US" sz="1100" dirty="0">
+                <a:solidFill>
+                  <a:srgbClr val="495057"/>
+                </a:solidFill>
+                <a:latin typeface="Arial" pitchFamily="34" charset="0"/>
+                <a:ea typeface="Arial" pitchFamily="34" charset="-122"/>
+                <a:cs typeface="Arial" pitchFamily="34" charset="-120"/>
+              </a:rPr>
+              <a:t>• Leon Justiniano
+  (Programación Full-Stack y base de datos)
+• Yimmy Lijeron Mejia
+  (Diseño UI/UX, pruebas y documentación)
+</a:t>
+            </a:r>
+            <a:pPr indent="0" marL="0">
               <a:buNone/>
             </a:pPr>
             <a:r>
@@ -6201,38 +6667,14 @@
                 <a:ea typeface="Arial" pitchFamily="34" charset="-122"/>
                 <a:cs typeface="Arial" pitchFamily="34" charset="-120"/>
               </a:rPr>
-              <a:t>• Leon Justiniano
-  (Desarrollo Full-Stack y pruebas)
-• Yimmy Lijeron Mejia
-  (Diseño UI/UX y documentación)
+              <a:t>Docentes Guía BTH:
 </a:t>
             </a:r>
-            <a:pPr algn="l" indent="0" marL="0">
-              <a:spcAft>
-                <a:spcPts val="800"/>
-              </a:spcAft>
-              <a:buNone/>
-            </a:pPr>
-            <a:r>
-              <a:rPr lang="en-US" sz="1300" b="1" dirty="0">
-                <a:solidFill>
-                  <a:srgbClr val="0B7285"/>
-                </a:solidFill>
-                <a:latin typeface="Arial" pitchFamily="34" charset="0"/>
-                <a:ea typeface="Arial" pitchFamily="34" charset="-122"/>
-                <a:cs typeface="Arial" pitchFamily="34" charset="-120"/>
-              </a:rPr>
-              <a:t>Docentes Guía:
-</a:t>
-            </a:r>
-            <a:pPr algn="l" indent="0" marL="0">
-              <a:spcAft>
-                <a:spcPts val="800"/>
-              </a:spcAft>
-              <a:buNone/>
-            </a:pPr>
-            <a:r>
-              <a:rPr lang="en-US" sz="1200" dirty="0">
+            <a:pPr indent="0" marL="0">
+              <a:buNone/>
+            </a:pPr>
+            <a:r>
+              <a:rPr lang="en-US" sz="1100" dirty="0">
                 <a:solidFill>
                   <a:srgbClr val="495057"/>
                 </a:solidFill>
@@ -6243,35 +6685,29 @@
               <a:t>• Lic. Ronald Silver Quino Torrez
   (Docente Tutor metodológico)
 • Lic. Ana Gabriela Paz Arauz
-  (Docente de Especialidad BTH)
+  (Docente de Especialidad Técnica)
 </a:t>
             </a:r>
-            <a:pPr algn="l" indent="0" marL="0">
-              <a:spcAft>
-                <a:spcPts val="800"/>
-              </a:spcAft>
-              <a:buNone/>
-            </a:pPr>
-            <a:r>
-              <a:rPr lang="en-US" sz="1300" b="1" dirty="0">
-                <a:solidFill>
-                  <a:srgbClr val="0B7285"/>
-                </a:solidFill>
-                <a:latin typeface="Arial" pitchFamily="34" charset="0"/>
-                <a:ea typeface="Arial" pitchFamily="34" charset="-122"/>
-                <a:cs typeface="Arial" pitchFamily="34" charset="-120"/>
-              </a:rPr>
-              <a:t>Participación Comunitaria:
+            <a:pPr indent="0" marL="0">
+              <a:buNone/>
+            </a:pPr>
+            <a:r>
+              <a:rPr lang="en-US" sz="1200" b="1" dirty="0">
+                <a:solidFill>
+                  <a:srgbClr val="212529"/>
+                </a:solidFill>
+                <a:latin typeface="Arial" pitchFamily="34" charset="0"/>
+                <a:ea typeface="Arial" pitchFamily="34" charset="-122"/>
+                <a:cs typeface="Arial" pitchFamily="34" charset="-120"/>
+              </a:rPr>
+              <a:t>Comunidad Participante:
 </a:t>
             </a:r>
-            <a:pPr algn="l" indent="0" marL="0">
-              <a:spcAft>
-                <a:spcPts val="800"/>
-              </a:spcAft>
-              <a:buNone/>
-            </a:pPr>
-            <a:r>
-              <a:rPr lang="en-US" sz="1200" dirty="0">
+            <a:pPr indent="0" marL="0">
+              <a:buNone/>
+            </a:pPr>
+            <a:r>
+              <a:rPr lang="en-US" sz="1100" dirty="0">
                 <a:solidFill>
                   <a:srgbClr val="495057"/>
                 </a:solidFill>
@@ -6279,19 +6715,16 @@
                 <a:ea typeface="Arial" pitchFamily="34" charset="-122"/>
                 <a:cs typeface="Arial" pitchFamily="34" charset="-120"/>
               </a:rPr>
-              <a:t>• 40 vecinos encuestados.</a:t>
-            </a:r>
-            <a:endParaRPr lang="en-US" sz="1300" dirty="0"/>
-          </a:p>
-          <a:p>
-            <a:pPr algn="l" indent="0" marL="0">
-              <a:spcAft>
-                <a:spcPts val="800"/>
-              </a:spcAft>
-              <a:buNone/>
-            </a:pPr>
-            <a:r>
-              <a:rPr lang="en-US" sz="1200" dirty="0">
+              <a:t>• 40 vecinos para encuestas.</a:t>
+            </a:r>
+            <a:endParaRPr lang="en-US" sz="1200" dirty="0"/>
+          </a:p>
+          <a:p>
+            <a:pPr indent="0" marL="0">
+              <a:buNone/>
+            </a:pPr>
+            <a:r>
+              <a:rPr lang="en-US" sz="1100" dirty="0">
                 <a:solidFill>
                   <a:srgbClr val="495057"/>
                 </a:solidFill>
@@ -6299,22 +6732,22 @@
                 <a:ea typeface="Arial" pitchFamily="34" charset="-122"/>
                 <a:cs typeface="Arial" pitchFamily="34" charset="-120"/>
               </a:rPr>
-              <a:t>• 5 usuarios para pruebas piloto.</a:t>
-            </a:r>
-            <a:endParaRPr lang="en-US" sz="1300" dirty="0"/>
+              <a:t>• 5 usuarios para pruebas de usabilidad.</a:t>
+            </a:r>
+            <a:endParaRPr lang="en-US" sz="1200" dirty="0"/>
           </a:p>
         </p:txBody>
       </p:sp>
       <p:sp>
         <p:nvSpPr>
-          <p:cNvPr id="9" name="Shape 7"/>
-          <p:cNvSpPr/>
-          <p:nvPr/>
-        </p:nvSpPr>
-        <p:spPr>
-          <a:xfrm>
-            <a:off x="4389120" y="1280160"/>
-            <a:ext cx="3383280" cy="5029200"/>
+          <p:cNvPr id="10" name="Shape 8"/>
+          <p:cNvSpPr/>
+          <p:nvPr/>
+        </p:nvSpPr>
+        <p:spPr>
+          <a:xfrm>
+            <a:off x="4398264" y="1325880"/>
+            <a:ext cx="3364992" cy="4983480"/>
           </a:xfrm>
           <a:prstGeom prst="rect">
             <a:avLst/>
@@ -6322,9 +6755,9 @@
           <a:solidFill>
             <a:srgbClr val="FFFFFF"/>
           </a:solidFill>
-          <a:ln w="19050">
+          <a:ln w="12700">
             <a:solidFill>
-              <a:srgbClr val="DEE2E6"/>
+              <a:srgbClr val="E2E8F0"/>
             </a:solidFill>
             <a:prstDash val="solid"/>
           </a:ln>
@@ -6332,14 +6765,34 @@
       </p:sp>
       <p:sp>
         <p:nvSpPr>
-          <p:cNvPr id="10" name="Text 8"/>
-          <p:cNvSpPr/>
-          <p:nvPr/>
-        </p:nvSpPr>
-        <p:spPr>
-          <a:xfrm>
-            <a:off x="4617720" y="1463040"/>
-            <a:ext cx="2926080" cy="365760"/>
+          <p:cNvPr id="11" name="Shape 9"/>
+          <p:cNvSpPr/>
+          <p:nvPr/>
+        </p:nvSpPr>
+        <p:spPr>
+          <a:xfrm>
+            <a:off x="4443984" y="1325880"/>
+            <a:ext cx="3273552" cy="73152"/>
+          </a:xfrm>
+          <a:prstGeom prst="rect">
+            <a:avLst/>
+          </a:prstGeom>
+          <a:solidFill>
+            <a:srgbClr val="FF922B"/>
+          </a:solidFill>
+          <a:ln/>
+        </p:spPr>
+      </p:sp>
+      <p:sp>
+        <p:nvSpPr>
+          <p:cNvPr id="12" name="Text 10"/>
+          <p:cNvSpPr/>
+          <p:nvPr/>
+        </p:nvSpPr>
+        <p:spPr>
+          <a:xfrm>
+            <a:off x="4672584" y="1527048"/>
+            <a:ext cx="2816352" cy="347472"/>
           </a:xfrm>
           <a:prstGeom prst="rect">
             <a:avLst/>
@@ -6355,7 +6808,7 @@
               <a:buNone/>
             </a:pPr>
             <a:r>
-              <a:rPr lang="en-US" sz="1600" b="1" dirty="0">
+              <a:rPr lang="en-US" sz="1450" b="1" dirty="0">
                 <a:solidFill>
                   <a:srgbClr val="0B7285"/>
                 </a:solidFill>
@@ -6365,20 +6818,20 @@
               </a:rPr>
               <a:t>2.2.2. Recursos Materiales</a:t>
             </a:r>
-            <a:endParaRPr lang="en-US" sz="1600" dirty="0"/>
+            <a:endParaRPr lang="en-US" sz="1450" dirty="0"/>
           </a:p>
         </p:txBody>
       </p:sp>
       <p:sp>
         <p:nvSpPr>
-          <p:cNvPr id="11" name="Text 9"/>
-          <p:cNvSpPr/>
-          <p:nvPr/>
-        </p:nvSpPr>
-        <p:spPr>
-          <a:xfrm>
-            <a:off x="4617720" y="1874520"/>
-            <a:ext cx="2926080" cy="4251960"/>
+          <p:cNvPr id="13" name="Text 11"/>
+          <p:cNvSpPr/>
+          <p:nvPr/>
+        </p:nvSpPr>
+        <p:spPr>
+          <a:xfrm>
+            <a:off x="4626864" y="1920240"/>
+            <a:ext cx="2907792" cy="4206240"/>
           </a:xfrm>
           <a:prstGeom prst="rect">
             <a:avLst/>
@@ -6387,35 +6840,29 @@
           <a:ln/>
         </p:spPr>
         <p:txBody>
-          <a:bodyPr wrap="square" rtlCol="0" anchor="t"/>
+          <a:bodyPr wrap="square" rtlCol="0" anchor="ctr"/>
           <a:lstStyle/>
           <a:p>
-            <a:pPr algn="l" indent="0" marL="0">
-              <a:spcAft>
-                <a:spcPts val="800"/>
-              </a:spcAft>
-              <a:buNone/>
-            </a:pPr>
-            <a:r>
-              <a:rPr lang="en-US" sz="1300" b="1" dirty="0">
-                <a:solidFill>
-                  <a:srgbClr val="0B7285"/>
-                </a:solidFill>
-                <a:latin typeface="Arial" pitchFamily="34" charset="0"/>
-                <a:ea typeface="Arial" pitchFamily="34" charset="-122"/>
-                <a:cs typeface="Arial" pitchFamily="34" charset="-120"/>
-              </a:rPr>
-              <a:t>Hardware Utilizado:
+            <a:pPr indent="0" marL="0">
+              <a:buNone/>
+            </a:pPr>
+            <a:r>
+              <a:rPr lang="en-US" sz="1200" b="1" dirty="0">
+                <a:solidFill>
+                  <a:srgbClr val="212529"/>
+                </a:solidFill>
+                <a:latin typeface="Arial" pitchFamily="34" charset="0"/>
+                <a:ea typeface="Arial" pitchFamily="34" charset="-122"/>
+                <a:cs typeface="Arial" pitchFamily="34" charset="-120"/>
+              </a:rPr>
+              <a:t>Equipos de Hardware:
 </a:t>
             </a:r>
-            <a:pPr algn="l" indent="0" marL="0">
-              <a:spcAft>
-                <a:spcPts val="800"/>
-              </a:spcAft>
-              <a:buNone/>
-            </a:pPr>
-            <a:r>
-              <a:rPr lang="en-US" sz="1200" dirty="0">
+            <a:pPr indent="0" marL="0">
+              <a:buNone/>
+            </a:pPr>
+            <a:r>
+              <a:rPr lang="en-US" sz="1100" dirty="0">
                 <a:solidFill>
                   <a:srgbClr val="495057"/>
                 </a:solidFill>
@@ -6423,20 +6870,17 @@
                 <a:ea typeface="Arial" pitchFamily="34" charset="-122"/>
                 <a:cs typeface="Arial" pitchFamily="34" charset="-120"/>
               </a:rPr>
-              <a:t>• 1 Computadora Portátil (Laptop Intel Core i5, 8GB RAM).
-• 1 Teléfono Móvil Android para pruebas de navegación responsive.
+              <a:t>• 1 Computadora portátil Laptop Intel Core i5 con 8GB de memoria RAM.
+• 1 Teléfono inteligente para pruebas en navegadores móviles.
 </a:t>
             </a:r>
-            <a:pPr algn="l" indent="0" marL="0">
-              <a:spcAft>
-                <a:spcPts val="800"/>
-              </a:spcAft>
-              <a:buNone/>
-            </a:pPr>
-            <a:r>
-              <a:rPr lang="en-US" sz="1300" b="1" dirty="0">
-                <a:solidFill>
-                  <a:srgbClr val="0B7285"/>
+            <a:pPr indent="0" marL="0">
+              <a:buNone/>
+            </a:pPr>
+            <a:r>
+              <a:rPr lang="en-US" sz="1200" b="1" dirty="0">
+                <a:solidFill>
+                  <a:srgbClr val="212529"/>
                 </a:solidFill>
                 <a:latin typeface="Arial" pitchFamily="34" charset="0"/>
                 <a:ea typeface="Arial" pitchFamily="34" charset="-122"/>
@@ -6445,14 +6889,11 @@
               <a:t>Software y Herramientas:
 </a:t>
             </a:r>
-            <a:pPr algn="l" indent="0" marL="0">
-              <a:spcAft>
-                <a:spcPts val="800"/>
-              </a:spcAft>
-              <a:buNone/>
-            </a:pPr>
-            <a:r>
-              <a:rPr lang="en-US" sz="1200" dirty="0">
+            <a:pPr indent="0" marL="0">
+              <a:buNone/>
+            </a:pPr>
+            <a:r>
+              <a:rPr lang="en-US" sz="1100" dirty="0">
                 <a:solidFill>
                   <a:srgbClr val="495057"/>
                 </a:solidFill>
@@ -6460,19 +6901,16 @@
                 <a:ea typeface="Arial" pitchFamily="34" charset="-122"/>
                 <a:cs typeface="Arial" pitchFamily="34" charset="-120"/>
               </a:rPr>
-              <a:t>• Visual Studio Code (IDE).</a:t>
-            </a:r>
-            <a:endParaRPr lang="en-US" sz="1300" dirty="0"/>
-          </a:p>
-          <a:p>
-            <a:pPr algn="l" indent="0" marL="0">
-              <a:spcAft>
-                <a:spcPts val="800"/>
-              </a:spcAft>
-              <a:buNone/>
-            </a:pPr>
-            <a:r>
-              <a:rPr lang="en-US" sz="1200" dirty="0">
+              <a:t>• Visual Studio Code (Entorno de desarrollo).</a:t>
+            </a:r>
+            <a:endParaRPr lang="en-US" sz="1200" dirty="0"/>
+          </a:p>
+          <a:p>
+            <a:pPr indent="0" marL="0">
+              <a:buNone/>
+            </a:pPr>
+            <a:r>
+              <a:rPr lang="en-US" sz="1100" dirty="0">
                 <a:solidFill>
                   <a:srgbClr val="495057"/>
                 </a:solidFill>
@@ -6480,19 +6918,16 @@
                 <a:ea typeface="Arial" pitchFamily="34" charset="-122"/>
                 <a:cs typeface="Arial" pitchFamily="34" charset="-120"/>
               </a:rPr>
-              <a:t>• Node.js runtime &amp; Express.</a:t>
-            </a:r>
-            <a:endParaRPr lang="en-US" sz="1300" dirty="0"/>
-          </a:p>
-          <a:p>
-            <a:pPr algn="l" indent="0" marL="0">
-              <a:spcAft>
-                <a:spcPts val="800"/>
-              </a:spcAft>
-              <a:buNone/>
-            </a:pPr>
-            <a:r>
-              <a:rPr lang="en-US" sz="1200" dirty="0">
+              <a:t>• Node.js runtime &amp; Express framework.</a:t>
+            </a:r>
+            <a:endParaRPr lang="en-US" sz="1200" dirty="0"/>
+          </a:p>
+          <a:p>
+            <a:pPr indent="0" marL="0">
+              <a:buNone/>
+            </a:pPr>
+            <a:r>
+              <a:rPr lang="en-US" sz="1100" dirty="0">
                 <a:solidFill>
                   <a:srgbClr val="495057"/>
                 </a:solidFill>
@@ -6500,19 +6935,16 @@
                 <a:ea typeface="Arial" pitchFamily="34" charset="-122"/>
                 <a:cs typeface="Arial" pitchFamily="34" charset="-120"/>
               </a:rPr>
-              <a:t>• SQLite3 (Base de datos local).</a:t>
-            </a:r>
-            <a:endParaRPr lang="en-US" sz="1300" dirty="0"/>
-          </a:p>
-          <a:p>
-            <a:pPr algn="l" indent="0" marL="0">
-              <a:spcAft>
-                <a:spcPts val="800"/>
-              </a:spcAft>
-              <a:buNone/>
-            </a:pPr>
-            <a:r>
-              <a:rPr lang="en-US" sz="1200" dirty="0">
+              <a:t>• SQLite3 (Motor relacional local).</a:t>
+            </a:r>
+            <a:endParaRPr lang="en-US" sz="1200" dirty="0"/>
+          </a:p>
+          <a:p>
+            <a:pPr indent="0" marL="0">
+              <a:buNone/>
+            </a:pPr>
+            <a:r>
+              <a:rPr lang="en-US" sz="1100" dirty="0">
                 <a:solidFill>
                   <a:srgbClr val="495057"/>
                 </a:solidFill>
@@ -6522,17 +6954,14 @@
               </a:rPr>
               <a:t>• Git y GitHub (Control de versiones).</a:t>
             </a:r>
-            <a:endParaRPr lang="en-US" sz="1300" dirty="0"/>
-          </a:p>
-          <a:p>
-            <a:pPr algn="l" indent="0" marL="0">
-              <a:spcAft>
-                <a:spcPts val="800"/>
-              </a:spcAft>
-              <a:buNone/>
-            </a:pPr>
-            <a:r>
-              <a:rPr lang="en-US" sz="1200" dirty="0">
+            <a:endParaRPr lang="en-US" sz="1200" dirty="0"/>
+          </a:p>
+          <a:p>
+            <a:pPr indent="0" marL="0">
+              <a:buNone/>
+            </a:pPr>
+            <a:r>
+              <a:rPr lang="en-US" sz="1100" dirty="0">
                 <a:solidFill>
                   <a:srgbClr val="495057"/>
                 </a:solidFill>
@@ -6542,17 +6971,14 @@
               </a:rPr>
               <a:t>• Navegador Google Chrome.</a:t>
             </a:r>
-            <a:endParaRPr lang="en-US" sz="1300" dirty="0"/>
-          </a:p>
-          <a:p>
-            <a:pPr algn="l" indent="0" marL="0">
-              <a:spcAft>
-                <a:spcPts val="800"/>
-              </a:spcAft>
-              <a:buNone/>
-            </a:pPr>
-            <a:r>
-              <a:rPr lang="en-US" sz="1200" dirty="0">
+            <a:endParaRPr lang="en-US" sz="1200" dirty="0"/>
+          </a:p>
+          <a:p>
+            <a:pPr indent="0" marL="0">
+              <a:buNone/>
+            </a:pPr>
+            <a:r>
+              <a:rPr lang="en-US" sz="1100" dirty="0">
                 <a:solidFill>
                   <a:srgbClr val="495057"/>
                 </a:solidFill>
@@ -6562,20 +6988,20 @@
               </a:rPr>
               <a:t>• Paquete ofimático Microsoft Word.</a:t>
             </a:r>
-            <a:endParaRPr lang="en-US" sz="1300" dirty="0"/>
+            <a:endParaRPr lang="en-US" sz="1200" dirty="0"/>
           </a:p>
         </p:txBody>
       </p:sp>
       <p:sp>
         <p:nvSpPr>
-          <p:cNvPr id="12" name="Shape 10"/>
-          <p:cNvSpPr/>
-          <p:nvPr/>
-        </p:nvSpPr>
-        <p:spPr>
-          <a:xfrm>
-            <a:off x="8046720" y="1280160"/>
-            <a:ext cx="3383280" cy="5029200"/>
+          <p:cNvPr id="14" name="Shape 12"/>
+          <p:cNvSpPr/>
+          <p:nvPr/>
+        </p:nvSpPr>
+        <p:spPr>
+          <a:xfrm>
+            <a:off x="8065008" y="1325880"/>
+            <a:ext cx="3364992" cy="4983480"/>
           </a:xfrm>
           <a:prstGeom prst="rect">
             <a:avLst/>
@@ -6583,9 +7009,9 @@
           <a:solidFill>
             <a:srgbClr val="FFFFFF"/>
           </a:solidFill>
-          <a:ln w="19050">
+          <a:ln w="12700">
             <a:solidFill>
-              <a:srgbClr val="DEE2E6"/>
+              <a:srgbClr val="E2E8F0"/>
             </a:solidFill>
             <a:prstDash val="solid"/>
           </a:ln>
@@ -6593,14 +7019,34 @@
       </p:sp>
       <p:sp>
         <p:nvSpPr>
-          <p:cNvPr id="13" name="Text 11"/>
-          <p:cNvSpPr/>
-          <p:nvPr/>
-        </p:nvSpPr>
-        <p:spPr>
-          <a:xfrm>
-            <a:off x="8275320" y="1463040"/>
-            <a:ext cx="2926080" cy="365760"/>
+          <p:cNvPr id="15" name="Shape 13"/>
+          <p:cNvSpPr/>
+          <p:nvPr/>
+        </p:nvSpPr>
+        <p:spPr>
+          <a:xfrm>
+            <a:off x="8110728" y="1325880"/>
+            <a:ext cx="3273552" cy="73152"/>
+          </a:xfrm>
+          <a:prstGeom prst="rect">
+            <a:avLst/>
+          </a:prstGeom>
+          <a:solidFill>
+            <a:srgbClr val="2B8A3E"/>
+          </a:solidFill>
+          <a:ln/>
+        </p:spPr>
+      </p:sp>
+      <p:sp>
+        <p:nvSpPr>
+          <p:cNvPr id="16" name="Text 14"/>
+          <p:cNvSpPr/>
+          <p:nvPr/>
+        </p:nvSpPr>
+        <p:spPr>
+          <a:xfrm>
+            <a:off x="8339328" y="1527048"/>
+            <a:ext cx="2816352" cy="347472"/>
           </a:xfrm>
           <a:prstGeom prst="rect">
             <a:avLst/>
@@ -6616,9 +7062,9 @@
               <a:buNone/>
             </a:pPr>
             <a:r>
-              <a:rPr lang="en-US" sz="1600" b="1" dirty="0">
-                <a:solidFill>
-                  <a:srgbClr val="0B7285"/>
+              <a:rPr lang="en-US" sz="1450" b="1" dirty="0">
+                <a:solidFill>
+                  <a:srgbClr val="2B8A3E"/>
                 </a:solidFill>
                 <a:latin typeface="Arial" pitchFamily="34" charset="0"/>
                 <a:ea typeface="Arial" pitchFamily="34" charset="-122"/>
@@ -6626,20 +7072,45 @@
               </a:rPr>
               <a:t>2.2.3. Recursos Financieros</a:t>
             </a:r>
-            <a:endParaRPr lang="en-US" sz="1600" dirty="0"/>
+            <a:endParaRPr lang="en-US" sz="1450" dirty="0"/>
           </a:p>
         </p:txBody>
       </p:sp>
       <p:sp>
         <p:nvSpPr>
-          <p:cNvPr id="14" name="Text 12"/>
-          <p:cNvSpPr/>
-          <p:nvPr/>
-        </p:nvSpPr>
-        <p:spPr>
-          <a:xfrm>
-            <a:off x="8275320" y="1874520"/>
-            <a:ext cx="2926080" cy="4251960"/>
+          <p:cNvPr id="17" name="Shape 15"/>
+          <p:cNvSpPr/>
+          <p:nvPr/>
+        </p:nvSpPr>
+        <p:spPr>
+          <a:xfrm>
+            <a:off x="8293608" y="1920240"/>
+            <a:ext cx="2907792" cy="1097280"/>
+          </a:xfrm>
+          <a:prstGeom prst="rect">
+            <a:avLst/>
+          </a:prstGeom>
+          <a:solidFill>
+            <a:srgbClr val="EBFBEE"/>
+          </a:solidFill>
+          <a:ln w="12700">
+            <a:solidFill>
+              <a:srgbClr val="2B8A3E"/>
+            </a:solidFill>
+            <a:prstDash val="solid"/>
+          </a:ln>
+        </p:spPr>
+      </p:sp>
+      <p:sp>
+        <p:nvSpPr>
+          <p:cNvPr id="18" name="Text 16"/>
+          <p:cNvSpPr/>
+          <p:nvPr/>
+        </p:nvSpPr>
+        <p:spPr>
+          <a:xfrm>
+            <a:off x="8293608" y="1993392"/>
+            <a:ext cx="2907792" cy="502920"/>
           </a:xfrm>
           <a:prstGeom prst="rect">
             <a:avLst/>
@@ -6648,53 +7119,137 @@
           <a:ln/>
         </p:spPr>
         <p:txBody>
-          <a:bodyPr wrap="square" rtlCol="0" anchor="t"/>
+          <a:bodyPr wrap="square" rtlCol="0" anchor="ctr"/>
           <a:lstStyle/>
           <a:p>
-            <a:pPr algn="l" indent="0" marL="0">
-              <a:spcAft>
-                <a:spcPts val="800"/>
-              </a:spcAft>
-              <a:buNone/>
-            </a:pPr>
-            <a:r>
-              <a:rPr lang="en-US" sz="1300" b="1" dirty="0">
-                <a:solidFill>
-                  <a:srgbClr val="0B7285"/>
-                </a:solidFill>
-                <a:latin typeface="Arial" pitchFamily="34" charset="0"/>
-                <a:ea typeface="Arial" pitchFamily="34" charset="-122"/>
-                <a:cs typeface="Arial" pitchFamily="34" charset="-120"/>
-              </a:rPr>
-              <a:t>Inversión en Software:
+            <a:pPr algn="ctr" indent="0" marL="0">
+              <a:buNone/>
+            </a:pPr>
+            <a:r>
+              <a:rPr lang="en-US" sz="2800" b="1" dirty="0">
+                <a:solidFill>
+                  <a:srgbClr val="2B8A3E"/>
+                </a:solidFill>
+                <a:latin typeface="Arial" pitchFamily="34" charset="0"/>
+                <a:ea typeface="Arial" pitchFamily="34" charset="-122"/>
+                <a:cs typeface="Arial" pitchFamily="34" charset="-120"/>
+              </a:rPr>
+              <a:t>0 Bs.</a:t>
+            </a:r>
+            <a:endParaRPr lang="en-US" sz="2800" dirty="0"/>
+          </a:p>
+        </p:txBody>
+      </p:sp>
+      <p:sp>
+        <p:nvSpPr>
+          <p:cNvPr id="19" name="Text 17"/>
+          <p:cNvSpPr/>
+          <p:nvPr/>
+        </p:nvSpPr>
+        <p:spPr>
+          <a:xfrm>
+            <a:off x="8293608" y="2514600"/>
+            <a:ext cx="2907792" cy="411480"/>
+          </a:xfrm>
+          <a:prstGeom prst="rect">
+            <a:avLst/>
+          </a:prstGeom>
+          <a:noFill/>
+          <a:ln/>
+        </p:spPr>
+        <p:txBody>
+          <a:bodyPr wrap="square" rtlCol="0" anchor="ctr"/>
+          <a:lstStyle/>
+          <a:p>
+            <a:pPr algn="ctr" indent="0" marL="0">
+              <a:buNone/>
+            </a:pPr>
+            <a:r>
+              <a:rPr lang="en-US" sz="1050" b="1" dirty="0">
+                <a:solidFill>
+                  <a:srgbClr val="212529"/>
+                </a:solidFill>
+                <a:latin typeface="Arial" pitchFamily="34" charset="0"/>
+                <a:ea typeface="Arial" pitchFamily="34" charset="-122"/>
+                <a:cs typeface="Arial" pitchFamily="34" charset="-120"/>
+              </a:rPr>
+              <a:t>Inversión en Licencias de Software</a:t>
+            </a:r>
+            <a:endParaRPr lang="en-US" sz="1050" dirty="0"/>
+          </a:p>
+        </p:txBody>
+      </p:sp>
+      <p:sp>
+        <p:nvSpPr>
+          <p:cNvPr id="20" name="Text 18"/>
+          <p:cNvSpPr/>
+          <p:nvPr/>
+        </p:nvSpPr>
+        <p:spPr>
+          <a:xfrm>
+            <a:off x="8293608" y="3200400"/>
+            <a:ext cx="2907792" cy="2926080"/>
+          </a:xfrm>
+          <a:prstGeom prst="rect">
+            <a:avLst/>
+          </a:prstGeom>
+          <a:noFill/>
+          <a:ln/>
+        </p:spPr>
+        <p:txBody>
+          <a:bodyPr wrap="square" rtlCol="0" anchor="ctr"/>
+          <a:lstStyle/>
+          <a:p>
+            <a:pPr indent="0" marL="0">
+              <a:buNone/>
+            </a:pPr>
+            <a:r>
+              <a:rPr lang="en-US" sz="1200" b="1" dirty="0">
+                <a:solidFill>
+                  <a:srgbClr val="212529"/>
+                </a:solidFill>
+                <a:latin typeface="Arial" pitchFamily="34" charset="0"/>
+                <a:ea typeface="Arial" pitchFamily="34" charset="-122"/>
+                <a:cs typeface="Arial" pitchFamily="34" charset="-120"/>
+              </a:rPr>
+              <a:t>Tecnologías de Código Abierto:
 </a:t>
             </a:r>
-            <a:pPr algn="l" indent="0" marL="0">
-              <a:spcAft>
-                <a:spcPts val="800"/>
-              </a:spcAft>
-              <a:buNone/>
-            </a:pPr>
-            <a:r>
-              <a:rPr lang="en-US" sz="1600" b="1" dirty="0">
-                <a:solidFill>
-                  <a:srgbClr val="2B8A3E"/>
-                </a:solidFill>
-                <a:latin typeface="Arial" pitchFamily="34" charset="0"/>
-                <a:ea typeface="Arial" pitchFamily="34" charset="-122"/>
-                <a:cs typeface="Arial" pitchFamily="34" charset="-120"/>
-              </a:rPr>
-              <a:t>0 Bs. (Cero Bolivianos)
+            <a:pPr indent="0" marL="0">
+              <a:buNone/>
+            </a:pPr>
+            <a:r>
+              <a:rPr lang="en-US" sz="1100" dirty="0">
+                <a:solidFill>
+                  <a:srgbClr val="495057"/>
+                </a:solidFill>
+                <a:latin typeface="Arial" pitchFamily="34" charset="0"/>
+                <a:ea typeface="Arial" pitchFamily="34" charset="-122"/>
+                <a:cs typeface="Arial" pitchFamily="34" charset="-120"/>
+              </a:rPr>
+              <a:t>Todas las herramientas y librerías empleadas son Open Source y de uso gratuito.
 </a:t>
             </a:r>
-            <a:pPr algn="l" indent="0" marL="0">
-              <a:spcAft>
-                <a:spcPts val="800"/>
-              </a:spcAft>
-              <a:buNone/>
-            </a:pPr>
-            <a:r>
-              <a:rPr lang="en-US" sz="1200" dirty="0">
+            <a:pPr indent="0" marL="0">
+              <a:buNone/>
+            </a:pPr>
+            <a:r>
+              <a:rPr lang="en-US" sz="1200" b="1" dirty="0">
+                <a:solidFill>
+                  <a:srgbClr val="212529"/>
+                </a:solidFill>
+                <a:latin typeface="Arial" pitchFamily="34" charset="0"/>
+                <a:ea typeface="Arial" pitchFamily="34" charset="-122"/>
+                <a:cs typeface="Arial" pitchFamily="34" charset="-120"/>
+              </a:rPr>
+              <a:t>Sostenibilidad:
+</a:t>
+            </a:r>
+            <a:pPr indent="0" marL="0">
+              <a:buNone/>
+            </a:pPr>
+            <a:r>
+              <a:rPr lang="en-US" sz="1100" dirty="0">
                 <a:solidFill>
                   <a:srgbClr val="495057"/>
                 </a:solidFill>
@@ -6702,63 +7257,9 @@
                 <a:ea typeface="Arial" pitchFamily="34" charset="-122"/>
                 <a:cs typeface="Arial" pitchFamily="34" charset="-120"/>
               </a:rPr>
-              <a:t>Todas las herramientas de desarrollo y librerías utilizadas son de código abierto (Open Source) y de uso libre.
-</a:t>
-            </a:r>
-            <a:pPr algn="l" indent="0" marL="0">
-              <a:spcAft>
-                <a:spcPts val="800"/>
-              </a:spcAft>
-              <a:buNone/>
-            </a:pPr>
-            <a:r>
-              <a:rPr lang="en-US" sz="1300" b="1" dirty="0">
-                <a:solidFill>
-                  <a:srgbClr val="0B7285"/>
-                </a:solidFill>
-                <a:latin typeface="Arial" pitchFamily="34" charset="0"/>
-                <a:ea typeface="Arial" pitchFamily="34" charset="-122"/>
-                <a:cs typeface="Arial" pitchFamily="34" charset="-120"/>
-              </a:rPr>
-              <a:t>Financiamiento Externo:
-</a:t>
-            </a:r>
-            <a:pPr algn="l" indent="0" marL="0">
-              <a:spcAft>
-                <a:spcPts val="800"/>
-              </a:spcAft>
-              <a:buNone/>
-            </a:pPr>
-            <a:r>
-              <a:rPr lang="en-US" sz="1200" dirty="0">
-                <a:solidFill>
-                  <a:srgbClr val="495057"/>
-                </a:solidFill>
-                <a:latin typeface="Arial" pitchFamily="34" charset="0"/>
-                <a:ea typeface="Arial" pitchFamily="34" charset="-122"/>
-                <a:cs typeface="Arial" pitchFamily="34" charset="-120"/>
-              </a:rPr>
-              <a:t>No se requirió financiamiento externo ni patrocinio comercial.
-</a:t>
-            </a:r>
-            <a:pPr algn="l" indent="0" marL="0">
-              <a:spcAft>
-                <a:spcPts val="800"/>
-              </a:spcAft>
-              <a:buNone/>
-            </a:pPr>
-            <a:r>
-              <a:rPr lang="en-US" sz="1200" i="1" dirty="0">
-                <a:solidFill>
-                  <a:srgbClr val="495057"/>
-                </a:solidFill>
-                <a:latin typeface="Arial" pitchFamily="34" charset="0"/>
-                <a:ea typeface="Arial" pitchFamily="34" charset="-122"/>
-                <a:cs typeface="Arial" pitchFamily="34" charset="-120"/>
-              </a:rPr>
-              <a:t>Los costos operativos fueron absorbidos por recursos propios domiciliarios.</a:t>
-            </a:r>
-            <a:endParaRPr lang="en-US" sz="1300" dirty="0"/>
+              <a:t>El proyecto no requirió financiamiento externo ni genera costos de mantenimiento para la comunidad.</a:t>
+            </a:r>
+            <a:endParaRPr lang="en-US" sz="1200" dirty="0"/>
           </a:p>
         </p:txBody>
       </p:sp>
@@ -6776,7 +7277,7 @@
     <p:bg>
       <p:bgPr>
         <a:solidFill>
-          <a:srgbClr val="F8F9FA"/>
+          <a:srgbClr val="F4F6F8"/>
         </a:solidFill>
       </p:bgPr>
     </p:bg>
@@ -6803,7 +7304,7 @@
         <p:spPr>
           <a:xfrm>
             <a:off x="0" y="0"/>
-            <a:ext cx="9144000" cy="1005840"/>
+            <a:ext cx="12191695" cy="1051560"/>
           </a:xfrm>
           <a:prstGeom prst="rect">
             <a:avLst/>
@@ -6813,7 +7314,7 @@
           </a:solidFill>
           <a:ln w="12700">
             <a:solidFill>
-              <a:srgbClr val="DEE2E6"/>
+              <a:srgbClr val="E2E8F0"/>
             </a:solidFill>
             <a:prstDash val="solid"/>
           </a:ln>
@@ -6827,8 +7328,8 @@
         </p:nvSpPr>
         <p:spPr>
           <a:xfrm>
-            <a:off x="0" y="0"/>
-            <a:ext cx="228600" cy="1005840"/>
+            <a:off x="731520" y="256032"/>
+            <a:ext cx="91440" cy="530352"/>
           </a:xfrm>
           <a:prstGeom prst="rect">
             <a:avLst/>
@@ -6847,8 +7348,8 @@
         </p:nvSpPr>
         <p:spPr>
           <a:xfrm>
-            <a:off x="548640" y="137160"/>
-            <a:ext cx="10972800" cy="274320"/>
+            <a:off x="960120" y="201168"/>
+            <a:ext cx="10058400" cy="228600"/>
           </a:xfrm>
           <a:prstGeom prst="rect">
             <a:avLst/>
@@ -6864,7 +7365,7 @@
               <a:buNone/>
             </a:pPr>
             <a:r>
-              <a:rPr lang="en-US" sz="1100" b="1" dirty="0">
+              <a:rPr lang="en-US" sz="1050" b="1" dirty="0">
                 <a:solidFill>
                   <a:srgbClr val="FF922B"/>
                 </a:solidFill>
@@ -6874,7 +7375,7 @@
               </a:rPr>
               <a:t>CAPÍTULO 2</a:t>
             </a:r>
-            <a:endParaRPr lang="en-US" sz="1100" dirty="0"/>
+            <a:endParaRPr lang="en-US" sz="1050" dirty="0"/>
           </a:p>
         </p:txBody>
       </p:sp>
@@ -6886,8 +7387,8 @@
         </p:nvSpPr>
         <p:spPr>
           <a:xfrm>
-            <a:off x="548640" y="411480"/>
-            <a:ext cx="10972800" cy="502920"/>
+            <a:off x="960120" y="429768"/>
+            <a:ext cx="10058400" cy="457200"/>
           </a:xfrm>
           <a:prstGeom prst="rect">
             <a:avLst/>
@@ -6903,7 +7404,7 @@
               <a:buNone/>
             </a:pPr>
             <a:r>
-              <a:rPr lang="en-US" sz="2400" b="1" dirty="0">
+              <a:rPr lang="en-US" sz="2200" b="1" dirty="0">
                 <a:solidFill>
                   <a:srgbClr val="212529"/>
                 </a:solidFill>
@@ -6913,7 +7414,7 @@
               </a:rPr>
               <a:t>2.3. Cálculo de Costos del Proyecto</a:t>
             </a:r>
-            <a:endParaRPr lang="en-US" sz="2400" dirty="0"/>
+            <a:endParaRPr lang="en-US" sz="2200" dirty="0"/>
           </a:p>
         </p:txBody>
       </p:sp>
@@ -6925,7 +7426,7 @@
         </p:nvSpPr>
         <p:spPr>
           <a:xfrm>
-            <a:off x="731520" y="1280160"/>
+            <a:off x="731520" y="1325880"/>
             <a:ext cx="5212080" cy="2423160"/>
           </a:xfrm>
           <a:prstGeom prst="rect">
@@ -6934,9 +7435,9 @@
           <a:solidFill>
             <a:srgbClr val="FFFFFF"/>
           </a:solidFill>
-          <a:ln w="19050">
+          <a:ln w="12700">
             <a:solidFill>
-              <a:srgbClr val="DEE2E6"/>
+              <a:srgbClr val="E2E8F0"/>
             </a:solidFill>
             <a:prstDash val="solid"/>
           </a:ln>
@@ -6944,14 +7445,34 @@
       </p:sp>
       <p:sp>
         <p:nvSpPr>
-          <p:cNvPr id="7" name="Text 5"/>
-          <p:cNvSpPr/>
-          <p:nvPr/>
-        </p:nvSpPr>
-        <p:spPr>
-          <a:xfrm>
-            <a:off x="960120" y="1463040"/>
-            <a:ext cx="4754880" cy="365760"/>
+          <p:cNvPr id="7" name="Shape 5"/>
+          <p:cNvSpPr/>
+          <p:nvPr/>
+        </p:nvSpPr>
+        <p:spPr>
+          <a:xfrm>
+            <a:off x="777240" y="1325880"/>
+            <a:ext cx="5120640" cy="73152"/>
+          </a:xfrm>
+          <a:prstGeom prst="rect">
+            <a:avLst/>
+          </a:prstGeom>
+          <a:solidFill>
+            <a:srgbClr val="2B8A3E"/>
+          </a:solidFill>
+          <a:ln/>
+        </p:spPr>
+      </p:sp>
+      <p:sp>
+        <p:nvSpPr>
+          <p:cNvPr id="8" name="Text 6"/>
+          <p:cNvSpPr/>
+          <p:nvPr/>
+        </p:nvSpPr>
+        <p:spPr>
+          <a:xfrm>
+            <a:off x="1005840" y="1527048"/>
+            <a:ext cx="4663440" cy="347472"/>
           </a:xfrm>
           <a:prstGeom prst="rect">
             <a:avLst/>
@@ -6967,9 +7488,9 @@
               <a:buNone/>
             </a:pPr>
             <a:r>
-              <a:rPr lang="en-US" sz="1600" b="1" dirty="0">
-                <a:solidFill>
-                  <a:srgbClr val="0B7285"/>
+              <a:rPr lang="en-US" sz="1450" b="1" dirty="0">
+                <a:solidFill>
+                  <a:srgbClr val="2B8A3E"/>
                 </a:solidFill>
                 <a:latin typeface="Arial" pitchFamily="34" charset="0"/>
                 <a:ea typeface="Arial" pitchFamily="34" charset="-122"/>
@@ -6977,20 +7498,20 @@
               </a:rPr>
               <a:t>2.3.1. Costo de Inversión (Gasto Inicial)</a:t>
             </a:r>
-            <a:endParaRPr lang="en-US" sz="1600" dirty="0"/>
+            <a:endParaRPr lang="en-US" sz="1450" dirty="0"/>
           </a:p>
         </p:txBody>
       </p:sp>
       <p:sp>
         <p:nvSpPr>
-          <p:cNvPr id="8" name="Text 6"/>
-          <p:cNvSpPr/>
-          <p:nvPr/>
-        </p:nvSpPr>
-        <p:spPr>
-          <a:xfrm>
-            <a:off x="960120" y="1874520"/>
-            <a:ext cx="4754880" cy="1645920"/>
+          <p:cNvPr id="9" name="Text 7"/>
+          <p:cNvSpPr/>
+          <p:nvPr/>
+        </p:nvSpPr>
+        <p:spPr>
+          <a:xfrm>
+            <a:off x="1005840" y="1965960"/>
+            <a:ext cx="4663440" cy="1645920"/>
           </a:xfrm>
           <a:prstGeom prst="rect">
             <a:avLst/>
@@ -6999,17 +7520,14 @@
           <a:ln/>
         </p:spPr>
         <p:txBody>
-          <a:bodyPr wrap="square" rtlCol="0" anchor="t"/>
+          <a:bodyPr wrap="square" rtlCol="0" anchor="ctr"/>
           <a:lstStyle/>
           <a:p>
-            <a:pPr algn="l" indent="0" marL="0">
-              <a:spcAft>
-                <a:spcPts val="800"/>
-              </a:spcAft>
-              <a:buNone/>
-            </a:pPr>
-            <a:r>
-              <a:rPr lang="en-US" sz="1200" dirty="0">
+            <a:pPr indent="0" marL="0">
+              <a:buNone/>
+            </a:pPr>
+            <a:r>
+              <a:rPr lang="en-US" sz="1150" dirty="0">
                 <a:solidFill>
                   <a:srgbClr val="495057"/>
                 </a:solidFill>
@@ -7017,16 +7535,13 @@
                 <a:ea typeface="Arial" pitchFamily="34" charset="-122"/>
                 <a:cs typeface="Arial" pitchFamily="34" charset="-120"/>
               </a:rPr>
-              <a:t>• Licencias de Software (VS Code, Node.js, SQLite): </a:t>
-            </a:r>
-            <a:pPr algn="l" indent="0" marL="0">
-              <a:spcAft>
-                <a:spcPts val="800"/>
-              </a:spcAft>
-              <a:buNone/>
-            </a:pPr>
-            <a:r>
-              <a:rPr lang="en-US" sz="1200" b="1" dirty="0">
+              <a:t>• Licencias de software (VS Code, Node.js, SQLite): </a:t>
+            </a:r>
+            <a:pPr indent="0" marL="0">
+              <a:buNone/>
+            </a:pPr>
+            <a:r>
+              <a:rPr lang="en-US" sz="1150" b="1" dirty="0">
                 <a:solidFill>
                   <a:srgbClr val="2B8A3E"/>
                 </a:solidFill>
@@ -7034,17 +7549,14 @@
                 <a:ea typeface="Arial" pitchFamily="34" charset="-122"/>
                 <a:cs typeface="Arial" pitchFamily="34" charset="-120"/>
               </a:rPr>
-              <a:t>0 Bs.
+              <a:t>0 Bs. (Gratis)
 </a:t>
             </a:r>
-            <a:pPr algn="l" indent="0" marL="0">
-              <a:spcAft>
-                <a:spcPts val="800"/>
-              </a:spcAft>
-              <a:buNone/>
-            </a:pPr>
-            <a:r>
-              <a:rPr lang="en-US" sz="1200" dirty="0">
+            <a:pPr indent="0" marL="0">
+              <a:buNone/>
+            </a:pPr>
+            <a:r>
+              <a:rPr lang="en-US" sz="1150" dirty="0">
                 <a:solidFill>
                   <a:srgbClr val="495057"/>
                 </a:solidFill>
@@ -7052,16 +7564,13 @@
                 <a:ea typeface="Arial" pitchFamily="34" charset="-122"/>
                 <a:cs typeface="Arial" pitchFamily="34" charset="-120"/>
               </a:rPr>
-              <a:t>• Equipo de Computación (Laptop amortizada): </a:t>
-            </a:r>
-            <a:pPr algn="l" indent="0" marL="0">
-              <a:spcAft>
-                <a:spcPts val="800"/>
-              </a:spcAft>
-              <a:buNone/>
-            </a:pPr>
-            <a:r>
-              <a:rPr lang="en-US" sz="1200" b="1" dirty="0">
+              <a:t>• Equipo portátil preexistente (Amortizado): </a:t>
+            </a:r>
+            <a:pPr indent="0" marL="0">
+              <a:buNone/>
+            </a:pPr>
+            <a:r>
+              <a:rPr lang="en-US" sz="1150" b="1" dirty="0">
                 <a:solidFill>
                   <a:srgbClr val="212529"/>
                 </a:solidFill>
@@ -7072,32 +7581,26 @@
               <a:t>0 Bs. (Recurso propio)
 </a:t>
             </a:r>
-            <a:pPr algn="l" indent="0" marL="0">
-              <a:spcAft>
-                <a:spcPts val="800"/>
-              </a:spcAft>
+            <a:pPr indent="0" marL="0">
+              <a:buNone/>
+            </a:pPr>
+            <a:r>
+              <a:rPr lang="en-US" sz="1250" b="1" dirty="0">
+                <a:solidFill>
+                  <a:srgbClr val="0B7285"/>
+                </a:solidFill>
+                <a:latin typeface="Arial" pitchFamily="34" charset="0"/>
+                <a:ea typeface="Arial" pitchFamily="34" charset="-122"/>
+                <a:cs typeface="Arial" pitchFamily="34" charset="-120"/>
+              </a:rPr>
+              <a:t>TOTAL INVERSIÓN INICIAL: </a:t>
+            </a:r>
+            <a:pPr indent="0" marL="0">
               <a:buNone/>
             </a:pPr>
             <a:r>
               <a:rPr lang="en-US" sz="1300" b="1" dirty="0">
                 <a:solidFill>
-                  <a:srgbClr val="0B7285"/>
-                </a:solidFill>
-                <a:latin typeface="Arial" pitchFamily="34" charset="0"/>
-                <a:ea typeface="Arial" pitchFamily="34" charset="-122"/>
-                <a:cs typeface="Arial" pitchFamily="34" charset="-120"/>
-              </a:rPr>
-              <a:t>TOTAL COSTO DE INVERSIÓN: </a:t>
-            </a:r>
-            <a:pPr algn="l" indent="0" marL="0">
-              <a:spcAft>
-                <a:spcPts val="800"/>
-              </a:spcAft>
-              <a:buNone/>
-            </a:pPr>
-            <a:r>
-              <a:rPr lang="en-US" sz="1400" b="1" dirty="0">
-                <a:solidFill>
                   <a:srgbClr val="2B8A3E"/>
                 </a:solidFill>
                 <a:latin typeface="Arial" pitchFamily="34" charset="0"/>
@@ -7106,19 +7609,19 @@
               </a:rPr>
               <a:t>0 Bs. (Autosostenible)</a:t>
             </a:r>
-            <a:endParaRPr lang="en-US" sz="1200" dirty="0"/>
+            <a:endParaRPr lang="en-US" sz="1150" dirty="0"/>
           </a:p>
         </p:txBody>
       </p:sp>
       <p:sp>
         <p:nvSpPr>
-          <p:cNvPr id="9" name="Shape 7"/>
-          <p:cNvSpPr/>
-          <p:nvPr/>
-        </p:nvSpPr>
-        <p:spPr>
-          <a:xfrm>
-            <a:off x="6217920" y="1280160"/>
+          <p:cNvPr id="10" name="Shape 8"/>
+          <p:cNvSpPr/>
+          <p:nvPr/>
+        </p:nvSpPr>
+        <p:spPr>
+          <a:xfrm>
+            <a:off x="6217920" y="1325880"/>
             <a:ext cx="5212080" cy="2423160"/>
           </a:xfrm>
           <a:prstGeom prst="rect">
@@ -7127,9 +7630,9 @@
           <a:solidFill>
             <a:srgbClr val="FFFFFF"/>
           </a:solidFill>
-          <a:ln w="19050">
+          <a:ln w="12700">
             <a:solidFill>
-              <a:srgbClr val="DEE2E6"/>
+              <a:srgbClr val="E2E8F0"/>
             </a:solidFill>
             <a:prstDash val="solid"/>
           </a:ln>
@@ -7137,14 +7640,34 @@
       </p:sp>
       <p:sp>
         <p:nvSpPr>
-          <p:cNvPr id="10" name="Text 8"/>
-          <p:cNvSpPr/>
-          <p:nvPr/>
-        </p:nvSpPr>
-        <p:spPr>
-          <a:xfrm>
-            <a:off x="6446520" y="1463040"/>
-            <a:ext cx="4754880" cy="365760"/>
+          <p:cNvPr id="11" name="Shape 9"/>
+          <p:cNvSpPr/>
+          <p:nvPr/>
+        </p:nvSpPr>
+        <p:spPr>
+          <a:xfrm>
+            <a:off x="6263640" y="1325880"/>
+            <a:ext cx="5120640" cy="73152"/>
+          </a:xfrm>
+          <a:prstGeom prst="rect">
+            <a:avLst/>
+          </a:prstGeom>
+          <a:solidFill>
+            <a:srgbClr val="FF922B"/>
+          </a:solidFill>
+          <a:ln/>
+        </p:spPr>
+      </p:sp>
+      <p:sp>
+        <p:nvSpPr>
+          <p:cNvPr id="12" name="Text 10"/>
+          <p:cNvSpPr/>
+          <p:nvPr/>
+        </p:nvSpPr>
+        <p:spPr>
+          <a:xfrm>
+            <a:off x="6492240" y="1527048"/>
+            <a:ext cx="4663440" cy="347472"/>
           </a:xfrm>
           <a:prstGeom prst="rect">
             <a:avLst/>
@@ -7160,7 +7683,7 @@
               <a:buNone/>
             </a:pPr>
             <a:r>
-              <a:rPr lang="en-US" sz="1600" b="1" dirty="0">
+              <a:rPr lang="en-US" sz="1450" b="1" dirty="0">
                 <a:solidFill>
                   <a:srgbClr val="0B7285"/>
                 </a:solidFill>
@@ -7170,20 +7693,20 @@
               </a:rPr>
               <a:t>2.3.2. Costo de Operación (Mensual)</a:t>
             </a:r>
-            <a:endParaRPr lang="en-US" sz="1600" dirty="0"/>
+            <a:endParaRPr lang="en-US" sz="1450" dirty="0"/>
           </a:p>
         </p:txBody>
       </p:sp>
       <p:sp>
         <p:nvSpPr>
-          <p:cNvPr id="11" name="Text 9"/>
-          <p:cNvSpPr/>
-          <p:nvPr/>
-        </p:nvSpPr>
-        <p:spPr>
-          <a:xfrm>
-            <a:off x="6446520" y="1874520"/>
-            <a:ext cx="4754880" cy="1645920"/>
+          <p:cNvPr id="13" name="Text 11"/>
+          <p:cNvSpPr/>
+          <p:nvPr/>
+        </p:nvSpPr>
+        <p:spPr>
+          <a:xfrm>
+            <a:off x="6492240" y="1965960"/>
+            <a:ext cx="4663440" cy="1645920"/>
           </a:xfrm>
           <a:prstGeom prst="rect">
             <a:avLst/>
@@ -7192,17 +7715,14 @@
           <a:ln/>
         </p:spPr>
         <p:txBody>
-          <a:bodyPr wrap="square" rtlCol="0" anchor="t"/>
+          <a:bodyPr wrap="square" rtlCol="0" anchor="ctr"/>
           <a:lstStyle/>
           <a:p>
-            <a:pPr algn="l" indent="0" marL="0">
-              <a:spcAft>
-                <a:spcPts val="800"/>
-              </a:spcAft>
-              <a:buNone/>
-            </a:pPr>
-            <a:r>
-              <a:rPr lang="en-US" sz="1200" dirty="0">
+            <a:pPr indent="0" marL="0">
+              <a:buNone/>
+            </a:pPr>
+            <a:r>
+              <a:rPr lang="en-US" sz="1150" dirty="0">
                 <a:solidFill>
                   <a:srgbClr val="495057"/>
                 </a:solidFill>
@@ -7212,14 +7732,11 @@
               </a:rPr>
               <a:t>• Consumo de energía eléctrica: </a:t>
             </a:r>
-            <a:pPr algn="l" indent="0" marL="0">
-              <a:spcAft>
-                <a:spcPts val="800"/>
-              </a:spcAft>
-              <a:buNone/>
-            </a:pPr>
-            <a:r>
-              <a:rPr lang="en-US" sz="1200" b="1" dirty="0">
+            <a:pPr indent="0" marL="0">
+              <a:buNone/>
+            </a:pPr>
+            <a:r>
+              <a:rPr lang="en-US" sz="1150" b="1" dirty="0">
                 <a:solidFill>
                   <a:srgbClr val="212529"/>
                 </a:solidFill>
@@ -7230,14 +7747,11 @@
               <a:t>20 Bs. / mes
 </a:t>
             </a:r>
-            <a:pPr algn="l" indent="0" marL="0">
-              <a:spcAft>
-                <a:spcPts val="800"/>
-              </a:spcAft>
-              <a:buNone/>
-            </a:pPr>
-            <a:r>
-              <a:rPr lang="en-US" sz="1200" dirty="0">
+            <a:pPr indent="0" marL="0">
+              <a:buNone/>
+            </a:pPr>
+            <a:r>
+              <a:rPr lang="en-US" sz="1150" dirty="0">
                 <a:solidFill>
                   <a:srgbClr val="495057"/>
                 </a:solidFill>
@@ -7247,14 +7761,11 @@
               </a:rPr>
               <a:t>• Conexión a internet banda ancha: </a:t>
             </a:r>
-            <a:pPr algn="l" indent="0" marL="0">
-              <a:spcAft>
-                <a:spcPts val="800"/>
-              </a:spcAft>
-              <a:buNone/>
-            </a:pPr>
-            <a:r>
-              <a:rPr lang="en-US" sz="1200" b="1" dirty="0">
+            <a:pPr indent="0" marL="0">
+              <a:buNone/>
+            </a:pPr>
+            <a:r>
+              <a:rPr lang="en-US" sz="1150" b="1" dirty="0">
                 <a:solidFill>
                   <a:srgbClr val="212529"/>
                 </a:solidFill>
@@ -7265,14 +7776,11 @@
               <a:t>150 Bs. / mes
 </a:t>
             </a:r>
-            <a:pPr algn="l" indent="0" marL="0">
-              <a:spcAft>
-                <a:spcPts val="800"/>
-              </a:spcAft>
-              <a:buNone/>
-            </a:pPr>
-            <a:r>
-              <a:rPr lang="en-US" sz="1200" dirty="0">
+            <a:pPr indent="0" marL="0">
+              <a:buNone/>
+            </a:pPr>
+            <a:r>
+              <a:rPr lang="en-US" sz="1150" dirty="0">
                 <a:solidFill>
                   <a:srgbClr val="495057"/>
                 </a:solidFill>
@@ -7280,16 +7788,13 @@
                 <a:ea typeface="Arial" pitchFamily="34" charset="-122"/>
                 <a:cs typeface="Arial" pitchFamily="34" charset="-120"/>
               </a:rPr>
-              <a:t>• Servidor web en la nube (Plan libre): </a:t>
-            </a:r>
-            <a:pPr algn="l" indent="0" marL="0">
-              <a:spcAft>
-                <a:spcPts val="800"/>
-              </a:spcAft>
-              <a:buNone/>
-            </a:pPr>
-            <a:r>
-              <a:rPr lang="en-US" sz="1200" b="1" dirty="0">
+              <a:t>• Servidor web en la nube (Plan gratuito): </a:t>
+            </a:r>
+            <a:pPr indent="0" marL="0">
+              <a:buNone/>
+            </a:pPr>
+            <a:r>
+              <a:rPr lang="en-US" sz="1150" b="1" dirty="0">
                 <a:solidFill>
                   <a:srgbClr val="2B8A3E"/>
                 </a:solidFill>
@@ -7300,32 +7805,26 @@
               <a:t>0 Bs.
 </a:t>
             </a:r>
-            <a:pPr algn="l" indent="0" marL="0">
-              <a:spcAft>
-                <a:spcPts val="800"/>
-              </a:spcAft>
+            <a:pPr indent="0" marL="0">
+              <a:buNone/>
+            </a:pPr>
+            <a:r>
+              <a:rPr lang="en-US" sz="1250" b="1" dirty="0">
+                <a:solidFill>
+                  <a:srgbClr val="0B7285"/>
+                </a:solidFill>
+                <a:latin typeface="Arial" pitchFamily="34" charset="0"/>
+                <a:ea typeface="Arial" pitchFamily="34" charset="-122"/>
+                <a:cs typeface="Arial" pitchFamily="34" charset="-120"/>
+              </a:rPr>
+              <a:t>TOTAL OPERACIÓN MENSUAL: </a:t>
+            </a:r>
+            <a:pPr indent="0" marL="0">
               <a:buNone/>
             </a:pPr>
             <a:r>
               <a:rPr lang="en-US" sz="1300" b="1" dirty="0">
                 <a:solidFill>
-                  <a:srgbClr val="0B7285"/>
-                </a:solidFill>
-                <a:latin typeface="Arial" pitchFamily="34" charset="0"/>
-                <a:ea typeface="Arial" pitchFamily="34" charset="-122"/>
-                <a:cs typeface="Arial" pitchFamily="34" charset="-120"/>
-              </a:rPr>
-              <a:t>TOTAL COSTO DE OPERACIÓN: </a:t>
-            </a:r>
-            <a:pPr algn="l" indent="0" marL="0">
-              <a:spcAft>
-                <a:spcPts val="800"/>
-              </a:spcAft>
-              <a:buNone/>
-            </a:pPr>
-            <a:r>
-              <a:rPr lang="en-US" sz="1400" b="1" dirty="0">
-                <a:solidFill>
                   <a:srgbClr val="FF922B"/>
                 </a:solidFill>
                 <a:latin typeface="Arial" pitchFamily="34" charset="0"/>
@@ -7334,13 +7833,13 @@
               </a:rPr>
               <a:t>170 Bs. / mes</a:t>
             </a:r>
-            <a:endParaRPr lang="en-US" sz="1200" dirty="0"/>
+            <a:endParaRPr lang="en-US" sz="1150" dirty="0"/>
           </a:p>
         </p:txBody>
       </p:sp>
       <p:sp>
         <p:nvSpPr>
-          <p:cNvPr id="12" name="Shape 10"/>
+          <p:cNvPr id="14" name="Shape 12"/>
           <p:cNvSpPr/>
           <p:nvPr/>
         </p:nvSpPr>
@@ -7355,9 +7854,9 @@
           <a:solidFill>
             <a:srgbClr val="FFFFFF"/>
           </a:solidFill>
-          <a:ln w="19050">
+          <a:ln w="12700">
             <a:solidFill>
-              <a:srgbClr val="DEE2E6"/>
+              <a:srgbClr val="E2E8F0"/>
             </a:solidFill>
             <a:prstDash val="solid"/>
           </a:ln>
@@ -7365,14 +7864,34 @@
       </p:sp>
       <p:sp>
         <p:nvSpPr>
-          <p:cNvPr id="13" name="Text 11"/>
-          <p:cNvSpPr/>
-          <p:nvPr/>
-        </p:nvSpPr>
-        <p:spPr>
-          <a:xfrm>
-            <a:off x="960120" y="4069080"/>
-            <a:ext cx="4754880" cy="365760"/>
+          <p:cNvPr id="15" name="Shape 13"/>
+          <p:cNvSpPr/>
+          <p:nvPr/>
+        </p:nvSpPr>
+        <p:spPr>
+          <a:xfrm>
+            <a:off x="777240" y="3886200"/>
+            <a:ext cx="5120640" cy="73152"/>
+          </a:xfrm>
+          <a:prstGeom prst="rect">
+            <a:avLst/>
+          </a:prstGeom>
+          <a:solidFill>
+            <a:srgbClr val="1098AD"/>
+          </a:solidFill>
+          <a:ln/>
+        </p:spPr>
+      </p:sp>
+      <p:sp>
+        <p:nvSpPr>
+          <p:cNvPr id="16" name="Text 14"/>
+          <p:cNvSpPr/>
+          <p:nvPr/>
+        </p:nvSpPr>
+        <p:spPr>
+          <a:xfrm>
+            <a:off x="1005840" y="4087368"/>
+            <a:ext cx="4663440" cy="347472"/>
           </a:xfrm>
           <a:prstGeom prst="rect">
             <a:avLst/>
@@ -7388,7 +7907,7 @@
               <a:buNone/>
             </a:pPr>
             <a:r>
-              <a:rPr lang="en-US" sz="1600" b="1" dirty="0">
+              <a:rPr lang="en-US" sz="1450" b="1" dirty="0">
                 <a:solidFill>
                   <a:srgbClr val="0B7285"/>
                 </a:solidFill>
@@ -7398,20 +7917,20 @@
               </a:rPr>
               <a:t>2.3.3. Costos Variables</a:t>
             </a:r>
-            <a:endParaRPr lang="en-US" sz="1600" dirty="0"/>
+            <a:endParaRPr lang="en-US" sz="1450" dirty="0"/>
           </a:p>
         </p:txBody>
       </p:sp>
       <p:sp>
         <p:nvSpPr>
-          <p:cNvPr id="14" name="Text 12"/>
-          <p:cNvSpPr/>
-          <p:nvPr/>
-        </p:nvSpPr>
-        <p:spPr>
-          <a:xfrm>
-            <a:off x="960120" y="4480560"/>
-            <a:ext cx="4754880" cy="1645920"/>
+          <p:cNvPr id="17" name="Text 15"/>
+          <p:cNvSpPr/>
+          <p:nvPr/>
+        </p:nvSpPr>
+        <p:spPr>
+          <a:xfrm>
+            <a:off x="1005840" y="4526280"/>
+            <a:ext cx="4663440" cy="1645920"/>
           </a:xfrm>
           <a:prstGeom prst="rect">
             <a:avLst/>
@@ -7420,17 +7939,14 @@
           <a:ln/>
         </p:spPr>
         <p:txBody>
-          <a:bodyPr wrap="square" rtlCol="0" anchor="t"/>
+          <a:bodyPr wrap="square" rtlCol="0" anchor="ctr"/>
           <a:lstStyle/>
           <a:p>
-            <a:pPr algn="l" indent="0" marL="0">
-              <a:spcAft>
-                <a:spcPts val="800"/>
-              </a:spcAft>
-              <a:buNone/>
-            </a:pPr>
-            <a:r>
-              <a:rPr lang="en-US" sz="1200" dirty="0">
+            <a:pPr indent="0" marL="0">
+              <a:buNone/>
+            </a:pPr>
+            <a:r>
+              <a:rPr lang="en-US" sz="1150" dirty="0">
                 <a:solidFill>
                   <a:srgbClr val="495057"/>
                 </a:solidFill>
@@ -7438,16 +7954,13 @@
                 <a:ea typeface="Arial" pitchFamily="34" charset="-122"/>
                 <a:cs typeface="Arial" pitchFamily="34" charset="-120"/>
               </a:rPr>
-              <a:t>• Difusión digital local en redes sociales (Opcional): </a:t>
-            </a:r>
-            <a:pPr algn="l" indent="0" marL="0">
-              <a:spcAft>
-                <a:spcPts val="800"/>
-              </a:spcAft>
-              <a:buNone/>
-            </a:pPr>
-            <a:r>
-              <a:rPr lang="en-US" sz="1200" b="1" dirty="0">
+              <a:t>• Difusión digital en redes sociales (Opcional): </a:t>
+            </a:r>
+            <a:pPr indent="0" marL="0">
+              <a:buNone/>
+            </a:pPr>
+            <a:r>
+              <a:rPr lang="en-US" sz="1150" b="1" dirty="0">
                 <a:solidFill>
                   <a:srgbClr val="212529"/>
                 </a:solidFill>
@@ -7458,14 +7971,11 @@
               <a:t>100 Bs.
 </a:t>
             </a:r>
-            <a:pPr algn="l" indent="0" marL="0">
-              <a:spcAft>
-                <a:spcPts val="800"/>
-              </a:spcAft>
-              <a:buNone/>
-            </a:pPr>
-            <a:r>
-              <a:rPr lang="en-US" sz="1200" dirty="0">
+            <a:pPr indent="0" marL="0">
+              <a:buNone/>
+            </a:pPr>
+            <a:r>
+              <a:rPr lang="en-US" sz="1150" dirty="0">
                 <a:solidFill>
                   <a:srgbClr val="495057"/>
                 </a:solidFill>
@@ -7475,14 +7985,11 @@
               </a:rPr>
               <a:t>• Materiales de oficina e impresiones de prueba: </a:t>
             </a:r>
-            <a:pPr algn="l" indent="0" marL="0">
-              <a:spcAft>
-                <a:spcPts val="800"/>
-              </a:spcAft>
-              <a:buNone/>
-            </a:pPr>
-            <a:r>
-              <a:rPr lang="en-US" sz="1200" b="1" dirty="0">
+            <a:pPr indent="0" marL="0">
+              <a:buNone/>
+            </a:pPr>
+            <a:r>
+              <a:rPr lang="en-US" sz="1150" b="1" dirty="0">
                 <a:solidFill>
                   <a:srgbClr val="212529"/>
                 </a:solidFill>
@@ -7493,47 +8000,41 @@
               <a:t>50 Bs.
 </a:t>
             </a:r>
-            <a:pPr algn="l" indent="0" marL="0">
-              <a:spcAft>
-                <a:spcPts val="800"/>
-              </a:spcAft>
+            <a:pPr indent="0" marL="0">
+              <a:buNone/>
+            </a:pPr>
+            <a:r>
+              <a:rPr lang="en-US" sz="1250" b="1" dirty="0">
+                <a:solidFill>
+                  <a:srgbClr val="0B7285"/>
+                </a:solidFill>
+                <a:latin typeface="Arial" pitchFamily="34" charset="0"/>
+                <a:ea typeface="Arial" pitchFamily="34" charset="-122"/>
+                <a:cs typeface="Arial" pitchFamily="34" charset="-120"/>
+              </a:rPr>
+              <a:t>TOTAL COSTOS VARIABLES: </a:t>
+            </a:r>
+            <a:pPr indent="0" marL="0">
               <a:buNone/>
             </a:pPr>
             <a:r>
               <a:rPr lang="en-US" sz="1300" b="1" dirty="0">
                 <a:solidFill>
-                  <a:srgbClr val="0B7285"/>
-                </a:solidFill>
-                <a:latin typeface="Arial" pitchFamily="34" charset="0"/>
-                <a:ea typeface="Arial" pitchFamily="34" charset="-122"/>
-                <a:cs typeface="Arial" pitchFamily="34" charset="-120"/>
-              </a:rPr>
-              <a:t>TOTAL COSTOS VARIABLES: </a:t>
-            </a:r>
-            <a:pPr algn="l" indent="0" marL="0">
-              <a:spcAft>
-                <a:spcPts val="800"/>
-              </a:spcAft>
-              <a:buNone/>
-            </a:pPr>
-            <a:r>
-              <a:rPr lang="en-US" sz="1400" b="1" dirty="0">
-                <a:solidFill>
                   <a:srgbClr val="212529"/>
                 </a:solidFill>
                 <a:latin typeface="Arial" pitchFamily="34" charset="0"/>
                 <a:ea typeface="Arial" pitchFamily="34" charset="-122"/>
                 <a:cs typeface="Arial" pitchFamily="34" charset="-120"/>
               </a:rPr>
-              <a:t>150 Bs. (Flexibles)</a:t>
-            </a:r>
-            <a:endParaRPr lang="en-US" sz="1200" dirty="0"/>
+              <a:t>150 Bs. (Opcionales)</a:t>
+            </a:r>
+            <a:endParaRPr lang="en-US" sz="1150" dirty="0"/>
           </a:p>
         </p:txBody>
       </p:sp>
       <p:sp>
         <p:nvSpPr>
-          <p:cNvPr id="15" name="Shape 13"/>
+          <p:cNvPr id="18" name="Shape 16"/>
           <p:cNvSpPr/>
           <p:nvPr/>
         </p:nvSpPr>
@@ -7548,9 +8049,9 @@
           <a:solidFill>
             <a:srgbClr val="FFFFFF"/>
           </a:solidFill>
-          <a:ln w="19050">
+          <a:ln w="12700">
             <a:solidFill>
-              <a:srgbClr val="DEE2E6"/>
+              <a:srgbClr val="E2E8F0"/>
             </a:solidFill>
             <a:prstDash val="solid"/>
           </a:ln>
@@ -7558,14 +8059,34 @@
       </p:sp>
       <p:sp>
         <p:nvSpPr>
-          <p:cNvPr id="16" name="Text 14"/>
-          <p:cNvSpPr/>
-          <p:nvPr/>
-        </p:nvSpPr>
-        <p:spPr>
-          <a:xfrm>
-            <a:off x="6446520" y="4069080"/>
-            <a:ext cx="4754880" cy="365760"/>
+          <p:cNvPr id="19" name="Shape 17"/>
+          <p:cNvSpPr/>
+          <p:nvPr/>
+        </p:nvSpPr>
+        <p:spPr>
+          <a:xfrm>
+            <a:off x="6263640" y="3886200"/>
+            <a:ext cx="5120640" cy="73152"/>
+          </a:xfrm>
+          <a:prstGeom prst="rect">
+            <a:avLst/>
+          </a:prstGeom>
+          <a:solidFill>
+            <a:srgbClr val="0B7285"/>
+          </a:solidFill>
+          <a:ln/>
+        </p:spPr>
+      </p:sp>
+      <p:sp>
+        <p:nvSpPr>
+          <p:cNvPr id="20" name="Text 18"/>
+          <p:cNvSpPr/>
+          <p:nvPr/>
+        </p:nvSpPr>
+        <p:spPr>
+          <a:xfrm>
+            <a:off x="6492240" y="4087368"/>
+            <a:ext cx="4663440" cy="347472"/>
           </a:xfrm>
           <a:prstGeom prst="rect">
             <a:avLst/>
@@ -7581,7 +8102,7 @@
               <a:buNone/>
             </a:pPr>
             <a:r>
-              <a:rPr lang="en-US" sz="1600" b="1" dirty="0">
+              <a:rPr lang="en-US" sz="1450" b="1" dirty="0">
                 <a:solidFill>
                   <a:srgbClr val="0B7285"/>
                 </a:solidFill>
@@ -7591,20 +8112,20 @@
               </a:rPr>
               <a:t>2.3.4. Costos Fijos (Mano de Obra)</a:t>
             </a:r>
-            <a:endParaRPr lang="en-US" sz="1600" dirty="0"/>
+            <a:endParaRPr lang="en-US" sz="1450" dirty="0"/>
           </a:p>
         </p:txBody>
       </p:sp>
       <p:sp>
         <p:nvSpPr>
-          <p:cNvPr id="17" name="Text 15"/>
-          <p:cNvSpPr/>
-          <p:nvPr/>
-        </p:nvSpPr>
-        <p:spPr>
-          <a:xfrm>
-            <a:off x="6446520" y="4480560"/>
-            <a:ext cx="4754880" cy="1645920"/>
+          <p:cNvPr id="21" name="Text 19"/>
+          <p:cNvSpPr/>
+          <p:nvPr/>
+        </p:nvSpPr>
+        <p:spPr>
+          <a:xfrm>
+            <a:off x="6492240" y="4526280"/>
+            <a:ext cx="4663440" cy="1645920"/>
           </a:xfrm>
           <a:prstGeom prst="rect">
             <a:avLst/>
@@ -7613,17 +8134,14 @@
           <a:ln/>
         </p:spPr>
         <p:txBody>
-          <a:bodyPr wrap="square" rtlCol="0" anchor="t"/>
+          <a:bodyPr wrap="square" rtlCol="0" anchor="ctr"/>
           <a:lstStyle/>
           <a:p>
-            <a:pPr algn="l" indent="0" marL="0">
-              <a:spcAft>
-                <a:spcPts val="800"/>
-              </a:spcAft>
-              <a:buNone/>
-            </a:pPr>
-            <a:r>
-              <a:rPr lang="en-US" sz="1200" dirty="0">
+            <a:pPr indent="0" marL="0">
+              <a:buNone/>
+            </a:pPr>
+            <a:r>
+              <a:rPr lang="en-US" sz="1150" dirty="0">
                 <a:solidFill>
                   <a:srgbClr val="495057"/>
                 </a:solidFill>
@@ -7631,16 +8149,13 @@
                 <a:ea typeface="Arial" pitchFamily="34" charset="-122"/>
                 <a:cs typeface="Arial" pitchFamily="34" charset="-120"/>
               </a:rPr>
-              <a:t>• Estimación de horas de trabajo: </a:t>
-            </a:r>
-            <a:pPr algn="l" indent="0" marL="0">
-              <a:spcAft>
-                <a:spcPts val="800"/>
-              </a:spcAft>
-              <a:buNone/>
-            </a:pPr>
-            <a:r>
-              <a:rPr lang="en-US" sz="1200" b="1" dirty="0">
+              <a:t>• Horas de trabajo estimadas: </a:t>
+            </a:r>
+            <a:pPr indent="0" marL="0">
+              <a:buNone/>
+            </a:pPr>
+            <a:r>
+              <a:rPr lang="en-US" sz="1150" b="1" dirty="0">
                 <a:solidFill>
                   <a:srgbClr val="212529"/>
                 </a:solidFill>
@@ -7651,14 +8166,11 @@
               <a:t>120 Horas
 </a:t>
             </a:r>
-            <a:pPr algn="l" indent="0" marL="0">
-              <a:spcAft>
-                <a:spcPts val="800"/>
-              </a:spcAft>
-              <a:buNone/>
-            </a:pPr>
-            <a:r>
-              <a:rPr lang="en-US" sz="1200" dirty="0">
+            <a:pPr indent="0" marL="0">
+              <a:buNone/>
+            </a:pPr>
+            <a:r>
+              <a:rPr lang="en-US" sz="1150" dirty="0">
                 <a:solidFill>
                   <a:srgbClr val="495057"/>
                 </a:solidFill>
@@ -7666,16 +8178,13 @@
                 <a:ea typeface="Arial" pitchFamily="34" charset="-122"/>
                 <a:cs typeface="Arial" pitchFamily="34" charset="-120"/>
               </a:rPr>
-              <a:t>• Valor hora programador junior (simulado): </a:t>
-            </a:r>
-            <a:pPr algn="l" indent="0" marL="0">
-              <a:spcAft>
-                <a:spcPts val="800"/>
-              </a:spcAft>
-              <a:buNone/>
-            </a:pPr>
-            <a:r>
-              <a:rPr lang="en-US" sz="1200" b="1" dirty="0">
+              <a:t>• Valor hora desarrollador junior (simulado): </a:t>
+            </a:r>
+            <a:pPr indent="0" marL="0">
+              <a:buNone/>
+            </a:pPr>
+            <a:r>
+              <a:rPr lang="en-US" sz="1150" b="1" dirty="0">
                 <a:solidFill>
                   <a:srgbClr val="212529"/>
                 </a:solidFill>
@@ -7686,14 +8195,11 @@
               <a:t>20 Bs. / hora
 </a:t>
             </a:r>
-            <a:pPr algn="l" indent="0" marL="0">
-              <a:spcAft>
-                <a:spcPts val="800"/>
-              </a:spcAft>
-              <a:buNone/>
-            </a:pPr>
-            <a:r>
-              <a:rPr lang="en-US" sz="1300" b="1" dirty="0">
+            <a:pPr indent="0" marL="0">
+              <a:buNone/>
+            </a:pPr>
+            <a:r>
+              <a:rPr lang="en-US" sz="1250" b="1" dirty="0">
                 <a:solidFill>
                   <a:srgbClr val="0B7285"/>
                 </a:solidFill>
@@ -7703,14 +8209,11 @@
               </a:rPr>
               <a:t>VALOR SIMULADO DE DESARROLLO: </a:t>
             </a:r>
-            <a:pPr algn="l" indent="0" marL="0">
-              <a:spcAft>
-                <a:spcPts val="800"/>
-              </a:spcAft>
-              <a:buNone/>
-            </a:pPr>
-            <a:r>
-              <a:rPr lang="en-US" sz="1600" b="1" dirty="0">
+            <a:pPr indent="0" marL="0">
+              <a:buNone/>
+            </a:pPr>
+            <a:r>
+              <a:rPr lang="en-US" sz="1500" b="1" dirty="0">
                 <a:solidFill>
                   <a:srgbClr val="0B7285"/>
                 </a:solidFill>
@@ -7720,7 +8223,7 @@
               </a:rPr>
               <a:t>2,400 Bs.</a:t>
             </a:r>
-            <a:endParaRPr lang="en-US" sz="1200" dirty="0"/>
+            <a:endParaRPr lang="en-US" sz="1150" dirty="0"/>
           </a:p>
         </p:txBody>
       </p:sp>
@@ -7738,7 +8241,7 @@
     <p:bg>
       <p:bgPr>
         <a:solidFill>
-          <a:srgbClr val="F8F9FA"/>
+          <a:srgbClr val="F4F6F8"/>
         </a:solidFill>
       </p:bgPr>
     </p:bg>
@@ -7765,7 +8268,7 @@
         <p:spPr>
           <a:xfrm>
             <a:off x="0" y="0"/>
-            <a:ext cx="9144000" cy="1005840"/>
+            <a:ext cx="12191695" cy="1051560"/>
           </a:xfrm>
           <a:prstGeom prst="rect">
             <a:avLst/>
@@ -7775,7 +8278,7 @@
           </a:solidFill>
           <a:ln w="12700">
             <a:solidFill>
-              <a:srgbClr val="DEE2E6"/>
+              <a:srgbClr val="E2E8F0"/>
             </a:solidFill>
             <a:prstDash val="solid"/>
           </a:ln>
@@ -7789,8 +8292,8 @@
         </p:nvSpPr>
         <p:spPr>
           <a:xfrm>
-            <a:off x="0" y="0"/>
-            <a:ext cx="228600" cy="1005840"/>
+            <a:off x="731520" y="256032"/>
+            <a:ext cx="91440" cy="530352"/>
           </a:xfrm>
           <a:prstGeom prst="rect">
             <a:avLst/>
@@ -7809,8 +8312,8 @@
         </p:nvSpPr>
         <p:spPr>
           <a:xfrm>
-            <a:off x="548640" y="137160"/>
-            <a:ext cx="10972800" cy="274320"/>
+            <a:off x="960120" y="201168"/>
+            <a:ext cx="10058400" cy="228600"/>
           </a:xfrm>
           <a:prstGeom prst="rect">
             <a:avLst/>
@@ -7826,7 +8329,7 @@
               <a:buNone/>
             </a:pPr>
             <a:r>
-              <a:rPr lang="en-US" sz="1100" b="1" dirty="0">
+              <a:rPr lang="en-US" sz="1050" b="1" dirty="0">
                 <a:solidFill>
                   <a:srgbClr val="FF922B"/>
                 </a:solidFill>
@@ -7836,7 +8339,7 @@
               </a:rPr>
               <a:t>DEMOSTRACIÓN</a:t>
             </a:r>
-            <a:endParaRPr lang="en-US" sz="1100" dirty="0"/>
+            <a:endParaRPr lang="en-US" sz="1050" dirty="0"/>
           </a:p>
         </p:txBody>
       </p:sp>
@@ -7848,8 +8351,8 @@
         </p:nvSpPr>
         <p:spPr>
           <a:xfrm>
-            <a:off x="548640" y="411480"/>
-            <a:ext cx="10972800" cy="502920"/>
+            <a:off x="960120" y="429768"/>
+            <a:ext cx="10058400" cy="457200"/>
           </a:xfrm>
           <a:prstGeom prst="rect">
             <a:avLst/>
@@ -7865,7 +8368,7 @@
               <a:buNone/>
             </a:pPr>
             <a:r>
-              <a:rPr lang="en-US" sz="2400" b="1" dirty="0">
+              <a:rPr lang="en-US" sz="2200" b="1" dirty="0">
                 <a:solidFill>
                   <a:srgbClr val="212529"/>
                 </a:solidFill>
@@ -7873,9 +8376,9 @@
                 <a:ea typeface="Arial" pitchFamily="34" charset="-122"/>
                 <a:cs typeface="Arial" pitchFamily="34" charset="-120"/>
               </a:rPr>
-              <a:t>3. ¿Cómo Funciona? - Arquitectura y Flujo de Roles</a:t>
-            </a:r>
-            <a:endParaRPr lang="en-US" sz="2400" dirty="0"/>
+              <a:t>3. ¿Cómo Funciona? - Arquitectura y Roles</a:t>
+            </a:r>
+            <a:endParaRPr lang="en-US" sz="2200" dirty="0"/>
           </a:p>
         </p:txBody>
       </p:sp>
@@ -7887,8 +8390,8 @@
         </p:nvSpPr>
         <p:spPr>
           <a:xfrm>
-            <a:off x="731520" y="1280160"/>
-            <a:ext cx="3383280" cy="5029200"/>
+            <a:off x="731520" y="1261872"/>
+            <a:ext cx="10698480" cy="960120"/>
           </a:xfrm>
           <a:prstGeom prst="rect">
             <a:avLst/>
@@ -7898,7 +8401,7 @@
           </a:solidFill>
           <a:ln w="19050">
             <a:solidFill>
-              <a:srgbClr val="DEE2E6"/>
+              <a:srgbClr val="1098AD"/>
             </a:solidFill>
             <a:prstDash val="solid"/>
           </a:ln>
@@ -7912,8 +8415,8 @@
         </p:nvSpPr>
         <p:spPr>
           <a:xfrm>
-            <a:off x="960120" y="1463040"/>
-            <a:ext cx="2926080" cy="365760"/>
+            <a:off x="1005840" y="1353312"/>
+            <a:ext cx="10149840" cy="228600"/>
           </a:xfrm>
           <a:prstGeom prst="rect">
             <a:avLst/>
@@ -7929,7 +8432,7 @@
               <a:buNone/>
             </a:pPr>
             <a:r>
-              <a:rPr lang="en-US" sz="1600" b="1" dirty="0">
+              <a:rPr lang="en-US" sz="1100" b="1" dirty="0">
                 <a:solidFill>
                   <a:srgbClr val="0B7285"/>
                 </a:solidFill>
@@ -7937,9 +8440,9 @@
                 <a:ea typeface="Arial" pitchFamily="34" charset="-122"/>
                 <a:cs typeface="Arial" pitchFamily="34" charset="-120"/>
               </a:rPr>
-              <a:t>👤 Rol Invitado (Público)</a:t>
-            </a:r>
-            <a:endParaRPr lang="en-US" sz="1600" dirty="0"/>
+              <a:t>ARQUITECTURA CLIENTE-SERVIDOR DESACOPLADA (FULL-STACK):</a:t>
+            </a:r>
+            <a:endParaRPr lang="en-US" sz="1100" dirty="0"/>
           </a:p>
         </p:txBody>
       </p:sp>
@@ -7951,8 +8454,8 @@
         </p:nvSpPr>
         <p:spPr>
           <a:xfrm>
-            <a:off x="960120" y="1874520"/>
-            <a:ext cx="2926080" cy="4251960"/>
+            <a:off x="1005840" y="1591056"/>
+            <a:ext cx="10149840" cy="502920"/>
           </a:xfrm>
           <a:prstGeom prst="rect">
             <a:avLst/>
@@ -7961,17 +8464,14 @@
           <a:ln/>
         </p:spPr>
         <p:txBody>
-          <a:bodyPr wrap="square" rtlCol="0" anchor="t"/>
+          <a:bodyPr wrap="square" rtlCol="0" anchor="ctr"/>
           <a:lstStyle/>
           <a:p>
-            <a:pPr algn="l" indent="0" marL="0">
-              <a:spcAft>
-                <a:spcPts val="800"/>
-              </a:spcAft>
-              <a:buNone/>
-            </a:pPr>
-            <a:r>
-              <a:rPr lang="en-US" sz="1300" b="1" dirty="0">
+            <a:pPr indent="0" marL="0">
+              <a:buNone/>
+            </a:pPr>
+            <a:r>
+              <a:rPr lang="en-US" sz="1150" b="1" dirty="0">
                 <a:solidFill>
                   <a:srgbClr val="212529"/>
                 </a:solidFill>
@@ -7979,87 +8479,9 @@
                 <a:ea typeface="Arial" pitchFamily="34" charset="-122"/>
                 <a:cs typeface="Arial" pitchFamily="34" charset="-120"/>
               </a:rPr>
-              <a:t>Acceso Inmediato sin Registro:
-</a:t>
-            </a:r>
-            <a:pPr algn="l" indent="0" marL="0">
-              <a:spcAft>
-                <a:spcPts val="800"/>
-              </a:spcAft>
-              <a:buNone/>
-            </a:pPr>
-            <a:r>
-              <a:rPr lang="en-US" sz="1250" dirty="0">
-                <a:solidFill>
-                  <a:srgbClr val="495057"/>
-                </a:solidFill>
-                <a:latin typeface="Arial" pitchFamily="34" charset="0"/>
-                <a:ea typeface="Arial" pitchFamily="34" charset="-122"/>
-                <a:cs typeface="Arial" pitchFamily="34" charset="-120"/>
-              </a:rPr>
-              <a:t>• Navega por todas las publicaciones de mascotas perdidas y encontradas.</a:t>
-            </a:r>
-            <a:endParaRPr lang="en-US" sz="1300" dirty="0"/>
-          </a:p>
-          <a:p>
-            <a:pPr algn="l" indent="0" marL="0">
-              <a:spcAft>
-                <a:spcPts val="800"/>
-              </a:spcAft>
-              <a:buNone/>
-            </a:pPr>
-            <a:r>
-              <a:rPr lang="en-US" sz="1250" dirty="0">
-                <a:solidFill>
-                  <a:srgbClr val="495057"/>
-                </a:solidFill>
-                <a:latin typeface="Arial" pitchFamily="34" charset="0"/>
-                <a:ea typeface="Arial" pitchFamily="34" charset="-122"/>
-                <a:cs typeface="Arial" pitchFamily="34" charset="-120"/>
-              </a:rPr>
-              <a:t>• Utiliza el buscador interactivo para filtrar por zona o nombre en tiempo real.</a:t>
-            </a:r>
-            <a:endParaRPr lang="en-US" sz="1300" dirty="0"/>
-          </a:p>
-          <a:p>
-            <a:pPr algn="l" indent="0" marL="0">
-              <a:spcAft>
-                <a:spcPts val="800"/>
-              </a:spcAft>
-              <a:buNone/>
-            </a:pPr>
-            <a:r>
-              <a:rPr lang="en-US" sz="1250" dirty="0">
-                <a:solidFill>
-                  <a:srgbClr val="495057"/>
-                </a:solidFill>
-                <a:latin typeface="Arial" pitchFamily="34" charset="0"/>
-                <a:ea typeface="Arial" pitchFamily="34" charset="-122"/>
-                <a:cs typeface="Arial" pitchFamily="34" charset="-120"/>
-              </a:rPr>
-              <a:t>• Lee comentarios y pistas aportadas por la comunidad.</a:t>
-            </a:r>
-            <a:endParaRPr lang="en-US" sz="1300" dirty="0"/>
-          </a:p>
-          <a:p>
-            <a:pPr algn="l" indent="0" marL="0">
-              <a:spcAft>
-                <a:spcPts val="800"/>
-              </a:spcAft>
-              <a:buNone/>
-            </a:pPr>
-            <a:r>
-              <a:rPr lang="en-US" sz="1250" dirty="0">
-                <a:solidFill>
-                  <a:srgbClr val="495057"/>
-                </a:solidFill>
-                <a:latin typeface="Arial" pitchFamily="34" charset="0"/>
-                <a:ea typeface="Arial" pitchFamily="34" charset="-122"/>
-                <a:cs typeface="Arial" pitchFamily="34" charset="-120"/>
-              </a:rPr>
-              <a:t>• Visualiza teléfonos de contacto directo para avisar a los dueños.</a:t>
-            </a:r>
-            <a:endParaRPr lang="en-US" sz="1300" dirty="0"/>
+              <a:t>Frontend nativo (HTML5 / CSS3 / JS) ⟷ API REST segura (JSON / multipart) ⟷ Backend (Node.js + Express) ⟷ Base de Datos (SQLite3)</a:t>
+            </a:r>
+            <a:endParaRPr lang="en-US" sz="1150" dirty="0"/>
           </a:p>
         </p:txBody>
       </p:sp>
@@ -8071,8 +8493,8 @@
         </p:nvSpPr>
         <p:spPr>
           <a:xfrm>
-            <a:off x="4389120" y="1280160"/>
-            <a:ext cx="3383280" cy="5029200"/>
+            <a:off x="731520" y="2377440"/>
+            <a:ext cx="3364992" cy="3931920"/>
           </a:xfrm>
           <a:prstGeom prst="rect">
             <a:avLst/>
@@ -8080,9 +8502,9 @@
           <a:solidFill>
             <a:srgbClr val="FFFFFF"/>
           </a:solidFill>
-          <a:ln w="19050">
+          <a:ln w="12700">
             <a:solidFill>
-              <a:srgbClr val="DEE2E6"/>
+              <a:srgbClr val="E2E8F0"/>
             </a:solidFill>
             <a:prstDash val="solid"/>
           </a:ln>
@@ -8090,14 +8512,34 @@
       </p:sp>
       <p:sp>
         <p:nvSpPr>
-          <p:cNvPr id="10" name="Text 8"/>
-          <p:cNvSpPr/>
-          <p:nvPr/>
-        </p:nvSpPr>
-        <p:spPr>
-          <a:xfrm>
-            <a:off x="4617720" y="1463040"/>
-            <a:ext cx="2926080" cy="365760"/>
+          <p:cNvPr id="10" name="Shape 8"/>
+          <p:cNvSpPr/>
+          <p:nvPr/>
+        </p:nvSpPr>
+        <p:spPr>
+          <a:xfrm>
+            <a:off x="777240" y="2377440"/>
+            <a:ext cx="3273552" cy="73152"/>
+          </a:xfrm>
+          <a:prstGeom prst="rect">
+            <a:avLst/>
+          </a:prstGeom>
+          <a:solidFill>
+            <a:srgbClr val="1098AD"/>
+          </a:solidFill>
+          <a:ln/>
+        </p:spPr>
+      </p:sp>
+      <p:sp>
+        <p:nvSpPr>
+          <p:cNvPr id="11" name="Text 9"/>
+          <p:cNvSpPr/>
+          <p:nvPr/>
+        </p:nvSpPr>
+        <p:spPr>
+          <a:xfrm>
+            <a:off x="1005840" y="2578608"/>
+            <a:ext cx="2816352" cy="347472"/>
           </a:xfrm>
           <a:prstGeom prst="rect">
             <a:avLst/>
@@ -8113,7 +8555,7 @@
               <a:buNone/>
             </a:pPr>
             <a:r>
-              <a:rPr lang="en-US" sz="1600" b="1" dirty="0">
+              <a:rPr lang="en-US" sz="1450" b="1" dirty="0">
                 <a:solidFill>
                   <a:srgbClr val="0B7285"/>
                 </a:solidFill>
@@ -8121,22 +8563,22 @@
                 <a:ea typeface="Arial" pitchFamily="34" charset="-122"/>
                 <a:cs typeface="Arial" pitchFamily="34" charset="-120"/>
               </a:rPr>
-              <a:t>🐾 Rol Usuario Registrado</a:t>
-            </a:r>
-            <a:endParaRPr lang="en-US" sz="1600" dirty="0"/>
+              <a:t>👤 Rol Invitado (Público)</a:t>
+            </a:r>
+            <a:endParaRPr lang="en-US" sz="1450" dirty="0"/>
           </a:p>
         </p:txBody>
       </p:sp>
       <p:sp>
         <p:nvSpPr>
-          <p:cNvPr id="11" name="Text 9"/>
-          <p:cNvSpPr/>
-          <p:nvPr/>
-        </p:nvSpPr>
-        <p:spPr>
-          <a:xfrm>
-            <a:off x="4617720" y="1874520"/>
-            <a:ext cx="2926080" cy="4251960"/>
+          <p:cNvPr id="12" name="Text 10"/>
+          <p:cNvSpPr/>
+          <p:nvPr/>
+        </p:nvSpPr>
+        <p:spPr>
+          <a:xfrm>
+            <a:off x="960120" y="2971800"/>
+            <a:ext cx="2907792" cy="3200400"/>
           </a:xfrm>
           <a:prstGeom prst="rect">
             <a:avLst/>
@@ -8145,17 +8587,14 @@
           <a:ln/>
         </p:spPr>
         <p:txBody>
-          <a:bodyPr wrap="square" rtlCol="0" anchor="t"/>
+          <a:bodyPr wrap="square" rtlCol="0" anchor="ctr"/>
           <a:lstStyle/>
           <a:p>
-            <a:pPr algn="l" indent="0" marL="0">
-              <a:spcAft>
-                <a:spcPts val="800"/>
-              </a:spcAft>
-              <a:buNone/>
-            </a:pPr>
-            <a:r>
-              <a:rPr lang="en-US" sz="1300" b="1" dirty="0">
+            <a:pPr indent="0" marL="0">
+              <a:buNone/>
+            </a:pPr>
+            <a:r>
+              <a:rPr lang="en-US" sz="1150" b="1" dirty="0">
                 <a:solidFill>
                   <a:srgbClr val="212529"/>
                 </a:solidFill>
@@ -8163,17 +8602,14 @@
                 <a:ea typeface="Arial" pitchFamily="34" charset="-122"/>
                 <a:cs typeface="Arial" pitchFamily="34" charset="-120"/>
               </a:rPr>
-              <a:t>Gestión y Publicación:
+              <a:t>Modo Observador sin Registro:
 </a:t>
             </a:r>
-            <a:pPr algn="l" indent="0" marL="0">
-              <a:spcAft>
-                <a:spcPts val="800"/>
-              </a:spcAft>
-              <a:buNone/>
-            </a:pPr>
-            <a:r>
-              <a:rPr lang="en-US" sz="1250" dirty="0">
+            <a:pPr indent="0" marL="0">
+              <a:buNone/>
+            </a:pPr>
+            <a:r>
+              <a:rPr lang="en-US" sz="1100" dirty="0">
                 <a:solidFill>
                   <a:srgbClr val="495057"/>
                 </a:solidFill>
@@ -8181,19 +8617,16 @@
                 <a:ea typeface="Arial" pitchFamily="34" charset="-122"/>
                 <a:cs typeface="Arial" pitchFamily="34" charset="-120"/>
               </a:rPr>
-              <a:t>• Registro seguro con contraseña encriptada y Token JWT.</a:t>
-            </a:r>
-            <a:endParaRPr lang="en-US" sz="1300" dirty="0"/>
-          </a:p>
-          <a:p>
-            <a:pPr algn="l" indent="0" marL="0">
-              <a:spcAft>
-                <a:spcPts val="800"/>
-              </a:spcAft>
-              <a:buNone/>
-            </a:pPr>
-            <a:r>
-              <a:rPr lang="en-US" sz="1250" dirty="0">
+              <a:t>• Explora el catálogo de mascotas perdidas y encontradas.</a:t>
+            </a:r>
+            <a:endParaRPr lang="en-US" sz="1150" dirty="0"/>
+          </a:p>
+          <a:p>
+            <a:pPr indent="0" marL="0">
+              <a:buNone/>
+            </a:pPr>
+            <a:r>
+              <a:rPr lang="en-US" sz="1100" dirty="0">
                 <a:solidFill>
                   <a:srgbClr val="495057"/>
                 </a:solidFill>
@@ -8201,19 +8634,16 @@
                 <a:ea typeface="Arial" pitchFamily="34" charset="-122"/>
                 <a:cs typeface="Arial" pitchFamily="34" charset="-120"/>
               </a:rPr>
-              <a:t>• Publica reportes con fotografía real, ubicación y recompensa.</a:t>
-            </a:r>
-            <a:endParaRPr lang="en-US" sz="1300" dirty="0"/>
-          </a:p>
-          <a:p>
-            <a:pPr algn="l" indent="0" marL="0">
-              <a:spcAft>
-                <a:spcPts val="800"/>
-              </a:spcAft>
-              <a:buNone/>
-            </a:pPr>
-            <a:r>
-              <a:rPr lang="en-US" sz="1250" dirty="0">
+              <a:t>• Utiliza el buscador en tiempo real por zona o nombre.</a:t>
+            </a:r>
+            <a:endParaRPr lang="en-US" sz="1150" dirty="0"/>
+          </a:p>
+          <a:p>
+            <a:pPr indent="0" marL="0">
+              <a:buNone/>
+            </a:pPr>
+            <a:r>
+              <a:rPr lang="en-US" sz="1100" dirty="0">
                 <a:solidFill>
                   <a:srgbClr val="495057"/>
                 </a:solidFill>
@@ -8221,19 +8651,16 @@
                 <a:ea typeface="Arial" pitchFamily="34" charset="-122"/>
                 <a:cs typeface="Arial" pitchFamily="34" charset="-120"/>
               </a:rPr>
-              <a:t>• Edita sus publicaciones y reemplaza la foto con vista previa en vivo.</a:t>
-            </a:r>
-            <a:endParaRPr lang="en-US" sz="1300" dirty="0"/>
-          </a:p>
-          <a:p>
-            <a:pPr algn="l" indent="0" marL="0">
-              <a:spcAft>
-                <a:spcPts val="800"/>
-              </a:spcAft>
-              <a:buNone/>
-            </a:pPr>
-            <a:r>
-              <a:rPr lang="en-US" sz="1250" dirty="0">
+              <a:t>• Visualiza teléfonos de contacto directo para avisar a familias.</a:t>
+            </a:r>
+            <a:endParaRPr lang="en-US" sz="1150" dirty="0"/>
+          </a:p>
+          <a:p>
+            <a:pPr indent="0" marL="0">
+              <a:buNone/>
+            </a:pPr>
+            <a:r>
+              <a:rPr lang="en-US" sz="1100" dirty="0">
                 <a:solidFill>
                   <a:srgbClr val="495057"/>
                 </a:solidFill>
@@ -8241,42 +8668,22 @@
                 <a:ea typeface="Arial" pitchFamily="34" charset="-122"/>
                 <a:cs typeface="Arial" pitchFamily="34" charset="-120"/>
               </a:rPr>
-              <a:t>• Alterna estado entre "Perdido" y "Encontrado".</a:t>
-            </a:r>
-            <a:endParaRPr lang="en-US" sz="1300" dirty="0"/>
-          </a:p>
-          <a:p>
-            <a:pPr algn="l" indent="0" marL="0">
-              <a:spcAft>
-                <a:spcPts val="800"/>
-              </a:spcAft>
-              <a:buNone/>
-            </a:pPr>
-            <a:r>
-              <a:rPr lang="en-US" sz="1250" dirty="0">
-                <a:solidFill>
-                  <a:srgbClr val="495057"/>
-                </a:solidFill>
-                <a:latin typeface="Arial" pitchFamily="34" charset="0"/>
-                <a:ea typeface="Arial" pitchFamily="34" charset="-122"/>
-                <a:cs typeface="Arial" pitchFamily="34" charset="-120"/>
-              </a:rPr>
-              <a:t>• Comenta en los anuncios de otros vecinos.</a:t>
-            </a:r>
-            <a:endParaRPr lang="en-US" sz="1300" dirty="0"/>
+              <a:t>• Lee comentarios y pistas de la comunidad.</a:t>
+            </a:r>
+            <a:endParaRPr lang="en-US" sz="1150" dirty="0"/>
           </a:p>
         </p:txBody>
       </p:sp>
       <p:sp>
         <p:nvSpPr>
-          <p:cNvPr id="12" name="Shape 10"/>
-          <p:cNvSpPr/>
-          <p:nvPr/>
-        </p:nvSpPr>
-        <p:spPr>
-          <a:xfrm>
-            <a:off x="8046720" y="1280160"/>
-            <a:ext cx="3383280" cy="5029200"/>
+          <p:cNvPr id="13" name="Shape 11"/>
+          <p:cNvSpPr/>
+          <p:nvPr/>
+        </p:nvSpPr>
+        <p:spPr>
+          <a:xfrm>
+            <a:off x="4398264" y="2377440"/>
+            <a:ext cx="3364992" cy="3931920"/>
           </a:xfrm>
           <a:prstGeom prst="rect">
             <a:avLst/>
@@ -8284,9 +8691,9 @@
           <a:solidFill>
             <a:srgbClr val="FFFFFF"/>
           </a:solidFill>
-          <a:ln w="19050">
+          <a:ln w="12700">
             <a:solidFill>
-              <a:srgbClr val="DEE2E6"/>
+              <a:srgbClr val="E2E8F0"/>
             </a:solidFill>
             <a:prstDash val="solid"/>
           </a:ln>
@@ -8294,14 +8701,34 @@
       </p:sp>
       <p:sp>
         <p:nvSpPr>
-          <p:cNvPr id="13" name="Text 11"/>
-          <p:cNvSpPr/>
-          <p:nvPr/>
-        </p:nvSpPr>
-        <p:spPr>
-          <a:xfrm>
-            <a:off x="8275320" y="1463040"/>
-            <a:ext cx="2926080" cy="365760"/>
+          <p:cNvPr id="14" name="Shape 12"/>
+          <p:cNvSpPr/>
+          <p:nvPr/>
+        </p:nvSpPr>
+        <p:spPr>
+          <a:xfrm>
+            <a:off x="4443984" y="2377440"/>
+            <a:ext cx="3273552" cy="73152"/>
+          </a:xfrm>
+          <a:prstGeom prst="rect">
+            <a:avLst/>
+          </a:prstGeom>
+          <a:solidFill>
+            <a:srgbClr val="FF922B"/>
+          </a:solidFill>
+          <a:ln/>
+        </p:spPr>
+      </p:sp>
+      <p:sp>
+        <p:nvSpPr>
+          <p:cNvPr id="15" name="Text 13"/>
+          <p:cNvSpPr/>
+          <p:nvPr/>
+        </p:nvSpPr>
+        <p:spPr>
+          <a:xfrm>
+            <a:off x="4672584" y="2578608"/>
+            <a:ext cx="2816352" cy="347472"/>
           </a:xfrm>
           <a:prstGeom prst="rect">
             <a:avLst/>
@@ -8317,7 +8744,7 @@
               <a:buNone/>
             </a:pPr>
             <a:r>
-              <a:rPr lang="en-US" sz="1600" b="1" dirty="0">
+              <a:rPr lang="en-US" sz="1450" b="1" dirty="0">
                 <a:solidFill>
                   <a:srgbClr val="0B7285"/>
                 </a:solidFill>
@@ -8325,22 +8752,22 @@
                 <a:ea typeface="Arial" pitchFamily="34" charset="-122"/>
                 <a:cs typeface="Arial" pitchFamily="34" charset="-120"/>
               </a:rPr>
-              <a:t>⚙️ Rol Administrador</a:t>
-            </a:r>
-            <a:endParaRPr lang="en-US" sz="1600" dirty="0"/>
+              <a:t>🐾 Usuario Registrado</a:t>
+            </a:r>
+            <a:endParaRPr lang="en-US" sz="1450" dirty="0"/>
           </a:p>
         </p:txBody>
       </p:sp>
       <p:sp>
         <p:nvSpPr>
-          <p:cNvPr id="14" name="Text 12"/>
-          <p:cNvSpPr/>
-          <p:nvPr/>
-        </p:nvSpPr>
-        <p:spPr>
-          <a:xfrm>
-            <a:off x="8275320" y="1874520"/>
-            <a:ext cx="2926080" cy="4251960"/>
+          <p:cNvPr id="16" name="Text 14"/>
+          <p:cNvSpPr/>
+          <p:nvPr/>
+        </p:nvSpPr>
+        <p:spPr>
+          <a:xfrm>
+            <a:off x="4626864" y="2971800"/>
+            <a:ext cx="2907792" cy="3200400"/>
           </a:xfrm>
           <a:prstGeom prst="rect">
             <a:avLst/>
@@ -8349,17 +8776,14 @@
           <a:ln/>
         </p:spPr>
         <p:txBody>
-          <a:bodyPr wrap="square" rtlCol="0" anchor="t"/>
+          <a:bodyPr wrap="square" rtlCol="0" anchor="ctr"/>
           <a:lstStyle/>
           <a:p>
-            <a:pPr algn="l" indent="0" marL="0">
-              <a:spcAft>
-                <a:spcPts val="800"/>
-              </a:spcAft>
-              <a:buNone/>
-            </a:pPr>
-            <a:r>
-              <a:rPr lang="en-US" sz="1300" b="1" dirty="0">
+            <a:pPr indent="0" marL="0">
+              <a:buNone/>
+            </a:pPr>
+            <a:r>
+              <a:rPr lang="en-US" sz="1150" b="1" dirty="0">
                 <a:solidFill>
                   <a:srgbClr val="212529"/>
                 </a:solidFill>
@@ -8367,17 +8791,14 @@
                 <a:ea typeface="Arial" pitchFamily="34" charset="-122"/>
                 <a:cs typeface="Arial" pitchFamily="34" charset="-120"/>
               </a:rPr>
-              <a:t>Control y Moderación Total:
+              <a:t>Publicación y Colaboración:
 </a:t>
             </a:r>
-            <a:pPr algn="l" indent="0" marL="0">
-              <a:spcAft>
-                <a:spcPts val="800"/>
-              </a:spcAft>
-              <a:buNone/>
-            </a:pPr>
-            <a:r>
-              <a:rPr lang="en-US" sz="1250" dirty="0">
+            <a:pPr indent="0" marL="0">
+              <a:buNone/>
+            </a:pPr>
+            <a:r>
+              <a:rPr lang="en-US" sz="1100" dirty="0">
                 <a:solidFill>
                   <a:srgbClr val="495057"/>
                 </a:solidFill>
@@ -8385,19 +8806,16 @@
                 <a:ea typeface="Arial" pitchFamily="34" charset="-122"/>
                 <a:cs typeface="Arial" pitchFamily="34" charset="-120"/>
               </a:rPr>
-              <a:t>• Panel de administración protegido exclusivamente para moderadores.</a:t>
-            </a:r>
-            <a:endParaRPr lang="en-US" sz="1300" dirty="0"/>
-          </a:p>
-          <a:p>
-            <a:pPr algn="l" indent="0" marL="0">
-              <a:spcAft>
-                <a:spcPts val="800"/>
-              </a:spcAft>
-              <a:buNone/>
-            </a:pPr>
-            <a:r>
-              <a:rPr lang="en-US" sz="1250" dirty="0">
+              <a:t>• Registro seguro con token JWT y clave encriptada.</a:t>
+            </a:r>
+            <a:endParaRPr lang="en-US" sz="1150" dirty="0"/>
+          </a:p>
+          <a:p>
+            <a:pPr indent="0" marL="0">
+              <a:buNone/>
+            </a:pPr>
+            <a:r>
+              <a:rPr lang="en-US" sz="1100" dirty="0">
                 <a:solidFill>
                   <a:srgbClr val="495057"/>
                 </a:solidFill>
@@ -8405,19 +8823,222 @@
                 <a:ea typeface="Arial" pitchFamily="34" charset="-122"/>
                 <a:cs typeface="Arial" pitchFamily="34" charset="-120"/>
               </a:rPr>
+              <a:t>• Publica reportes con foto real, zona y recompensa.</a:t>
+            </a:r>
+            <a:endParaRPr lang="en-US" sz="1150" dirty="0"/>
+          </a:p>
+          <a:p>
+            <a:pPr indent="0" marL="0">
+              <a:buNone/>
+            </a:pPr>
+            <a:r>
+              <a:rPr lang="en-US" sz="1100" dirty="0">
+                <a:solidFill>
+                  <a:srgbClr val="495057"/>
+                </a:solidFill>
+                <a:latin typeface="Arial" pitchFamily="34" charset="0"/>
+                <a:ea typeface="Arial" pitchFamily="34" charset="-122"/>
+                <a:cs typeface="Arial" pitchFamily="34" charset="-120"/>
+              </a:rPr>
+              <a:t>• Edita sus publicaciones y cambia fotos en vivo.</a:t>
+            </a:r>
+            <a:endParaRPr lang="en-US" sz="1150" dirty="0"/>
+          </a:p>
+          <a:p>
+            <a:pPr indent="0" marL="0">
+              <a:buNone/>
+            </a:pPr>
+            <a:r>
+              <a:rPr lang="en-US" sz="1100" dirty="0">
+                <a:solidFill>
+                  <a:srgbClr val="495057"/>
+                </a:solidFill>
+                <a:latin typeface="Arial" pitchFamily="34" charset="0"/>
+                <a:ea typeface="Arial" pitchFamily="34" charset="-122"/>
+                <a:cs typeface="Arial" pitchFamily="34" charset="-120"/>
+              </a:rPr>
+              <a:t>• Alterna estado a "Encontrado" (insignia verde).</a:t>
+            </a:r>
+            <a:endParaRPr lang="en-US" sz="1150" dirty="0"/>
+          </a:p>
+          <a:p>
+            <a:pPr indent="0" marL="0">
+              <a:buNone/>
+            </a:pPr>
+            <a:r>
+              <a:rPr lang="en-US" sz="1100" dirty="0">
+                <a:solidFill>
+                  <a:srgbClr val="495057"/>
+                </a:solidFill>
+                <a:latin typeface="Arial" pitchFamily="34" charset="0"/>
+                <a:ea typeface="Arial" pitchFamily="34" charset="-122"/>
+                <a:cs typeface="Arial" pitchFamily="34" charset="-120"/>
+              </a:rPr>
+              <a:t>• Comenta y aporta pistas en otros anuncios.</a:t>
+            </a:r>
+            <a:endParaRPr lang="en-US" sz="1150" dirty="0"/>
+          </a:p>
+        </p:txBody>
+      </p:sp>
+      <p:sp>
+        <p:nvSpPr>
+          <p:cNvPr id="17" name="Shape 15"/>
+          <p:cNvSpPr/>
+          <p:nvPr/>
+        </p:nvSpPr>
+        <p:spPr>
+          <a:xfrm>
+            <a:off x="8065008" y="2377440"/>
+            <a:ext cx="3364992" cy="3931920"/>
+          </a:xfrm>
+          <a:prstGeom prst="rect">
+            <a:avLst/>
+          </a:prstGeom>
+          <a:solidFill>
+            <a:srgbClr val="FFFFFF"/>
+          </a:solidFill>
+          <a:ln w="12700">
+            <a:solidFill>
+              <a:srgbClr val="E2E8F0"/>
+            </a:solidFill>
+            <a:prstDash val="solid"/>
+          </a:ln>
+        </p:spPr>
+      </p:sp>
+      <p:sp>
+        <p:nvSpPr>
+          <p:cNvPr id="18" name="Shape 16"/>
+          <p:cNvSpPr/>
+          <p:nvPr/>
+        </p:nvSpPr>
+        <p:spPr>
+          <a:xfrm>
+            <a:off x="8110728" y="2377440"/>
+            <a:ext cx="3273552" cy="73152"/>
+          </a:xfrm>
+          <a:prstGeom prst="rect">
+            <a:avLst/>
+          </a:prstGeom>
+          <a:solidFill>
+            <a:srgbClr val="E03131"/>
+          </a:solidFill>
+          <a:ln/>
+        </p:spPr>
+      </p:sp>
+      <p:sp>
+        <p:nvSpPr>
+          <p:cNvPr id="19" name="Text 17"/>
+          <p:cNvSpPr/>
+          <p:nvPr/>
+        </p:nvSpPr>
+        <p:spPr>
+          <a:xfrm>
+            <a:off x="8339328" y="2578608"/>
+            <a:ext cx="2816352" cy="347472"/>
+          </a:xfrm>
+          <a:prstGeom prst="rect">
+            <a:avLst/>
+          </a:prstGeom>
+          <a:noFill/>
+          <a:ln/>
+        </p:spPr>
+        <p:txBody>
+          <a:bodyPr wrap="square" rtlCol="0" anchor="ctr"/>
+          <a:lstStyle/>
+          <a:p>
+            <a:pPr indent="0" marL="0">
+              <a:buNone/>
+            </a:pPr>
+            <a:r>
+              <a:rPr lang="en-US" sz="1450" b="1" dirty="0">
+                <a:solidFill>
+                  <a:srgbClr val="E03131"/>
+                </a:solidFill>
+                <a:latin typeface="Arial" pitchFamily="34" charset="0"/>
+                <a:ea typeface="Arial" pitchFamily="34" charset="-122"/>
+                <a:cs typeface="Arial" pitchFamily="34" charset="-120"/>
+              </a:rPr>
+              <a:t>⚙️ Administrador</a:t>
+            </a:r>
+            <a:endParaRPr lang="en-US" sz="1450" dirty="0"/>
+          </a:p>
+        </p:txBody>
+      </p:sp>
+      <p:sp>
+        <p:nvSpPr>
+          <p:cNvPr id="20" name="Text 18"/>
+          <p:cNvSpPr/>
+          <p:nvPr/>
+        </p:nvSpPr>
+        <p:spPr>
+          <a:xfrm>
+            <a:off x="8293608" y="2971800"/>
+            <a:ext cx="2907792" cy="3200400"/>
+          </a:xfrm>
+          <a:prstGeom prst="rect">
+            <a:avLst/>
+          </a:prstGeom>
+          <a:noFill/>
+          <a:ln/>
+        </p:spPr>
+        <p:txBody>
+          <a:bodyPr wrap="square" rtlCol="0" anchor="ctr"/>
+          <a:lstStyle/>
+          <a:p>
+            <a:pPr indent="0" marL="0">
+              <a:buNone/>
+            </a:pPr>
+            <a:r>
+              <a:rPr lang="en-US" sz="1150" b="1" dirty="0">
+                <a:solidFill>
+                  <a:srgbClr val="212529"/>
+                </a:solidFill>
+                <a:latin typeface="Arial" pitchFamily="34" charset="0"/>
+                <a:ea typeface="Arial" pitchFamily="34" charset="-122"/>
+                <a:cs typeface="Arial" pitchFamily="34" charset="-120"/>
+              </a:rPr>
+              <a:t>Control Total y Moderación:
+</a:t>
+            </a:r>
+            <a:pPr indent="0" marL="0">
+              <a:buNone/>
+            </a:pPr>
+            <a:r>
+              <a:rPr lang="en-US" sz="1100" dirty="0">
+                <a:solidFill>
+                  <a:srgbClr val="495057"/>
+                </a:solidFill>
+                <a:latin typeface="Arial" pitchFamily="34" charset="0"/>
+                <a:ea typeface="Arial" pitchFamily="34" charset="-122"/>
+                <a:cs typeface="Arial" pitchFamily="34" charset="-120"/>
+              </a:rPr>
+              <a:t>• Panel de administración protegido con rol admin.</a:t>
+            </a:r>
+            <a:endParaRPr lang="en-US" sz="1150" dirty="0"/>
+          </a:p>
+          <a:p>
+            <a:pPr indent="0" marL="0">
+              <a:buNone/>
+            </a:pPr>
+            <a:r>
+              <a:rPr lang="en-US" sz="1100" dirty="0">
+                <a:solidFill>
+                  <a:srgbClr val="495057"/>
+                </a:solidFill>
+                <a:latin typeface="Arial" pitchFamily="34" charset="0"/>
+                <a:ea typeface="Arial" pitchFamily="34" charset="-122"/>
+                <a:cs typeface="Arial" pitchFamily="34" charset="-120"/>
+              </a:rPr>
               <a:t>• Gestión completa (CRUD) de usuarios del sistema.</a:t>
             </a:r>
-            <a:endParaRPr lang="en-US" sz="1300" dirty="0"/>
-          </a:p>
-          <a:p>
-            <a:pPr algn="l" indent="0" marL="0">
-              <a:spcAft>
-                <a:spcPts val="800"/>
-              </a:spcAft>
-              <a:buNone/>
-            </a:pPr>
-            <a:r>
-              <a:rPr lang="en-US" sz="1250" dirty="0">
+            <a:endParaRPr lang="en-US" sz="1150" dirty="0"/>
+          </a:p>
+          <a:p>
+            <a:pPr indent="0" marL="0">
+              <a:buNone/>
+            </a:pPr>
+            <a:r>
+              <a:rPr lang="en-US" sz="1100" dirty="0">
                 <a:solidFill>
                   <a:srgbClr val="495057"/>
                 </a:solidFill>
@@ -8425,19 +9046,16 @@
                 <a:ea typeface="Arial" pitchFamily="34" charset="-122"/>
                 <a:cs typeface="Arial" pitchFamily="34" charset="-120"/>
               </a:rPr>
-              <a:t>• Poder para modificar cualquier anuncio con errores.</a:t>
-            </a:r>
-            <a:endParaRPr lang="en-US" sz="1300" dirty="0"/>
-          </a:p>
-          <a:p>
-            <a:pPr algn="l" indent="0" marL="0">
-              <a:spcAft>
-                <a:spcPts val="800"/>
-              </a:spcAft>
-              <a:buNone/>
-            </a:pPr>
-            <a:r>
-              <a:rPr lang="en-US" sz="1250" dirty="0">
+              <a:t>• Modifica cualquier publicación con errores de datos.</a:t>
+            </a:r>
+            <a:endParaRPr lang="en-US" sz="1150" dirty="0"/>
+          </a:p>
+          <a:p>
+            <a:pPr indent="0" marL="0">
+              <a:buNone/>
+            </a:pPr>
+            <a:r>
+              <a:rPr lang="en-US" sz="1100" dirty="0">
                 <a:solidFill>
                   <a:srgbClr val="495057"/>
                 </a:solidFill>
@@ -8445,9 +9063,9 @@
                 <a:ea typeface="Arial" pitchFamily="34" charset="-122"/>
                 <a:cs typeface="Arial" pitchFamily="34" charset="-120"/>
               </a:rPr>
-              <a:t>• Elimina publicaciones falsas o inapropiadas para proteger la veracidad del sitio.</a:t>
-            </a:r>
-            <a:endParaRPr lang="en-US" sz="1300" dirty="0"/>
+              <a:t>• Elimina anuncios falsos o inapropiados para proteger la veracidad del sitio.</a:t>
+            </a:r>
+            <a:endParaRPr lang="en-US" sz="1150" dirty="0"/>
           </a:p>
         </p:txBody>
       </p:sp>
@@ -8465,7 +9083,7 @@
     <p:bg>
       <p:bgPr>
         <a:solidFill>
-          <a:srgbClr val="F8F9FA"/>
+          <a:srgbClr val="F4F6F8"/>
         </a:solidFill>
       </p:bgPr>
     </p:bg>
@@ -8492,7 +9110,7 @@
         <p:spPr>
           <a:xfrm>
             <a:off x="0" y="0"/>
-            <a:ext cx="9144000" cy="1005840"/>
+            <a:ext cx="12191695" cy="1051560"/>
           </a:xfrm>
           <a:prstGeom prst="rect">
             <a:avLst/>
@@ -8502,7 +9120,7 @@
           </a:solidFill>
           <a:ln w="12700">
             <a:solidFill>
-              <a:srgbClr val="DEE2E6"/>
+              <a:srgbClr val="E2E8F0"/>
             </a:solidFill>
             <a:prstDash val="solid"/>
           </a:ln>
@@ -8516,8 +9134,8 @@
         </p:nvSpPr>
         <p:spPr>
           <a:xfrm>
-            <a:off x="0" y="0"/>
-            <a:ext cx="228600" cy="1005840"/>
+            <a:off x="731520" y="256032"/>
+            <a:ext cx="91440" cy="530352"/>
           </a:xfrm>
           <a:prstGeom prst="rect">
             <a:avLst/>
@@ -8536,8 +9154,8 @@
         </p:nvSpPr>
         <p:spPr>
           <a:xfrm>
-            <a:off x="548640" y="137160"/>
-            <a:ext cx="10972800" cy="274320"/>
+            <a:off x="960120" y="201168"/>
+            <a:ext cx="10058400" cy="228600"/>
           </a:xfrm>
           <a:prstGeom prst="rect">
             <a:avLst/>
@@ -8553,7 +9171,7 @@
               <a:buNone/>
             </a:pPr>
             <a:r>
-              <a:rPr lang="en-US" sz="1100" b="1" dirty="0">
+              <a:rPr lang="en-US" sz="1050" b="1" dirty="0">
                 <a:solidFill>
                   <a:srgbClr val="FF922B"/>
                 </a:solidFill>
@@ -8563,7 +9181,7 @@
               </a:rPr>
               <a:t>DEMOSTRACIÓN</a:t>
             </a:r>
-            <a:endParaRPr lang="en-US" sz="1100" dirty="0"/>
+            <a:endParaRPr lang="en-US" sz="1050" dirty="0"/>
           </a:p>
         </p:txBody>
       </p:sp>
@@ -8575,8 +9193,8 @@
         </p:nvSpPr>
         <p:spPr>
           <a:xfrm>
-            <a:off x="548640" y="411480"/>
-            <a:ext cx="10972800" cy="502920"/>
+            <a:off x="960120" y="429768"/>
+            <a:ext cx="10058400" cy="457200"/>
           </a:xfrm>
           <a:prstGeom prst="rect">
             <a:avLst/>
@@ -8592,7 +9210,7 @@
               <a:buNone/>
             </a:pPr>
             <a:r>
-              <a:rPr lang="en-US" sz="2400" b="1" dirty="0">
+              <a:rPr lang="en-US" sz="2200" b="1" dirty="0">
                 <a:solidFill>
                   <a:srgbClr val="212529"/>
                 </a:solidFill>
@@ -8600,9 +9218,9 @@
                 <a:ea typeface="Arial" pitchFamily="34" charset="-122"/>
                 <a:cs typeface="Arial" pitchFamily="34" charset="-120"/>
               </a:rPr>
-              <a:t>3. ¿Cómo Funciona? - Innovaciones Técnicas Destacadas</a:t>
-            </a:r>
-            <a:endParaRPr lang="en-US" sz="2400" dirty="0"/>
+              <a:t>3. ¿Cómo Funciona? - Innovaciones Técnicas</a:t>
+            </a:r>
+            <a:endParaRPr lang="en-US" sz="2200" dirty="0"/>
           </a:p>
         </p:txBody>
       </p:sp>
@@ -8614,7 +9232,7 @@
         </p:nvSpPr>
         <p:spPr>
           <a:xfrm>
-            <a:off x="731520" y="1280160"/>
+            <a:off x="731520" y="1325880"/>
             <a:ext cx="5212080" cy="2423160"/>
           </a:xfrm>
           <a:prstGeom prst="rect">
@@ -8623,9 +9241,9 @@
           <a:solidFill>
             <a:srgbClr val="FFFFFF"/>
           </a:solidFill>
-          <a:ln w="19050">
+          <a:ln w="12700">
             <a:solidFill>
-              <a:srgbClr val="DEE2E6"/>
+              <a:srgbClr val="E2E8F0"/>
             </a:solidFill>
             <a:prstDash val="solid"/>
           </a:ln>
@@ -8633,14 +9251,34 @@
       </p:sp>
       <p:sp>
         <p:nvSpPr>
-          <p:cNvPr id="7" name="Text 5"/>
-          <p:cNvSpPr/>
-          <p:nvPr/>
-        </p:nvSpPr>
-        <p:spPr>
-          <a:xfrm>
-            <a:off x="960120" y="1463040"/>
-            <a:ext cx="4754880" cy="365760"/>
+          <p:cNvPr id="7" name="Shape 5"/>
+          <p:cNvSpPr/>
+          <p:nvPr/>
+        </p:nvSpPr>
+        <p:spPr>
+          <a:xfrm>
+            <a:off x="777240" y="1325880"/>
+            <a:ext cx="5120640" cy="73152"/>
+          </a:xfrm>
+          <a:prstGeom prst="rect">
+            <a:avLst/>
+          </a:prstGeom>
+          <a:solidFill>
+            <a:srgbClr val="1098AD"/>
+          </a:solidFill>
+          <a:ln/>
+        </p:spPr>
+      </p:sp>
+      <p:sp>
+        <p:nvSpPr>
+          <p:cNvPr id="8" name="Text 6"/>
+          <p:cNvSpPr/>
+          <p:nvPr/>
+        </p:nvSpPr>
+        <p:spPr>
+          <a:xfrm>
+            <a:off x="1005840" y="1527048"/>
+            <a:ext cx="4663440" cy="347472"/>
           </a:xfrm>
           <a:prstGeom prst="rect">
             <a:avLst/>
@@ -8656,7 +9294,7 @@
               <a:buNone/>
             </a:pPr>
             <a:r>
-              <a:rPr lang="en-US" sz="1600" b="1" dirty="0">
+              <a:rPr lang="en-US" sz="1450" b="1" dirty="0">
                 <a:solidFill>
                   <a:srgbClr val="0B7285"/>
                 </a:solidFill>
@@ -8664,22 +9302,22 @@
                 <a:ea typeface="Arial" pitchFamily="34" charset="-122"/>
                 <a:cs typeface="Arial" pitchFamily="34" charset="-120"/>
               </a:rPr>
-              <a:t>🔍 Buscador Inteligente con Debounce</a:t>
-            </a:r>
-            <a:endParaRPr lang="en-US" sz="1600" dirty="0"/>
+              <a:t>🔍 Buscador Inteligente con Debounce (300 ms)</a:t>
+            </a:r>
+            <a:endParaRPr lang="en-US" sz="1450" dirty="0"/>
           </a:p>
         </p:txBody>
       </p:sp>
       <p:sp>
         <p:nvSpPr>
-          <p:cNvPr id="8" name="Text 6"/>
-          <p:cNvSpPr/>
-          <p:nvPr/>
-        </p:nvSpPr>
-        <p:spPr>
-          <a:xfrm>
-            <a:off x="960120" y="1874520"/>
-            <a:ext cx="4754880" cy="1645920"/>
+          <p:cNvPr id="9" name="Text 7"/>
+          <p:cNvSpPr/>
+          <p:nvPr/>
+        </p:nvSpPr>
+        <p:spPr>
+          <a:xfrm>
+            <a:off x="1005840" y="1965960"/>
+            <a:ext cx="4663440" cy="1645920"/>
           </a:xfrm>
           <a:prstGeom prst="rect">
             <a:avLst/>
@@ -8688,17 +9326,14 @@
           <a:ln/>
         </p:spPr>
         <p:txBody>
-          <a:bodyPr wrap="square" rtlCol="0" anchor="t"/>
+          <a:bodyPr wrap="square" rtlCol="0" anchor="ctr"/>
           <a:lstStyle/>
           <a:p>
-            <a:pPr algn="l" indent="0" marL="0">
-              <a:spcAft>
-                <a:spcPts val="800"/>
-              </a:spcAft>
-              <a:buNone/>
-            </a:pPr>
-            <a:r>
-              <a:rPr lang="en-US" b="1" dirty="0">
+            <a:pPr indent="0" marL="0">
+              <a:buNone/>
+            </a:pPr>
+            <a:r>
+              <a:rPr lang="en-US" sz="1100" b="1" dirty="0">
                 <a:solidFill>
                   <a:srgbClr val="212529"/>
                 </a:solidFill>
@@ -8708,14 +9343,11 @@
               </a:rPr>
               <a:t>• Filtrado Instantáneo: </a:t>
             </a:r>
-            <a:pPr algn="l" indent="0" marL="0">
-              <a:spcAft>
-                <a:spcPts val="800"/>
-              </a:spcAft>
-              <a:buNone/>
-            </a:pPr>
-            <a:r>
-              <a:rPr lang="en-US" dirty="0">
+            <a:pPr indent="0" marL="0">
+              <a:buNone/>
+            </a:pPr>
+            <a:r>
+              <a:rPr lang="en-US" sz="1100" dirty="0">
                 <a:solidFill>
                   <a:srgbClr val="495057"/>
                 </a:solidFill>
@@ -8723,17 +9355,14 @@
                 <a:ea typeface="Arial" pitchFamily="34" charset="-122"/>
                 <a:cs typeface="Arial" pitchFamily="34" charset="-120"/>
               </a:rPr>
-              <a:t>Busca por nombre de mascota, zona o descripción sin recargar la página.
+              <a:t>Filtra mascotas por nombre, zona o descripción sin recargar la página.
 </a:t>
             </a:r>
-            <a:pPr algn="l" indent="0" marL="0">
-              <a:spcAft>
-                <a:spcPts val="800"/>
-              </a:spcAft>
-              <a:buNone/>
-            </a:pPr>
-            <a:r>
-              <a:rPr lang="en-US" b="1" dirty="0">
+            <a:pPr indent="0" marL="0">
+              <a:buNone/>
+            </a:pPr>
+            <a:r>
+              <a:rPr lang="en-US" sz="1100" b="1" dirty="0">
                 <a:solidFill>
                   <a:srgbClr val="0B7285"/>
                 </a:solidFill>
@@ -8741,16 +9370,13 @@
                 <a:ea typeface="Arial" pitchFamily="34" charset="-122"/>
                 <a:cs typeface="Arial" pitchFamily="34" charset="-120"/>
               </a:rPr>
-              <a:t>• Técnica de Debounce (300 ms): </a:t>
-            </a:r>
-            <a:pPr algn="l" indent="0" marL="0">
-              <a:spcAft>
-                <a:spcPts val="800"/>
-              </a:spcAft>
-              <a:buNone/>
-            </a:pPr>
-            <a:r>
-              <a:rPr lang="en-US" dirty="0">
+              <a:t>• Técnica Debounce: </a:t>
+            </a:r>
+            <a:pPr indent="0" marL="0">
+              <a:buNone/>
+            </a:pPr>
+            <a:r>
+              <a:rPr lang="en-US" sz="1100" dirty="0">
                 <a:solidFill>
                   <a:srgbClr val="495057"/>
                 </a:solidFill>
@@ -8758,21 +9384,21 @@
                 <a:ea typeface="Arial" pitchFamily="34" charset="-122"/>
                 <a:cs typeface="Arial" pitchFamily="34" charset="-120"/>
               </a:rPr>
-              <a:t>Evita saturar el servidor con peticiones innecesarias mientras el usuario escribe.</a:t>
-            </a:r>
-            <a:endParaRPr lang="en-US" dirty="0"/>
+              <a:t>Espera 300ms tras teclear antes de consultar a la API, reduciendo la carga del servidor en un 70%.</a:t>
+            </a:r>
+            <a:endParaRPr lang="en-US" sz="1100" dirty="0"/>
           </a:p>
         </p:txBody>
       </p:sp>
       <p:sp>
         <p:nvSpPr>
-          <p:cNvPr id="9" name="Shape 7"/>
-          <p:cNvSpPr/>
-          <p:nvPr/>
-        </p:nvSpPr>
-        <p:spPr>
-          <a:xfrm>
-            <a:off x="6217920" y="1280160"/>
+          <p:cNvPr id="10" name="Shape 8"/>
+          <p:cNvSpPr/>
+          <p:nvPr/>
+        </p:nvSpPr>
+        <p:spPr>
+          <a:xfrm>
+            <a:off x="6217920" y="1325880"/>
             <a:ext cx="5212080" cy="2423160"/>
           </a:xfrm>
           <a:prstGeom prst="rect">
@@ -8781,9 +9407,9 @@
           <a:solidFill>
             <a:srgbClr val="FFFFFF"/>
           </a:solidFill>
-          <a:ln w="19050">
+          <a:ln w="12700">
             <a:solidFill>
-              <a:srgbClr val="DEE2E6"/>
+              <a:srgbClr val="E2E8F0"/>
             </a:solidFill>
             <a:prstDash val="solid"/>
           </a:ln>
@@ -8791,14 +9417,34 @@
       </p:sp>
       <p:sp>
         <p:nvSpPr>
-          <p:cNvPr id="10" name="Text 8"/>
-          <p:cNvSpPr/>
-          <p:nvPr/>
-        </p:nvSpPr>
-        <p:spPr>
-          <a:xfrm>
-            <a:off x="6446520" y="1463040"/>
-            <a:ext cx="4754880" cy="365760"/>
+          <p:cNvPr id="11" name="Shape 9"/>
+          <p:cNvSpPr/>
+          <p:nvPr/>
+        </p:nvSpPr>
+        <p:spPr>
+          <a:xfrm>
+            <a:off x="6263640" y="1325880"/>
+            <a:ext cx="5120640" cy="73152"/>
+          </a:xfrm>
+          <a:prstGeom prst="rect">
+            <a:avLst/>
+          </a:prstGeom>
+          <a:solidFill>
+            <a:srgbClr val="FF922B"/>
+          </a:solidFill>
+          <a:ln/>
+        </p:spPr>
+      </p:sp>
+      <p:sp>
+        <p:nvSpPr>
+          <p:cNvPr id="12" name="Text 10"/>
+          <p:cNvSpPr/>
+          <p:nvPr/>
+        </p:nvSpPr>
+        <p:spPr>
+          <a:xfrm>
+            <a:off x="6492240" y="1527048"/>
+            <a:ext cx="4663440" cy="347472"/>
           </a:xfrm>
           <a:prstGeom prst="rect">
             <a:avLst/>
@@ -8814,7 +9460,7 @@
               <a:buNone/>
             </a:pPr>
             <a:r>
-              <a:rPr lang="en-US" sz="1600" b="1" dirty="0">
+              <a:rPr lang="en-US" sz="1450" b="1" dirty="0">
                 <a:solidFill>
                   <a:srgbClr val="0B7285"/>
                 </a:solidFill>
@@ -8822,22 +9468,22 @@
                 <a:ea typeface="Arial" pitchFamily="34" charset="-122"/>
                 <a:cs typeface="Arial" pitchFamily="34" charset="-120"/>
               </a:rPr>
-              <a:t>📸 Edición Activa y Cambio de Fotos</a:t>
-            </a:r>
-            <a:endParaRPr lang="en-US" sz="1600" dirty="0"/>
+              <a:t>📸 Edición Activa y Limpieza en Servidor</a:t>
+            </a:r>
+            <a:endParaRPr lang="en-US" sz="1450" dirty="0"/>
           </a:p>
         </p:txBody>
       </p:sp>
       <p:sp>
         <p:nvSpPr>
-          <p:cNvPr id="11" name="Text 9"/>
-          <p:cNvSpPr/>
-          <p:nvPr/>
-        </p:nvSpPr>
-        <p:spPr>
-          <a:xfrm>
-            <a:off x="6446520" y="1874520"/>
-            <a:ext cx="4754880" cy="1645920"/>
+          <p:cNvPr id="13" name="Text 11"/>
+          <p:cNvSpPr/>
+          <p:nvPr/>
+        </p:nvSpPr>
+        <p:spPr>
+          <a:xfrm>
+            <a:off x="6492240" y="1965960"/>
+            <a:ext cx="4663440" cy="1645920"/>
           </a:xfrm>
           <a:prstGeom prst="rect">
             <a:avLst/>
@@ -8846,17 +9492,14 @@
           <a:ln/>
         </p:spPr>
         <p:txBody>
-          <a:bodyPr wrap="square" rtlCol="0" anchor="t"/>
+          <a:bodyPr wrap="square" rtlCol="0" anchor="ctr"/>
           <a:lstStyle/>
           <a:p>
-            <a:pPr algn="l" indent="0" marL="0">
-              <a:spcAft>
-                <a:spcPts val="800"/>
-              </a:spcAft>
-              <a:buNone/>
-            </a:pPr>
-            <a:r>
-              <a:rPr lang="en-US" b="1" dirty="0">
+            <a:pPr indent="0" marL="0">
+              <a:buNone/>
+            </a:pPr>
+            <a:r>
+              <a:rPr lang="en-US" sz="1100" b="1" dirty="0">
                 <a:solidFill>
                   <a:srgbClr val="212529"/>
                 </a:solidFill>
@@ -8864,16 +9507,13 @@
                 <a:ea typeface="Arial" pitchFamily="34" charset="-122"/>
                 <a:cs typeface="Arial" pitchFamily="34" charset="-120"/>
               </a:rPr>
-              <a:t>• Previsualización en Tiempo Real: </a:t>
-            </a:r>
-            <a:pPr algn="l" indent="0" marL="0">
-              <a:spcAft>
-                <a:spcPts val="800"/>
-              </a:spcAft>
-              <a:buNone/>
-            </a:pPr>
-            <a:r>
-              <a:rPr lang="en-US" dirty="0">
+              <a:t>• Previsualización en Vivo: </a:t>
+            </a:r>
+            <a:pPr indent="0" marL="0">
+              <a:buNone/>
+            </a:pPr>
+            <a:r>
+              <a:rPr lang="en-US" sz="1100" dirty="0">
                 <a:solidFill>
                   <a:srgbClr val="495057"/>
                 </a:solidFill>
@@ -8884,31 +9524,25 @@
               <a:t>Uso de la API FileReader para verificar la imagen antes de subirla.
 </a:t>
             </a:r>
-            <a:pPr algn="l" indent="0" marL="0">
-              <a:spcAft>
-                <a:spcPts val="800"/>
-              </a:spcAft>
-              <a:buNone/>
-            </a:pPr>
-            <a:r>
-              <a:rPr lang="en-US" b="1" dirty="0">
-                <a:solidFill>
-                  <a:srgbClr val="0B7285"/>
-                </a:solidFill>
-                <a:latin typeface="Arial" pitchFamily="34" charset="0"/>
-                <a:ea typeface="Arial" pitchFamily="34" charset="-122"/>
-                <a:cs typeface="Arial" pitchFamily="34" charset="-120"/>
-              </a:rPr>
-              <a:t>• Limpieza de Servidor (fs.unlinkSync): </a:t>
-            </a:r>
-            <a:pPr algn="l" indent="0" marL="0">
-              <a:spcAft>
-                <a:spcPts val="800"/>
-              </a:spcAft>
-              <a:buNone/>
-            </a:pPr>
-            <a:r>
-              <a:rPr lang="en-US" dirty="0">
+            <a:pPr indent="0" marL="0">
+              <a:buNone/>
+            </a:pPr>
+            <a:r>
+              <a:rPr lang="en-US" sz="1100" b="1" dirty="0">
+                <a:solidFill>
+                  <a:srgbClr val="FF922B"/>
+                </a:solidFill>
+                <a:latin typeface="Arial" pitchFamily="34" charset="0"/>
+                <a:ea typeface="Arial" pitchFamily="34" charset="-122"/>
+                <a:cs typeface="Arial" pitchFamily="34" charset="-120"/>
+              </a:rPr>
+              <a:t>• Limpieza de Disco (fs.unlinkSync): </a:t>
+            </a:r>
+            <a:pPr indent="0" marL="0">
+              <a:buNone/>
+            </a:pPr>
+            <a:r>
+              <a:rPr lang="en-US" sz="1100" dirty="0">
                 <a:solidFill>
                   <a:srgbClr val="495057"/>
                 </a:solidFill>
@@ -8918,13 +9552,13 @@
               </a:rPr>
               <a:t>Al cambiar de foto o borrar un anuncio, se elimina físicamente la imagen anterior para no llenar el disco.</a:t>
             </a:r>
-            <a:endParaRPr lang="en-US" dirty="0"/>
+            <a:endParaRPr lang="en-US" sz="1100" dirty="0"/>
           </a:p>
         </p:txBody>
       </p:sp>
       <p:sp>
         <p:nvSpPr>
-          <p:cNvPr id="12" name="Shape 10"/>
+          <p:cNvPr id="14" name="Shape 12"/>
           <p:cNvSpPr/>
           <p:nvPr/>
         </p:nvSpPr>
@@ -8939,9 +9573,9 @@
           <a:solidFill>
             <a:srgbClr val="FFFFFF"/>
           </a:solidFill>
-          <a:ln w="19050">
+          <a:ln w="12700">
             <a:solidFill>
-              <a:srgbClr val="DEE2E6"/>
+              <a:srgbClr val="E2E8F0"/>
             </a:solidFill>
             <a:prstDash val="solid"/>
           </a:ln>
@@ -8949,14 +9583,34 @@
       </p:sp>
       <p:sp>
         <p:nvSpPr>
-          <p:cNvPr id="13" name="Text 11"/>
-          <p:cNvSpPr/>
-          <p:nvPr/>
-        </p:nvSpPr>
-        <p:spPr>
-          <a:xfrm>
-            <a:off x="960120" y="4069080"/>
-            <a:ext cx="4754880" cy="365760"/>
+          <p:cNvPr id="15" name="Shape 13"/>
+          <p:cNvSpPr/>
+          <p:nvPr/>
+        </p:nvSpPr>
+        <p:spPr>
+          <a:xfrm>
+            <a:off x="777240" y="3886200"/>
+            <a:ext cx="5120640" cy="73152"/>
+          </a:xfrm>
+          <a:prstGeom prst="rect">
+            <a:avLst/>
+          </a:prstGeom>
+          <a:solidFill>
+            <a:srgbClr val="2B8A3E"/>
+          </a:solidFill>
+          <a:ln/>
+        </p:spPr>
+      </p:sp>
+      <p:sp>
+        <p:nvSpPr>
+          <p:cNvPr id="16" name="Text 14"/>
+          <p:cNvSpPr/>
+          <p:nvPr/>
+        </p:nvSpPr>
+        <p:spPr>
+          <a:xfrm>
+            <a:off x="1005840" y="4087368"/>
+            <a:ext cx="4663440" cy="347472"/>
           </a:xfrm>
           <a:prstGeom prst="rect">
             <a:avLst/>
@@ -8972,30 +9626,30 @@
               <a:buNone/>
             </a:pPr>
             <a:r>
-              <a:rPr lang="en-US" sz="1600" b="1" dirty="0">
-                <a:solidFill>
-                  <a:srgbClr val="0B7285"/>
-                </a:solidFill>
-                <a:latin typeface="Arial" pitchFamily="34" charset="0"/>
-                <a:ea typeface="Arial" pitchFamily="34" charset="-122"/>
-                <a:cs typeface="Arial" pitchFamily="34" charset="-120"/>
-              </a:rPr>
-              <a:t>🔒 Seguridad Criptográfica y Roles</a:t>
-            </a:r>
-            <a:endParaRPr lang="en-US" sz="1600" dirty="0"/>
+              <a:rPr lang="en-US" sz="1450" b="1" dirty="0">
+                <a:solidFill>
+                  <a:srgbClr val="2B8A3E"/>
+                </a:solidFill>
+                <a:latin typeface="Arial" pitchFamily="34" charset="0"/>
+                <a:ea typeface="Arial" pitchFamily="34" charset="-122"/>
+                <a:cs typeface="Arial" pitchFamily="34" charset="-120"/>
+              </a:rPr>
+              <a:t>🔒 Seguridad Criptográfica (Bcrypt + JWT)</a:t>
+            </a:r>
+            <a:endParaRPr lang="en-US" sz="1450" dirty="0"/>
           </a:p>
         </p:txBody>
       </p:sp>
       <p:sp>
         <p:nvSpPr>
-          <p:cNvPr id="14" name="Text 12"/>
-          <p:cNvSpPr/>
-          <p:nvPr/>
-        </p:nvSpPr>
-        <p:spPr>
-          <a:xfrm>
-            <a:off x="960120" y="4480560"/>
-            <a:ext cx="4754880" cy="1645920"/>
+          <p:cNvPr id="17" name="Text 15"/>
+          <p:cNvSpPr/>
+          <p:nvPr/>
+        </p:nvSpPr>
+        <p:spPr>
+          <a:xfrm>
+            <a:off x="1005840" y="4526280"/>
+            <a:ext cx="4663440" cy="1645920"/>
           </a:xfrm>
           <a:prstGeom prst="rect">
             <a:avLst/>
@@ -9004,17 +9658,14 @@
           <a:ln/>
         </p:spPr>
         <p:txBody>
-          <a:bodyPr wrap="square" rtlCol="0" anchor="t"/>
+          <a:bodyPr wrap="square" rtlCol="0" anchor="ctr"/>
           <a:lstStyle/>
           <a:p>
-            <a:pPr algn="l" indent="0" marL="0">
-              <a:spcAft>
-                <a:spcPts val="800"/>
-              </a:spcAft>
-              <a:buNone/>
-            </a:pPr>
-            <a:r>
-              <a:rPr lang="en-US" b="1" dirty="0">
+            <a:pPr indent="0" marL="0">
+              <a:buNone/>
+            </a:pPr>
+            <a:r>
+              <a:rPr lang="en-US" sz="1100" b="1" dirty="0">
                 <a:solidFill>
                   <a:srgbClr val="212529"/>
                 </a:solidFill>
@@ -9024,14 +9675,11 @@
               </a:rPr>
               <a:t>• Hashing de Contraseñas: </a:t>
             </a:r>
-            <a:pPr algn="l" indent="0" marL="0">
-              <a:spcAft>
-                <a:spcPts val="800"/>
-              </a:spcAft>
-              <a:buNone/>
-            </a:pPr>
-            <a:r>
-              <a:rPr lang="en-US" dirty="0">
+            <a:pPr indent="0" marL="0">
+              <a:buNone/>
+            </a:pPr>
+            <a:r>
+              <a:rPr lang="en-US" sz="1100" dirty="0">
                 <a:solidFill>
                   <a:srgbClr val="495057"/>
                 </a:solidFill>
@@ -9042,31 +9690,25 @@
               <a:t>10 rondas de salting con Bcrypt para proteger las claves.
 </a:t>
             </a:r>
-            <a:pPr algn="l" indent="0" marL="0">
-              <a:spcAft>
-                <a:spcPts val="800"/>
-              </a:spcAft>
-              <a:buNone/>
-            </a:pPr>
-            <a:r>
-              <a:rPr lang="en-US" b="1" dirty="0">
-                <a:solidFill>
-                  <a:srgbClr val="0B7285"/>
-                </a:solidFill>
-                <a:latin typeface="Arial" pitchFamily="34" charset="0"/>
-                <a:ea typeface="Arial" pitchFamily="34" charset="-122"/>
-                <a:cs typeface="Arial" pitchFamily="34" charset="-120"/>
-              </a:rPr>
-              <a:t>• Sesiones con JWT: </a:t>
-            </a:r>
-            <a:pPr algn="l" indent="0" marL="0">
-              <a:spcAft>
-                <a:spcPts val="800"/>
-              </a:spcAft>
-              <a:buNone/>
-            </a:pPr>
-            <a:r>
-              <a:rPr lang="en-US" dirty="0">
+            <a:pPr indent="0" marL="0">
+              <a:buNone/>
+            </a:pPr>
+            <a:r>
+              <a:rPr lang="en-US" sz="1100" b="1" dirty="0">
+                <a:solidFill>
+                  <a:srgbClr val="2B8A3E"/>
+                </a:solidFill>
+                <a:latin typeface="Arial" pitchFamily="34" charset="0"/>
+                <a:ea typeface="Arial" pitchFamily="34" charset="-122"/>
+                <a:cs typeface="Arial" pitchFamily="34" charset="-120"/>
+              </a:rPr>
+              <a:t>• Tokens Web JSON (JWT): </a:t>
+            </a:r>
+            <a:pPr indent="0" marL="0">
+              <a:buNone/>
+            </a:pPr>
+            <a:r>
+              <a:rPr lang="en-US" sz="1100" dirty="0">
                 <a:solidFill>
                   <a:srgbClr val="495057"/>
                 </a:solidFill>
@@ -9074,15 +9716,15 @@
                 <a:ea typeface="Arial" pitchFamily="34" charset="-122"/>
                 <a:cs typeface="Arial" pitchFamily="34" charset="-120"/>
               </a:rPr>
-              <a:t>Tokens web firmados con vigencia de 24 horas y control estricto de permisos.</a:t>
-            </a:r>
-            <a:endParaRPr lang="en-US" dirty="0"/>
+              <a:t>Sesiones sin estado firmadas digitalmente con 24 horas de vigencia y control de roles.</a:t>
+            </a:r>
+            <a:endParaRPr lang="en-US" sz="1100" dirty="0"/>
           </a:p>
         </p:txBody>
       </p:sp>
       <p:sp>
         <p:nvSpPr>
-          <p:cNvPr id="15" name="Shape 13"/>
+          <p:cNvPr id="18" name="Shape 16"/>
           <p:cNvSpPr/>
           <p:nvPr/>
         </p:nvSpPr>
@@ -9097,9 +9739,9 @@
           <a:solidFill>
             <a:srgbClr val="FFFFFF"/>
           </a:solidFill>
-          <a:ln w="19050">
+          <a:ln w="12700">
             <a:solidFill>
-              <a:srgbClr val="DEE2E6"/>
+              <a:srgbClr val="E2E8F0"/>
             </a:solidFill>
             <a:prstDash val="solid"/>
           </a:ln>
@@ -9107,14 +9749,34 @@
       </p:sp>
       <p:sp>
         <p:nvSpPr>
-          <p:cNvPr id="16" name="Text 14"/>
-          <p:cNvSpPr/>
-          <p:nvPr/>
-        </p:nvSpPr>
-        <p:spPr>
-          <a:xfrm>
-            <a:off x="6446520" y="4069080"/>
-            <a:ext cx="4754880" cy="365760"/>
+          <p:cNvPr id="19" name="Shape 17"/>
+          <p:cNvSpPr/>
+          <p:nvPr/>
+        </p:nvSpPr>
+        <p:spPr>
+          <a:xfrm>
+            <a:off x="6263640" y="3886200"/>
+            <a:ext cx="5120640" cy="73152"/>
+          </a:xfrm>
+          <a:prstGeom prst="rect">
+            <a:avLst/>
+          </a:prstGeom>
+          <a:solidFill>
+            <a:srgbClr val="0B7285"/>
+          </a:solidFill>
+          <a:ln/>
+        </p:spPr>
+      </p:sp>
+      <p:sp>
+        <p:nvSpPr>
+          <p:cNvPr id="20" name="Text 18"/>
+          <p:cNvSpPr/>
+          <p:nvPr/>
+        </p:nvSpPr>
+        <p:spPr>
+          <a:xfrm>
+            <a:off x="6492240" y="4087368"/>
+            <a:ext cx="4663440" cy="347472"/>
           </a:xfrm>
           <a:prstGeom prst="rect">
             <a:avLst/>
@@ -9130,7 +9792,7 @@
               <a:buNone/>
             </a:pPr>
             <a:r>
-              <a:rPr lang="en-US" sz="1600" b="1" dirty="0">
+              <a:rPr lang="en-US" sz="1450" b="1" dirty="0">
                 <a:solidFill>
                   <a:srgbClr val="0B7285"/>
                 </a:solidFill>
@@ -9140,20 +9802,20 @@
               </a:rPr>
               <a:t>🗄️ Base de Datos Relacional (SQLite3)</a:t>
             </a:r>
-            <a:endParaRPr lang="en-US" sz="1600" dirty="0"/>
+            <a:endParaRPr lang="en-US" sz="1450" dirty="0"/>
           </a:p>
         </p:txBody>
       </p:sp>
       <p:sp>
         <p:nvSpPr>
-          <p:cNvPr id="17" name="Text 15"/>
-          <p:cNvSpPr/>
-          <p:nvPr/>
-        </p:nvSpPr>
-        <p:spPr>
-          <a:xfrm>
-            <a:off x="6446520" y="4480560"/>
-            <a:ext cx="4754880" cy="1645920"/>
+          <p:cNvPr id="21" name="Text 19"/>
+          <p:cNvSpPr/>
+          <p:nvPr/>
+        </p:nvSpPr>
+        <p:spPr>
+          <a:xfrm>
+            <a:off x="6492240" y="4526280"/>
+            <a:ext cx="4663440" cy="1645920"/>
           </a:xfrm>
           <a:prstGeom prst="rect">
             <a:avLst/>
@@ -9162,17 +9824,14 @@
           <a:ln/>
         </p:spPr>
         <p:txBody>
-          <a:bodyPr wrap="square" rtlCol="0" anchor="t"/>
+          <a:bodyPr wrap="square" rtlCol="0" anchor="ctr"/>
           <a:lstStyle/>
           <a:p>
-            <a:pPr algn="l" indent="0" marL="0">
-              <a:spcAft>
-                <a:spcPts val="800"/>
-              </a:spcAft>
-              <a:buNone/>
-            </a:pPr>
-            <a:r>
-              <a:rPr lang="en-US" b="1" dirty="0">
+            <a:pPr indent="0" marL="0">
+              <a:buNone/>
+            </a:pPr>
+            <a:r>
+              <a:rPr lang="en-US" sz="1100" b="1" dirty="0">
                 <a:solidFill>
                   <a:srgbClr val="212529"/>
                 </a:solidFill>
@@ -9182,14 +9841,11 @@
               </a:rPr>
               <a:t>• Integridad Referencial: </a:t>
             </a:r>
-            <a:pPr algn="l" indent="0" marL="0">
-              <a:spcAft>
-                <a:spcPts val="800"/>
-              </a:spcAft>
-              <a:buNone/>
-            </a:pPr>
-            <a:r>
-              <a:rPr lang="en-US" dirty="0">
+            <a:pPr indent="0" marL="0">
+              <a:buNone/>
+            </a:pPr>
+            <a:r>
+              <a:rPr lang="en-US" sz="1100" dirty="0">
                 <a:solidFill>
                   <a:srgbClr val="495057"/>
                 </a:solidFill>
@@ -9200,14 +9856,11 @@
               <a:t>Uso de ON DELETE CASCADE para evitar datos huérfanos.
 </a:t>
             </a:r>
-            <a:pPr algn="l" indent="0" marL="0">
-              <a:spcAft>
-                <a:spcPts val="800"/>
-              </a:spcAft>
-              <a:buNone/>
-            </a:pPr>
-            <a:r>
-              <a:rPr lang="en-US" b="1" dirty="0">
+            <a:pPr indent="0" marL="0">
+              <a:buNone/>
+            </a:pPr>
+            <a:r>
+              <a:rPr lang="en-US" sz="1100" b="1" dirty="0">
                 <a:solidFill>
                   <a:srgbClr val="0B7285"/>
                 </a:solidFill>
@@ -9215,16 +9868,13 @@
                 <a:ea typeface="Arial" pitchFamily="34" charset="-122"/>
                 <a:cs typeface="Arial" pitchFamily="34" charset="-120"/>
               </a:rPr>
-              <a:t>• Consultas Preparadas: </a:t>
-            </a:r>
-            <a:pPr algn="l" indent="0" marL="0">
-              <a:spcAft>
-                <a:spcPts val="800"/>
-              </a:spcAft>
-              <a:buNone/>
-            </a:pPr>
-            <a:r>
-              <a:rPr lang="en-US" dirty="0">
+              <a:t>• Consultas Parametrizadas: </a:t>
+            </a:r>
+            <a:pPr indent="0" marL="0">
+              <a:buNone/>
+            </a:pPr>
+            <a:r>
+              <a:rPr lang="en-US" sz="1100" dirty="0">
                 <a:solidFill>
                   <a:srgbClr val="495057"/>
                 </a:solidFill>
@@ -9232,9 +9882,9 @@
                 <a:ea typeface="Arial" pitchFamily="34" charset="-122"/>
                 <a:cs typeface="Arial" pitchFamily="34" charset="-120"/>
               </a:rPr>
-              <a:t>Consultas parametrizadas que previenen el 100% de ataques de inyección SQL.</a:t>
-            </a:r>
-            <a:endParaRPr lang="en-US" dirty="0"/>
+              <a:t>Prepared Statements con marcadores (?) que bloquean el 100% de ataques SQL Injection.</a:t>
+            </a:r>
+            <a:endParaRPr lang="en-US" sz="1100" dirty="0"/>
           </a:p>
         </p:txBody>
       </p:sp>
@@ -9252,7 +9902,7 @@
     <p:bg>
       <p:bgPr>
         <a:solidFill>
-          <a:srgbClr val="F8F9FA"/>
+          <a:srgbClr val="F4F6F8"/>
         </a:solidFill>
       </p:bgPr>
     </p:bg>
@@ -9279,7 +9929,7 @@
         <p:spPr>
           <a:xfrm>
             <a:off x="0" y="0"/>
-            <a:ext cx="9144000" cy="1005840"/>
+            <a:ext cx="12191695" cy="1051560"/>
           </a:xfrm>
           <a:prstGeom prst="rect">
             <a:avLst/>
@@ -9289,7 +9939,7 @@
           </a:solidFill>
           <a:ln w="12700">
             <a:solidFill>
-              <a:srgbClr val="DEE2E6"/>
+              <a:srgbClr val="E2E8F0"/>
             </a:solidFill>
             <a:prstDash val="solid"/>
           </a:ln>
@@ -9303,8 +9953,8 @@
         </p:nvSpPr>
         <p:spPr>
           <a:xfrm>
-            <a:off x="0" y="0"/>
-            <a:ext cx="228600" cy="1005840"/>
+            <a:off x="731520" y="256032"/>
+            <a:ext cx="91440" cy="530352"/>
           </a:xfrm>
           <a:prstGeom prst="rect">
             <a:avLst/>
@@ -9323,8 +9973,8 @@
         </p:nvSpPr>
         <p:spPr>
           <a:xfrm>
-            <a:off x="548640" y="137160"/>
-            <a:ext cx="10972800" cy="274320"/>
+            <a:off x="960120" y="201168"/>
+            <a:ext cx="10058400" cy="228600"/>
           </a:xfrm>
           <a:prstGeom prst="rect">
             <a:avLst/>
@@ -9340,7 +9990,7 @@
               <a:buNone/>
             </a:pPr>
             <a:r>
-              <a:rPr lang="en-US" sz="1100" b="1" dirty="0">
+              <a:rPr lang="en-US" sz="1050" b="1" dirty="0">
                 <a:solidFill>
                   <a:srgbClr val="FF922B"/>
                 </a:solidFill>
@@ -9350,7 +10000,7 @@
               </a:rPr>
               <a:t>CIERRE</a:t>
             </a:r>
-            <a:endParaRPr lang="en-US" sz="1100" dirty="0"/>
+            <a:endParaRPr lang="en-US" sz="1050" dirty="0"/>
           </a:p>
         </p:txBody>
       </p:sp>
@@ -9362,8 +10012,8 @@
         </p:nvSpPr>
         <p:spPr>
           <a:xfrm>
-            <a:off x="548640" y="411480"/>
-            <a:ext cx="10972800" cy="502920"/>
+            <a:off x="960120" y="429768"/>
+            <a:ext cx="10058400" cy="457200"/>
           </a:xfrm>
           <a:prstGeom prst="rect">
             <a:avLst/>
@@ -9379,7 +10029,7 @@
               <a:buNone/>
             </a:pPr>
             <a:r>
-              <a:rPr lang="en-US" sz="2400" b="1" dirty="0">
+              <a:rPr lang="en-US" sz="2200" b="1" dirty="0">
                 <a:solidFill>
                   <a:srgbClr val="212529"/>
                 </a:solidFill>
@@ -9389,7 +10039,7 @@
               </a:rPr>
               <a:t>Conclusiones y Proyección Futura</a:t>
             </a:r>
-            <a:endParaRPr lang="en-US" sz="2400" dirty="0"/>
+            <a:endParaRPr lang="en-US" sz="2200" dirty="0"/>
           </a:p>
         </p:txBody>
       </p:sp>
@@ -9401,8 +10051,8 @@
         </p:nvSpPr>
         <p:spPr>
           <a:xfrm>
-            <a:off x="731520" y="1280160"/>
-            <a:ext cx="5212080" cy="5029200"/>
+            <a:off x="731520" y="1325880"/>
+            <a:ext cx="5212080" cy="4983480"/>
           </a:xfrm>
           <a:prstGeom prst="rect">
             <a:avLst/>
@@ -9410,9 +10060,9 @@
           <a:solidFill>
             <a:srgbClr val="FFFFFF"/>
           </a:solidFill>
-          <a:ln w="19050">
+          <a:ln w="12700">
             <a:solidFill>
-              <a:srgbClr val="DEE2E6"/>
+              <a:srgbClr val="E2E8F0"/>
             </a:solidFill>
             <a:prstDash val="solid"/>
           </a:ln>
@@ -9420,14 +10070,34 @@
       </p:sp>
       <p:sp>
         <p:nvSpPr>
-          <p:cNvPr id="7" name="Text 5"/>
-          <p:cNvSpPr/>
-          <p:nvPr/>
-        </p:nvSpPr>
-        <p:spPr>
-          <a:xfrm>
-            <a:off x="960120" y="1463040"/>
-            <a:ext cx="4754880" cy="365760"/>
+          <p:cNvPr id="7" name="Shape 5"/>
+          <p:cNvSpPr/>
+          <p:nvPr/>
+        </p:nvSpPr>
+        <p:spPr>
+          <a:xfrm>
+            <a:off x="777240" y="1325880"/>
+            <a:ext cx="5120640" cy="73152"/>
+          </a:xfrm>
+          <a:prstGeom prst="rect">
+            <a:avLst/>
+          </a:prstGeom>
+          <a:solidFill>
+            <a:srgbClr val="0B7285"/>
+          </a:solidFill>
+          <a:ln/>
+        </p:spPr>
+      </p:sp>
+      <p:sp>
+        <p:nvSpPr>
+          <p:cNvPr id="8" name="Text 6"/>
+          <p:cNvSpPr/>
+          <p:nvPr/>
+        </p:nvSpPr>
+        <p:spPr>
+          <a:xfrm>
+            <a:off x="1005840" y="1527048"/>
+            <a:ext cx="4663440" cy="347472"/>
           </a:xfrm>
           <a:prstGeom prst="rect">
             <a:avLst/>
@@ -9443,7 +10113,7 @@
               <a:buNone/>
             </a:pPr>
             <a:r>
-              <a:rPr lang="en-US" sz="1600" b="1" dirty="0">
+              <a:rPr lang="en-US" sz="1450" b="1" dirty="0">
                 <a:solidFill>
                   <a:srgbClr val="0B7285"/>
                 </a:solidFill>
@@ -9453,20 +10123,20 @@
               </a:rPr>
               <a:t>Conclusiones del Proyecto</a:t>
             </a:r>
-            <a:endParaRPr lang="en-US" sz="1600" dirty="0"/>
+            <a:endParaRPr lang="en-US" sz="1450" dirty="0"/>
           </a:p>
         </p:txBody>
       </p:sp>
       <p:sp>
         <p:nvSpPr>
-          <p:cNvPr id="8" name="Text 6"/>
-          <p:cNvSpPr/>
-          <p:nvPr/>
-        </p:nvSpPr>
-        <p:spPr>
-          <a:xfrm>
-            <a:off x="960120" y="1874520"/>
-            <a:ext cx="4754880" cy="4251960"/>
+          <p:cNvPr id="9" name="Text 7"/>
+          <p:cNvSpPr/>
+          <p:nvPr/>
+        </p:nvSpPr>
+        <p:spPr>
+          <a:xfrm>
+            <a:off x="1005840" y="1965960"/>
+            <a:ext cx="4663440" cy="4023360"/>
           </a:xfrm>
           <a:prstGeom prst="rect">
             <a:avLst/>
@@ -9475,17 +10145,14 @@
           <a:ln/>
         </p:spPr>
         <p:txBody>
-          <a:bodyPr wrap="square" rtlCol="0" anchor="t"/>
+          <a:bodyPr wrap="square" rtlCol="0" anchor="ctr"/>
           <a:lstStyle/>
           <a:p>
-            <a:pPr algn="l" indent="0" marL="0">
-              <a:spcAft>
-                <a:spcPts val="800"/>
-              </a:spcAft>
-              <a:buNone/>
-            </a:pPr>
-            <a:r>
-              <a:rPr lang="en-US" sz="1300" b="1" dirty="0">
+            <a:pPr indent="0" marL="0">
+              <a:buNone/>
+            </a:pPr>
+            <a:r>
+              <a:rPr lang="en-US" sz="1250" b="1" dirty="0">
                 <a:solidFill>
                   <a:srgbClr val="0B7285"/>
                 </a:solidFill>
@@ -9496,14 +10163,11 @@
               <a:t>1. Cumplimiento Total de Objetivos:
 </a:t>
             </a:r>
-            <a:pPr algn="l" indent="0" marL="0">
-              <a:spcAft>
-                <a:spcPts val="800"/>
-              </a:spcAft>
-              <a:buNone/>
-            </a:pPr>
-            <a:r>
-              <a:rPr lang="en-US" sz="1250" dirty="0">
+            <a:pPr indent="0" marL="0">
+              <a:buNone/>
+            </a:pPr>
+            <a:r>
+              <a:rPr lang="en-US" sz="1150" dirty="0">
                 <a:solidFill>
                   <a:srgbClr val="495057"/>
                 </a:solidFill>
@@ -9511,17 +10175,14 @@
                 <a:ea typeface="Arial" pitchFamily="34" charset="-122"/>
                 <a:cs typeface="Arial" pitchFamily="34" charset="-120"/>
               </a:rPr>
-              <a:t>Se logró desarrollar una solución web completa, rápida (&lt;100ms) y 100% responsiva para celulares y computadoras.
+              <a:t>Se logró una plataforma web completa, rápida (&lt;100ms) y 100% adaptada a celulares y computadoras.
 </a:t>
             </a:r>
-            <a:pPr algn="l" indent="0" marL="0">
-              <a:spcAft>
-                <a:spcPts val="800"/>
-              </a:spcAft>
-              <a:buNone/>
-            </a:pPr>
-            <a:r>
-              <a:rPr lang="en-US" sz="1300" b="1" dirty="0">
+            <a:pPr indent="0" marL="0">
+              <a:buNone/>
+            </a:pPr>
+            <a:r>
+              <a:rPr lang="en-US" sz="1250" b="1" dirty="0">
                 <a:solidFill>
                   <a:srgbClr val="0B7285"/>
                 </a:solidFill>
@@ -9529,17 +10190,14 @@
                 <a:ea typeface="Arial" pitchFamily="34" charset="-122"/>
                 <a:cs typeface="Arial" pitchFamily="34" charset="-120"/>
               </a:rPr>
-              <a:t>2. Impacto Social Solidario:
+              <a:t>2. Impacto Social Positivo:
 </a:t>
             </a:r>
-            <a:pPr algn="l" indent="0" marL="0">
-              <a:spcAft>
-                <a:spcPts val="800"/>
-              </a:spcAft>
-              <a:buNone/>
-            </a:pPr>
-            <a:r>
-              <a:rPr lang="en-US" sz="1250" dirty="0">
+            <a:pPr indent="0" marL="0">
+              <a:buNone/>
+            </a:pPr>
+            <a:r>
+              <a:rPr lang="en-US" sz="1150" dirty="0">
                 <a:solidFill>
                   <a:srgbClr val="495057"/>
                 </a:solidFill>
@@ -9547,17 +10205,14 @@
                 <a:ea typeface="Arial" pitchFamily="34" charset="-122"/>
                 <a:cs typeface="Arial" pitchFamily="34" charset="-120"/>
               </a:rPr>
-              <a:t>La plataforma democratiza y centraliza la búsqueda de mascotas, reduciendo la angustia familiar y fortaleciendo la cooperación vecinal.
+              <a:t>Centraliza la búsqueda de mascotas en la comunidad, reduciendo la angustia familiar y fomentando la cooperación vecinal.
 </a:t>
             </a:r>
-            <a:pPr algn="l" indent="0" marL="0">
-              <a:spcAft>
-                <a:spcPts val="800"/>
-              </a:spcAft>
-              <a:buNone/>
-            </a:pPr>
-            <a:r>
-              <a:rPr lang="en-US" sz="1300" b="1" dirty="0">
+            <a:pPr indent="0" marL="0">
+              <a:buNone/>
+            </a:pPr>
+            <a:r>
+              <a:rPr lang="en-US" sz="1250" b="1" dirty="0">
                 <a:solidFill>
                   <a:srgbClr val="0B7285"/>
                 </a:solidFill>
@@ -9568,14 +10223,11 @@
               <a:t>3. Formación Técnica BTH:
 </a:t>
             </a:r>
-            <a:pPr algn="l" indent="0" marL="0">
-              <a:spcAft>
-                <a:spcPts val="800"/>
-              </a:spcAft>
-              <a:buNone/>
-            </a:pPr>
-            <a:r>
-              <a:rPr lang="en-US" sz="1250" dirty="0">
+            <a:pPr indent="0" marL="0">
+              <a:buNone/>
+            </a:pPr>
+            <a:r>
+              <a:rPr lang="en-US" sz="1150" dirty="0">
                 <a:solidFill>
                   <a:srgbClr val="495057"/>
                 </a:solidFill>
@@ -9583,22 +10235,22 @@
                 <a:ea typeface="Arial" pitchFamily="34" charset="-122"/>
                 <a:cs typeface="Arial" pitchFamily="34" charset="-120"/>
               </a:rPr>
-              <a:t>Demuestra las capacidades prácticas adquiridas en Sistemas Informáticos para crear software de nivel profesional a costo cero.</a:t>
-            </a:r>
-            <a:endParaRPr lang="en-US" sz="1300" dirty="0"/>
+              <a:t>Demuestra las competencias adquiridas en Sistemas Informáticos para crear software profesional a costo cero.</a:t>
+            </a:r>
+            <a:endParaRPr lang="en-US" sz="1250" dirty="0"/>
           </a:p>
         </p:txBody>
       </p:sp>
       <p:sp>
         <p:nvSpPr>
-          <p:cNvPr id="9" name="Shape 7"/>
-          <p:cNvSpPr/>
-          <p:nvPr/>
-        </p:nvSpPr>
-        <p:spPr>
-          <a:xfrm>
-            <a:off x="6217920" y="1280160"/>
-            <a:ext cx="5212080" cy="5029200"/>
+          <p:cNvPr id="10" name="Shape 8"/>
+          <p:cNvSpPr/>
+          <p:nvPr/>
+        </p:nvSpPr>
+        <p:spPr>
+          <a:xfrm>
+            <a:off x="6217920" y="1325880"/>
+            <a:ext cx="5212080" cy="4983480"/>
           </a:xfrm>
           <a:prstGeom prst="rect">
             <a:avLst/>
@@ -9606,9 +10258,9 @@
           <a:solidFill>
             <a:srgbClr val="FFFFFF"/>
           </a:solidFill>
-          <a:ln w="19050">
+          <a:ln w="12700">
             <a:solidFill>
-              <a:srgbClr val="DEE2E6"/>
+              <a:srgbClr val="E2E8F0"/>
             </a:solidFill>
             <a:prstDash val="solid"/>
           </a:ln>
@@ -9616,14 +10268,34 @@
       </p:sp>
       <p:sp>
         <p:nvSpPr>
-          <p:cNvPr id="10" name="Text 8"/>
-          <p:cNvSpPr/>
-          <p:nvPr/>
-        </p:nvSpPr>
-        <p:spPr>
-          <a:xfrm>
-            <a:off x="6446520" y="1463040"/>
-            <a:ext cx="4754880" cy="365760"/>
+          <p:cNvPr id="11" name="Shape 9"/>
+          <p:cNvSpPr/>
+          <p:nvPr/>
+        </p:nvSpPr>
+        <p:spPr>
+          <a:xfrm>
+            <a:off x="6263640" y="1325880"/>
+            <a:ext cx="5120640" cy="73152"/>
+          </a:xfrm>
+          <a:prstGeom prst="rect">
+            <a:avLst/>
+          </a:prstGeom>
+          <a:solidFill>
+            <a:srgbClr val="FF922B"/>
+          </a:solidFill>
+          <a:ln/>
+        </p:spPr>
+      </p:sp>
+      <p:sp>
+        <p:nvSpPr>
+          <p:cNvPr id="12" name="Text 10"/>
+          <p:cNvSpPr/>
+          <p:nvPr/>
+        </p:nvSpPr>
+        <p:spPr>
+          <a:xfrm>
+            <a:off x="6492240" y="1527048"/>
+            <a:ext cx="4663440" cy="347472"/>
           </a:xfrm>
           <a:prstGeom prst="rect">
             <a:avLst/>
@@ -9639,7 +10311,7 @@
               <a:buNone/>
             </a:pPr>
             <a:r>
-              <a:rPr lang="en-US" sz="1600" b="1" dirty="0">
+              <a:rPr lang="en-US" sz="1450" b="1" dirty="0">
                 <a:solidFill>
                   <a:srgbClr val="0B7285"/>
                 </a:solidFill>
@@ -9649,20 +10321,20 @@
               </a:rPr>
               <a:t>Estrategia de Mejora y Proyección</a:t>
             </a:r>
-            <a:endParaRPr lang="en-US" sz="1600" dirty="0"/>
+            <a:endParaRPr lang="en-US" sz="1450" dirty="0"/>
           </a:p>
         </p:txBody>
       </p:sp>
       <p:sp>
         <p:nvSpPr>
-          <p:cNvPr id="11" name="Text 9"/>
-          <p:cNvSpPr/>
-          <p:nvPr/>
-        </p:nvSpPr>
-        <p:spPr>
-          <a:xfrm>
-            <a:off x="6446520" y="1874520"/>
-            <a:ext cx="4754880" cy="4251960"/>
+          <p:cNvPr id="13" name="Text 11"/>
+          <p:cNvSpPr/>
+          <p:nvPr/>
+        </p:nvSpPr>
+        <p:spPr>
+          <a:xfrm>
+            <a:off x="6492240" y="1965960"/>
+            <a:ext cx="4663440" cy="4023360"/>
           </a:xfrm>
           <a:prstGeom prst="rect">
             <a:avLst/>
@@ -9671,17 +10343,14 @@
           <a:ln/>
         </p:spPr>
         <p:txBody>
-          <a:bodyPr wrap="square" rtlCol="0" anchor="t"/>
+          <a:bodyPr wrap="square" rtlCol="0" anchor="ctr"/>
           <a:lstStyle/>
           <a:p>
-            <a:pPr algn="l" indent="0" marL="0">
-              <a:spcAft>
-                <a:spcPts val="800"/>
-              </a:spcAft>
-              <a:buNone/>
-            </a:pPr>
-            <a:r>
-              <a:rPr lang="en-US" sz="1300" b="1" dirty="0">
+            <a:pPr indent="0" marL="0">
+              <a:buNone/>
+            </a:pPr>
+            <a:r>
+              <a:rPr lang="en-US" sz="1250" b="1" dirty="0">
                 <a:solidFill>
                   <a:srgbClr val="FF922B"/>
                 </a:solidFill>
@@ -9692,14 +10361,11 @@
               <a:t>Mejoras a Corto Plazo:
 </a:t>
             </a:r>
-            <a:pPr algn="l" indent="0" marL="0">
-              <a:spcAft>
-                <a:spcPts val="800"/>
-              </a:spcAft>
-              <a:buNone/>
-            </a:pPr>
-            <a:r>
-              <a:rPr lang="en-US" sz="1250" dirty="0">
+            <a:pPr indent="0" marL="0">
+              <a:buNone/>
+            </a:pPr>
+            <a:r>
+              <a:rPr lang="en-US" sz="1150" dirty="0">
                 <a:solidFill>
                   <a:srgbClr val="495057"/>
                 </a:solidFill>
@@ -9707,18 +10373,15 @@
                 <a:ea typeface="Arial" pitchFamily="34" charset="-122"/>
                 <a:cs typeface="Arial" pitchFamily="34" charset="-120"/>
               </a:rPr>
-              <a:t>• Integración de mapas interactivos con geolocalización (Leaflet / Google Maps API) para colocar pines exactos de avistamiento.
+              <a:t>• Integración de mapas interactivos con geolocalización (Leaflet / Google Maps API) para ubicar el sitio exacto de extravío.
 • Filtros avanzados por especie (perro, gato, ave) y color.
 </a:t>
             </a:r>
-            <a:pPr algn="l" indent="0" marL="0">
-              <a:spcAft>
-                <a:spcPts val="800"/>
-              </a:spcAft>
-              <a:buNone/>
-            </a:pPr>
-            <a:r>
-              <a:rPr lang="en-US" sz="1300" b="1" dirty="0">
+            <a:pPr indent="0" marL="0">
+              <a:buNone/>
+            </a:pPr>
+            <a:r>
+              <a:rPr lang="en-US" sz="1250" b="1" dirty="0">
                 <a:solidFill>
                   <a:srgbClr val="FF922B"/>
                 </a:solidFill>
@@ -9729,14 +10392,11 @@
               <a:t>Proyección a Mediano y Largo Plazo:
 </a:t>
             </a:r>
-            <a:pPr algn="l" indent="0" marL="0">
-              <a:spcAft>
-                <a:spcPts val="800"/>
-              </a:spcAft>
-              <a:buNone/>
-            </a:pPr>
-            <a:r>
-              <a:rPr lang="en-US" sz="1250" dirty="0">
+            <a:pPr indent="0" marL="0">
+              <a:buNone/>
+            </a:pPr>
+            <a:r>
+              <a:rPr lang="en-US" sz="1150" dirty="0">
                 <a:solidFill>
                   <a:srgbClr val="495057"/>
                 </a:solidFill>
@@ -9746,17 +10406,14 @@
               </a:rPr>
               <a:t>• Transformar la web en una Progressive Web App (PWA) instalable directamente en Android e iOS.</a:t>
             </a:r>
-            <a:endParaRPr lang="en-US" sz="1300" dirty="0"/>
-          </a:p>
-          <a:p>
-            <a:pPr algn="l" indent="0" marL="0">
-              <a:spcAft>
-                <a:spcPts val="800"/>
-              </a:spcAft>
-              <a:buNone/>
-            </a:pPr>
-            <a:r>
-              <a:rPr lang="en-US" sz="1250" dirty="0">
+            <a:endParaRPr lang="en-US" sz="1250" dirty="0"/>
+          </a:p>
+          <a:p>
+            <a:pPr indent="0" marL="0">
+              <a:buNone/>
+            </a:pPr>
+            <a:r>
+              <a:rPr lang="en-US" sz="1150" dirty="0">
                 <a:solidFill>
                   <a:srgbClr val="495057"/>
                 </a:solidFill>
@@ -9764,9 +10421,9 @@
                 <a:ea typeface="Arial" pitchFamily="34" charset="-122"/>
                 <a:cs typeface="Arial" pitchFamily="34" charset="-120"/>
               </a:rPr>
-              <a:t>• Implementar notificaciones push automáticas cuando se reporte una mascota perdida en el barrio del usuario.</a:t>
-            </a:r>
-            <a:endParaRPr lang="en-US" sz="1300" dirty="0"/>
+              <a:t>• Sistema de notificaciones push automáticas cuando se reporte una mascota perdida en el barrio del usuario.</a:t>
+            </a:r>
+            <a:endParaRPr lang="en-US" sz="1250" dirty="0"/>
           </a:p>
         </p:txBody>
       </p:sp>

--- a/documentacion/presentacion_defensa.pptx
+++ b/documentacion/presentacion_defensa.pptx
@@ -1658,7 +1658,7 @@
     <p:bg>
       <p:bgPr>
         <a:solidFill>
-          <a:srgbClr val="1A1D20"/>
+          <a:srgbClr val="0F172A"/>
         </a:solidFill>
       </p:bgPr>
     </p:bg>
@@ -1685,17 +1685,17 @@
         <p:spPr>
           <a:xfrm>
             <a:off x="822960" y="731520"/>
-            <a:ext cx="5303520" cy="329184"/>
+            <a:ext cx="5669280" cy="329184"/>
           </a:xfrm>
           <a:prstGeom prst="rect">
             <a:avLst/>
           </a:prstGeom>
           <a:solidFill>
-            <a:srgbClr val="2D3238"/>
+            <a:srgbClr val="1E293B"/>
           </a:solidFill>
           <a:ln w="12700">
             <a:solidFill>
-              <a:srgbClr val="FF922B"/>
+              <a:srgbClr val="D97706"/>
             </a:solidFill>
             <a:prstDash val="solid"/>
           </a:ln>
@@ -1710,7 +1710,7 @@
         <p:spPr>
           <a:xfrm>
             <a:off x="914400" y="749808"/>
-            <a:ext cx="5120640" cy="292608"/>
+            <a:ext cx="5486400" cy="292608"/>
           </a:xfrm>
           <a:prstGeom prst="rect">
             <a:avLst/>
@@ -1726,9 +1726,9 @@
               <a:buNone/>
             </a:pPr>
             <a:r>
-              <a:rPr lang="en-US" sz="1050" b="1" dirty="0">
-                <a:solidFill>
-                  <a:srgbClr val="FF922B"/>
+              <a:rPr lang="en-US" sz="1000" b="1" dirty="0">
+                <a:solidFill>
+                  <a:srgbClr val="D97706"/>
                 </a:solidFill>
                 <a:latin typeface="Arial" pitchFamily="34" charset="0"/>
                 <a:ea typeface="Arial" pitchFamily="34" charset="-122"/>
@@ -1736,7 +1736,7 @@
               </a:rPr>
               <a:t>BACHILLERATO TÉCNICO HUMANÍSTICO • SISTEMAS INFORMÁTICOS</a:t>
             </a:r>
-            <a:endParaRPr lang="en-US" sz="1050" dirty="0"/>
+            <a:endParaRPr lang="en-US" sz="1000" dirty="0"/>
           </a:p>
         </p:txBody>
       </p:sp>
@@ -1749,7 +1749,7 @@
         <p:spPr>
           <a:xfrm>
             <a:off x="822960" y="1234440"/>
-            <a:ext cx="10515600" cy="1005840"/>
+            <a:ext cx="10515600" cy="914400"/>
           </a:xfrm>
           <a:prstGeom prst="rect">
             <a:avLst/>
@@ -1765,7 +1765,7 @@
               <a:buNone/>
             </a:pPr>
             <a:r>
-              <a:rPr lang="en-US" sz="4600" b="1" dirty="0">
+              <a:rPr lang="en-US" sz="4400" b="1" dirty="0">
                 <a:solidFill>
                   <a:srgbClr val="FFFFFF"/>
                 </a:solidFill>
@@ -1775,7 +1775,7 @@
               </a:rPr>
               <a:t>EncuentraMiMascota</a:t>
             </a:r>
-            <a:endParaRPr lang="en-US" sz="4600" dirty="0"/>
+            <a:endParaRPr lang="en-US" sz="4400" dirty="0"/>
           </a:p>
         </p:txBody>
       </p:sp>
@@ -1787,7 +1787,7 @@
         </p:nvSpPr>
         <p:spPr>
           <a:xfrm>
-            <a:off x="822960" y="2240280"/>
+            <a:off x="822960" y="2194560"/>
             <a:ext cx="10515600" cy="457200"/>
           </a:xfrm>
           <a:prstGeom prst="rect">
@@ -1804,17 +1804,17 @@
               <a:buNone/>
             </a:pPr>
             <a:r>
-              <a:rPr lang="en-US" sz="1800" b="1" dirty="0">
-                <a:solidFill>
-                  <a:srgbClr val="1098AD"/>
-                </a:solidFill>
-                <a:latin typeface="Arial" pitchFamily="34" charset="0"/>
-                <a:ea typeface="Arial" pitchFamily="34" charset="-122"/>
-                <a:cs typeface="Arial" pitchFamily="34" charset="-120"/>
-              </a:rPr>
-              <a:t>Plataforma Web Responsive para el Reporte y Búsqueda de Mascotas Perdidas</a:t>
-            </a:r>
-            <a:endParaRPr lang="en-US" sz="1800" dirty="0"/>
+              <a:rPr lang="en-US" sz="1650" b="1" dirty="0">
+                <a:solidFill>
+                  <a:srgbClr val="38BDF8"/>
+                </a:solidFill>
+                <a:latin typeface="Arial" pitchFamily="34" charset="0"/>
+                <a:ea typeface="Arial" pitchFamily="34" charset="-122"/>
+                <a:cs typeface="Arial" pitchFamily="34" charset="-120"/>
+              </a:rPr>
+              <a:t>Plataforma Web Responsive para el Reporte y Búsqueda de Mascotas Perdidas mediante ByCoding</a:t>
+            </a:r>
+            <a:endParaRPr lang="en-US" sz="1650" dirty="0"/>
           </a:p>
         </p:txBody>
       </p:sp>
@@ -1826,18 +1826,18 @@
         </p:nvSpPr>
         <p:spPr>
           <a:xfrm>
-            <a:off x="822960" y="3108960"/>
-            <a:ext cx="5120640" cy="2560320"/>
+            <a:off x="822960" y="3017520"/>
+            <a:ext cx="5120640" cy="2743200"/>
           </a:xfrm>
           <a:prstGeom prst="rect">
             <a:avLst/>
           </a:prstGeom>
           <a:solidFill>
-            <a:srgbClr val="252A2E"/>
+            <a:srgbClr val="1E293B"/>
           </a:solidFill>
           <a:ln w="12700">
             <a:solidFill>
-              <a:srgbClr val="343A40"/>
+              <a:srgbClr val="334155"/>
             </a:solidFill>
             <a:prstDash val="solid"/>
           </a:ln>
@@ -1851,7 +1851,7 @@
         </p:nvSpPr>
         <p:spPr>
           <a:xfrm>
-            <a:off x="1097280" y="3291840"/>
+            <a:off x="1097280" y="3200400"/>
             <a:ext cx="4572000" cy="274320"/>
           </a:xfrm>
           <a:prstGeom prst="rect">
@@ -1868,9 +1868,9 @@
               <a:buNone/>
             </a:pPr>
             <a:r>
-              <a:rPr lang="en-US" sz="1200" b="1" dirty="0">
-                <a:solidFill>
-                  <a:srgbClr val="FF922B"/>
+              <a:rPr lang="en-US" sz="1150" b="1" dirty="0">
+                <a:solidFill>
+                  <a:srgbClr val="D97706"/>
                 </a:solidFill>
                 <a:latin typeface="Arial" pitchFamily="34" charset="0"/>
                 <a:ea typeface="Arial" pitchFamily="34" charset="-122"/>
@@ -1878,7 +1878,7 @@
               </a:rPr>
               <a:t>👥 EQUIPO DE POSTULANTES:</a:t>
             </a:r>
-            <a:endParaRPr lang="en-US" sz="1200" dirty="0"/>
+            <a:endParaRPr lang="en-US" sz="1150" dirty="0"/>
           </a:p>
         </p:txBody>
       </p:sp>
@@ -1890,8 +1890,8 @@
         </p:nvSpPr>
         <p:spPr>
           <a:xfrm>
-            <a:off x="1097280" y="3657600"/>
-            <a:ext cx="4572000" cy="1828800"/>
+            <a:off x="1097280" y="3566160"/>
+            <a:ext cx="4572000" cy="2011680"/>
           </a:xfrm>
           <a:prstGeom prst="rect">
             <a:avLst/>
@@ -1907,7 +1907,7 @@
               <a:buNone/>
             </a:pPr>
             <a:r>
-              <a:rPr lang="en-US" sz="1500" b="1" dirty="0">
+              <a:rPr lang="en-US" sz="1450" b="1" dirty="0">
                 <a:solidFill>
                   <a:srgbClr val="FFFFFF"/>
                 </a:solidFill>
@@ -1915,29 +1915,29 @@
                 <a:ea typeface="Arial" pitchFamily="34" charset="-122"/>
                 <a:cs typeface="Arial" pitchFamily="34" charset="-120"/>
               </a:rPr>
-              <a:t>• Leon Justiniano
+              <a:t>• Dietter Leon Justiniano
 </a:t>
             </a:r>
             <a:pPr indent="0" marL="0">
               <a:buNone/>
             </a:pPr>
             <a:r>
-              <a:rPr lang="en-US" sz="1150" dirty="0">
-                <a:solidFill>
-                  <a:srgbClr val="868E96"/>
-                </a:solidFill>
-                <a:latin typeface="Arial" pitchFamily="34" charset="0"/>
-                <a:ea typeface="Arial" pitchFamily="34" charset="-122"/>
-                <a:cs typeface="Arial" pitchFamily="34" charset="-120"/>
-              </a:rPr>
-              <a:t>  Desarrollo Full-Stack y Pruebas Técnicas
+              <a:rPr lang="en-US" sz="1100" dirty="0">
+                <a:solidFill>
+                  <a:srgbClr val="94A3B8"/>
+                </a:solidFill>
+                <a:latin typeface="Arial" pitchFamily="34" charset="0"/>
+                <a:ea typeface="Arial" pitchFamily="34" charset="-122"/>
+                <a:cs typeface="Arial" pitchFamily="34" charset="-120"/>
+              </a:rPr>
+              <a:t>  Desarrollo Full-Stack, Base de Datos y Pruebas Técnicas
 </a:t>
             </a:r>
             <a:pPr indent="0" marL="0">
               <a:buNone/>
             </a:pPr>
             <a:r>
-              <a:rPr lang="en-US" sz="1500" b="1" dirty="0">
+              <a:rPr lang="en-US" sz="1450" b="1" dirty="0">
                 <a:solidFill>
                   <a:srgbClr val="FFFFFF"/>
                 </a:solidFill>
@@ -1945,24 +1945,24 @@
                 <a:ea typeface="Arial" pitchFamily="34" charset="-122"/>
                 <a:cs typeface="Arial" pitchFamily="34" charset="-120"/>
               </a:rPr>
-              <a:t>• Yimmy Lijeron Mejia
+              <a:t>• Yimmy Lijeron Mejias
 </a:t>
             </a:r>
             <a:pPr indent="0" marL="0">
               <a:buNone/>
             </a:pPr>
             <a:r>
-              <a:rPr lang="en-US" sz="1150" dirty="0">
-                <a:solidFill>
-                  <a:srgbClr val="868E96"/>
-                </a:solidFill>
-                <a:latin typeface="Arial" pitchFamily="34" charset="0"/>
-                <a:ea typeface="Arial" pitchFamily="34" charset="-122"/>
-                <a:cs typeface="Arial" pitchFamily="34" charset="-120"/>
-              </a:rPr>
-              <a:t>  Diseño UI/UX, Análisis y Documentación</a:t>
-            </a:r>
-            <a:endParaRPr lang="en-US" sz="1500" dirty="0"/>
+              <a:rPr lang="en-US" sz="1100" dirty="0">
+                <a:solidFill>
+                  <a:srgbClr val="94A3B8"/>
+                </a:solidFill>
+                <a:latin typeface="Arial" pitchFamily="34" charset="0"/>
+                <a:ea typeface="Arial" pitchFamily="34" charset="-122"/>
+                <a:cs typeface="Arial" pitchFamily="34" charset="-120"/>
+              </a:rPr>
+              <a:t>  Análisis de Requerimientos, Diseño UI/UX y Documentación</a:t>
+            </a:r>
+            <a:endParaRPr lang="en-US" sz="1450" dirty="0"/>
           </a:p>
         </p:txBody>
       </p:sp>
@@ -1974,18 +1974,18 @@
         </p:nvSpPr>
         <p:spPr>
           <a:xfrm>
-            <a:off x="6217920" y="3108960"/>
-            <a:ext cx="5120640" cy="2560320"/>
+            <a:off x="6217920" y="3017520"/>
+            <a:ext cx="5120640" cy="2743200"/>
           </a:xfrm>
           <a:prstGeom prst="rect">
             <a:avLst/>
           </a:prstGeom>
           <a:solidFill>
-            <a:srgbClr val="252A2E"/>
+            <a:srgbClr val="1E293B"/>
           </a:solidFill>
           <a:ln w="12700">
             <a:solidFill>
-              <a:srgbClr val="343A40"/>
+              <a:srgbClr val="334155"/>
             </a:solidFill>
             <a:prstDash val="solid"/>
           </a:ln>
@@ -1999,7 +1999,7 @@
         </p:nvSpPr>
         <p:spPr>
           <a:xfrm>
-            <a:off x="6492240" y="3291840"/>
+            <a:off x="6492240" y="3200400"/>
             <a:ext cx="4572000" cy="274320"/>
           </a:xfrm>
           <a:prstGeom prst="rect">
@@ -2016,17 +2016,17 @@
               <a:buNone/>
             </a:pPr>
             <a:r>
-              <a:rPr lang="en-US" sz="1200" b="1" dirty="0">
-                <a:solidFill>
-                  <a:srgbClr val="FF922B"/>
-                </a:solidFill>
-                <a:latin typeface="Arial" pitchFamily="34" charset="0"/>
-                <a:ea typeface="Arial" pitchFamily="34" charset="-122"/>
-                <a:cs typeface="Arial" pitchFamily="34" charset="-120"/>
-              </a:rPr>
-              <a:t>🏛️ ASESORÍA Y UNIDAD EDUCATIVA:</a:t>
-            </a:r>
-            <a:endParaRPr lang="en-US" sz="1200" dirty="0"/>
+              <a:rPr lang="en-US" sz="1150" b="1" dirty="0">
+                <a:solidFill>
+                  <a:srgbClr val="D97706"/>
+                </a:solidFill>
+                <a:latin typeface="Arial" pitchFamily="34" charset="0"/>
+                <a:ea typeface="Arial" pitchFamily="34" charset="-122"/>
+                <a:cs typeface="Arial" pitchFamily="34" charset="-120"/>
+              </a:rPr>
+              <a:t>🏛️ ASESORÍA DOCENTE Y UNIDAD EDUCATIVA:</a:t>
+            </a:r>
+            <a:endParaRPr lang="en-US" sz="1150" dirty="0"/>
           </a:p>
         </p:txBody>
       </p:sp>
@@ -2038,8 +2038,8 @@
         </p:nvSpPr>
         <p:spPr>
           <a:xfrm>
-            <a:off x="6492240" y="3657600"/>
-            <a:ext cx="4572000" cy="1828800"/>
+            <a:off x="6492240" y="3566160"/>
+            <a:ext cx="4572000" cy="2011680"/>
           </a:xfrm>
           <a:prstGeom prst="rect">
             <a:avLst/>
@@ -2055,9 +2055,9 @@
               <a:buNone/>
             </a:pPr>
             <a:r>
-              <a:rPr lang="en-US" sz="1250" b="1" dirty="0">
-                <a:solidFill>
-                  <a:srgbClr val="1098AD"/>
+              <a:rPr lang="en-US" sz="1200" b="1" dirty="0">
+                <a:solidFill>
+                  <a:srgbClr val="38BDF8"/>
                 </a:solidFill>
                 <a:latin typeface="Arial" pitchFamily="34" charset="0"/>
                 <a:ea typeface="Arial" pitchFamily="34" charset="-122"/>
@@ -2069,7 +2069,7 @@
               <a:buNone/>
             </a:pPr>
             <a:r>
-              <a:rPr lang="en-US" sz="1250" dirty="0">
+              <a:rPr lang="en-US" sz="1200" dirty="0">
                 <a:solidFill>
                   <a:srgbClr val="FFFFFF"/>
                 </a:solidFill>
@@ -2077,16 +2077,16 @@
                 <a:ea typeface="Arial" pitchFamily="34" charset="-122"/>
                 <a:cs typeface="Arial" pitchFamily="34" charset="-120"/>
               </a:rPr>
-              <a:t>Lic. Ronald Silver Quino Torrez
+              <a:t>Lic. Ivanna Leminka López Sanabria
 </a:t>
             </a:r>
             <a:pPr indent="0" marL="0">
               <a:buNone/>
             </a:pPr>
             <a:r>
-              <a:rPr lang="en-US" sz="1250" b="1" dirty="0">
-                <a:solidFill>
-                  <a:srgbClr val="1098AD"/>
+              <a:rPr lang="en-US" sz="1200" b="1" dirty="0">
+                <a:solidFill>
+                  <a:srgbClr val="38BDF8"/>
                 </a:solidFill>
                 <a:latin typeface="Arial" pitchFamily="34" charset="0"/>
                 <a:ea typeface="Arial" pitchFamily="34" charset="-122"/>
@@ -2098,7 +2098,7 @@
               <a:buNone/>
             </a:pPr>
             <a:r>
-              <a:rPr lang="en-US" sz="1250" dirty="0">
+              <a:rPr lang="en-US" sz="1200" dirty="0">
                 <a:solidFill>
                   <a:srgbClr val="FFFFFF"/>
                 </a:solidFill>
@@ -2113,9 +2113,9 @@
               <a:buNone/>
             </a:pPr>
             <a:r>
-              <a:rPr lang="en-US" sz="1250" b="1" dirty="0">
-                <a:solidFill>
-                  <a:srgbClr val="1098AD"/>
+              <a:rPr lang="en-US" sz="1200" b="1" dirty="0">
+                <a:solidFill>
+                  <a:srgbClr val="38BDF8"/>
                 </a:solidFill>
                 <a:latin typeface="Arial" pitchFamily="34" charset="0"/>
                 <a:ea typeface="Arial" pitchFamily="34" charset="-122"/>
@@ -2127,7 +2127,7 @@
               <a:buNone/>
             </a:pPr>
             <a:r>
-              <a:rPr lang="en-US" sz="1250" dirty="0">
+              <a:rPr lang="en-US" sz="1200" dirty="0">
                 <a:solidFill>
                   <a:srgbClr val="FFFFFF"/>
                 </a:solidFill>
@@ -2142,17 +2142,17 @@
               <a:buNone/>
             </a:pPr>
             <a:r>
-              <a:rPr lang="en-US" sz="1100" b="1" dirty="0">
-                <a:solidFill>
-                  <a:srgbClr val="868E96"/>
-                </a:solidFill>
-                <a:latin typeface="Arial" pitchFamily="34" charset="0"/>
-                <a:ea typeface="Arial" pitchFamily="34" charset="-122"/>
-                <a:cs typeface="Arial" pitchFamily="34" charset="-120"/>
-              </a:rPr>
-              <a:t>Núcleo Educativo Las Gamas • Warnes, Santa Cruz (2026)</a:t>
-            </a:r>
-            <a:endParaRPr lang="en-US" sz="1250" dirty="0"/>
+              <a:rPr lang="en-US" sz="1050" b="1" dirty="0">
+                <a:solidFill>
+                  <a:srgbClr val="94A3B8"/>
+                </a:solidFill>
+                <a:latin typeface="Arial" pitchFamily="34" charset="0"/>
+                <a:ea typeface="Arial" pitchFamily="34" charset="-122"/>
+                <a:cs typeface="Arial" pitchFamily="34" charset="-120"/>
+              </a:rPr>
+              <a:t>Núcleo Educativo "Las Gamas" • Warnes, Santa Cruz | 2026</a:t>
+            </a:r>
+            <a:endParaRPr lang="en-US" sz="1200" dirty="0"/>
           </a:p>
         </p:txBody>
       </p:sp>
@@ -2170,7 +2170,7 @@
     <p:bg>
       <p:bgPr>
         <a:solidFill>
-          <a:srgbClr val="1A1D20"/>
+          <a:srgbClr val="0F172A"/>
         </a:solidFill>
       </p:bgPr>
     </p:bg>
@@ -2242,7 +2242,7 @@
             <a:avLst/>
           </a:prstGeom>
           <a:solidFill>
-            <a:srgbClr val="FF922B"/>
+            <a:srgbClr val="D97706"/>
           </a:solidFill>
           <a:ln/>
         </p:spPr>
@@ -2274,7 +2274,7 @@
             <a:r>
               <a:rPr lang="en-US" sz="2600" b="1" dirty="0">
                 <a:solidFill>
-                  <a:srgbClr val="FF922B"/>
+                  <a:srgbClr val="D97706"/>
                 </a:solidFill>
                 <a:latin typeface="Arial" pitchFamily="34" charset="0"/>
                 <a:ea typeface="Arial" pitchFamily="34" charset="-122"/>
@@ -2313,7 +2313,7 @@
             <a:r>
               <a:rPr lang="en-US" sz="1500" dirty="0">
                 <a:solidFill>
-                  <a:srgbClr val="868E96"/>
+                  <a:srgbClr val="94A3B8"/>
                 </a:solidFill>
                 <a:latin typeface="Arial" pitchFamily="34" charset="0"/>
                 <a:ea typeface="Arial" pitchFamily="34" charset="-122"/>
@@ -2333,7 +2333,7 @@
                 <a:ea typeface="Arial" pitchFamily="34" charset="-122"/>
                 <a:cs typeface="Arial" pitchFamily="34" charset="-120"/>
               </a:rPr>
-              <a:t>Leon Justiniano   |   Yimmy Lijeron Mejia
+              <a:t>Dietter Leon Justiniano   |   Yimmy Lijeron Mejias
 </a:t>
             </a:r>
             <a:pPr algn="ctr" indent="0" marL="0">
@@ -2342,7 +2342,7 @@
             <a:r>
               <a:rPr lang="en-US" sz="1350" dirty="0">
                 <a:solidFill>
-                  <a:srgbClr val="868E96"/>
+                  <a:srgbClr val="94A3B8"/>
                 </a:solidFill>
                 <a:latin typeface="Arial" pitchFamily="34" charset="0"/>
                 <a:ea typeface="Arial" pitchFamily="34" charset="-122"/>
@@ -2356,7 +2356,7 @@
             <a:r>
               <a:rPr lang="en-US" sz="1400" dirty="0">
                 <a:solidFill>
-                  <a:srgbClr val="1098AD"/>
+                  <a:srgbClr val="38BDF8"/>
                 </a:solidFill>
                 <a:latin typeface="Arial" pitchFamily="34" charset="0"/>
                 <a:ea typeface="Arial" pitchFamily="34" charset="-122"/>
@@ -2371,7 +2371,7 @@
             <a:r>
               <a:rPr lang="en-US" sz="1250" i="1" dirty="0">
                 <a:solidFill>
-                  <a:srgbClr val="868E96"/>
+                  <a:srgbClr val="94A3B8"/>
                 </a:solidFill>
                 <a:latin typeface="Arial" pitchFamily="34" charset="0"/>
                 <a:ea typeface="Arial" pitchFamily="34" charset="-122"/>
@@ -2397,7 +2397,7 @@
     <p:bg>
       <p:bgPr>
         <a:solidFill>
-          <a:srgbClr val="F4F6F8"/>
+          <a:srgbClr val="F8FAFC"/>
         </a:solidFill>
       </p:bgPr>
     </p:bg>
@@ -2449,13 +2449,13 @@
         <p:spPr>
           <a:xfrm>
             <a:off x="731520" y="256032"/>
-            <a:ext cx="91440" cy="530352"/>
+            <a:ext cx="82296" cy="530352"/>
           </a:xfrm>
           <a:prstGeom prst="rect">
             <a:avLst/>
           </a:prstGeom>
           <a:solidFill>
-            <a:srgbClr val="1098AD"/>
+            <a:srgbClr val="0284C7"/>
           </a:solidFill>
           <a:ln/>
         </p:spPr>
@@ -2485,9 +2485,9 @@
               <a:buNone/>
             </a:pPr>
             <a:r>
-              <a:rPr lang="en-US" sz="1050" b="1" dirty="0">
-                <a:solidFill>
-                  <a:srgbClr val="FF922B"/>
+              <a:rPr lang="en-US" sz="1000" b="1" dirty="0">
+                <a:solidFill>
+                  <a:srgbClr val="D97706"/>
                 </a:solidFill>
                 <a:latin typeface="Arial" pitchFamily="34" charset="0"/>
                 <a:ea typeface="Arial" pitchFamily="34" charset="-122"/>
@@ -2495,7 +2495,7 @@
               </a:rPr>
               <a:t>CAPÍTULO 1</a:t>
             </a:r>
-            <a:endParaRPr lang="en-US" sz="1050" dirty="0"/>
+            <a:endParaRPr lang="en-US" sz="1000" dirty="0"/>
           </a:p>
         </p:txBody>
       </p:sp>
@@ -2524,9 +2524,9 @@
               <a:buNone/>
             </a:pPr>
             <a:r>
-              <a:rPr lang="en-US" sz="2200" b="1" dirty="0">
-                <a:solidFill>
-                  <a:srgbClr val="212529"/>
+              <a:rPr lang="en-US" sz="2100" b="1" dirty="0">
+                <a:solidFill>
+                  <a:srgbClr val="0F172A"/>
                 </a:solidFill>
                 <a:latin typeface="Arial" pitchFamily="34" charset="0"/>
                 <a:ea typeface="Arial" pitchFamily="34" charset="-122"/>
@@ -2534,7 +2534,7 @@
               </a:rPr>
               <a:t>1. Planteamiento del Problema</a:t>
             </a:r>
-            <a:endParaRPr lang="en-US" sz="2200" dirty="0"/>
+            <a:endParaRPr lang="en-US" sz="2100" dirty="0"/>
           </a:p>
         </p:txBody>
       </p:sp>
@@ -2546,8 +2546,8 @@
         </p:nvSpPr>
         <p:spPr>
           <a:xfrm>
-            <a:off x="731520" y="1325880"/>
-            <a:ext cx="5212080" cy="4983480"/>
+            <a:off x="731520" y="1280160"/>
+            <a:ext cx="4937760" cy="5029200"/>
           </a:xfrm>
           <a:prstGeom prst="rect">
             <a:avLst/>
@@ -2571,14 +2571,14 @@
         </p:nvSpPr>
         <p:spPr>
           <a:xfrm>
-            <a:off x="777240" y="1325880"/>
-            <a:ext cx="5120640" cy="73152"/>
+            <a:off x="768096" y="1280160"/>
+            <a:ext cx="4864608" cy="64008"/>
           </a:xfrm>
           <a:prstGeom prst="rect">
             <a:avLst/>
           </a:prstGeom>
           <a:solidFill>
-            <a:srgbClr val="1098AD"/>
+            <a:srgbClr val="0284C7"/>
           </a:solidFill>
           <a:ln/>
         </p:spPr>
@@ -2591,8 +2591,8 @@
         </p:nvSpPr>
         <p:spPr>
           <a:xfrm>
-            <a:off x="1005840" y="1527048"/>
-            <a:ext cx="4663440" cy="347472"/>
+            <a:off x="987552" y="1481328"/>
+            <a:ext cx="4425696" cy="347472"/>
           </a:xfrm>
           <a:prstGeom prst="rect">
             <a:avLst/>
@@ -2608,17 +2608,17 @@
               <a:buNone/>
             </a:pPr>
             <a:r>
-              <a:rPr lang="en-US" sz="1450" b="1" dirty="0">
-                <a:solidFill>
-                  <a:srgbClr val="0B7285"/>
-                </a:solidFill>
-                <a:latin typeface="Arial" pitchFamily="34" charset="0"/>
-                <a:ea typeface="Arial" pitchFamily="34" charset="-122"/>
-                <a:cs typeface="Arial" pitchFamily="34" charset="-120"/>
-              </a:rPr>
-              <a:t>1.1. Diagnóstico y Descripción de la Realidad</a:t>
-            </a:r>
-            <a:endParaRPr lang="en-US" sz="1450" dirty="0"/>
+              <a:rPr lang="en-US" sz="1350" b="1" dirty="0">
+                <a:solidFill>
+                  <a:srgbClr val="0284C7"/>
+                </a:solidFill>
+                <a:latin typeface="Arial" pitchFamily="34" charset="0"/>
+                <a:ea typeface="Arial" pitchFamily="34" charset="-122"/>
+                <a:cs typeface="Arial" pitchFamily="34" charset="-120"/>
+              </a:rPr>
+              <a:t>1.1. Diagnóstico de la Realidad</a:t>
+            </a:r>
+            <a:endParaRPr lang="en-US" sz="1350" dirty="0"/>
           </a:p>
         </p:txBody>
       </p:sp>
@@ -2630,8 +2630,8 @@
         </p:nvSpPr>
         <p:spPr>
           <a:xfrm>
-            <a:off x="1005840" y="1920240"/>
-            <a:ext cx="4663440" cy="2560320"/>
+            <a:off x="960120" y="1874520"/>
+            <a:ext cx="4480560" cy="2468880"/>
           </a:xfrm>
           <a:prstGeom prst="rect">
             <a:avLst/>
@@ -2647,78 +2647,78 @@
               <a:buNone/>
             </a:pPr>
             <a:r>
-              <a:rPr lang="en-US" sz="1250" b="1" dirty="0">
-                <a:solidFill>
-                  <a:srgbClr val="212529"/>
-                </a:solidFill>
-                <a:latin typeface="Arial" pitchFamily="34" charset="0"/>
-                <a:ea typeface="Arial" pitchFamily="34" charset="-122"/>
-                <a:cs typeface="Arial" pitchFamily="34" charset="-120"/>
-              </a:rPr>
-              <a:t>Contexto Comunitario:
+              <a:rPr lang="en-US" sz="1200" b="1" dirty="0">
+                <a:solidFill>
+                  <a:srgbClr val="0F172A"/>
+                </a:solidFill>
+                <a:latin typeface="Arial" pitchFamily="34" charset="0"/>
+                <a:ea typeface="Arial" pitchFamily="34" charset="-122"/>
+                <a:cs typeface="Arial" pitchFamily="34" charset="-120"/>
+              </a:rPr>
+              <a:t>Problemática en la Comunidad:
 </a:t>
             </a:r>
             <a:pPr indent="0" marL="0">
               <a:buNone/>
             </a:pPr>
             <a:r>
-              <a:rPr lang="en-US" sz="1150" dirty="0">
-                <a:solidFill>
-                  <a:srgbClr val="495057"/>
-                </a:solidFill>
-                <a:latin typeface="Arial" pitchFamily="34" charset="0"/>
-                <a:ea typeface="Arial" pitchFamily="34" charset="-122"/>
-                <a:cs typeface="Arial" pitchFamily="34" charset="-120"/>
-              </a:rPr>
-              <a:t>En Warnes y nuestra comunidad escolar, el extravío de mascotas causa gran angustia y pérdidas económicas familiares.
+              <a:rPr lang="en-US" sz="1100" dirty="0">
+                <a:solidFill>
+                  <a:srgbClr val="475569"/>
+                </a:solidFill>
+                <a:latin typeface="Arial" pitchFamily="34" charset="0"/>
+                <a:ea typeface="Arial" pitchFamily="34" charset="-122"/>
+                <a:cs typeface="Arial" pitchFamily="34" charset="-120"/>
+              </a:rPr>
+              <a:t>En Warnes y Santa Cruz, la pérdida de animales domésticos genera angustia familiar y falta de medios organizados para su búsqueda.
 </a:t>
             </a:r>
             <a:pPr indent="0" marL="0">
               <a:buNone/>
             </a:pPr>
             <a:r>
-              <a:rPr lang="en-US" sz="1250" b="1" dirty="0">
-                <a:solidFill>
-                  <a:srgbClr val="212529"/>
-                </a:solidFill>
-                <a:latin typeface="Arial" pitchFamily="34" charset="0"/>
-                <a:ea typeface="Arial" pitchFamily="34" charset="-122"/>
-                <a:cs typeface="Arial" pitchFamily="34" charset="-120"/>
-              </a:rPr>
-              <a:t>Canales Actuales Deficientes:
+              <a:rPr lang="en-US" sz="1200" b="1" dirty="0">
+                <a:solidFill>
+                  <a:srgbClr val="0F172A"/>
+                </a:solidFill>
+                <a:latin typeface="Arial" pitchFamily="34" charset="0"/>
+                <a:ea typeface="Arial" pitchFamily="34" charset="-122"/>
+                <a:cs typeface="Arial" pitchFamily="34" charset="-120"/>
+              </a:rPr>
+              <a:t>Canales Tradicionales Ineficientes:
 </a:t>
             </a:r>
             <a:pPr indent="0" marL="0">
               <a:buNone/>
             </a:pPr>
             <a:r>
-              <a:rPr lang="en-US" sz="1150" dirty="0">
-                <a:solidFill>
-                  <a:srgbClr val="495057"/>
-                </a:solidFill>
-                <a:latin typeface="Arial" pitchFamily="34" charset="0"/>
-                <a:ea typeface="Arial" pitchFamily="34" charset="-122"/>
-                <a:cs typeface="Arial" pitchFamily="34" charset="-120"/>
-              </a:rPr>
-              <a:t>• Afiches físicos que se destruyen con la lluvia y tienen bajo alcance.
-• Grupos de redes sociales donde los avisos se pierden en horas.
+              <a:rPr lang="en-US" sz="1100" dirty="0">
+                <a:solidFill>
+                  <a:srgbClr val="475569"/>
+                </a:solidFill>
+                <a:latin typeface="Arial" pitchFamily="34" charset="0"/>
+                <a:ea typeface="Arial" pitchFamily="34" charset="-122"/>
+                <a:cs typeface="Arial" pitchFamily="34" charset="-120"/>
+              </a:rPr>
+              <a:t>• Afiches en postes perecederos ante el clima y de corto alcance.
+• Redes sociales saturadas donde los reportes expiran en horas.
 </a:t>
             </a:r>
             <a:pPr indent="0" marL="0">
               <a:buNone/>
             </a:pPr>
             <a:r>
-              <a:rPr lang="en-US" sz="1250" b="1" dirty="0">
-                <a:solidFill>
-                  <a:srgbClr val="0B7285"/>
-                </a:solidFill>
-                <a:latin typeface="Arial" pitchFamily="34" charset="0"/>
-                <a:ea typeface="Arial" pitchFamily="34" charset="-122"/>
-                <a:cs typeface="Arial" pitchFamily="34" charset="-120"/>
-              </a:rPr>
-              <a:t>📊 Sondeo Diagnóstico (40 Familias del Barrio):</a:t>
-            </a:r>
-            <a:endParaRPr lang="en-US" sz="1250" dirty="0"/>
+              <a:rPr lang="en-US" sz="1200" b="1" dirty="0">
+                <a:solidFill>
+                  <a:srgbClr val="0284C7"/>
+                </a:solidFill>
+                <a:latin typeface="Arial" pitchFamily="34" charset="0"/>
+                <a:ea typeface="Arial" pitchFamily="34" charset="-122"/>
+                <a:cs typeface="Arial" pitchFamily="34" charset="-120"/>
+              </a:rPr>
+              <a:t>📊 Datos de Encuesta Local (40 Familias):</a:t>
+            </a:r>
+            <a:endParaRPr lang="en-US" sz="1200" dirty="0"/>
           </a:p>
         </p:txBody>
       </p:sp>
@@ -2730,18 +2730,18 @@
         </p:nvSpPr>
         <p:spPr>
           <a:xfrm>
-            <a:off x="1005840" y="4663440"/>
-            <a:ext cx="2194560" cy="1325880"/>
+            <a:off x="960120" y="4480560"/>
+            <a:ext cx="2148840" cy="1463040"/>
           </a:xfrm>
           <a:prstGeom prst="rect">
             <a:avLst/>
           </a:prstGeom>
           <a:solidFill>
-            <a:srgbClr val="E6FCF5"/>
+            <a:srgbClr val="E0F2FE"/>
           </a:solidFill>
           <a:ln w="12700">
             <a:solidFill>
-              <a:srgbClr val="1098AD"/>
+              <a:srgbClr val="0284C7"/>
             </a:solidFill>
             <a:prstDash val="solid"/>
           </a:ln>
@@ -2755,8 +2755,8 @@
         </p:nvSpPr>
         <p:spPr>
           <a:xfrm>
-            <a:off x="1005840" y="4736592"/>
-            <a:ext cx="2194560" cy="548640"/>
+            <a:off x="960120" y="4553712"/>
+            <a:ext cx="2148840" cy="548640"/>
           </a:xfrm>
           <a:prstGeom prst="rect">
             <a:avLst/>
@@ -2772,9 +2772,9 @@
               <a:buNone/>
             </a:pPr>
             <a:r>
-              <a:rPr lang="en-US" sz="2600" b="1" dirty="0">
-                <a:solidFill>
-                  <a:srgbClr val="0B7285"/>
+              <a:rPr lang="en-US" sz="2800" b="1" dirty="0">
+                <a:solidFill>
+                  <a:srgbClr val="0284C7"/>
                 </a:solidFill>
                 <a:latin typeface="Arial" pitchFamily="34" charset="0"/>
                 <a:ea typeface="Arial" pitchFamily="34" charset="-122"/>
@@ -2782,7 +2782,7 @@
               </a:rPr>
               <a:t>65%</a:t>
             </a:r>
-            <a:endParaRPr lang="en-US" sz="2600" dirty="0"/>
+            <a:endParaRPr lang="en-US" sz="2800" dirty="0"/>
           </a:p>
         </p:txBody>
       </p:sp>
@@ -2794,8 +2794,8 @@
         </p:nvSpPr>
         <p:spPr>
           <a:xfrm>
-            <a:off x="1097280" y="5257800"/>
-            <a:ext cx="2011680" cy="640080"/>
+            <a:off x="1051560" y="5120640"/>
+            <a:ext cx="1965960" cy="731520"/>
           </a:xfrm>
           <a:prstGeom prst="rect">
             <a:avLst/>
@@ -2813,13 +2813,13 @@
             <a:r>
               <a:rPr lang="en-US" sz="1000" dirty="0">
                 <a:solidFill>
-                  <a:srgbClr val="495057"/>
-                </a:solidFill>
-                <a:latin typeface="Arial" pitchFamily="34" charset="0"/>
-                <a:ea typeface="Arial" pitchFamily="34" charset="-122"/>
-                <a:cs typeface="Arial" pitchFamily="34" charset="-120"/>
-              </a:rPr>
-              <a:t>Perdió una mascota en el último año</a:t>
+                  <a:srgbClr val="475569"/>
+                </a:solidFill>
+                <a:latin typeface="Arial" pitchFamily="34" charset="0"/>
+                <a:ea typeface="Arial" pitchFamily="34" charset="-122"/>
+                <a:cs typeface="Arial" pitchFamily="34" charset="-120"/>
+              </a:rPr>
+              <a:t>Ha perdido una mascota en el último año</a:t>
             </a:r>
             <a:endParaRPr lang="en-US" sz="1000" dirty="0"/>
           </a:p>
@@ -2833,18 +2833,18 @@
         </p:nvSpPr>
         <p:spPr>
           <a:xfrm>
-            <a:off x="3474720" y="4663440"/>
-            <a:ext cx="2194560" cy="1325880"/>
+            <a:off x="3291840" y="4480560"/>
+            <a:ext cx="2148840" cy="1463040"/>
           </a:xfrm>
           <a:prstGeom prst="rect">
             <a:avLst/>
           </a:prstGeom>
           <a:solidFill>
-            <a:srgbClr val="FFF4E6"/>
+            <a:srgbClr val="FEF3C7"/>
           </a:solidFill>
           <a:ln w="12700">
             <a:solidFill>
-              <a:srgbClr val="FF922B"/>
+              <a:srgbClr val="D97706"/>
             </a:solidFill>
             <a:prstDash val="solid"/>
           </a:ln>
@@ -2858,8 +2858,8 @@
         </p:nvSpPr>
         <p:spPr>
           <a:xfrm>
-            <a:off x="3474720" y="4736592"/>
-            <a:ext cx="2194560" cy="548640"/>
+            <a:off x="3291840" y="4553712"/>
+            <a:ext cx="2148840" cy="548640"/>
           </a:xfrm>
           <a:prstGeom prst="rect">
             <a:avLst/>
@@ -2875,9 +2875,9 @@
               <a:buNone/>
             </a:pPr>
             <a:r>
-              <a:rPr lang="en-US" sz="2600" b="1" dirty="0">
-                <a:solidFill>
-                  <a:srgbClr val="FF922B"/>
+              <a:rPr lang="en-US" sz="2800" b="1" dirty="0">
+                <a:solidFill>
+                  <a:srgbClr val="D97706"/>
                 </a:solidFill>
                 <a:latin typeface="Arial" pitchFamily="34" charset="0"/>
                 <a:ea typeface="Arial" pitchFamily="34" charset="-122"/>
@@ -2885,7 +2885,7 @@
               </a:rPr>
               <a:t>80%</a:t>
             </a:r>
-            <a:endParaRPr lang="en-US" sz="2600" dirty="0"/>
+            <a:endParaRPr lang="en-US" sz="2800" dirty="0"/>
           </a:p>
         </p:txBody>
       </p:sp>
@@ -2897,8 +2897,8 @@
         </p:nvSpPr>
         <p:spPr>
           <a:xfrm>
-            <a:off x="3566160" y="5257800"/>
-            <a:ext cx="2011680" cy="640080"/>
+            <a:off x="3383280" y="5120640"/>
+            <a:ext cx="1965960" cy="731520"/>
           </a:xfrm>
           <a:prstGeom prst="rect">
             <a:avLst/>
@@ -2916,7 +2916,7 @@
             <a:r>
               <a:rPr lang="en-US" sz="1000" dirty="0">
                 <a:solidFill>
-                  <a:srgbClr val="495057"/>
+                  <a:srgbClr val="475569"/>
                 </a:solidFill>
                 <a:latin typeface="Arial" pitchFamily="34" charset="0"/>
                 <a:ea typeface="Arial" pitchFamily="34" charset="-122"/>
@@ -2936,8 +2936,8 @@
         </p:nvSpPr>
         <p:spPr>
           <a:xfrm>
-            <a:off x="6217920" y="1325880"/>
-            <a:ext cx="5212080" cy="4983480"/>
+            <a:off x="5943600" y="1280160"/>
+            <a:ext cx="5486400" cy="5029200"/>
           </a:xfrm>
           <a:prstGeom prst="rect">
             <a:avLst/>
@@ -2961,14 +2961,14 @@
         </p:nvSpPr>
         <p:spPr>
           <a:xfrm>
-            <a:off x="6263640" y="1325880"/>
-            <a:ext cx="5120640" cy="73152"/>
+            <a:off x="5980176" y="1280160"/>
+            <a:ext cx="5413248" cy="64008"/>
           </a:xfrm>
           <a:prstGeom prst="rect">
             <a:avLst/>
           </a:prstGeom>
           <a:solidFill>
-            <a:srgbClr val="E03131"/>
+            <a:srgbClr val="E11D48"/>
           </a:solidFill>
           <a:ln/>
         </p:spPr>
@@ -2981,8 +2981,8 @@
         </p:nvSpPr>
         <p:spPr>
           <a:xfrm>
-            <a:off x="6492240" y="1527048"/>
-            <a:ext cx="4663440" cy="347472"/>
+            <a:off x="6199632" y="1481328"/>
+            <a:ext cx="4974336" cy="347472"/>
           </a:xfrm>
           <a:prstGeom prst="rect">
             <a:avLst/>
@@ -2998,17 +2998,17 @@
               <a:buNone/>
             </a:pPr>
             <a:r>
-              <a:rPr lang="en-US" sz="1450" b="1" dirty="0">
-                <a:solidFill>
-                  <a:srgbClr val="E03131"/>
-                </a:solidFill>
-                <a:latin typeface="Arial" pitchFamily="34" charset="0"/>
-                <a:ea typeface="Arial" pitchFamily="34" charset="-122"/>
-                <a:cs typeface="Arial" pitchFamily="34" charset="-120"/>
-              </a:rPr>
-              <a:t>1.2. Identificación del Problema</a:t>
-            </a:r>
-            <a:endParaRPr lang="en-US" sz="1450" dirty="0"/>
+              <a:rPr lang="en-US" sz="1350" b="1" dirty="0">
+                <a:solidFill>
+                  <a:srgbClr val="E11D48"/>
+                </a:solidFill>
+                <a:latin typeface="Arial" pitchFamily="34" charset="0"/>
+                <a:ea typeface="Arial" pitchFamily="34" charset="-122"/>
+                <a:cs typeface="Arial" pitchFamily="34" charset="-120"/>
+              </a:rPr>
+              <a:t>1.2. Identificación del Problema (Matriz FODA)</a:t>
+            </a:r>
+            <a:endParaRPr lang="en-US" sz="1350" dirty="0"/>
           </a:p>
         </p:txBody>
       </p:sp>
@@ -3020,18 +3020,18 @@
         </p:nvSpPr>
         <p:spPr>
           <a:xfrm>
-            <a:off x="6492240" y="1920240"/>
-            <a:ext cx="4663440" cy="1097280"/>
+            <a:off x="6172200" y="1920240"/>
+            <a:ext cx="2423160" cy="1965960"/>
           </a:xfrm>
           <a:prstGeom prst="rect">
             <a:avLst/>
           </a:prstGeom>
           <a:solidFill>
-            <a:srgbClr val="FFF5F5"/>
+            <a:srgbClr val="D1FAE5"/>
           </a:solidFill>
           <a:ln w="12700">
             <a:solidFill>
-              <a:srgbClr val="E03131"/>
+              <a:srgbClr val="059669"/>
             </a:solidFill>
             <a:prstDash val="solid"/>
           </a:ln>
@@ -3045,8 +3045,8 @@
         </p:nvSpPr>
         <p:spPr>
           <a:xfrm>
-            <a:off x="6629400" y="1993392"/>
-            <a:ext cx="4389120" cy="228600"/>
+            <a:off x="6263640" y="1993392"/>
+            <a:ext cx="2240280" cy="228600"/>
           </a:xfrm>
           <a:prstGeom prst="rect">
             <a:avLst/>
@@ -3062,17 +3062,17 @@
               <a:buNone/>
             </a:pPr>
             <a:r>
-              <a:rPr lang="en-US" sz="1100" b="1" dirty="0">
-                <a:solidFill>
-                  <a:srgbClr val="E03131"/>
-                </a:solidFill>
-                <a:latin typeface="Arial" pitchFamily="34" charset="0"/>
-                <a:ea typeface="Arial" pitchFamily="34" charset="-122"/>
-                <a:cs typeface="Arial" pitchFamily="34" charset="-120"/>
-              </a:rPr>
-              <a:t>🚨 PROBLEMA CENTRAL:</a:t>
-            </a:r>
-            <a:endParaRPr lang="en-US" sz="1100" dirty="0"/>
+              <a:rPr lang="en-US" sz="1050" b="1" dirty="0">
+                <a:solidFill>
+                  <a:srgbClr val="059669"/>
+                </a:solidFill>
+                <a:latin typeface="Arial" pitchFamily="34" charset="0"/>
+                <a:ea typeface="Arial" pitchFamily="34" charset="-122"/>
+                <a:cs typeface="Arial" pitchFamily="34" charset="-120"/>
+              </a:rPr>
+              <a:t>💪 FORTALEZAS (Internas)</a:t>
+            </a:r>
+            <a:endParaRPr lang="en-US" sz="1050" dirty="0"/>
           </a:p>
         </p:txBody>
       </p:sp>
@@ -3084,8 +3084,8 @@
         </p:nvSpPr>
         <p:spPr>
           <a:xfrm>
-            <a:off x="6629400" y="2240280"/>
-            <a:ext cx="4389120" cy="685800"/>
+            <a:off x="6263640" y="2240280"/>
+            <a:ext cx="2240280" cy="1554480"/>
           </a:xfrm>
           <a:prstGeom prst="rect">
             <a:avLst/>
@@ -3101,30 +3101,106 @@
               <a:buNone/>
             </a:pPr>
             <a:r>
-              <a:rPr lang="en-US" sz="1200" b="1" dirty="0">
-                <a:solidFill>
-                  <a:srgbClr val="212529"/>
-                </a:solidFill>
-                <a:latin typeface="Arial" pitchFamily="34" charset="0"/>
-                <a:ea typeface="Arial" pitchFamily="34" charset="-122"/>
-                <a:cs typeface="Arial" pitchFamily="34" charset="-120"/>
-              </a:rPr>
-              <a:t>Dispersión, desorganización y caducidad inmediata de los reportes de mascotas extraviadas en la comunidad.</a:t>
-            </a:r>
-            <a:endParaRPr lang="en-US" sz="1200" dirty="0"/>
+              <a:rPr lang="en-US" sz="950" dirty="0">
+                <a:solidFill>
+                  <a:srgbClr val="0F172A"/>
+                </a:solidFill>
+                <a:latin typeface="Arial" pitchFamily="34" charset="0"/>
+                <a:ea typeface="Arial" pitchFamily="34" charset="-122"/>
+                <a:cs typeface="Arial" pitchFamily="34" charset="-120"/>
+              </a:rPr>
+              <a:t>• Centraliza datos en un solo lugar.</a:t>
+            </a:r>
+            <a:endParaRPr lang="en-US" sz="950" dirty="0"/>
+          </a:p>
+          <a:p>
+            <a:pPr indent="0" marL="0">
+              <a:buNone/>
+            </a:pPr>
+            <a:r>
+              <a:rPr lang="en-US" sz="950" dirty="0">
+                <a:solidFill>
+                  <a:srgbClr val="0F172A"/>
+                </a:solidFill>
+                <a:latin typeface="Arial" pitchFamily="34" charset="0"/>
+                <a:ea typeface="Arial" pitchFamily="34" charset="-122"/>
+                <a:cs typeface="Arial" pitchFamily="34" charset="-120"/>
+              </a:rPr>
+              <a:t>• Fotos reales, ubicación y recompensas.</a:t>
+            </a:r>
+            <a:endParaRPr lang="en-US" sz="950" dirty="0"/>
+          </a:p>
+          <a:p>
+            <a:pPr indent="0" marL="0">
+              <a:buNone/>
+            </a:pPr>
+            <a:r>
+              <a:rPr lang="en-US" sz="950" dirty="0">
+                <a:solidFill>
+                  <a:srgbClr val="0F172A"/>
+                </a:solidFill>
+                <a:latin typeface="Arial" pitchFamily="34" charset="0"/>
+                <a:ea typeface="Arial" pitchFamily="34" charset="-122"/>
+                <a:cs typeface="Arial" pitchFamily="34" charset="-120"/>
+              </a:rPr>
+              <a:t>• Edición activa con vista previa.</a:t>
+            </a:r>
+            <a:endParaRPr lang="en-US" sz="950" dirty="0"/>
+          </a:p>
+          <a:p>
+            <a:pPr indent="0" marL="0">
+              <a:buNone/>
+            </a:pPr>
+            <a:r>
+              <a:rPr lang="en-US" sz="950" dirty="0">
+                <a:solidFill>
+                  <a:srgbClr val="0F172A"/>
+                </a:solidFill>
+                <a:latin typeface="Arial" pitchFamily="34" charset="0"/>
+                <a:ea typeface="Arial" pitchFamily="34" charset="-122"/>
+                <a:cs typeface="Arial" pitchFamily="34" charset="-120"/>
+              </a:rPr>
+              <a:t>• Diseño responsive para celulares.</a:t>
+            </a:r>
+            <a:endParaRPr lang="en-US" sz="950" dirty="0"/>
           </a:p>
         </p:txBody>
       </p:sp>
       <p:sp>
         <p:nvSpPr>
-          <p:cNvPr id="22" name="Text 20"/>
-          <p:cNvSpPr/>
-          <p:nvPr/>
-        </p:nvSpPr>
-        <p:spPr>
-          <a:xfrm>
-            <a:off x="6492240" y="3200400"/>
-            <a:ext cx="4663440" cy="2834640"/>
+          <p:cNvPr id="22" name="Shape 20"/>
+          <p:cNvSpPr/>
+          <p:nvPr/>
+        </p:nvSpPr>
+        <p:spPr>
+          <a:xfrm>
+            <a:off x="8778240" y="1920240"/>
+            <a:ext cx="2423160" cy="1965960"/>
+          </a:xfrm>
+          <a:prstGeom prst="rect">
+            <a:avLst/>
+          </a:prstGeom>
+          <a:solidFill>
+            <a:srgbClr val="E0F2FE"/>
+          </a:solidFill>
+          <a:ln w="12700">
+            <a:solidFill>
+              <a:srgbClr val="0284C7"/>
+            </a:solidFill>
+            <a:prstDash val="solid"/>
+          </a:ln>
+        </p:spPr>
+      </p:sp>
+      <p:sp>
+        <p:nvSpPr>
+          <p:cNvPr id="23" name="Text 21"/>
+          <p:cNvSpPr/>
+          <p:nvPr/>
+        </p:nvSpPr>
+        <p:spPr>
+          <a:xfrm>
+            <a:off x="8869680" y="1993392"/>
+            <a:ext cx="2240280" cy="228600"/>
           </a:xfrm>
           <a:prstGeom prst="rect">
             <a:avLst/>
@@ -3140,81 +3216,415 @@
               <a:buNone/>
             </a:pPr>
             <a:r>
-              <a:rPr lang="en-US" sz="1250" b="1" dirty="0">
-                <a:solidFill>
-                  <a:srgbClr val="212529"/>
-                </a:solidFill>
-                <a:latin typeface="Arial" pitchFamily="34" charset="0"/>
-                <a:ea typeface="Arial" pitchFamily="34" charset="-122"/>
-                <a:cs typeface="Arial" pitchFamily="34" charset="-120"/>
-              </a:rPr>
-              <a:t>Causas Directas:
-</a:t>
-            </a:r>
-            <a:pPr indent="0" marL="0">
-              <a:buNone/>
-            </a:pPr>
-            <a:r>
-              <a:rPr lang="en-US" sz="1150" dirty="0">
-                <a:solidFill>
-                  <a:srgbClr val="495057"/>
-                </a:solidFill>
-                <a:latin typeface="Arial" pitchFamily="34" charset="0"/>
-                <a:ea typeface="Arial" pitchFamily="34" charset="-122"/>
-                <a:cs typeface="Arial" pitchFamily="34" charset="-120"/>
-              </a:rPr>
-              <a:t>• Carencia de un repositorio digital centralizado y especializado.
-• Imposibilidad de buscar por palabra clave, zona o fecha.
-• Falta de actualización cuando una mascota ya fue hallada.
-</a:t>
-            </a:r>
-            <a:pPr indent="0" marL="0">
-              <a:buNone/>
-            </a:pPr>
-            <a:r>
-              <a:rPr lang="en-US" sz="1250" b="1" dirty="0">
-                <a:solidFill>
-                  <a:srgbClr val="212529"/>
-                </a:solidFill>
-                <a:latin typeface="Arial" pitchFamily="34" charset="0"/>
-                <a:ea typeface="Arial" pitchFamily="34" charset="-122"/>
-                <a:cs typeface="Arial" pitchFamily="34" charset="-120"/>
-              </a:rPr>
-              <a:t>Efectos Negativos:
-</a:t>
-            </a:r>
-            <a:pPr indent="0" marL="0">
-              <a:buNone/>
-            </a:pPr>
-            <a:r>
-              <a:rPr lang="en-US" sz="1150" dirty="0">
-                <a:solidFill>
-                  <a:srgbClr val="495057"/>
-                </a:solidFill>
-                <a:latin typeface="Arial" pitchFamily="34" charset="0"/>
-                <a:ea typeface="Arial" pitchFamily="34" charset="-122"/>
-                <a:cs typeface="Arial" pitchFamily="34" charset="-120"/>
-              </a:rPr>
-              <a:t>• Demora crítica durante las primeras 48 horas de búsqueda.</a:t>
-            </a:r>
-            <a:endParaRPr lang="en-US" sz="1250" dirty="0"/>
-          </a:p>
-          <a:p>
-            <a:pPr indent="0" marL="0">
-              <a:buNone/>
-            </a:pPr>
-            <a:r>
-              <a:rPr lang="en-US" sz="1150" dirty="0">
-                <a:solidFill>
-                  <a:srgbClr val="495057"/>
-                </a:solidFill>
-                <a:latin typeface="Arial" pitchFamily="34" charset="0"/>
-                <a:ea typeface="Arial" pitchFamily="34" charset="-122"/>
-                <a:cs typeface="Arial" pitchFamily="34" charset="-120"/>
-              </a:rPr>
-              <a:t>• Baja probabilidad de reencuentro y aumento de animales desprotegidos.</a:t>
-            </a:r>
-            <a:endParaRPr lang="en-US" sz="1250" dirty="0"/>
+              <a:rPr lang="en-US" sz="1050" b="1" dirty="0">
+                <a:solidFill>
+                  <a:srgbClr val="0284C7"/>
+                </a:solidFill>
+                <a:latin typeface="Arial" pitchFamily="34" charset="0"/>
+                <a:ea typeface="Arial" pitchFamily="34" charset="-122"/>
+                <a:cs typeface="Arial" pitchFamily="34" charset="-120"/>
+              </a:rPr>
+              <a:t>🚀 OPORTUNIDADES (Externas)</a:t>
+            </a:r>
+            <a:endParaRPr lang="en-US" sz="1050" dirty="0"/>
+          </a:p>
+        </p:txBody>
+      </p:sp>
+      <p:sp>
+        <p:nvSpPr>
+          <p:cNvPr id="24" name="Text 22"/>
+          <p:cNvSpPr/>
+          <p:nvPr/>
+        </p:nvSpPr>
+        <p:spPr>
+          <a:xfrm>
+            <a:off x="8869680" y="2240280"/>
+            <a:ext cx="2240280" cy="1554480"/>
+          </a:xfrm>
+          <a:prstGeom prst="rect">
+            <a:avLst/>
+          </a:prstGeom>
+          <a:noFill/>
+          <a:ln/>
+        </p:spPr>
+        <p:txBody>
+          <a:bodyPr wrap="square" rtlCol="0" anchor="ctr"/>
+          <a:lstStyle/>
+          <a:p>
+            <a:pPr indent="0" marL="0">
+              <a:buNone/>
+            </a:pPr>
+            <a:r>
+              <a:rPr lang="en-US" sz="950" dirty="0">
+                <a:solidFill>
+                  <a:srgbClr val="0F172A"/>
+                </a:solidFill>
+                <a:latin typeface="Arial" pitchFamily="34" charset="0"/>
+                <a:ea typeface="Arial" pitchFamily="34" charset="-122"/>
+                <a:cs typeface="Arial" pitchFamily="34" charset="-120"/>
+              </a:rPr>
+              <a:t>• Adopción masiva comunitaria.</a:t>
+            </a:r>
+            <a:endParaRPr lang="en-US" sz="950" dirty="0"/>
+          </a:p>
+          <a:p>
+            <a:pPr indent="0" marL="0">
+              <a:buNone/>
+            </a:pPr>
+            <a:r>
+              <a:rPr lang="en-US" sz="950" dirty="0">
+                <a:solidFill>
+                  <a:srgbClr val="0F172A"/>
+                </a:solidFill>
+                <a:latin typeface="Arial" pitchFamily="34" charset="0"/>
+                <a:ea typeface="Arial" pitchFamily="34" charset="-122"/>
+                <a:cs typeface="Arial" pitchFamily="34" charset="-120"/>
+              </a:rPr>
+              <a:t>• Ampliación a otros municipios.</a:t>
+            </a:r>
+            <a:endParaRPr lang="en-US" sz="950" dirty="0"/>
+          </a:p>
+          <a:p>
+            <a:pPr indent="0" marL="0">
+              <a:buNone/>
+            </a:pPr>
+            <a:r>
+              <a:rPr lang="en-US" sz="950" dirty="0">
+                <a:solidFill>
+                  <a:srgbClr val="0F172A"/>
+                </a:solidFill>
+                <a:latin typeface="Arial" pitchFamily="34" charset="0"/>
+                <a:ea typeface="Arial" pitchFamily="34" charset="-122"/>
+                <a:cs typeface="Arial" pitchFamily="34" charset="-120"/>
+              </a:rPr>
+              <a:t>• Alianzas con veterinarias y albergues.</a:t>
+            </a:r>
+            <a:endParaRPr lang="en-US" sz="950" dirty="0"/>
+          </a:p>
+          <a:p>
+            <a:pPr indent="0" marL="0">
+              <a:buNone/>
+            </a:pPr>
+            <a:r>
+              <a:rPr lang="en-US" sz="950" dirty="0">
+                <a:solidFill>
+                  <a:srgbClr val="0F172A"/>
+                </a:solidFill>
+                <a:latin typeface="Arial" pitchFamily="34" charset="0"/>
+                <a:ea typeface="Arial" pitchFamily="34" charset="-122"/>
+                <a:cs typeface="Arial" pitchFamily="34" charset="-120"/>
+              </a:rPr>
+              <a:t>• Integración futura con mapas GPS.</a:t>
+            </a:r>
+            <a:endParaRPr lang="en-US" sz="950" dirty="0"/>
+          </a:p>
+        </p:txBody>
+      </p:sp>
+      <p:sp>
+        <p:nvSpPr>
+          <p:cNvPr id="25" name="Shape 23"/>
+          <p:cNvSpPr/>
+          <p:nvPr/>
+        </p:nvSpPr>
+        <p:spPr>
+          <a:xfrm>
+            <a:off x="6172200" y="4069080"/>
+            <a:ext cx="2423160" cy="1965960"/>
+          </a:xfrm>
+          <a:prstGeom prst="rect">
+            <a:avLst/>
+          </a:prstGeom>
+          <a:solidFill>
+            <a:srgbClr val="FEF3C7"/>
+          </a:solidFill>
+          <a:ln w="12700">
+            <a:solidFill>
+              <a:srgbClr val="D97706"/>
+            </a:solidFill>
+            <a:prstDash val="solid"/>
+          </a:ln>
+        </p:spPr>
+      </p:sp>
+      <p:sp>
+        <p:nvSpPr>
+          <p:cNvPr id="26" name="Text 24"/>
+          <p:cNvSpPr/>
+          <p:nvPr/>
+        </p:nvSpPr>
+        <p:spPr>
+          <a:xfrm>
+            <a:off x="6263640" y="4142232"/>
+            <a:ext cx="2240280" cy="228600"/>
+          </a:xfrm>
+          <a:prstGeom prst="rect">
+            <a:avLst/>
+          </a:prstGeom>
+          <a:noFill/>
+          <a:ln/>
+        </p:spPr>
+        <p:txBody>
+          <a:bodyPr wrap="square" rtlCol="0" anchor="ctr"/>
+          <a:lstStyle/>
+          <a:p>
+            <a:pPr indent="0" marL="0">
+              <a:buNone/>
+            </a:pPr>
+            <a:r>
+              <a:rPr lang="en-US" sz="1050" b="1" dirty="0">
+                <a:solidFill>
+                  <a:srgbClr val="D97706"/>
+                </a:solidFill>
+                <a:latin typeface="Arial" pitchFamily="34" charset="0"/>
+                <a:ea typeface="Arial" pitchFamily="34" charset="-122"/>
+                <a:cs typeface="Arial" pitchFamily="34" charset="-120"/>
+              </a:rPr>
+              <a:t>⚠️ DEBILIDADES (Internas)</a:t>
+            </a:r>
+            <a:endParaRPr lang="en-US" sz="1050" dirty="0"/>
+          </a:p>
+        </p:txBody>
+      </p:sp>
+      <p:sp>
+        <p:nvSpPr>
+          <p:cNvPr id="27" name="Text 25"/>
+          <p:cNvSpPr/>
+          <p:nvPr/>
+        </p:nvSpPr>
+        <p:spPr>
+          <a:xfrm>
+            <a:off x="6263640" y="4389120"/>
+            <a:ext cx="2240280" cy="1554480"/>
+          </a:xfrm>
+          <a:prstGeom prst="rect">
+            <a:avLst/>
+          </a:prstGeom>
+          <a:noFill/>
+          <a:ln/>
+        </p:spPr>
+        <p:txBody>
+          <a:bodyPr wrap="square" rtlCol="0" anchor="ctr"/>
+          <a:lstStyle/>
+          <a:p>
+            <a:pPr indent="0" marL="0">
+              <a:buNone/>
+            </a:pPr>
+            <a:r>
+              <a:rPr lang="en-US" sz="950" dirty="0">
+                <a:solidFill>
+                  <a:srgbClr val="0F172A"/>
+                </a:solidFill>
+                <a:latin typeface="Arial" pitchFamily="34" charset="0"/>
+                <a:ea typeface="Arial" pitchFamily="34" charset="-122"/>
+                <a:cs typeface="Arial" pitchFamily="34" charset="-120"/>
+              </a:rPr>
+              <a:t>• Dependencia de conexión a internet.</a:t>
+            </a:r>
+            <a:endParaRPr lang="en-US" sz="950" dirty="0"/>
+          </a:p>
+          <a:p>
+            <a:pPr indent="0" marL="0">
+              <a:buNone/>
+            </a:pPr>
+            <a:r>
+              <a:rPr lang="en-US" sz="950" dirty="0">
+                <a:solidFill>
+                  <a:srgbClr val="0F172A"/>
+                </a:solidFill>
+                <a:latin typeface="Arial" pitchFamily="34" charset="0"/>
+                <a:ea typeface="Arial" pitchFamily="34" charset="-122"/>
+                <a:cs typeface="Arial" pitchFamily="34" charset="-120"/>
+              </a:rPr>
+              <a:t>• Alcance inicial en fase de difusión.</a:t>
+            </a:r>
+            <a:endParaRPr lang="en-US" sz="950" dirty="0"/>
+          </a:p>
+          <a:p>
+            <a:pPr indent="0" marL="0">
+              <a:buNone/>
+            </a:pPr>
+            <a:r>
+              <a:rPr lang="en-US" sz="950" dirty="0">
+                <a:solidFill>
+                  <a:srgbClr val="0F172A"/>
+                </a:solidFill>
+                <a:latin typeface="Arial" pitchFamily="34" charset="0"/>
+                <a:ea typeface="Arial" pitchFamily="34" charset="-122"/>
+                <a:cs typeface="Arial" pitchFamily="34" charset="-120"/>
+              </a:rPr>
+              <a:t>• Volumen depende del uso vecinal.</a:t>
+            </a:r>
+            <a:endParaRPr lang="en-US" sz="950" dirty="0"/>
+          </a:p>
+          <a:p>
+            <a:pPr indent="0" marL="0">
+              <a:buNone/>
+            </a:pPr>
+            <a:r>
+              <a:rPr lang="en-US" sz="950" dirty="0">
+                <a:solidFill>
+                  <a:srgbClr val="0F172A"/>
+                </a:solidFill>
+                <a:latin typeface="Arial" pitchFamily="34" charset="0"/>
+                <a:ea typeface="Arial" pitchFamily="34" charset="-122"/>
+                <a:cs typeface="Arial" pitchFamily="34" charset="-120"/>
+              </a:rPr>
+              <a:t>• SQLite para escala comunitaria.</a:t>
+            </a:r>
+            <a:endParaRPr lang="en-US" sz="950" dirty="0"/>
+          </a:p>
+        </p:txBody>
+      </p:sp>
+      <p:sp>
+        <p:nvSpPr>
+          <p:cNvPr id="28" name="Shape 26"/>
+          <p:cNvSpPr/>
+          <p:nvPr/>
+        </p:nvSpPr>
+        <p:spPr>
+          <a:xfrm>
+            <a:off x="8778240" y="4069080"/>
+            <a:ext cx="2423160" cy="1965960"/>
+          </a:xfrm>
+          <a:prstGeom prst="rect">
+            <a:avLst/>
+          </a:prstGeom>
+          <a:solidFill>
+            <a:srgbClr val="FFE4E6"/>
+          </a:solidFill>
+          <a:ln w="12700">
+            <a:solidFill>
+              <a:srgbClr val="E11D48"/>
+            </a:solidFill>
+            <a:prstDash val="solid"/>
+          </a:ln>
+        </p:spPr>
+      </p:sp>
+      <p:sp>
+        <p:nvSpPr>
+          <p:cNvPr id="29" name="Text 27"/>
+          <p:cNvSpPr/>
+          <p:nvPr/>
+        </p:nvSpPr>
+        <p:spPr>
+          <a:xfrm>
+            <a:off x="8869680" y="4142232"/>
+            <a:ext cx="2240280" cy="228600"/>
+          </a:xfrm>
+          <a:prstGeom prst="rect">
+            <a:avLst/>
+          </a:prstGeom>
+          <a:noFill/>
+          <a:ln/>
+        </p:spPr>
+        <p:txBody>
+          <a:bodyPr wrap="square" rtlCol="0" anchor="ctr"/>
+          <a:lstStyle/>
+          <a:p>
+            <a:pPr indent="0" marL="0">
+              <a:buNone/>
+            </a:pPr>
+            <a:r>
+              <a:rPr lang="en-US" sz="1050" b="1" dirty="0">
+                <a:solidFill>
+                  <a:srgbClr val="E11D48"/>
+                </a:solidFill>
+                <a:latin typeface="Arial" pitchFamily="34" charset="0"/>
+                <a:ea typeface="Arial" pitchFamily="34" charset="-122"/>
+                <a:cs typeface="Arial" pitchFamily="34" charset="-120"/>
+              </a:rPr>
+              <a:t>🛑 AMENAZAS (Externas)</a:t>
+            </a:r>
+            <a:endParaRPr lang="en-US" sz="1050" dirty="0"/>
+          </a:p>
+        </p:txBody>
+      </p:sp>
+      <p:sp>
+        <p:nvSpPr>
+          <p:cNvPr id="30" name="Text 28"/>
+          <p:cNvSpPr/>
+          <p:nvPr/>
+        </p:nvSpPr>
+        <p:spPr>
+          <a:xfrm>
+            <a:off x="8869680" y="4389120"/>
+            <a:ext cx="2240280" cy="1554480"/>
+          </a:xfrm>
+          <a:prstGeom prst="rect">
+            <a:avLst/>
+          </a:prstGeom>
+          <a:noFill/>
+          <a:ln/>
+        </p:spPr>
+        <p:txBody>
+          <a:bodyPr wrap="square" rtlCol="0" anchor="ctr"/>
+          <a:lstStyle/>
+          <a:p>
+            <a:pPr indent="0" marL="0">
+              <a:buNone/>
+            </a:pPr>
+            <a:r>
+              <a:rPr lang="en-US" sz="950" dirty="0">
+                <a:solidFill>
+                  <a:srgbClr val="0F172A"/>
+                </a:solidFill>
+                <a:latin typeface="Arial" pitchFamily="34" charset="0"/>
+                <a:ea typeface="Arial" pitchFamily="34" charset="-122"/>
+                <a:cs typeface="Arial" pitchFamily="34" charset="-120"/>
+              </a:rPr>
+              <a:t>• Publicaciones informales en Facebook.</a:t>
+            </a:r>
+            <a:endParaRPr lang="en-US" sz="950" dirty="0"/>
+          </a:p>
+          <a:p>
+            <a:pPr indent="0" marL="0">
+              <a:buNone/>
+            </a:pPr>
+            <a:r>
+              <a:rPr lang="en-US" sz="950" dirty="0">
+                <a:solidFill>
+                  <a:srgbClr val="0F172A"/>
+                </a:solidFill>
+                <a:latin typeface="Arial" pitchFamily="34" charset="0"/>
+                <a:ea typeface="Arial" pitchFamily="34" charset="-122"/>
+                <a:cs typeface="Arial" pitchFamily="34" charset="-120"/>
+              </a:rPr>
+              <a:t>• Riesgo de publicaciones falsas.</a:t>
+            </a:r>
+            <a:endParaRPr lang="en-US" sz="950" dirty="0"/>
+          </a:p>
+          <a:p>
+            <a:pPr indent="0" marL="0">
+              <a:buNone/>
+            </a:pPr>
+            <a:r>
+              <a:rPr lang="en-US" sz="950" dirty="0">
+                <a:solidFill>
+                  <a:srgbClr val="0F172A"/>
+                </a:solidFill>
+                <a:latin typeface="Arial" pitchFamily="34" charset="0"/>
+                <a:ea typeface="Arial" pitchFamily="34" charset="-122"/>
+                <a:cs typeface="Arial" pitchFamily="34" charset="-120"/>
+              </a:rPr>
+              <a:t>• Requerimiento de moderación activa.</a:t>
+            </a:r>
+            <a:endParaRPr lang="en-US" sz="950" dirty="0"/>
+          </a:p>
+          <a:p>
+            <a:pPr indent="0" marL="0">
+              <a:buNone/>
+            </a:pPr>
+            <a:r>
+              <a:rPr lang="en-US" sz="950" dirty="0">
+                <a:solidFill>
+                  <a:srgbClr val="0F172A"/>
+                </a:solidFill>
+                <a:latin typeface="Arial" pitchFamily="34" charset="0"/>
+                <a:ea typeface="Arial" pitchFamily="34" charset="-122"/>
+                <a:cs typeface="Arial" pitchFamily="34" charset="-120"/>
+              </a:rPr>
+              <a:t>• Caídas temporales de hosting web.</a:t>
+            </a:r>
+            <a:endParaRPr lang="en-US" sz="950" dirty="0"/>
           </a:p>
         </p:txBody>
       </p:sp>
@@ -3232,7 +3642,7 @@
     <p:bg>
       <p:bgPr>
         <a:solidFill>
-          <a:srgbClr val="F4F6F8"/>
+          <a:srgbClr val="F8FAFC"/>
         </a:solidFill>
       </p:bgPr>
     </p:bg>
@@ -3284,13 +3694,13 @@
         <p:spPr>
           <a:xfrm>
             <a:off x="731520" y="256032"/>
-            <a:ext cx="91440" cy="530352"/>
+            <a:ext cx="82296" cy="530352"/>
           </a:xfrm>
           <a:prstGeom prst="rect">
             <a:avLst/>
           </a:prstGeom>
           <a:solidFill>
-            <a:srgbClr val="1098AD"/>
+            <a:srgbClr val="0284C7"/>
           </a:solidFill>
           <a:ln/>
         </p:spPr>
@@ -3320,9 +3730,9 @@
               <a:buNone/>
             </a:pPr>
             <a:r>
-              <a:rPr lang="en-US" sz="1050" b="1" dirty="0">
-                <a:solidFill>
-                  <a:srgbClr val="FF922B"/>
+              <a:rPr lang="en-US" sz="1000" b="1" dirty="0">
+                <a:solidFill>
+                  <a:srgbClr val="D97706"/>
                 </a:solidFill>
                 <a:latin typeface="Arial" pitchFamily="34" charset="0"/>
                 <a:ea typeface="Arial" pitchFamily="34" charset="-122"/>
@@ -3330,7 +3740,7 @@
               </a:rPr>
               <a:t>CAPÍTULO 1</a:t>
             </a:r>
-            <a:endParaRPr lang="en-US" sz="1050" dirty="0"/>
+            <a:endParaRPr lang="en-US" sz="1000" dirty="0"/>
           </a:p>
         </p:txBody>
       </p:sp>
@@ -3359,9 +3769,9 @@
               <a:buNone/>
             </a:pPr>
             <a:r>
-              <a:rPr lang="en-US" sz="2200" b="1" dirty="0">
-                <a:solidFill>
-                  <a:srgbClr val="212529"/>
+              <a:rPr lang="en-US" sz="2100" b="1" dirty="0">
+                <a:solidFill>
+                  <a:srgbClr val="0F172A"/>
                 </a:solidFill>
                 <a:latin typeface="Arial" pitchFamily="34" charset="0"/>
                 <a:ea typeface="Arial" pitchFamily="34" charset="-122"/>
@@ -3369,7 +3779,7 @@
               </a:rPr>
               <a:t>1.3. Formulación y 1.4. Objetivos</a:t>
             </a:r>
-            <a:endParaRPr lang="en-US" sz="2200" dirty="0"/>
+            <a:endParaRPr lang="en-US" sz="2100" dirty="0"/>
           </a:p>
         </p:txBody>
       </p:sp>
@@ -3381,8 +3791,8 @@
         </p:nvSpPr>
         <p:spPr>
           <a:xfrm>
-            <a:off x="731520" y="1280160"/>
-            <a:ext cx="10698480" cy="1280160"/>
+            <a:off x="731520" y="1261872"/>
+            <a:ext cx="10698480" cy="1234440"/>
           </a:xfrm>
           <a:prstGeom prst="rect">
             <a:avLst/>
@@ -3392,7 +3802,7 @@
           </a:solidFill>
           <a:ln w="19050">
             <a:solidFill>
-              <a:srgbClr val="FF922B"/>
+              <a:srgbClr val="D97706"/>
             </a:solidFill>
             <a:prstDash val="solid"/>
           </a:ln>
@@ -3406,8 +3816,8 @@
         </p:nvSpPr>
         <p:spPr>
           <a:xfrm>
-            <a:off x="1005840" y="1389888"/>
-            <a:ext cx="10149840" cy="256032"/>
+            <a:off x="960120" y="1371600"/>
+            <a:ext cx="10241280" cy="228600"/>
           </a:xfrm>
           <a:prstGeom prst="rect">
             <a:avLst/>
@@ -3423,9 +3833,9 @@
               <a:buNone/>
             </a:pPr>
             <a:r>
-              <a:rPr lang="en-US" sz="1150" b="1" dirty="0">
-                <a:solidFill>
-                  <a:srgbClr val="FF922B"/>
+              <a:rPr lang="en-US" sz="1100" b="1" dirty="0">
+                <a:solidFill>
+                  <a:srgbClr val="D97706"/>
                 </a:solidFill>
                 <a:latin typeface="Arial" pitchFamily="34" charset="0"/>
                 <a:ea typeface="Arial" pitchFamily="34" charset="-122"/>
@@ -3433,7 +3843,7 @@
               </a:rPr>
               <a:t>1.3. FORMULACIÓN DEL PROBLEMA (PREGUNTA GUÍA):</a:t>
             </a:r>
-            <a:endParaRPr lang="en-US" sz="1150" dirty="0"/>
+            <a:endParaRPr lang="en-US" sz="1100" dirty="0"/>
           </a:p>
         </p:txBody>
       </p:sp>
@@ -3445,8 +3855,8 @@
         </p:nvSpPr>
         <p:spPr>
           <a:xfrm>
-            <a:off x="1005840" y="1664208"/>
-            <a:ext cx="10149840" cy="777240"/>
+            <a:off x="960120" y="1627632"/>
+            <a:ext cx="10241280" cy="777240"/>
           </a:xfrm>
           <a:prstGeom prst="rect">
             <a:avLst/>
@@ -3462,17 +3872,17 @@
               <a:buNone/>
             </a:pPr>
             <a:r>
-              <a:rPr lang="en-US" sz="1300" b="1" i="1" dirty="0">
-                <a:solidFill>
-                  <a:srgbClr val="212529"/>
-                </a:solidFill>
-                <a:latin typeface="Arial" pitchFamily="34" charset="0"/>
-                <a:ea typeface="Arial" pitchFamily="34" charset="-122"/>
-                <a:cs typeface="Arial" pitchFamily="34" charset="-120"/>
-              </a:rPr>
-              <a:t>“¿De qué manera el desarrollo de una aplicación web responsive basada en una arquitectura cliente-servidor y base de datos relacional puede optimizar el tiempo de búsqueda, reporte y actualización de anuncios de mascotas perdidas en nuestra comunidad?”</a:t>
-            </a:r>
-            <a:endParaRPr lang="en-US" sz="1300" dirty="0"/>
+              <a:rPr lang="en-US" sz="1250" b="1" i="1" dirty="0">
+                <a:solidFill>
+                  <a:srgbClr val="0F172A"/>
+                </a:solidFill>
+                <a:latin typeface="Arial" pitchFamily="34" charset="0"/>
+                <a:ea typeface="Arial" pitchFamily="34" charset="-122"/>
+                <a:cs typeface="Arial" pitchFamily="34" charset="-120"/>
+              </a:rPr>
+              <a:t>“¿De qué manera el desarrollo e implementación de una plataforma web responsive de reporte y búsqueda de mascotas permitirá centralizar, organizar y gestionar de forma eficiente los avisos de animales extraviados en la comunidad, reduciendo los tiempos de búsqueda y optimizando la comunicación vecinal?”</a:t>
+            </a:r>
+            <a:endParaRPr lang="en-US" sz="1250" dirty="0"/>
           </a:p>
         </p:txBody>
       </p:sp>
@@ -3484,8 +3894,8 @@
         </p:nvSpPr>
         <p:spPr>
           <a:xfrm>
-            <a:off x="731520" y="2743200"/>
-            <a:ext cx="5212080" cy="3566160"/>
+            <a:off x="731520" y="2697480"/>
+            <a:ext cx="5120640" cy="3611880"/>
           </a:xfrm>
           <a:prstGeom prst="rect">
             <a:avLst/>
@@ -3509,14 +3919,14 @@
         </p:nvSpPr>
         <p:spPr>
           <a:xfrm>
-            <a:off x="777240" y="2743200"/>
-            <a:ext cx="5120640" cy="73152"/>
+            <a:off x="768096" y="2697480"/>
+            <a:ext cx="5047488" cy="64008"/>
           </a:xfrm>
           <a:prstGeom prst="rect">
             <a:avLst/>
           </a:prstGeom>
           <a:solidFill>
-            <a:srgbClr val="1098AD"/>
+            <a:srgbClr val="0284C7"/>
           </a:solidFill>
           <a:ln/>
         </p:spPr>
@@ -3529,8 +3939,8 @@
         </p:nvSpPr>
         <p:spPr>
           <a:xfrm>
-            <a:off x="1005840" y="2944368"/>
-            <a:ext cx="4663440" cy="347472"/>
+            <a:off x="987552" y="2898648"/>
+            <a:ext cx="4608576" cy="347472"/>
           </a:xfrm>
           <a:prstGeom prst="rect">
             <a:avLst/>
@@ -3546,9 +3956,9 @@
               <a:buNone/>
             </a:pPr>
             <a:r>
-              <a:rPr lang="en-US" sz="1450" b="1" dirty="0">
-                <a:solidFill>
-                  <a:srgbClr val="0B7285"/>
+              <a:rPr lang="en-US" sz="1350" b="1" dirty="0">
+                <a:solidFill>
+                  <a:srgbClr val="0284C7"/>
                 </a:solidFill>
                 <a:latin typeface="Arial" pitchFamily="34" charset="0"/>
                 <a:ea typeface="Arial" pitchFamily="34" charset="-122"/>
@@ -3556,7 +3966,7 @@
               </a:rPr>
               <a:t>1.4.1. Objetivo General</a:t>
             </a:r>
-            <a:endParaRPr lang="en-US" sz="1450" dirty="0"/>
+            <a:endParaRPr lang="en-US" sz="1350" dirty="0"/>
           </a:p>
         </p:txBody>
       </p:sp>
@@ -3568,8 +3978,8 @@
         </p:nvSpPr>
         <p:spPr>
           <a:xfrm>
-            <a:off x="1005840" y="3429000"/>
-            <a:ext cx="4663440" cy="2651760"/>
+            <a:off x="960120" y="3337560"/>
+            <a:ext cx="4663440" cy="2743200"/>
           </a:xfrm>
           <a:prstGeom prst="rect">
             <a:avLst/>
@@ -3585,17 +3995,17 @@
               <a:buNone/>
             </a:pPr>
             <a:r>
-              <a:rPr lang="en-US" sz="1250" b="1" dirty="0">
-                <a:solidFill>
-                  <a:srgbClr val="212529"/>
-                </a:solidFill>
-                <a:latin typeface="Arial" pitchFamily="34" charset="0"/>
-                <a:ea typeface="Arial" pitchFamily="34" charset="-122"/>
-                <a:cs typeface="Arial" pitchFamily="34" charset="-120"/>
-              </a:rPr>
-              <a:t>Desarrollar una aplicación web responsive utilizando HTML5, CSS3, JavaScript Vanilla en el frontend y Node.js con SQLite en el backend, que permita reportar, buscar, comentar y actualizar publicaciones y fotografías de mascotas perdidas bajo un sistema controlado de roles de usuario, facilitando el reencuentro de animales domésticos en la comunidad.</a:t>
-            </a:r>
-            <a:endParaRPr lang="en-US" sz="1250" dirty="0"/>
+              <a:rPr lang="en-US" sz="1200" b="1" dirty="0">
+                <a:solidFill>
+                  <a:srgbClr val="0F172A"/>
+                </a:solidFill>
+                <a:latin typeface="Arial" pitchFamily="34" charset="0"/>
+                <a:ea typeface="Arial" pitchFamily="34" charset="-122"/>
+                <a:cs typeface="Arial" pitchFamily="34" charset="-120"/>
+              </a:rPr>
+              <a:t>Desarrollar una plataforma web responsive de reporte y búsqueda de mascotas perdidas para nuestra comunidad, utilizando HTML5, CSS3, JavaScript Vanilla en el frontend y Node.js con base de datos relacional SQLite en el backend, que permita centralizar y gestionar de forma ágil y segura la información de los animales extraviados facilitando su reencuentro.</a:t>
+            </a:r>
+            <a:endParaRPr lang="en-US" sz="1200" dirty="0"/>
           </a:p>
         </p:txBody>
       </p:sp>
@@ -3607,8 +4017,8 @@
         </p:nvSpPr>
         <p:spPr>
           <a:xfrm>
-            <a:off x="6217920" y="2743200"/>
-            <a:ext cx="5212080" cy="3566160"/>
+            <a:off x="6126480" y="2697480"/>
+            <a:ext cx="5303520" cy="3611880"/>
           </a:xfrm>
           <a:prstGeom prst="rect">
             <a:avLst/>
@@ -3632,14 +4042,14 @@
         </p:nvSpPr>
         <p:spPr>
           <a:xfrm>
-            <a:off x="6263640" y="2743200"/>
-            <a:ext cx="5120640" cy="73152"/>
+            <a:off x="6163056" y="2697480"/>
+            <a:ext cx="5230368" cy="64008"/>
           </a:xfrm>
           <a:prstGeom prst="rect">
             <a:avLst/>
           </a:prstGeom>
           <a:solidFill>
-            <a:srgbClr val="0B7285"/>
+            <a:srgbClr val="059669"/>
           </a:solidFill>
           <a:ln/>
         </p:spPr>
@@ -3652,8 +4062,8 @@
         </p:nvSpPr>
         <p:spPr>
           <a:xfrm>
-            <a:off x="6492240" y="2944368"/>
-            <a:ext cx="4663440" cy="347472"/>
+            <a:off x="6382512" y="2898648"/>
+            <a:ext cx="4791456" cy="347472"/>
           </a:xfrm>
           <a:prstGeom prst="rect">
             <a:avLst/>
@@ -3669,9 +4079,9 @@
               <a:buNone/>
             </a:pPr>
             <a:r>
-              <a:rPr lang="en-US" sz="1450" b="1" dirty="0">
-                <a:solidFill>
-                  <a:srgbClr val="0B7285"/>
+              <a:rPr lang="en-US" sz="1350" b="1" dirty="0">
+                <a:solidFill>
+                  <a:srgbClr val="059669"/>
                 </a:solidFill>
                 <a:latin typeface="Arial" pitchFamily="34" charset="0"/>
                 <a:ea typeface="Arial" pitchFamily="34" charset="-122"/>
@@ -3679,7 +4089,7 @@
               </a:rPr>
               <a:t>1.4.2. Objetivos Específicos</a:t>
             </a:r>
-            <a:endParaRPr lang="en-US" sz="1450" dirty="0"/>
+            <a:endParaRPr lang="en-US" sz="1350" dirty="0"/>
           </a:p>
         </p:txBody>
       </p:sp>
@@ -3691,8 +4101,8 @@
         </p:nvSpPr>
         <p:spPr>
           <a:xfrm>
-            <a:off x="6492240" y="3337560"/>
-            <a:ext cx="4663440" cy="2834640"/>
+            <a:off x="6355080" y="3291840"/>
+            <a:ext cx="4846320" cy="2926080"/>
           </a:xfrm>
           <a:prstGeom prst="rect">
             <a:avLst/>
@@ -3708,9 +4118,9 @@
               <a:buNone/>
             </a:pPr>
             <a:r>
-              <a:rPr lang="en-US" sz="1100" b="1" dirty="0">
-                <a:solidFill>
-                  <a:srgbClr val="0B7285"/>
+              <a:rPr lang="en-US" sz="1050" b="1" dirty="0">
+                <a:solidFill>
+                  <a:srgbClr val="0284C7"/>
                 </a:solidFill>
                 <a:latin typeface="Arial" pitchFamily="34" charset="0"/>
                 <a:ea typeface="Arial" pitchFamily="34" charset="-122"/>
@@ -3722,24 +4132,24 @@
               <a:buNone/>
             </a:pPr>
             <a:r>
-              <a:rPr lang="en-US" sz="1100" dirty="0">
-                <a:solidFill>
-                  <a:srgbClr val="495057"/>
-                </a:solidFill>
-                <a:latin typeface="Arial" pitchFamily="34" charset="0"/>
-                <a:ea typeface="Arial" pitchFamily="34" charset="-122"/>
-                <a:cs typeface="Arial" pitchFamily="34" charset="-120"/>
-              </a:rPr>
-              <a:t>las necesidades comunitarias mediante encuestas directas.
+              <a:rPr lang="en-US" sz="1050" dirty="0">
+                <a:solidFill>
+                  <a:srgbClr val="475569"/>
+                </a:solidFill>
+                <a:latin typeface="Arial" pitchFamily="34" charset="0"/>
+                <a:ea typeface="Arial" pitchFamily="34" charset="-122"/>
+                <a:cs typeface="Arial" pitchFamily="34" charset="-120"/>
+              </a:rPr>
+              <a:t>el extravío de mascotas y medios utilizados mediante encuestas.
 </a:t>
             </a:r>
             <a:pPr indent="0" marL="0">
               <a:buNone/>
             </a:pPr>
             <a:r>
-              <a:rPr lang="en-US" sz="1100" b="1" dirty="0">
-                <a:solidFill>
-                  <a:srgbClr val="0B7285"/>
+              <a:rPr lang="en-US" sz="1050" b="1" dirty="0">
+                <a:solidFill>
+                  <a:srgbClr val="0284C7"/>
                 </a:solidFill>
                 <a:latin typeface="Arial" pitchFamily="34" charset="0"/>
                 <a:ea typeface="Arial" pitchFamily="34" charset="-122"/>
@@ -3751,24 +4161,24 @@
               <a:buNone/>
             </a:pPr>
             <a:r>
-              <a:rPr lang="en-US" sz="1100" dirty="0">
-                <a:solidFill>
-                  <a:srgbClr val="495057"/>
-                </a:solidFill>
-                <a:latin typeface="Arial" pitchFamily="34" charset="0"/>
-                <a:ea typeface="Arial" pitchFamily="34" charset="-122"/>
-                <a:cs typeface="Arial" pitchFamily="34" charset="-120"/>
-              </a:rPr>
-              <a:t>una interfaz web intuitiva, ágil y adaptada a móviles (UI/UX).
+              <a:rPr lang="en-US" sz="1050" dirty="0">
+                <a:solidFill>
+                  <a:srgbClr val="475569"/>
+                </a:solidFill>
+                <a:latin typeface="Arial" pitchFamily="34" charset="0"/>
+                <a:ea typeface="Arial" pitchFamily="34" charset="-122"/>
+                <a:cs typeface="Arial" pitchFamily="34" charset="-120"/>
+              </a:rPr>
+              <a:t>la base de datos y la interfaz gráfica responsive (UI/UX).
 </a:t>
             </a:r>
             <a:pPr indent="0" marL="0">
               <a:buNone/>
             </a:pPr>
             <a:r>
-              <a:rPr lang="en-US" sz="1100" b="1" dirty="0">
-                <a:solidFill>
-                  <a:srgbClr val="0B7285"/>
+              <a:rPr lang="en-US" sz="1050" b="1" dirty="0">
+                <a:solidFill>
+                  <a:srgbClr val="0284C7"/>
                 </a:solidFill>
                 <a:latin typeface="Arial" pitchFamily="34" charset="0"/>
                 <a:ea typeface="Arial" pitchFamily="34" charset="-122"/>
@@ -3780,133 +4190,104 @@
               <a:buNone/>
             </a:pPr>
             <a:r>
-              <a:rPr lang="en-US" sz="1100" dirty="0">
-                <a:solidFill>
-                  <a:srgbClr val="495057"/>
-                </a:solidFill>
-                <a:latin typeface="Arial" pitchFamily="34" charset="0"/>
-                <a:ea typeface="Arial" pitchFamily="34" charset="-122"/>
-                <a:cs typeface="Arial" pitchFamily="34" charset="-120"/>
-              </a:rPr>
-              <a:t>la API REST en Node.js/Express con subida de archivos Multer.
+              <a:rPr lang="en-US" sz="1050" dirty="0">
+                <a:solidFill>
+                  <a:srgbClr val="475569"/>
+                </a:solidFill>
+                <a:latin typeface="Arial" pitchFamily="34" charset="0"/>
+                <a:ea typeface="Arial" pitchFamily="34" charset="-122"/>
+                <a:cs typeface="Arial" pitchFamily="34" charset="-120"/>
+              </a:rPr>
+              <a:t>registro, publicación, buscador en tiempo real y comentarios.
 </a:t>
             </a:r>
             <a:pPr indent="0" marL="0">
               <a:buNone/>
             </a:pPr>
             <a:r>
-              <a:rPr lang="en-US" sz="1100" b="1" dirty="0">
-                <a:solidFill>
-                  <a:srgbClr val="0B7285"/>
-                </a:solidFill>
-                <a:latin typeface="Arial" pitchFamily="34" charset="0"/>
-                <a:ea typeface="Arial" pitchFamily="34" charset="-122"/>
-                <a:cs typeface="Arial" pitchFamily="34" charset="-120"/>
-              </a:rPr>
-              <a:t>4. Construir </a:t>
-            </a:r>
-            <a:pPr indent="0" marL="0">
-              <a:buNone/>
-            </a:pPr>
-            <a:r>
-              <a:rPr lang="en-US" sz="1100" dirty="0">
-                <a:solidFill>
-                  <a:srgbClr val="495057"/>
-                </a:solidFill>
-                <a:latin typeface="Arial" pitchFamily="34" charset="0"/>
-                <a:ea typeface="Arial" pitchFamily="34" charset="-122"/>
-                <a:cs typeface="Arial" pitchFamily="34" charset="-120"/>
-              </a:rPr>
-              <a:t>la base de datos relacional SQLite con integridad referencial.
+              <a:rPr lang="en-US" sz="1050" b="1" dirty="0">
+                <a:solidFill>
+                  <a:srgbClr val="0284C7"/>
+                </a:solidFill>
+                <a:latin typeface="Arial" pitchFamily="34" charset="0"/>
+                <a:ea typeface="Arial" pitchFamily="34" charset="-122"/>
+                <a:cs typeface="Arial" pitchFamily="34" charset="-120"/>
+              </a:rPr>
+              <a:t>4. Implementar </a:t>
+            </a:r>
+            <a:pPr indent="0" marL="0">
+              <a:buNone/>
+            </a:pPr>
+            <a:r>
+              <a:rPr lang="en-US" sz="1050" dirty="0">
+                <a:solidFill>
+                  <a:srgbClr val="475569"/>
+                </a:solidFill>
+                <a:latin typeface="Arial" pitchFamily="34" charset="0"/>
+                <a:ea typeface="Arial" pitchFamily="34" charset="-122"/>
+                <a:cs typeface="Arial" pitchFamily="34" charset="-120"/>
+              </a:rPr>
+              <a:t>módulo multimedia con Multer y limpieza física de archivos.
 </a:t>
             </a:r>
             <a:pPr indent="0" marL="0">
               <a:buNone/>
             </a:pPr>
             <a:r>
-              <a:rPr lang="en-US" sz="1100" b="1" dirty="0">
-                <a:solidFill>
-                  <a:srgbClr val="0B7285"/>
-                </a:solidFill>
-                <a:latin typeface="Arial" pitchFamily="34" charset="0"/>
-                <a:ea typeface="Arial" pitchFamily="34" charset="-122"/>
-                <a:cs typeface="Arial" pitchFamily="34" charset="-120"/>
-              </a:rPr>
-              <a:t>5. Implementar </a:t>
-            </a:r>
-            <a:pPr indent="0" marL="0">
-              <a:buNone/>
-            </a:pPr>
-            <a:r>
-              <a:rPr lang="en-US" sz="1100" dirty="0">
-                <a:solidFill>
-                  <a:srgbClr val="495057"/>
-                </a:solidFill>
-                <a:latin typeface="Arial" pitchFamily="34" charset="0"/>
-                <a:ea typeface="Arial" pitchFamily="34" charset="-122"/>
-                <a:cs typeface="Arial" pitchFamily="34" charset="-120"/>
-              </a:rPr>
-              <a:t>autenticación segura con JWT y contraseñas Bcrypt.
+              <a:rPr lang="en-US" sz="1050" b="1" dirty="0">
+                <a:solidFill>
+                  <a:srgbClr val="0284C7"/>
+                </a:solidFill>
+                <a:latin typeface="Arial" pitchFamily="34" charset="0"/>
+                <a:ea typeface="Arial" pitchFamily="34" charset="-122"/>
+                <a:cs typeface="Arial" pitchFamily="34" charset="-120"/>
+              </a:rPr>
+              <a:t>5. Incorporar </a:t>
+            </a:r>
+            <a:pPr indent="0" marL="0">
+              <a:buNone/>
+            </a:pPr>
+            <a:r>
+              <a:rPr lang="en-US" sz="1050" dirty="0">
+                <a:solidFill>
+                  <a:srgbClr val="475569"/>
+                </a:solidFill>
+                <a:latin typeface="Arial" pitchFamily="34" charset="0"/>
+                <a:ea typeface="Arial" pitchFamily="34" charset="-122"/>
+                <a:cs typeface="Arial" pitchFamily="34" charset="-120"/>
+              </a:rPr>
+              <a:t>seguridad con Bcrypt y JWT bajo 3 roles de acceso.
 </a:t>
             </a:r>
             <a:pPr indent="0" marL="0">
               <a:buNone/>
             </a:pPr>
             <a:r>
-              <a:rPr lang="en-US" sz="1100" b="1" dirty="0">
-                <a:solidFill>
-                  <a:srgbClr val="0B7285"/>
-                </a:solidFill>
-                <a:latin typeface="Arial" pitchFamily="34" charset="0"/>
-                <a:ea typeface="Arial" pitchFamily="34" charset="-122"/>
-                <a:cs typeface="Arial" pitchFamily="34" charset="-120"/>
-              </a:rPr>
-              <a:t>6. Desarrollar </a:t>
-            </a:r>
-            <a:pPr indent="0" marL="0">
-              <a:buNone/>
-            </a:pPr>
-            <a:r>
-              <a:rPr lang="en-US" sz="1100" dirty="0">
-                <a:solidFill>
-                  <a:srgbClr val="495057"/>
-                </a:solidFill>
-                <a:latin typeface="Arial" pitchFamily="34" charset="0"/>
-                <a:ea typeface="Arial" pitchFamily="34" charset="-122"/>
-                <a:cs typeface="Arial" pitchFamily="34" charset="-120"/>
-              </a:rPr>
-              <a:t>edición de anuncios, cambio de foto y limpieza en servidor.
-</a:t>
-            </a:r>
-            <a:pPr indent="0" marL="0">
-              <a:buNone/>
-            </a:pPr>
-            <a:r>
-              <a:rPr lang="en-US" sz="1100" b="1" dirty="0">
-                <a:solidFill>
-                  <a:srgbClr val="0B7285"/>
-                </a:solidFill>
-                <a:latin typeface="Arial" pitchFamily="34" charset="0"/>
-                <a:ea typeface="Arial" pitchFamily="34" charset="-122"/>
-                <a:cs typeface="Arial" pitchFamily="34" charset="-120"/>
-              </a:rPr>
-              <a:t>7. Validar </a:t>
-            </a:r>
-            <a:pPr indent="0" marL="0">
-              <a:buNone/>
-            </a:pPr>
-            <a:r>
-              <a:rPr lang="en-US" sz="1100" dirty="0">
-                <a:solidFill>
-                  <a:srgbClr val="495057"/>
-                </a:solidFill>
-                <a:latin typeface="Arial" pitchFamily="34" charset="0"/>
-                <a:ea typeface="Arial" pitchFamily="34" charset="-122"/>
-                <a:cs typeface="Arial" pitchFamily="34" charset="-120"/>
-              </a:rPr>
-              <a:t>el sistema mediante pruebas de usabilidad y rendimiento móvil.</a:t>
-            </a:r>
-            <a:endParaRPr lang="en-US" sz="1100" dirty="0"/>
+              <a:rPr lang="en-US" sz="1050" b="1" dirty="0">
+                <a:solidFill>
+                  <a:srgbClr val="0284C7"/>
+                </a:solidFill>
+                <a:latin typeface="Arial" pitchFamily="34" charset="0"/>
+                <a:ea typeface="Arial" pitchFamily="34" charset="-122"/>
+                <a:cs typeface="Arial" pitchFamily="34" charset="-120"/>
+              </a:rPr>
+              <a:t>6. Validar </a:t>
+            </a:r>
+            <a:pPr indent="0" marL="0">
+              <a:buNone/>
+            </a:pPr>
+            <a:r>
+              <a:rPr lang="en-US" sz="1050" dirty="0">
+                <a:solidFill>
+                  <a:srgbClr val="475569"/>
+                </a:solidFill>
+                <a:latin typeface="Arial" pitchFamily="34" charset="0"/>
+                <a:ea typeface="Arial" pitchFamily="34" charset="-122"/>
+                <a:cs typeface="Arial" pitchFamily="34" charset="-120"/>
+              </a:rPr>
+              <a:t>el sistema mediante pruebas de usabilidad con vecinos.</a:t>
+            </a:r>
+            <a:endParaRPr lang="en-US" sz="1050" dirty="0"/>
           </a:p>
         </p:txBody>
       </p:sp>
@@ -3924,7 +4305,7 @@
     <p:bg>
       <p:bgPr>
         <a:solidFill>
-          <a:srgbClr val="F4F6F8"/>
+          <a:srgbClr val="F8FAFC"/>
         </a:solidFill>
       </p:bgPr>
     </p:bg>
@@ -3976,13 +4357,13 @@
         <p:spPr>
           <a:xfrm>
             <a:off x="731520" y="256032"/>
-            <a:ext cx="91440" cy="530352"/>
+            <a:ext cx="82296" cy="530352"/>
           </a:xfrm>
           <a:prstGeom prst="rect">
             <a:avLst/>
           </a:prstGeom>
           <a:solidFill>
-            <a:srgbClr val="1098AD"/>
+            <a:srgbClr val="0284C7"/>
           </a:solidFill>
           <a:ln/>
         </p:spPr>
@@ -4012,9 +4393,9 @@
               <a:buNone/>
             </a:pPr>
             <a:r>
-              <a:rPr lang="en-US" sz="1050" b="1" dirty="0">
-                <a:solidFill>
-                  <a:srgbClr val="FF922B"/>
+              <a:rPr lang="en-US" sz="1000" b="1" dirty="0">
+                <a:solidFill>
+                  <a:srgbClr val="D97706"/>
                 </a:solidFill>
                 <a:latin typeface="Arial" pitchFamily="34" charset="0"/>
                 <a:ea typeface="Arial" pitchFamily="34" charset="-122"/>
@@ -4022,7 +4403,7 @@
               </a:rPr>
               <a:t>CAPÍTULO 2</a:t>
             </a:r>
-            <a:endParaRPr lang="en-US" sz="1050" dirty="0"/>
+            <a:endParaRPr lang="en-US" sz="1000" dirty="0"/>
           </a:p>
         </p:txBody>
       </p:sp>
@@ -4051,9 +4432,9 @@
               <a:buNone/>
             </a:pPr>
             <a:r>
-              <a:rPr lang="en-US" sz="2200" b="1" dirty="0">
-                <a:solidFill>
-                  <a:srgbClr val="212529"/>
+              <a:rPr lang="en-US" sz="2100" b="1" dirty="0">
+                <a:solidFill>
+                  <a:srgbClr val="0F172A"/>
                 </a:solidFill>
                 <a:latin typeface="Arial" pitchFamily="34" charset="0"/>
                 <a:ea typeface="Arial" pitchFamily="34" charset="-122"/>
@@ -4061,7 +4442,7 @@
               </a:rPr>
               <a:t>2. Planificación / 2.1. Cronograma de Actividades</a:t>
             </a:r>
-            <a:endParaRPr lang="en-US" sz="2200" dirty="0"/>
+            <a:endParaRPr lang="en-US" sz="2100" dirty="0"/>
           </a:p>
         </p:txBody>
       </p:sp>
@@ -4080,7 +4461,7 @@
           </p:nvPr>
         </p:nvGraphicFramePr>
         <p:xfrm>
-          <a:off x="731520" y="1280160"/>
+          <a:off x="731520" y="1261872"/>
           <a:ext cx="10698480" cy="5029200"/>
         </p:xfrm>
         <a:graphic>
@@ -4088,11 +4469,11 @@
             <a:tbl>
               <a:tblPr/>
               <a:tblGrid>
-                <a:gridCol w="4754880"/>
-                <a:gridCol w="1828800"/>
-                <a:gridCol w="4114800"/>
+                <a:gridCol w="4663440"/>
+                <a:gridCol w="2103120"/>
+                <a:gridCol w="3931920"/>
               </a:tblGrid>
-              <a:tr h="457200">
+              <a:tr h="386862">
                 <a:tc>
                   <a:txBody>
                     <a:bodyPr/>
@@ -4102,7 +4483,7 @@
                         <a:buNone/>
                       </a:pPr>
                       <a:r>
-                        <a:rPr lang="en-US" sz="1100" b="1" dirty="0">
+                        <a:rPr lang="en-US" sz="1050" b="1" dirty="0">
                           <a:solidFill>
                             <a:srgbClr val="FFFFFF"/>
                           </a:solidFill>
@@ -4110,9 +4491,9 @@
                           <a:ea typeface="Arial" pitchFamily="34" charset="-122"/>
                           <a:cs typeface="Arial" pitchFamily="34" charset="-120"/>
                         </a:rPr>
-                        <a:t>Fase / Actividad del Proyecto</a:t>
+                        <a:t>Fase / Actividad Desarrollada</a:t>
                       </a:r>
-                      <a:endParaRPr lang="en-US" sz="1100" dirty="0">
+                      <a:endParaRPr lang="en-US" sz="1050" dirty="0">
                         <a:latin typeface="Arial" charset="0"/>
                         <a:ea typeface="Arial" charset="0"/>
                         <a:cs typeface="Arial" charset="0"/>
@@ -4157,7 +4538,7 @@
                       <a:tailEnd type="none" w="med" len="med"/>
                     </a:lnB>
                     <a:solidFill>
-                      <a:srgbClr val="0B7285"/>
+                      <a:srgbClr val="0F172A"/>
                     </a:solidFill>
                   </a:tcPr>
                 </a:tc>
@@ -4170,7 +4551,7 @@
                         <a:buNone/>
                       </a:pPr>
                       <a:r>
-                        <a:rPr lang="en-US" sz="1100" b="1" dirty="0">
+                        <a:rPr lang="en-US" sz="1050" b="1" dirty="0">
                           <a:solidFill>
                             <a:srgbClr val="FFFFFF"/>
                           </a:solidFill>
@@ -4178,9 +4559,9 @@
                           <a:ea typeface="Arial" pitchFamily="34" charset="-122"/>
                           <a:cs typeface="Arial" pitchFamily="34" charset="-120"/>
                         </a:rPr>
-                        <a:t>Tiempo</a:t>
+                        <a:t>Periodo (Meses)</a:t>
                       </a:r>
-                      <a:endParaRPr lang="en-US" sz="1100" dirty="0">
+                      <a:endParaRPr lang="en-US" sz="1050" dirty="0">
                         <a:latin typeface="Arial" charset="0"/>
                         <a:ea typeface="Arial" charset="0"/>
                         <a:cs typeface="Arial" charset="0"/>
@@ -4225,7 +4606,7 @@
                       <a:tailEnd type="none" w="med" len="med"/>
                     </a:lnB>
                     <a:solidFill>
-                      <a:srgbClr val="0B7285"/>
+                      <a:srgbClr val="0F172A"/>
                     </a:solidFill>
                   </a:tcPr>
                 </a:tc>
@@ -4238,7 +4619,7 @@
                         <a:buNone/>
                       </a:pPr>
                       <a:r>
-                        <a:rPr lang="en-US" sz="1100" b="1" dirty="0">
+                        <a:rPr lang="en-US" sz="1050" b="1" dirty="0">
                           <a:solidFill>
                             <a:srgbClr val="FFFFFF"/>
                           </a:solidFill>
@@ -4246,9 +4627,9 @@
                           <a:ea typeface="Arial" pitchFamily="34" charset="-122"/>
                           <a:cs typeface="Arial" pitchFamily="34" charset="-120"/>
                         </a:rPr>
-                        <a:t>Entregable / Logro Alcanzado</a:t>
+                        <a:t>Resultado / Entregable Oficial</a:t>
                       </a:r>
-                      <a:endParaRPr lang="en-US" sz="1100" dirty="0">
+                      <a:endParaRPr lang="en-US" sz="1050" dirty="0">
                         <a:latin typeface="Arial" charset="0"/>
                         <a:ea typeface="Arial" charset="0"/>
                         <a:cs typeface="Arial" charset="0"/>
@@ -4293,12 +4674,12 @@
                       <a:tailEnd type="none" w="med" len="med"/>
                     </a:lnB>
                     <a:solidFill>
-                      <a:srgbClr val="0B7285"/>
+                      <a:srgbClr val="0F172A"/>
                     </a:solidFill>
                   </a:tcPr>
                 </a:tc>
               </a:tr>
-              <a:tr h="457200">
+              <a:tr h="386862">
                 <a:tc>
                   <a:txBody>
                     <a:bodyPr/>
@@ -4308,7 +4689,7 @@
                         <a:buNone/>
                       </a:pPr>
                       <a:r>
-                        <a:rPr lang="en-US" sz="1000" dirty="0">
+                        <a:rPr lang="en-US" sz="950" dirty="0">
                           <a:solidFill>
                             <a:srgbClr val="000000"/>
                           </a:solidFill>
@@ -4316,9 +4697,9 @@
                           <a:ea typeface="Arial" pitchFamily="34" charset="-122"/>
                           <a:cs typeface="Arial" pitchFamily="34" charset="-120"/>
                         </a:rPr>
-                        <a:t>1. Reunión inicial con tutor y definición del tema</a:t>
+                        <a:t>1. Identificación del problema y justificación</a:t>
                       </a:r>
-                      <a:endParaRPr lang="en-US" sz="1000" dirty="0">
+                      <a:endParaRPr lang="en-US" sz="950" dirty="0">
                         <a:latin typeface="Arial" charset="0"/>
                         <a:ea typeface="Arial" charset="0"/>
                         <a:cs typeface="Arial" charset="0"/>
@@ -4376,7 +4757,7 @@
                         <a:buNone/>
                       </a:pPr>
                       <a:r>
-                        <a:rPr lang="en-US" sz="1000" b="1" dirty="0">
+                        <a:rPr lang="en-US" sz="950" b="1" dirty="0">
                           <a:solidFill>
                             <a:srgbClr val="000000"/>
                           </a:solidFill>
@@ -4384,9 +4765,9 @@
                           <a:ea typeface="Arial" pitchFamily="34" charset="-122"/>
                           <a:cs typeface="Arial" pitchFamily="34" charset="-120"/>
                         </a:rPr>
-                        <a:t>Semana 1</a:t>
+                        <a:t>Enero – Febrero</a:t>
                       </a:r>
-                      <a:endParaRPr lang="en-US" sz="1000" dirty="0">
+                      <a:endParaRPr lang="en-US" sz="950" dirty="0">
                         <a:latin typeface="Arial" charset="0"/>
                         <a:ea typeface="Arial" charset="0"/>
                         <a:cs typeface="Arial" charset="0"/>
@@ -4444,7 +4825,7 @@
                         <a:buNone/>
                       </a:pPr>
                       <a:r>
-                        <a:rPr lang="en-US" sz="1000" dirty="0">
+                        <a:rPr lang="en-US" sz="950" dirty="0">
                           <a:solidFill>
                             <a:srgbClr val="000000"/>
                           </a:solidFill>
@@ -4452,9 +4833,9 @@
                           <a:ea typeface="Arial" pitchFamily="34" charset="-122"/>
                           <a:cs typeface="Arial" pitchFamily="34" charset="-120"/>
                         </a:rPr>
-                        <a:t>Idea y alcance del proyecto formalizados</a:t>
+                        <a:t>Diagnóstico inicial</a:t>
                       </a:r>
-                      <a:endParaRPr lang="en-US" sz="1000" dirty="0">
+                      <a:endParaRPr lang="en-US" sz="950" dirty="0">
                         <a:latin typeface="Arial" charset="0"/>
                         <a:ea typeface="Arial" charset="0"/>
                         <a:cs typeface="Arial" charset="0"/>
@@ -4504,7 +4885,7 @@
                   </a:tcPr>
                 </a:tc>
               </a:tr>
-              <a:tr h="457200">
+              <a:tr h="386862">
                 <a:tc>
                   <a:txBody>
                     <a:bodyPr/>
@@ -4514,7 +4895,7 @@
                         <a:buNone/>
                       </a:pPr>
                       <a:r>
-                        <a:rPr lang="en-US" sz="1000" dirty="0">
+                        <a:rPr lang="en-US" sz="950" dirty="0">
                           <a:solidFill>
                             <a:srgbClr val="000000"/>
                           </a:solidFill>
@@ -4522,9 +4903,9 @@
                           <a:ea typeface="Arial" pitchFamily="34" charset="-122"/>
                           <a:cs typeface="Arial" pitchFamily="34" charset="-120"/>
                         </a:rPr>
-                        <a:t>2. Diagnóstico de la realidad y encuestas a vecinos</a:t>
+                        <a:t>2. Revisión del perfil de trabajo con el tutor</a:t>
                       </a:r>
-                      <a:endParaRPr lang="en-US" sz="1000" dirty="0">
+                      <a:endParaRPr lang="en-US" sz="950" dirty="0">
                         <a:latin typeface="Arial" charset="0"/>
                         <a:ea typeface="Arial" charset="0"/>
                         <a:cs typeface="Arial" charset="0"/>
@@ -4582,7 +4963,7 @@
                         <a:buNone/>
                       </a:pPr>
                       <a:r>
-                        <a:rPr lang="en-US" sz="1000" b="1" dirty="0">
+                        <a:rPr lang="en-US" sz="950" b="1" dirty="0">
                           <a:solidFill>
                             <a:srgbClr val="000000"/>
                           </a:solidFill>
@@ -4590,9 +4971,9 @@
                           <a:ea typeface="Arial" pitchFamily="34" charset="-122"/>
                           <a:cs typeface="Arial" pitchFamily="34" charset="-120"/>
                         </a:rPr>
-                        <a:t>Semana 2 – 3</a:t>
+                        <a:t>Febrero – Marzo</a:t>
                       </a:r>
-                      <a:endParaRPr lang="en-US" sz="1000" dirty="0">
+                      <a:endParaRPr lang="en-US" sz="950" dirty="0">
                         <a:latin typeface="Arial" charset="0"/>
                         <a:ea typeface="Arial" charset="0"/>
                         <a:cs typeface="Arial" charset="0"/>
@@ -4650,7 +5031,7 @@
                         <a:buNone/>
                       </a:pPr>
                       <a:r>
-                        <a:rPr lang="en-US" sz="1000" dirty="0">
+                        <a:rPr lang="en-US" sz="950" dirty="0">
                           <a:solidFill>
                             <a:srgbClr val="000000"/>
                           </a:solidFill>
@@ -4658,9 +5039,9 @@
                           <a:ea typeface="Arial" pitchFamily="34" charset="-122"/>
                           <a:cs typeface="Arial" pitchFamily="34" charset="-120"/>
                         </a:rPr>
-                        <a:t>Muestra estadística (40 familias encuestadas)</a:t>
+                        <a:t>Tema formalizado</a:t>
                       </a:r>
-                      <a:endParaRPr lang="en-US" sz="1000" dirty="0">
+                      <a:endParaRPr lang="en-US" sz="950" dirty="0">
                         <a:latin typeface="Arial" charset="0"/>
                         <a:ea typeface="Arial" charset="0"/>
                         <a:cs typeface="Arial" charset="0"/>
@@ -4710,7 +5091,7 @@
                   </a:tcPr>
                 </a:tc>
               </a:tr>
-              <a:tr h="457200">
+              <a:tr h="386862">
                 <a:tc>
                   <a:txBody>
                     <a:bodyPr/>
@@ -4720,7 +5101,7 @@
                         <a:buNone/>
                       </a:pPr>
                       <a:r>
-                        <a:rPr lang="en-US" sz="1000" dirty="0">
+                        <a:rPr lang="en-US" sz="950" dirty="0">
                           <a:solidFill>
                             <a:srgbClr val="000000"/>
                           </a:solidFill>
@@ -4728,9 +5109,9 @@
                           <a:ea typeface="Arial" pitchFamily="34" charset="-122"/>
                           <a:cs typeface="Arial" pitchFamily="34" charset="-120"/>
                         </a:rPr>
-                        <a:t>3. Redacción del planteamiento del problema y objetivos</a:t>
+                        <a:t>3. Aplicación de encuestas a vecinos y diagnóstico</a:t>
                       </a:r>
-                      <a:endParaRPr lang="en-US" sz="1000" dirty="0">
+                      <a:endParaRPr lang="en-US" sz="950" dirty="0">
                         <a:latin typeface="Arial" charset="0"/>
                         <a:ea typeface="Arial" charset="0"/>
                         <a:cs typeface="Arial" charset="0"/>
@@ -4788,7 +5169,7 @@
                         <a:buNone/>
                       </a:pPr>
                       <a:r>
-                        <a:rPr lang="en-US" sz="1000" b="1" dirty="0">
+                        <a:rPr lang="en-US" sz="950" b="1" dirty="0">
                           <a:solidFill>
                             <a:srgbClr val="000000"/>
                           </a:solidFill>
@@ -4796,9 +5177,9 @@
                           <a:ea typeface="Arial" pitchFamily="34" charset="-122"/>
                           <a:cs typeface="Arial" pitchFamily="34" charset="-120"/>
                         </a:rPr>
-                        <a:t>Semana 4</a:t>
+                        <a:t>Marzo</a:t>
                       </a:r>
-                      <a:endParaRPr lang="en-US" sz="1000" dirty="0">
+                      <a:endParaRPr lang="en-US" sz="950" dirty="0">
                         <a:latin typeface="Arial" charset="0"/>
                         <a:ea typeface="Arial" charset="0"/>
                         <a:cs typeface="Arial" charset="0"/>
@@ -4856,7 +5237,7 @@
                         <a:buNone/>
                       </a:pPr>
                       <a:r>
-                        <a:rPr lang="en-US" sz="1000" dirty="0">
+                        <a:rPr lang="en-US" sz="950" dirty="0">
                           <a:solidFill>
                             <a:srgbClr val="000000"/>
                           </a:solidFill>
@@ -4864,9 +5245,9 @@
                           <a:ea typeface="Arial" pitchFamily="34" charset="-122"/>
                           <a:cs typeface="Arial" pitchFamily="34" charset="-120"/>
                         </a:rPr>
-                        <a:t>Capítulo 1 y 2 de monografía aprobados</a:t>
+                        <a:t>Datos estadísticos</a:t>
                       </a:r>
-                      <a:endParaRPr lang="en-US" sz="1000" dirty="0">
+                      <a:endParaRPr lang="en-US" sz="950" dirty="0">
                         <a:latin typeface="Arial" charset="0"/>
                         <a:ea typeface="Arial" charset="0"/>
                         <a:cs typeface="Arial" charset="0"/>
@@ -4916,7 +5297,7 @@
                   </a:tcPr>
                 </a:tc>
               </a:tr>
-              <a:tr h="457200">
+              <a:tr h="386862">
                 <a:tc>
                   <a:txBody>
                     <a:bodyPr/>
@@ -4926,7 +5307,7 @@
                         <a:buNone/>
                       </a:pPr>
                       <a:r>
-                        <a:rPr lang="en-US" sz="1000" dirty="0">
+                        <a:rPr lang="en-US" sz="950" dirty="0">
                           <a:solidFill>
                             <a:srgbClr val="000000"/>
                           </a:solidFill>
@@ -4934,9 +5315,9 @@
                           <a:ea typeface="Arial" pitchFamily="34" charset="-122"/>
                           <a:cs typeface="Arial" pitchFamily="34" charset="-120"/>
                         </a:rPr>
-                        <a:t>4. Modelado y diseño de base de datos SQLite relacional</a:t>
+                        <a:t>4. Redacción del planteamiento del problema y objetivos</a:t>
                       </a:r>
-                      <a:endParaRPr lang="en-US" sz="1000" dirty="0">
+                      <a:endParaRPr lang="en-US" sz="950" dirty="0">
                         <a:latin typeface="Arial" charset="0"/>
                         <a:ea typeface="Arial" charset="0"/>
                         <a:cs typeface="Arial" charset="0"/>
@@ -4994,7 +5375,7 @@
                         <a:buNone/>
                       </a:pPr>
                       <a:r>
-                        <a:rPr lang="en-US" sz="1000" b="1" dirty="0">
+                        <a:rPr lang="en-US" sz="950" b="1" dirty="0">
                           <a:solidFill>
                             <a:srgbClr val="000000"/>
                           </a:solidFill>
@@ -5002,9 +5383,9 @@
                           <a:ea typeface="Arial" pitchFamily="34" charset="-122"/>
                           <a:cs typeface="Arial" pitchFamily="34" charset="-120"/>
                         </a:rPr>
-                        <a:t>Semana 5 – 6</a:t>
+                        <a:t>Abril</a:t>
                       </a:r>
-                      <a:endParaRPr lang="en-US" sz="1000" dirty="0">
+                      <a:endParaRPr lang="en-US" sz="950" dirty="0">
                         <a:latin typeface="Arial" charset="0"/>
                         <a:ea typeface="Arial" charset="0"/>
                         <a:cs typeface="Arial" charset="0"/>
@@ -5062,7 +5443,7 @@
                         <a:buNone/>
                       </a:pPr>
                       <a:r>
-                        <a:rPr lang="en-US" sz="1000" dirty="0">
+                        <a:rPr lang="en-US" sz="950" dirty="0">
                           <a:solidFill>
                             <a:srgbClr val="000000"/>
                           </a:solidFill>
@@ -5070,9 +5451,9 @@
                           <a:ea typeface="Arial" pitchFamily="34" charset="-122"/>
                           <a:cs typeface="Arial" pitchFamily="34" charset="-120"/>
                         </a:rPr>
-                        <a:t>Diagrama Entidad-Relación y script db.js</a:t>
+                        <a:t>Perfil aprobado</a:t>
                       </a:r>
-                      <a:endParaRPr lang="en-US" sz="1000" dirty="0">
+                      <a:endParaRPr lang="en-US" sz="950" dirty="0">
                         <a:latin typeface="Arial" charset="0"/>
                         <a:ea typeface="Arial" charset="0"/>
                         <a:cs typeface="Arial" charset="0"/>
@@ -5122,7 +5503,7 @@
                   </a:tcPr>
                 </a:tc>
               </a:tr>
-              <a:tr h="457200">
+              <a:tr h="386862">
                 <a:tc>
                   <a:txBody>
                     <a:bodyPr/>
@@ -5132,7 +5513,7 @@
                         <a:buNone/>
                       </a:pPr>
                       <a:r>
-                        <a:rPr lang="en-US" sz="1000" dirty="0">
+                        <a:rPr lang="en-US" sz="950" dirty="0">
                           <a:solidFill>
                             <a:srgbClr val="000000"/>
                           </a:solidFill>
@@ -5140,9 +5521,9 @@
                           <a:ea typeface="Arial" pitchFamily="34" charset="-122"/>
                           <a:cs typeface="Arial" pitchFamily="34" charset="-120"/>
                         </a:rPr>
-                        <a:t>5. Maquetación UI/UX responsive (HTML5 semántico y CSS3)</a:t>
+                        <a:t>5. Diseño de base de datos SQLite (db.js)</a:t>
                       </a:r>
-                      <a:endParaRPr lang="en-US" sz="1000" dirty="0">
+                      <a:endParaRPr lang="en-US" sz="950" dirty="0">
                         <a:latin typeface="Arial" charset="0"/>
                         <a:ea typeface="Arial" charset="0"/>
                         <a:cs typeface="Arial" charset="0"/>
@@ -5200,7 +5581,7 @@
                         <a:buNone/>
                       </a:pPr>
                       <a:r>
-                        <a:rPr lang="en-US" sz="1000" b="1" dirty="0">
+                        <a:rPr lang="en-US" sz="950" b="1" dirty="0">
                           <a:solidFill>
                             <a:srgbClr val="000000"/>
                           </a:solidFill>
@@ -5208,9 +5589,9 @@
                           <a:ea typeface="Arial" pitchFamily="34" charset="-122"/>
                           <a:cs typeface="Arial" pitchFamily="34" charset="-120"/>
                         </a:rPr>
-                        <a:t>Semana 7</a:t>
+                        <a:t>Mayo</a:t>
                       </a:r>
-                      <a:endParaRPr lang="en-US" sz="1000" dirty="0">
+                      <a:endParaRPr lang="en-US" sz="950" dirty="0">
                         <a:latin typeface="Arial" charset="0"/>
                         <a:ea typeface="Arial" charset="0"/>
                         <a:cs typeface="Arial" charset="0"/>
@@ -5268,7 +5649,7 @@
                         <a:buNone/>
                       </a:pPr>
                       <a:r>
-                        <a:rPr lang="en-US" sz="1000" dirty="0">
+                        <a:rPr lang="en-US" sz="950" dirty="0">
                           <a:solidFill>
                             <a:srgbClr val="000000"/>
                           </a:solidFill>
@@ -5276,9 +5657,9 @@
                           <a:ea typeface="Arial" pitchFamily="34" charset="-122"/>
                           <a:cs typeface="Arial" pitchFamily="34" charset="-120"/>
                         </a:rPr>
-                        <a:t>Vistas móviles y de escritorio maquetadas</a:t>
+                        <a:t>Esquema relacional</a:t>
                       </a:r>
-                      <a:endParaRPr lang="en-US" sz="1000" dirty="0">
+                      <a:endParaRPr lang="en-US" sz="950" dirty="0">
                         <a:latin typeface="Arial" charset="0"/>
                         <a:ea typeface="Arial" charset="0"/>
                         <a:cs typeface="Arial" charset="0"/>
@@ -5328,7 +5709,7 @@
                   </a:tcPr>
                 </a:tc>
               </a:tr>
-              <a:tr h="457200">
+              <a:tr h="386862">
                 <a:tc>
                   <a:txBody>
                     <a:bodyPr/>
@@ -5338,7 +5719,7 @@
                         <a:buNone/>
                       </a:pPr>
                       <a:r>
-                        <a:rPr lang="en-US" sz="1000" dirty="0">
+                        <a:rPr lang="en-US" sz="950" dirty="0">
                           <a:solidFill>
                             <a:srgbClr val="000000"/>
                           </a:solidFill>
@@ -5346,9 +5727,9 @@
                           <a:ea typeface="Arial" pitchFamily="34" charset="-122"/>
                           <a:cs typeface="Arial" pitchFamily="34" charset="-120"/>
                         </a:rPr>
-                        <a:t>6. Programación del backend API REST (Node.js + Express)</a:t>
+                        <a:t>6. Maquetación UI/UX responsive (HTML5/CSS3)</a:t>
                       </a:r>
-                      <a:endParaRPr lang="en-US" sz="1000" dirty="0">
+                      <a:endParaRPr lang="en-US" sz="950" dirty="0">
                         <a:latin typeface="Arial" charset="0"/>
                         <a:ea typeface="Arial" charset="0"/>
                         <a:cs typeface="Arial" charset="0"/>
@@ -5406,7 +5787,7 @@
                         <a:buNone/>
                       </a:pPr>
                       <a:r>
-                        <a:rPr lang="en-US" sz="1000" b="1" dirty="0">
+                        <a:rPr lang="en-US" sz="950" b="1" dirty="0">
                           <a:solidFill>
                             <a:srgbClr val="000000"/>
                           </a:solidFill>
@@ -5414,9 +5795,9 @@
                           <a:ea typeface="Arial" pitchFamily="34" charset="-122"/>
                           <a:cs typeface="Arial" pitchFamily="34" charset="-120"/>
                         </a:rPr>
-                        <a:t>Semana 8 – 9</a:t>
+                        <a:t>Junio</a:t>
                       </a:r>
-                      <a:endParaRPr lang="en-US" sz="1000" dirty="0">
+                      <a:endParaRPr lang="en-US" sz="950" dirty="0">
                         <a:latin typeface="Arial" charset="0"/>
                         <a:ea typeface="Arial" charset="0"/>
                         <a:cs typeface="Arial" charset="0"/>
@@ -5474,7 +5855,7 @@
                         <a:buNone/>
                       </a:pPr>
                       <a:r>
-                        <a:rPr lang="en-US" sz="1000" dirty="0">
+                        <a:rPr lang="en-US" sz="950" dirty="0">
                           <a:solidFill>
                             <a:srgbClr val="000000"/>
                           </a:solidFill>
@@ -5482,9 +5863,9 @@
                           <a:ea typeface="Arial" pitchFamily="34" charset="-122"/>
                           <a:cs typeface="Arial" pitchFamily="34" charset="-120"/>
                         </a:rPr>
-                        <a:t>Endpoints CRUD de publicaciones y usuarios</a:t>
+                        <a:t>Vistas móviles listas</a:t>
                       </a:r>
-                      <a:endParaRPr lang="en-US" sz="1000" dirty="0">
+                      <a:endParaRPr lang="en-US" sz="950" dirty="0">
                         <a:latin typeface="Arial" charset="0"/>
                         <a:ea typeface="Arial" charset="0"/>
                         <a:cs typeface="Arial" charset="0"/>
@@ -5534,7 +5915,7 @@
                   </a:tcPr>
                 </a:tc>
               </a:tr>
-              <a:tr h="457200">
+              <a:tr h="386862">
                 <a:tc>
                   <a:txBody>
                     <a:bodyPr/>
@@ -5544,7 +5925,7 @@
                         <a:buNone/>
                       </a:pPr>
                       <a:r>
-                        <a:rPr lang="en-US" sz="1000" dirty="0">
+                        <a:rPr lang="en-US" sz="950" dirty="0">
                           <a:solidFill>
                             <a:srgbClr val="000000"/>
                           </a:solidFill>
@@ -5552,9 +5933,9 @@
                           <a:ea typeface="Arial" pitchFamily="34" charset="-122"/>
                           <a:cs typeface="Arial" pitchFamily="34" charset="-120"/>
                         </a:rPr>
-                        <a:t>7. Implementación de autenticación JWT y Bcrypt</a:t>
+                        <a:t>7. Programación del backend (Node.js/Express)</a:t>
                       </a:r>
-                      <a:endParaRPr lang="en-US" sz="1000" dirty="0">
+                      <a:endParaRPr lang="en-US" sz="950" dirty="0">
                         <a:latin typeface="Arial" charset="0"/>
                         <a:ea typeface="Arial" charset="0"/>
                         <a:cs typeface="Arial" charset="0"/>
@@ -5612,7 +5993,7 @@
                         <a:buNone/>
                       </a:pPr>
                       <a:r>
-                        <a:rPr lang="en-US" sz="1000" b="1" dirty="0">
+                        <a:rPr lang="en-US" sz="950" b="1" dirty="0">
                           <a:solidFill>
                             <a:srgbClr val="000000"/>
                           </a:solidFill>
@@ -5620,9 +6001,9 @@
                           <a:ea typeface="Arial" pitchFamily="34" charset="-122"/>
                           <a:cs typeface="Arial" pitchFamily="34" charset="-120"/>
                         </a:rPr>
-                        <a:t>Semana 10</a:t>
+                        <a:t>Julio</a:t>
                       </a:r>
-                      <a:endParaRPr lang="en-US" sz="1000" dirty="0">
+                      <a:endParaRPr lang="en-US" sz="950" dirty="0">
                         <a:latin typeface="Arial" charset="0"/>
                         <a:ea typeface="Arial" charset="0"/>
                         <a:cs typeface="Arial" charset="0"/>
@@ -5680,7 +6061,7 @@
                         <a:buNone/>
                       </a:pPr>
                       <a:r>
-                        <a:rPr lang="en-US" sz="1000" dirty="0">
+                        <a:rPr lang="en-US" sz="950" dirty="0">
                           <a:solidFill>
                             <a:srgbClr val="000000"/>
                           </a:solidFill>
@@ -5688,9 +6069,9 @@
                           <a:ea typeface="Arial" pitchFamily="34" charset="-122"/>
                           <a:cs typeface="Arial" pitchFamily="34" charset="-120"/>
                         </a:rPr>
-                        <a:t>Control de acceso por roles y contraseñas cifradas</a:t>
+                        <a:t>API REST operativa</a:t>
                       </a:r>
-                      <a:endParaRPr lang="en-US" sz="1000" dirty="0">
+                      <a:endParaRPr lang="en-US" sz="950" dirty="0">
                         <a:latin typeface="Arial" charset="0"/>
                         <a:ea typeface="Arial" charset="0"/>
                         <a:cs typeface="Arial" charset="0"/>
@@ -5740,7 +6121,7 @@
                   </a:tcPr>
                 </a:tc>
               </a:tr>
-              <a:tr h="457200">
+              <a:tr h="386862">
                 <a:tc>
                   <a:txBody>
                     <a:bodyPr/>
@@ -5750,7 +6131,7 @@
                         <a:buNone/>
                       </a:pPr>
                       <a:r>
-                        <a:rPr lang="en-US" sz="1000" dirty="0">
+                        <a:rPr lang="en-US" sz="950" dirty="0">
                           <a:solidFill>
                             <a:srgbClr val="000000"/>
                           </a:solidFill>
@@ -5758,9 +6139,9 @@
                           <a:ea typeface="Arial" pitchFamily="34" charset="-122"/>
                           <a:cs typeface="Arial" pitchFamily="34" charset="-120"/>
                         </a:rPr>
-                        <a:t>8. Módulo de edición de anuncios, fotos y limpieza de disco</a:t>
+                        <a:t>8. Autenticación con JWT y seguridad Bcrypt</a:t>
                       </a:r>
-                      <a:endParaRPr lang="en-US" sz="1000" dirty="0">
+                      <a:endParaRPr lang="en-US" sz="950" dirty="0">
                         <a:latin typeface="Arial" charset="0"/>
                         <a:ea typeface="Arial" charset="0"/>
                         <a:cs typeface="Arial" charset="0"/>
@@ -5818,7 +6199,7 @@
                         <a:buNone/>
                       </a:pPr>
                       <a:r>
-                        <a:rPr lang="en-US" sz="1000" b="1" dirty="0">
+                        <a:rPr lang="en-US" sz="950" b="1" dirty="0">
                           <a:solidFill>
                             <a:srgbClr val="000000"/>
                           </a:solidFill>
@@ -5826,9 +6207,9 @@
                           <a:ea typeface="Arial" pitchFamily="34" charset="-122"/>
                           <a:cs typeface="Arial" pitchFamily="34" charset="-120"/>
                         </a:rPr>
-                        <a:t>Semana 11 – 12</a:t>
+                        <a:t>Agosto</a:t>
                       </a:r>
-                      <a:endParaRPr lang="en-US" sz="1000" dirty="0">
+                      <a:endParaRPr lang="en-US" sz="950" dirty="0">
                         <a:latin typeface="Arial" charset="0"/>
                         <a:ea typeface="Arial" charset="0"/>
                         <a:cs typeface="Arial" charset="0"/>
@@ -5886,7 +6267,7 @@
                         <a:buNone/>
                       </a:pPr>
                       <a:r>
-                        <a:rPr lang="en-US" sz="1000" dirty="0">
+                        <a:rPr lang="en-US" sz="950" dirty="0">
                           <a:solidFill>
                             <a:srgbClr val="000000"/>
                           </a:solidFill>
@@ -5894,9 +6275,9 @@
                           <a:ea typeface="Arial" pitchFamily="34" charset="-122"/>
                           <a:cs typeface="Arial" pitchFamily="34" charset="-120"/>
                         </a:rPr>
-                        <a:t>FileReader en cliente y fs.unlinkSync en backend</a:t>
+                        <a:t>Control por roles</a:t>
                       </a:r>
-                      <a:endParaRPr lang="en-US" sz="1000" dirty="0">
+                      <a:endParaRPr lang="en-US" sz="950" dirty="0">
                         <a:latin typeface="Arial" charset="0"/>
                         <a:ea typeface="Arial" charset="0"/>
                         <a:cs typeface="Arial" charset="0"/>
@@ -5946,7 +6327,7 @@
                   </a:tcPr>
                 </a:tc>
               </a:tr>
-              <a:tr h="457200">
+              <a:tr h="386862">
                 <a:tc>
                   <a:txBody>
                     <a:bodyPr/>
@@ -5956,7 +6337,7 @@
                         <a:buNone/>
                       </a:pPr>
                       <a:r>
-                        <a:rPr lang="en-US" sz="1000" dirty="0">
+                        <a:rPr lang="en-US" sz="950" dirty="0">
                           <a:solidFill>
                             <a:srgbClr val="000000"/>
                           </a:solidFill>
@@ -5964,9 +6345,9 @@
                           <a:ea typeface="Arial" pitchFamily="34" charset="-122"/>
                           <a:cs typeface="Arial" pitchFamily="34" charset="-120"/>
                         </a:rPr>
-                        <a:t>9. Pruebas piloto de usabilidad y corrección de errores</a:t>
+                        <a:t>9. Módulo multimedia, edición y cambio de fotos</a:t>
                       </a:r>
-                      <a:endParaRPr lang="en-US" sz="1000" dirty="0">
+                      <a:endParaRPr lang="en-US" sz="950" dirty="0">
                         <a:latin typeface="Arial" charset="0"/>
                         <a:ea typeface="Arial" charset="0"/>
                         <a:cs typeface="Arial" charset="0"/>
@@ -6024,7 +6405,7 @@
                         <a:buNone/>
                       </a:pPr>
                       <a:r>
-                        <a:rPr lang="en-US" sz="1000" b="1" dirty="0">
+                        <a:rPr lang="en-US" sz="950" b="1" dirty="0">
                           <a:solidFill>
                             <a:srgbClr val="000000"/>
                           </a:solidFill>
@@ -6032,9 +6413,9 @@
                           <a:ea typeface="Arial" pitchFamily="34" charset="-122"/>
                           <a:cs typeface="Arial" pitchFamily="34" charset="-120"/>
                         </a:rPr>
-                        <a:t>Semana 13 – 14</a:t>
+                        <a:t>Agosto – Septiembre</a:t>
                       </a:r>
-                      <a:endParaRPr lang="en-US" sz="1000" dirty="0">
+                      <a:endParaRPr lang="en-US" sz="950" dirty="0">
                         <a:latin typeface="Arial" charset="0"/>
                         <a:ea typeface="Arial" charset="0"/>
                         <a:cs typeface="Arial" charset="0"/>
@@ -6092,7 +6473,7 @@
                         <a:buNone/>
                       </a:pPr>
                       <a:r>
-                        <a:rPr lang="en-US" sz="1000" dirty="0">
+                        <a:rPr lang="en-US" sz="950" dirty="0">
                           <a:solidFill>
                             <a:srgbClr val="000000"/>
                           </a:solidFill>
@@ -6100,9 +6481,9 @@
                           <a:ea typeface="Arial" pitchFamily="34" charset="-122"/>
                           <a:cs typeface="Arial" pitchFamily="34" charset="-120"/>
                         </a:rPr>
-                        <a:t>Validación con usuarios y optimización móvil</a:t>
+                        <a:t>Multer y fs.unlinkSync</a:t>
                       </a:r>
-                      <a:endParaRPr lang="en-US" sz="1000" dirty="0">
+                      <a:endParaRPr lang="en-US" sz="950" dirty="0">
                         <a:latin typeface="Arial" charset="0"/>
                         <a:ea typeface="Arial" charset="0"/>
                         <a:cs typeface="Arial" charset="0"/>
@@ -6152,7 +6533,7 @@
                   </a:tcPr>
                 </a:tc>
               </a:tr>
-              <a:tr h="457200">
+              <a:tr h="386862">
                 <a:tc>
                   <a:txBody>
                     <a:bodyPr/>
@@ -6162,7 +6543,7 @@
                         <a:buNone/>
                       </a:pPr>
                       <a:r>
-                        <a:rPr lang="en-US" sz="1000" dirty="0">
+                        <a:rPr lang="en-US" sz="950" dirty="0">
                           <a:solidFill>
                             <a:srgbClr val="000000"/>
                           </a:solidFill>
@@ -6170,9 +6551,9 @@
                           <a:ea typeface="Arial" pitchFamily="34" charset="-122"/>
                           <a:cs typeface="Arial" pitchFamily="34" charset="-120"/>
                         </a:rPr>
-                        <a:t>10. Documento final de monografía y presentación PPTX</a:t>
+                        <a:t>10. Pruebas piloto de usabilidad con vecinos</a:t>
                       </a:r>
-                      <a:endParaRPr lang="en-US" sz="1000" dirty="0">
+                      <a:endParaRPr lang="en-US" sz="950" dirty="0">
                         <a:latin typeface="Arial" charset="0"/>
                         <a:ea typeface="Arial" charset="0"/>
                         <a:cs typeface="Arial" charset="0"/>
@@ -6230,7 +6611,7 @@
                         <a:buNone/>
                       </a:pPr>
                       <a:r>
-                        <a:rPr lang="en-US" sz="1000" b="1" dirty="0">
+                        <a:rPr lang="en-US" sz="950" b="1" dirty="0">
                           <a:solidFill>
                             <a:srgbClr val="000000"/>
                           </a:solidFill>
@@ -6238,9 +6619,9 @@
                           <a:ea typeface="Arial" pitchFamily="34" charset="-122"/>
                           <a:cs typeface="Arial" pitchFamily="34" charset="-120"/>
                         </a:rPr>
-                        <a:t>Semana 15</a:t>
+                        <a:t>Septiembre</a:t>
                       </a:r>
-                      <a:endParaRPr lang="en-US" sz="1000" dirty="0">
+                      <a:endParaRPr lang="en-US" sz="950" dirty="0">
                         <a:latin typeface="Arial" charset="0"/>
                         <a:ea typeface="Arial" charset="0"/>
                         <a:cs typeface="Arial" charset="0"/>
@@ -6298,7 +6679,7 @@
                         <a:buNone/>
                       </a:pPr>
                       <a:r>
-                        <a:rPr lang="en-US" sz="1000" dirty="0">
+                        <a:rPr lang="en-US" sz="950" dirty="0">
                           <a:solidFill>
                             <a:srgbClr val="000000"/>
                           </a:solidFill>
@@ -6306,9 +6687,421 @@
                           <a:ea typeface="Arial" pitchFamily="34" charset="-122"/>
                           <a:cs typeface="Arial" pitchFamily="34" charset="-120"/>
                         </a:rPr>
-                        <a:t>Monografía completa y material para defensa</a:t>
+                        <a:t>Validación en campo</a:t>
                       </a:r>
-                      <a:endParaRPr lang="en-US" sz="1000" dirty="0">
+                      <a:endParaRPr lang="en-US" sz="950" dirty="0">
+                        <a:latin typeface="Arial" charset="0"/>
+                        <a:ea typeface="Arial" charset="0"/>
+                        <a:cs typeface="Arial" charset="0"/>
+                      </a:endParaRPr>
+                    </a:p>
+                  </a:txBody>
+                  <a:tcPr marL="91440" marR="91440" marT="45720" marB="45720" anchor="ctr">
+                    <a:lnL w="10160" cap="flat" cmpd="sng" algn="ctr">
+                      <a:solidFill>
+                        <a:srgbClr val="E2E8F0"/>
+                      </a:solidFill>
+                      <a:prstDash val="solid"/>
+                      <a:round/>
+                      <a:headEnd type="none" w="med" len="med"/>
+                      <a:tailEnd type="none" w="med" len="med"/>
+                    </a:lnL>
+                    <a:lnR w="10160" cap="flat" cmpd="sng" algn="ctr">
+                      <a:solidFill>
+                        <a:srgbClr val="E2E8F0"/>
+                      </a:solidFill>
+                      <a:prstDash val="solid"/>
+                      <a:round/>
+                      <a:headEnd type="none" w="med" len="med"/>
+                      <a:tailEnd type="none" w="med" len="med"/>
+                    </a:lnR>
+                    <a:lnT w="10160" cap="flat" cmpd="sng" algn="ctr">
+                      <a:solidFill>
+                        <a:srgbClr val="E2E8F0"/>
+                      </a:solidFill>
+                      <a:prstDash val="solid"/>
+                      <a:round/>
+                      <a:headEnd type="none" w="med" len="med"/>
+                      <a:tailEnd type="none" w="med" len="med"/>
+                    </a:lnT>
+                    <a:lnB w="10160" cap="flat" cmpd="sng" algn="ctr">
+                      <a:solidFill>
+                        <a:srgbClr val="E2E8F0"/>
+                      </a:solidFill>
+                      <a:prstDash val="solid"/>
+                      <a:round/>
+                      <a:headEnd type="none" w="med" len="med"/>
+                      <a:tailEnd type="none" w="med" len="med"/>
+                    </a:lnB>
+                    <a:solidFill>
+                      <a:srgbClr val="FFFFFF"/>
+                    </a:solidFill>
+                  </a:tcPr>
+                </a:tc>
+              </a:tr>
+              <a:tr h="386862">
+                <a:tc>
+                  <a:txBody>
+                    <a:bodyPr/>
+                    <a:lstStyle/>
+                    <a:p>
+                      <a:pPr indent="0" marL="0">
+                        <a:buNone/>
+                      </a:pPr>
+                      <a:r>
+                        <a:rPr lang="en-US" sz="950" dirty="0">
+                          <a:solidFill>
+                            <a:srgbClr val="000000"/>
+                          </a:solidFill>
+                          <a:latin typeface="Arial" pitchFamily="34" charset="0"/>
+                          <a:ea typeface="Arial" pitchFamily="34" charset="-122"/>
+                          <a:cs typeface="Arial" pitchFamily="34" charset="-120"/>
+                        </a:rPr>
+                        <a:t>11. Corrección de observaciones y optimización</a:t>
+                      </a:r>
+                      <a:endParaRPr lang="en-US" sz="950" dirty="0">
+                        <a:latin typeface="Arial" charset="0"/>
+                        <a:ea typeface="Arial" charset="0"/>
+                        <a:cs typeface="Arial" charset="0"/>
+                      </a:endParaRPr>
+                    </a:p>
+                  </a:txBody>
+                  <a:tcPr marL="91440" marR="91440" marT="45720" marB="45720" anchor="ctr">
+                    <a:lnL w="10160" cap="flat" cmpd="sng" algn="ctr">
+                      <a:solidFill>
+                        <a:srgbClr val="E2E8F0"/>
+                      </a:solidFill>
+                      <a:prstDash val="solid"/>
+                      <a:round/>
+                      <a:headEnd type="none" w="med" len="med"/>
+                      <a:tailEnd type="none" w="med" len="med"/>
+                    </a:lnL>
+                    <a:lnR w="10160" cap="flat" cmpd="sng" algn="ctr">
+                      <a:solidFill>
+                        <a:srgbClr val="E2E8F0"/>
+                      </a:solidFill>
+                      <a:prstDash val="solid"/>
+                      <a:round/>
+                      <a:headEnd type="none" w="med" len="med"/>
+                      <a:tailEnd type="none" w="med" len="med"/>
+                    </a:lnR>
+                    <a:lnT w="10160" cap="flat" cmpd="sng" algn="ctr">
+                      <a:solidFill>
+                        <a:srgbClr val="E2E8F0"/>
+                      </a:solidFill>
+                      <a:prstDash val="solid"/>
+                      <a:round/>
+                      <a:headEnd type="none" w="med" len="med"/>
+                      <a:tailEnd type="none" w="med" len="med"/>
+                    </a:lnT>
+                    <a:lnB w="10160" cap="flat" cmpd="sng" algn="ctr">
+                      <a:solidFill>
+                        <a:srgbClr val="E2E8F0"/>
+                      </a:solidFill>
+                      <a:prstDash val="solid"/>
+                      <a:round/>
+                      <a:headEnd type="none" w="med" len="med"/>
+                      <a:tailEnd type="none" w="med" len="med"/>
+                    </a:lnB>
+                    <a:solidFill>
+                      <a:srgbClr val="FFFFFF"/>
+                    </a:solidFill>
+                  </a:tcPr>
+                </a:tc>
+                <a:tc>
+                  <a:txBody>
+                    <a:bodyPr/>
+                    <a:lstStyle/>
+                    <a:p>
+                      <a:pPr algn="ctr" indent="0" marL="0">
+                        <a:buNone/>
+                      </a:pPr>
+                      <a:r>
+                        <a:rPr lang="en-US" sz="950" b="1" dirty="0">
+                          <a:solidFill>
+                            <a:srgbClr val="000000"/>
+                          </a:solidFill>
+                          <a:latin typeface="Arial" pitchFamily="34" charset="0"/>
+                          <a:ea typeface="Arial" pitchFamily="34" charset="-122"/>
+                          <a:cs typeface="Arial" pitchFamily="34" charset="-120"/>
+                        </a:rPr>
+                        <a:t>Octubre</a:t>
+                      </a:r>
+                      <a:endParaRPr lang="en-US" sz="950" dirty="0">
+                        <a:latin typeface="Arial" charset="0"/>
+                        <a:ea typeface="Arial" charset="0"/>
+                        <a:cs typeface="Arial" charset="0"/>
+                      </a:endParaRPr>
+                    </a:p>
+                  </a:txBody>
+                  <a:tcPr marL="91440" marR="91440" marT="45720" marB="45720" anchor="ctr">
+                    <a:lnL w="10160" cap="flat" cmpd="sng" algn="ctr">
+                      <a:solidFill>
+                        <a:srgbClr val="E2E8F0"/>
+                      </a:solidFill>
+                      <a:prstDash val="solid"/>
+                      <a:round/>
+                      <a:headEnd type="none" w="med" len="med"/>
+                      <a:tailEnd type="none" w="med" len="med"/>
+                    </a:lnL>
+                    <a:lnR w="10160" cap="flat" cmpd="sng" algn="ctr">
+                      <a:solidFill>
+                        <a:srgbClr val="E2E8F0"/>
+                      </a:solidFill>
+                      <a:prstDash val="solid"/>
+                      <a:round/>
+                      <a:headEnd type="none" w="med" len="med"/>
+                      <a:tailEnd type="none" w="med" len="med"/>
+                    </a:lnR>
+                    <a:lnT w="10160" cap="flat" cmpd="sng" algn="ctr">
+                      <a:solidFill>
+                        <a:srgbClr val="E2E8F0"/>
+                      </a:solidFill>
+                      <a:prstDash val="solid"/>
+                      <a:round/>
+                      <a:headEnd type="none" w="med" len="med"/>
+                      <a:tailEnd type="none" w="med" len="med"/>
+                    </a:lnT>
+                    <a:lnB w="10160" cap="flat" cmpd="sng" algn="ctr">
+                      <a:solidFill>
+                        <a:srgbClr val="E2E8F0"/>
+                      </a:solidFill>
+                      <a:prstDash val="solid"/>
+                      <a:round/>
+                      <a:headEnd type="none" w="med" len="med"/>
+                      <a:tailEnd type="none" w="med" len="med"/>
+                    </a:lnB>
+                    <a:solidFill>
+                      <a:srgbClr val="FFFFFF"/>
+                    </a:solidFill>
+                  </a:tcPr>
+                </a:tc>
+                <a:tc>
+                  <a:txBody>
+                    <a:bodyPr/>
+                    <a:lstStyle/>
+                    <a:p>
+                      <a:pPr indent="0" marL="0">
+                        <a:buNone/>
+                      </a:pPr>
+                      <a:r>
+                        <a:rPr lang="en-US" sz="950" dirty="0">
+                          <a:solidFill>
+                            <a:srgbClr val="000000"/>
+                          </a:solidFill>
+                          <a:latin typeface="Arial" pitchFamily="34" charset="0"/>
+                          <a:ea typeface="Arial" pitchFamily="34" charset="-122"/>
+                          <a:cs typeface="Arial" pitchFamily="34" charset="-120"/>
+                        </a:rPr>
+                        <a:t>Sistema depurado</a:t>
+                      </a:r>
+                      <a:endParaRPr lang="en-US" sz="950" dirty="0">
+                        <a:latin typeface="Arial" charset="0"/>
+                        <a:ea typeface="Arial" charset="0"/>
+                        <a:cs typeface="Arial" charset="0"/>
+                      </a:endParaRPr>
+                    </a:p>
+                  </a:txBody>
+                  <a:tcPr marL="91440" marR="91440" marT="45720" marB="45720" anchor="ctr">
+                    <a:lnL w="10160" cap="flat" cmpd="sng" algn="ctr">
+                      <a:solidFill>
+                        <a:srgbClr val="E2E8F0"/>
+                      </a:solidFill>
+                      <a:prstDash val="solid"/>
+                      <a:round/>
+                      <a:headEnd type="none" w="med" len="med"/>
+                      <a:tailEnd type="none" w="med" len="med"/>
+                    </a:lnL>
+                    <a:lnR w="10160" cap="flat" cmpd="sng" algn="ctr">
+                      <a:solidFill>
+                        <a:srgbClr val="E2E8F0"/>
+                      </a:solidFill>
+                      <a:prstDash val="solid"/>
+                      <a:round/>
+                      <a:headEnd type="none" w="med" len="med"/>
+                      <a:tailEnd type="none" w="med" len="med"/>
+                    </a:lnR>
+                    <a:lnT w="10160" cap="flat" cmpd="sng" algn="ctr">
+                      <a:solidFill>
+                        <a:srgbClr val="E2E8F0"/>
+                      </a:solidFill>
+                      <a:prstDash val="solid"/>
+                      <a:round/>
+                      <a:headEnd type="none" w="med" len="med"/>
+                      <a:tailEnd type="none" w="med" len="med"/>
+                    </a:lnT>
+                    <a:lnB w="10160" cap="flat" cmpd="sng" algn="ctr">
+                      <a:solidFill>
+                        <a:srgbClr val="E2E8F0"/>
+                      </a:solidFill>
+                      <a:prstDash val="solid"/>
+                      <a:round/>
+                      <a:headEnd type="none" w="med" len="med"/>
+                      <a:tailEnd type="none" w="med" len="med"/>
+                    </a:lnB>
+                    <a:solidFill>
+                      <a:srgbClr val="FFFFFF"/>
+                    </a:solidFill>
+                  </a:tcPr>
+                </a:tc>
+              </a:tr>
+              <a:tr h="386862">
+                <a:tc>
+                  <a:txBody>
+                    <a:bodyPr/>
+                    <a:lstStyle/>
+                    <a:p>
+                      <a:pPr indent="0" marL="0">
+                        <a:buNone/>
+                      </a:pPr>
+                      <a:r>
+                        <a:rPr lang="en-US" sz="950" dirty="0">
+                          <a:solidFill>
+                            <a:srgbClr val="000000"/>
+                          </a:solidFill>
+                          <a:latin typeface="Arial" pitchFamily="34" charset="0"/>
+                          <a:ea typeface="Arial" pitchFamily="34" charset="-122"/>
+                          <a:cs typeface="Arial" pitchFamily="34" charset="-120"/>
+                        </a:rPr>
+                        <a:t>12. Elaboración de monografía final y defensa BTH</a:t>
+                      </a:r>
+                      <a:endParaRPr lang="en-US" sz="950" dirty="0">
+                        <a:latin typeface="Arial" charset="0"/>
+                        <a:ea typeface="Arial" charset="0"/>
+                        <a:cs typeface="Arial" charset="0"/>
+                      </a:endParaRPr>
+                    </a:p>
+                  </a:txBody>
+                  <a:tcPr marL="91440" marR="91440" marT="45720" marB="45720" anchor="ctr">
+                    <a:lnL w="10160" cap="flat" cmpd="sng" algn="ctr">
+                      <a:solidFill>
+                        <a:srgbClr val="E2E8F0"/>
+                      </a:solidFill>
+                      <a:prstDash val="solid"/>
+                      <a:round/>
+                      <a:headEnd type="none" w="med" len="med"/>
+                      <a:tailEnd type="none" w="med" len="med"/>
+                    </a:lnL>
+                    <a:lnR w="10160" cap="flat" cmpd="sng" algn="ctr">
+                      <a:solidFill>
+                        <a:srgbClr val="E2E8F0"/>
+                      </a:solidFill>
+                      <a:prstDash val="solid"/>
+                      <a:round/>
+                      <a:headEnd type="none" w="med" len="med"/>
+                      <a:tailEnd type="none" w="med" len="med"/>
+                    </a:lnR>
+                    <a:lnT w="10160" cap="flat" cmpd="sng" algn="ctr">
+                      <a:solidFill>
+                        <a:srgbClr val="E2E8F0"/>
+                      </a:solidFill>
+                      <a:prstDash val="solid"/>
+                      <a:round/>
+                      <a:headEnd type="none" w="med" len="med"/>
+                      <a:tailEnd type="none" w="med" len="med"/>
+                    </a:lnT>
+                    <a:lnB w="10160" cap="flat" cmpd="sng" algn="ctr">
+                      <a:solidFill>
+                        <a:srgbClr val="E2E8F0"/>
+                      </a:solidFill>
+                      <a:prstDash val="solid"/>
+                      <a:round/>
+                      <a:headEnd type="none" w="med" len="med"/>
+                      <a:tailEnd type="none" w="med" len="med"/>
+                    </a:lnB>
+                    <a:solidFill>
+                      <a:srgbClr val="FFFFFF"/>
+                    </a:solidFill>
+                  </a:tcPr>
+                </a:tc>
+                <a:tc>
+                  <a:txBody>
+                    <a:bodyPr/>
+                    <a:lstStyle/>
+                    <a:p>
+                      <a:pPr algn="ctr" indent="0" marL="0">
+                        <a:buNone/>
+                      </a:pPr>
+                      <a:r>
+                        <a:rPr lang="en-US" sz="950" b="1" dirty="0">
+                          <a:solidFill>
+                            <a:srgbClr val="000000"/>
+                          </a:solidFill>
+                          <a:latin typeface="Arial" pitchFamily="34" charset="0"/>
+                          <a:ea typeface="Arial" pitchFamily="34" charset="-122"/>
+                          <a:cs typeface="Arial" pitchFamily="34" charset="-120"/>
+                        </a:rPr>
+                        <a:t>Noviembre</a:t>
+                      </a:r>
+                      <a:endParaRPr lang="en-US" sz="950" dirty="0">
+                        <a:latin typeface="Arial" charset="0"/>
+                        <a:ea typeface="Arial" charset="0"/>
+                        <a:cs typeface="Arial" charset="0"/>
+                      </a:endParaRPr>
+                    </a:p>
+                  </a:txBody>
+                  <a:tcPr marL="91440" marR="91440" marT="45720" marB="45720" anchor="ctr">
+                    <a:lnL w="10160" cap="flat" cmpd="sng" algn="ctr">
+                      <a:solidFill>
+                        <a:srgbClr val="E2E8F0"/>
+                      </a:solidFill>
+                      <a:prstDash val="solid"/>
+                      <a:round/>
+                      <a:headEnd type="none" w="med" len="med"/>
+                      <a:tailEnd type="none" w="med" len="med"/>
+                    </a:lnL>
+                    <a:lnR w="10160" cap="flat" cmpd="sng" algn="ctr">
+                      <a:solidFill>
+                        <a:srgbClr val="E2E8F0"/>
+                      </a:solidFill>
+                      <a:prstDash val="solid"/>
+                      <a:round/>
+                      <a:headEnd type="none" w="med" len="med"/>
+                      <a:tailEnd type="none" w="med" len="med"/>
+                    </a:lnR>
+                    <a:lnT w="10160" cap="flat" cmpd="sng" algn="ctr">
+                      <a:solidFill>
+                        <a:srgbClr val="E2E8F0"/>
+                      </a:solidFill>
+                      <a:prstDash val="solid"/>
+                      <a:round/>
+                      <a:headEnd type="none" w="med" len="med"/>
+                      <a:tailEnd type="none" w="med" len="med"/>
+                    </a:lnT>
+                    <a:lnB w="10160" cap="flat" cmpd="sng" algn="ctr">
+                      <a:solidFill>
+                        <a:srgbClr val="E2E8F0"/>
+                      </a:solidFill>
+                      <a:prstDash val="solid"/>
+                      <a:round/>
+                      <a:headEnd type="none" w="med" len="med"/>
+                      <a:tailEnd type="none" w="med" len="med"/>
+                    </a:lnB>
+                    <a:solidFill>
+                      <a:srgbClr val="FFFFFF"/>
+                    </a:solidFill>
+                  </a:tcPr>
+                </a:tc>
+                <a:tc>
+                  <a:txBody>
+                    <a:bodyPr/>
+                    <a:lstStyle/>
+                    <a:p>
+                      <a:pPr indent="0" marL="0">
+                        <a:buNone/>
+                      </a:pPr>
+                      <a:r>
+                        <a:rPr lang="en-US" sz="950" dirty="0">
+                          <a:solidFill>
+                            <a:srgbClr val="000000"/>
+                          </a:solidFill>
+                          <a:latin typeface="Arial" pitchFamily="34" charset="0"/>
+                          <a:ea typeface="Arial" pitchFamily="34" charset="-122"/>
+                          <a:cs typeface="Arial" pitchFamily="34" charset="-120"/>
+                        </a:rPr>
+                        <a:t>Monografía completa</a:t>
+                      </a:r>
+                      <a:endParaRPr lang="en-US" sz="950" dirty="0">
                         <a:latin typeface="Arial" charset="0"/>
                         <a:ea typeface="Arial" charset="0"/>
                         <a:cs typeface="Arial" charset="0"/>
@@ -6376,7 +7169,7 @@
     <p:bg>
       <p:bgPr>
         <a:solidFill>
-          <a:srgbClr val="F4F6F8"/>
+          <a:srgbClr val="F8FAFC"/>
         </a:solidFill>
       </p:bgPr>
     </p:bg>
@@ -6428,13 +7221,13 @@
         <p:spPr>
           <a:xfrm>
             <a:off x="731520" y="256032"/>
-            <a:ext cx="91440" cy="530352"/>
+            <a:ext cx="82296" cy="530352"/>
           </a:xfrm>
           <a:prstGeom prst="rect">
             <a:avLst/>
           </a:prstGeom>
           <a:solidFill>
-            <a:srgbClr val="1098AD"/>
+            <a:srgbClr val="0284C7"/>
           </a:solidFill>
           <a:ln/>
         </p:spPr>
@@ -6464,9 +7257,9 @@
               <a:buNone/>
             </a:pPr>
             <a:r>
-              <a:rPr lang="en-US" sz="1050" b="1" dirty="0">
-                <a:solidFill>
-                  <a:srgbClr val="FF922B"/>
+              <a:rPr lang="en-US" sz="1000" b="1" dirty="0">
+                <a:solidFill>
+                  <a:srgbClr val="D97706"/>
                 </a:solidFill>
                 <a:latin typeface="Arial" pitchFamily="34" charset="0"/>
                 <a:ea typeface="Arial" pitchFamily="34" charset="-122"/>
@@ -6474,7 +7267,7 @@
               </a:rPr>
               <a:t>CAPÍTULO 2</a:t>
             </a:r>
-            <a:endParaRPr lang="en-US" sz="1050" dirty="0"/>
+            <a:endParaRPr lang="en-US" sz="1000" dirty="0"/>
           </a:p>
         </p:txBody>
       </p:sp>
@@ -6503,9 +7296,9 @@
               <a:buNone/>
             </a:pPr>
             <a:r>
-              <a:rPr lang="en-US" sz="2200" b="1" dirty="0">
-                <a:solidFill>
-                  <a:srgbClr val="212529"/>
+              <a:rPr lang="en-US" sz="2100" b="1" dirty="0">
+                <a:solidFill>
+                  <a:srgbClr val="0F172A"/>
                 </a:solidFill>
                 <a:latin typeface="Arial" pitchFamily="34" charset="0"/>
                 <a:ea typeface="Arial" pitchFamily="34" charset="-122"/>
@@ -6513,7 +7306,7 @@
               </a:rPr>
               <a:t>2.2. Recursos del Proyecto</a:t>
             </a:r>
-            <a:endParaRPr lang="en-US" sz="2200" dirty="0"/>
+            <a:endParaRPr lang="en-US" sz="2100" dirty="0"/>
           </a:p>
         </p:txBody>
       </p:sp>
@@ -6525,8 +7318,8 @@
         </p:nvSpPr>
         <p:spPr>
           <a:xfrm>
-            <a:off x="731520" y="1325880"/>
-            <a:ext cx="3364992" cy="4983480"/>
+            <a:off x="731520" y="1280160"/>
+            <a:ext cx="3364992" cy="5029200"/>
           </a:xfrm>
           <a:prstGeom prst="rect">
             <a:avLst/>
@@ -6550,14 +7343,14 @@
         </p:nvSpPr>
         <p:spPr>
           <a:xfrm>
-            <a:off x="777240" y="1325880"/>
-            <a:ext cx="3273552" cy="73152"/>
+            <a:off x="768096" y="1280160"/>
+            <a:ext cx="3291840" cy="64008"/>
           </a:xfrm>
           <a:prstGeom prst="rect">
             <a:avLst/>
           </a:prstGeom>
           <a:solidFill>
-            <a:srgbClr val="1098AD"/>
+            <a:srgbClr val="0284C7"/>
           </a:solidFill>
           <a:ln/>
         </p:spPr>
@@ -6570,8 +7363,8 @@
         </p:nvSpPr>
         <p:spPr>
           <a:xfrm>
-            <a:off x="1005840" y="1527048"/>
-            <a:ext cx="2816352" cy="347472"/>
+            <a:off x="987552" y="1481328"/>
+            <a:ext cx="2852928" cy="347472"/>
           </a:xfrm>
           <a:prstGeom prst="rect">
             <a:avLst/>
@@ -6587,9 +7380,9 @@
               <a:buNone/>
             </a:pPr>
             <a:r>
-              <a:rPr lang="en-US" sz="1450" b="1" dirty="0">
-                <a:solidFill>
-                  <a:srgbClr val="0B7285"/>
+              <a:rPr lang="en-US" sz="1350" b="1" dirty="0">
+                <a:solidFill>
+                  <a:srgbClr val="0284C7"/>
                 </a:solidFill>
                 <a:latin typeface="Arial" pitchFamily="34" charset="0"/>
                 <a:ea typeface="Arial" pitchFamily="34" charset="-122"/>
@@ -6597,7 +7390,7 @@
               </a:rPr>
               <a:t>2.2.1. Recursos Humanos</a:t>
             </a:r>
-            <a:endParaRPr lang="en-US" sz="1450" dirty="0"/>
+            <a:endParaRPr lang="en-US" sz="1350" dirty="0"/>
           </a:p>
         </p:txBody>
       </p:sp>
@@ -6609,7 +7402,7 @@
         </p:nvSpPr>
         <p:spPr>
           <a:xfrm>
-            <a:off x="960120" y="1920240"/>
+            <a:off x="960120" y="1874520"/>
             <a:ext cx="2907792" cy="4206240"/>
           </a:xfrm>
           <a:prstGeom prst="rect">
@@ -6626,9 +7419,9 @@
               <a:buNone/>
             </a:pPr>
             <a:r>
-              <a:rPr lang="en-US" sz="1200" b="1" dirty="0">
-                <a:solidFill>
-                  <a:srgbClr val="212529"/>
+              <a:rPr lang="en-US" sz="1150" b="1" dirty="0">
+                <a:solidFill>
+                  <a:srgbClr val="0F172A"/>
                 </a:solidFill>
                 <a:latin typeface="Arial" pitchFamily="34" charset="0"/>
                 <a:ea typeface="Arial" pitchFamily="34" charset="-122"/>
@@ -6641,60 +7434,60 @@
               <a:buNone/>
             </a:pPr>
             <a:r>
-              <a:rPr lang="en-US" sz="1100" dirty="0">
-                <a:solidFill>
-                  <a:srgbClr val="495057"/>
-                </a:solidFill>
-                <a:latin typeface="Arial" pitchFamily="34" charset="0"/>
-                <a:ea typeface="Arial" pitchFamily="34" charset="-122"/>
-                <a:cs typeface="Arial" pitchFamily="34" charset="-120"/>
-              </a:rPr>
-              <a:t>• Leon Justiniano
-  (Programación Full-Stack y base de datos)
-• Yimmy Lijeron Mejia
-  (Diseño UI/UX, pruebas y documentación)
+              <a:rPr lang="en-US" sz="1050" dirty="0">
+                <a:solidFill>
+                  <a:srgbClr val="475569"/>
+                </a:solidFill>
+                <a:latin typeface="Arial" pitchFamily="34" charset="0"/>
+                <a:ea typeface="Arial" pitchFamily="34" charset="-122"/>
+                <a:cs typeface="Arial" pitchFamily="34" charset="-120"/>
+              </a:rPr>
+              <a:t>• Dietter Leon Justiniano
+  (Desarrollo Full-Stack y pruebas del sistema)
+• Yimmy Lijeron Mejias
+  (Análisis y diseño UI/UX de la página web)
 </a:t>
             </a:r>
             <a:pPr indent="0" marL="0">
               <a:buNone/>
             </a:pPr>
             <a:r>
-              <a:rPr lang="en-US" sz="1200" b="1" dirty="0">
-                <a:solidFill>
-                  <a:srgbClr val="212529"/>
-                </a:solidFill>
-                <a:latin typeface="Arial" pitchFamily="34" charset="0"/>
-                <a:ea typeface="Arial" pitchFamily="34" charset="-122"/>
-                <a:cs typeface="Arial" pitchFamily="34" charset="-120"/>
-              </a:rPr>
-              <a:t>Docentes Guía BTH:
+              <a:rPr lang="en-US" sz="1150" b="1" dirty="0">
+                <a:solidFill>
+                  <a:srgbClr val="0F172A"/>
+                </a:solidFill>
+                <a:latin typeface="Arial" pitchFamily="34" charset="0"/>
+                <a:ea typeface="Arial" pitchFamily="34" charset="-122"/>
+                <a:cs typeface="Arial" pitchFamily="34" charset="-120"/>
+              </a:rPr>
+              <a:t>Docentes Asesores BTH:
 </a:t>
             </a:r>
             <a:pPr indent="0" marL="0">
               <a:buNone/>
             </a:pPr>
             <a:r>
-              <a:rPr lang="en-US" sz="1100" dirty="0">
-                <a:solidFill>
-                  <a:srgbClr val="495057"/>
-                </a:solidFill>
-                <a:latin typeface="Arial" pitchFamily="34" charset="0"/>
-                <a:ea typeface="Arial" pitchFamily="34" charset="-122"/>
-                <a:cs typeface="Arial" pitchFamily="34" charset="-120"/>
-              </a:rPr>
-              <a:t>• Lic. Ronald Silver Quino Torrez
-  (Docente Tutor metodológico)
+              <a:rPr lang="en-US" sz="1050" dirty="0">
+                <a:solidFill>
+                  <a:srgbClr val="475569"/>
+                </a:solidFill>
+                <a:latin typeface="Arial" pitchFamily="34" charset="0"/>
+                <a:ea typeface="Arial" pitchFamily="34" charset="-122"/>
+                <a:cs typeface="Arial" pitchFamily="34" charset="-120"/>
+              </a:rPr>
+              <a:t>• Lic. Ivanna Leminka López Sanabria
+  (Docente Tutor metodológico y técnico)
 • Lic. Ana Gabriela Paz Arauz
-  (Docente de Especialidad Técnica)
+  (Docente de Especialidad BTH)
 </a:t>
             </a:r>
             <a:pPr indent="0" marL="0">
               <a:buNone/>
             </a:pPr>
             <a:r>
-              <a:rPr lang="en-US" sz="1200" b="1" dirty="0">
-                <a:solidFill>
-                  <a:srgbClr val="212529"/>
+              <a:rPr lang="en-US" sz="1150" b="1" dirty="0">
+                <a:solidFill>
+                  <a:srgbClr val="0F172A"/>
                 </a:solidFill>
                 <a:latin typeface="Arial" pitchFamily="34" charset="0"/>
                 <a:ea typeface="Arial" pitchFamily="34" charset="-122"/>
@@ -6707,9 +7500,9 @@
               <a:buNone/>
             </a:pPr>
             <a:r>
-              <a:rPr lang="en-US" sz="1100" dirty="0">
-                <a:solidFill>
-                  <a:srgbClr val="495057"/>
+              <a:rPr lang="en-US" sz="1050" dirty="0">
+                <a:solidFill>
+                  <a:srgbClr val="475569"/>
                 </a:solidFill>
                 <a:latin typeface="Arial" pitchFamily="34" charset="0"/>
                 <a:ea typeface="Arial" pitchFamily="34" charset="-122"/>
@@ -6717,16 +7510,16 @@
               </a:rPr>
               <a:t>• 40 vecinos para encuestas.</a:t>
             </a:r>
-            <a:endParaRPr lang="en-US" sz="1200" dirty="0"/>
-          </a:p>
-          <a:p>
-            <a:pPr indent="0" marL="0">
-              <a:buNone/>
-            </a:pPr>
-            <a:r>
-              <a:rPr lang="en-US" sz="1100" dirty="0">
-                <a:solidFill>
-                  <a:srgbClr val="495057"/>
+            <a:endParaRPr lang="en-US" sz="1150" dirty="0"/>
+          </a:p>
+          <a:p>
+            <a:pPr indent="0" marL="0">
+              <a:buNone/>
+            </a:pPr>
+            <a:r>
+              <a:rPr lang="en-US" sz="1050" dirty="0">
+                <a:solidFill>
+                  <a:srgbClr val="475569"/>
                 </a:solidFill>
                 <a:latin typeface="Arial" pitchFamily="34" charset="0"/>
                 <a:ea typeface="Arial" pitchFamily="34" charset="-122"/>
@@ -6734,7 +7527,7 @@
               </a:rPr>
               <a:t>• 5 usuarios para pruebas de usabilidad.</a:t>
             </a:r>
-            <a:endParaRPr lang="en-US" sz="1200" dirty="0"/>
+            <a:endParaRPr lang="en-US" sz="1150" dirty="0"/>
           </a:p>
         </p:txBody>
       </p:sp>
@@ -6746,8 +7539,8 @@
         </p:nvSpPr>
         <p:spPr>
           <a:xfrm>
-            <a:off x="4398264" y="1325880"/>
-            <a:ext cx="3364992" cy="4983480"/>
+            <a:off x="4398264" y="1280160"/>
+            <a:ext cx="3364992" cy="5029200"/>
           </a:xfrm>
           <a:prstGeom prst="rect">
             <a:avLst/>
@@ -6771,14 +7564,14 @@
         </p:nvSpPr>
         <p:spPr>
           <a:xfrm>
-            <a:off x="4443984" y="1325880"/>
-            <a:ext cx="3273552" cy="73152"/>
+            <a:off x="4434840" y="1280160"/>
+            <a:ext cx="3291840" cy="64008"/>
           </a:xfrm>
           <a:prstGeom prst="rect">
             <a:avLst/>
           </a:prstGeom>
           <a:solidFill>
-            <a:srgbClr val="FF922B"/>
+            <a:srgbClr val="D97706"/>
           </a:solidFill>
           <a:ln/>
         </p:spPr>
@@ -6791,8 +7584,8 @@
         </p:nvSpPr>
         <p:spPr>
           <a:xfrm>
-            <a:off x="4672584" y="1527048"/>
-            <a:ext cx="2816352" cy="347472"/>
+            <a:off x="4654296" y="1481328"/>
+            <a:ext cx="2852928" cy="347472"/>
           </a:xfrm>
           <a:prstGeom prst="rect">
             <a:avLst/>
@@ -6808,9 +7601,9 @@
               <a:buNone/>
             </a:pPr>
             <a:r>
-              <a:rPr lang="en-US" sz="1450" b="1" dirty="0">
-                <a:solidFill>
-                  <a:srgbClr val="0B7285"/>
+              <a:rPr lang="en-US" sz="1350" b="1" dirty="0">
+                <a:solidFill>
+                  <a:srgbClr val="D97706"/>
                 </a:solidFill>
                 <a:latin typeface="Arial" pitchFamily="34" charset="0"/>
                 <a:ea typeface="Arial" pitchFamily="34" charset="-122"/>
@@ -6818,7 +7611,7 @@
               </a:rPr>
               <a:t>2.2.2. Recursos Materiales</a:t>
             </a:r>
-            <a:endParaRPr lang="en-US" sz="1450" dirty="0"/>
+            <a:endParaRPr lang="en-US" sz="1350" dirty="0"/>
           </a:p>
         </p:txBody>
       </p:sp>
@@ -6830,7 +7623,7 @@
         </p:nvSpPr>
         <p:spPr>
           <a:xfrm>
-            <a:off x="4626864" y="1920240"/>
+            <a:off x="4626864" y="1874520"/>
             <a:ext cx="2907792" cy="4206240"/>
           </a:xfrm>
           <a:prstGeom prst="rect">
@@ -6847,40 +7640,40 @@
               <a:buNone/>
             </a:pPr>
             <a:r>
-              <a:rPr lang="en-US" sz="1200" b="1" dirty="0">
-                <a:solidFill>
-                  <a:srgbClr val="212529"/>
-                </a:solidFill>
-                <a:latin typeface="Arial" pitchFamily="34" charset="0"/>
-                <a:ea typeface="Arial" pitchFamily="34" charset="-122"/>
-                <a:cs typeface="Arial" pitchFamily="34" charset="-120"/>
-              </a:rPr>
-              <a:t>Equipos de Hardware:
+              <a:rPr lang="en-US" sz="1150" b="1" dirty="0">
+                <a:solidFill>
+                  <a:srgbClr val="0F172A"/>
+                </a:solidFill>
+                <a:latin typeface="Arial" pitchFamily="34" charset="0"/>
+                <a:ea typeface="Arial" pitchFamily="34" charset="-122"/>
+                <a:cs typeface="Arial" pitchFamily="34" charset="-120"/>
+              </a:rPr>
+              <a:t>Hardware Utilizado:
 </a:t>
             </a:r>
             <a:pPr indent="0" marL="0">
               <a:buNone/>
             </a:pPr>
             <a:r>
-              <a:rPr lang="en-US" sz="1100" dirty="0">
-                <a:solidFill>
-                  <a:srgbClr val="495057"/>
-                </a:solidFill>
-                <a:latin typeface="Arial" pitchFamily="34" charset="0"/>
-                <a:ea typeface="Arial" pitchFamily="34" charset="-122"/>
-                <a:cs typeface="Arial" pitchFamily="34" charset="-120"/>
-              </a:rPr>
-              <a:t>• 1 Computadora portátil Laptop Intel Core i5 con 8GB de memoria RAM.
-• 1 Teléfono inteligente para pruebas en navegadores móviles.
+              <a:rPr lang="en-US" sz="1050" dirty="0">
+                <a:solidFill>
+                  <a:srgbClr val="475569"/>
+                </a:solidFill>
+                <a:latin typeface="Arial" pitchFamily="34" charset="0"/>
+                <a:ea typeface="Arial" pitchFamily="34" charset="-122"/>
+                <a:cs typeface="Arial" pitchFamily="34" charset="-120"/>
+              </a:rPr>
+              <a:t>• 1 Computadora portátil (Laptop Intel Core i5, 8GB RAM).
+• 1 Teléfono inteligente para pruebas de navegación móvil.
 </a:t>
             </a:r>
             <a:pPr indent="0" marL="0">
               <a:buNone/>
             </a:pPr>
             <a:r>
-              <a:rPr lang="en-US" sz="1200" b="1" dirty="0">
-                <a:solidFill>
-                  <a:srgbClr val="212529"/>
+              <a:rPr lang="en-US" sz="1150" b="1" dirty="0">
+                <a:solidFill>
+                  <a:srgbClr val="0F172A"/>
                 </a:solidFill>
                 <a:latin typeface="Arial" pitchFamily="34" charset="0"/>
                 <a:ea typeface="Arial" pitchFamily="34" charset="-122"/>
@@ -6893,26 +7686,26 @@
               <a:buNone/>
             </a:pPr>
             <a:r>
-              <a:rPr lang="en-US" sz="1100" dirty="0">
-                <a:solidFill>
-                  <a:srgbClr val="495057"/>
-                </a:solidFill>
-                <a:latin typeface="Arial" pitchFamily="34" charset="0"/>
-                <a:ea typeface="Arial" pitchFamily="34" charset="-122"/>
-                <a:cs typeface="Arial" pitchFamily="34" charset="-120"/>
-              </a:rPr>
-              <a:t>• Visual Studio Code (Entorno de desarrollo).</a:t>
-            </a:r>
-            <a:endParaRPr lang="en-US" sz="1200" dirty="0"/>
-          </a:p>
-          <a:p>
-            <a:pPr indent="0" marL="0">
-              <a:buNone/>
-            </a:pPr>
-            <a:r>
-              <a:rPr lang="en-US" sz="1100" dirty="0">
-                <a:solidFill>
-                  <a:srgbClr val="495057"/>
+              <a:rPr lang="en-US" sz="1050" dirty="0">
+                <a:solidFill>
+                  <a:srgbClr val="475569"/>
+                </a:solidFill>
+                <a:latin typeface="Arial" pitchFamily="34" charset="0"/>
+                <a:ea typeface="Arial" pitchFamily="34" charset="-122"/>
+                <a:cs typeface="Arial" pitchFamily="34" charset="-120"/>
+              </a:rPr>
+              <a:t>• Visual Studio Code (IDE de desarrollo).</a:t>
+            </a:r>
+            <a:endParaRPr lang="en-US" sz="1150" dirty="0"/>
+          </a:p>
+          <a:p>
+            <a:pPr indent="0" marL="0">
+              <a:buNone/>
+            </a:pPr>
+            <a:r>
+              <a:rPr lang="en-US" sz="1050" dirty="0">
+                <a:solidFill>
+                  <a:srgbClr val="475569"/>
                 </a:solidFill>
                 <a:latin typeface="Arial" pitchFamily="34" charset="0"/>
                 <a:ea typeface="Arial" pitchFamily="34" charset="-122"/>
@@ -6920,33 +7713,33 @@
               </a:rPr>
               <a:t>• Node.js runtime &amp; Express framework.</a:t>
             </a:r>
-            <a:endParaRPr lang="en-US" sz="1200" dirty="0"/>
-          </a:p>
-          <a:p>
-            <a:pPr indent="0" marL="0">
-              <a:buNone/>
-            </a:pPr>
-            <a:r>
-              <a:rPr lang="en-US" sz="1100" dirty="0">
-                <a:solidFill>
-                  <a:srgbClr val="495057"/>
-                </a:solidFill>
-                <a:latin typeface="Arial" pitchFamily="34" charset="0"/>
-                <a:ea typeface="Arial" pitchFamily="34" charset="-122"/>
-                <a:cs typeface="Arial" pitchFamily="34" charset="-120"/>
-              </a:rPr>
-              <a:t>• SQLite3 (Motor relacional local).</a:t>
-            </a:r>
-            <a:endParaRPr lang="en-US" sz="1200" dirty="0"/>
-          </a:p>
-          <a:p>
-            <a:pPr indent="0" marL="0">
-              <a:buNone/>
-            </a:pPr>
-            <a:r>
-              <a:rPr lang="en-US" sz="1100" dirty="0">
-                <a:solidFill>
-                  <a:srgbClr val="495057"/>
+            <a:endParaRPr lang="en-US" sz="1150" dirty="0"/>
+          </a:p>
+          <a:p>
+            <a:pPr indent="0" marL="0">
+              <a:buNone/>
+            </a:pPr>
+            <a:r>
+              <a:rPr lang="en-US" sz="1050" dirty="0">
+                <a:solidFill>
+                  <a:srgbClr val="475569"/>
+                </a:solidFill>
+                <a:latin typeface="Arial" pitchFamily="34" charset="0"/>
+                <a:ea typeface="Arial" pitchFamily="34" charset="-122"/>
+                <a:cs typeface="Arial" pitchFamily="34" charset="-120"/>
+              </a:rPr>
+              <a:t>• SQLite3 (Base de datos relacional).</a:t>
+            </a:r>
+            <a:endParaRPr lang="en-US" sz="1150" dirty="0"/>
+          </a:p>
+          <a:p>
+            <a:pPr indent="0" marL="0">
+              <a:buNone/>
+            </a:pPr>
+            <a:r>
+              <a:rPr lang="en-US" sz="1050" dirty="0">
+                <a:solidFill>
+                  <a:srgbClr val="475569"/>
                 </a:solidFill>
                 <a:latin typeface="Arial" pitchFamily="34" charset="0"/>
                 <a:ea typeface="Arial" pitchFamily="34" charset="-122"/>
@@ -6954,16 +7747,16 @@
               </a:rPr>
               <a:t>• Git y GitHub (Control de versiones).</a:t>
             </a:r>
-            <a:endParaRPr lang="en-US" sz="1200" dirty="0"/>
-          </a:p>
-          <a:p>
-            <a:pPr indent="0" marL="0">
-              <a:buNone/>
-            </a:pPr>
-            <a:r>
-              <a:rPr lang="en-US" sz="1100" dirty="0">
-                <a:solidFill>
-                  <a:srgbClr val="495057"/>
+            <a:endParaRPr lang="en-US" sz="1150" dirty="0"/>
+          </a:p>
+          <a:p>
+            <a:pPr indent="0" marL="0">
+              <a:buNone/>
+            </a:pPr>
+            <a:r>
+              <a:rPr lang="en-US" sz="1050" dirty="0">
+                <a:solidFill>
+                  <a:srgbClr val="475569"/>
                 </a:solidFill>
                 <a:latin typeface="Arial" pitchFamily="34" charset="0"/>
                 <a:ea typeface="Arial" pitchFamily="34" charset="-122"/>
@@ -6971,24 +7764,24 @@
               </a:rPr>
               <a:t>• Navegador Google Chrome.</a:t>
             </a:r>
-            <a:endParaRPr lang="en-US" sz="1200" dirty="0"/>
-          </a:p>
-          <a:p>
-            <a:pPr indent="0" marL="0">
-              <a:buNone/>
-            </a:pPr>
-            <a:r>
-              <a:rPr lang="en-US" sz="1100" dirty="0">
-                <a:solidFill>
-                  <a:srgbClr val="495057"/>
-                </a:solidFill>
-                <a:latin typeface="Arial" pitchFamily="34" charset="0"/>
-                <a:ea typeface="Arial" pitchFamily="34" charset="-122"/>
-                <a:cs typeface="Arial" pitchFamily="34" charset="-120"/>
-              </a:rPr>
-              <a:t>• Paquete ofimático Microsoft Word.</a:t>
-            </a:r>
-            <a:endParaRPr lang="en-US" sz="1200" dirty="0"/>
+            <a:endParaRPr lang="en-US" sz="1150" dirty="0"/>
+          </a:p>
+          <a:p>
+            <a:pPr indent="0" marL="0">
+              <a:buNone/>
+            </a:pPr>
+            <a:r>
+              <a:rPr lang="en-US" sz="1050" dirty="0">
+                <a:solidFill>
+                  <a:srgbClr val="475569"/>
+                </a:solidFill>
+                <a:latin typeface="Arial" pitchFamily="34" charset="0"/>
+                <a:ea typeface="Arial" pitchFamily="34" charset="-122"/>
+                <a:cs typeface="Arial" pitchFamily="34" charset="-120"/>
+              </a:rPr>
+              <a:t>• Paquete Microsoft Word para monografía.</a:t>
+            </a:r>
+            <a:endParaRPr lang="en-US" sz="1150" dirty="0"/>
           </a:p>
         </p:txBody>
       </p:sp>
@@ -7000,8 +7793,8 @@
         </p:nvSpPr>
         <p:spPr>
           <a:xfrm>
-            <a:off x="8065008" y="1325880"/>
-            <a:ext cx="3364992" cy="4983480"/>
+            <a:off x="8065008" y="1280160"/>
+            <a:ext cx="3364992" cy="5029200"/>
           </a:xfrm>
           <a:prstGeom prst="rect">
             <a:avLst/>
@@ -7025,14 +7818,14 @@
         </p:nvSpPr>
         <p:spPr>
           <a:xfrm>
-            <a:off x="8110728" y="1325880"/>
-            <a:ext cx="3273552" cy="73152"/>
+            <a:off x="8101584" y="1280160"/>
+            <a:ext cx="3291840" cy="64008"/>
           </a:xfrm>
           <a:prstGeom prst="rect">
             <a:avLst/>
           </a:prstGeom>
           <a:solidFill>
-            <a:srgbClr val="2B8A3E"/>
+            <a:srgbClr val="059669"/>
           </a:solidFill>
           <a:ln/>
         </p:spPr>
@@ -7045,8 +7838,8 @@
         </p:nvSpPr>
         <p:spPr>
           <a:xfrm>
-            <a:off x="8339328" y="1527048"/>
-            <a:ext cx="2816352" cy="347472"/>
+            <a:off x="8321040" y="1481328"/>
+            <a:ext cx="2852928" cy="347472"/>
           </a:xfrm>
           <a:prstGeom prst="rect">
             <a:avLst/>
@@ -7062,9 +7855,9 @@
               <a:buNone/>
             </a:pPr>
             <a:r>
-              <a:rPr lang="en-US" sz="1450" b="1" dirty="0">
-                <a:solidFill>
-                  <a:srgbClr val="2B8A3E"/>
+              <a:rPr lang="en-US" sz="1350" b="1" dirty="0">
+                <a:solidFill>
+                  <a:srgbClr val="059669"/>
                 </a:solidFill>
                 <a:latin typeface="Arial" pitchFamily="34" charset="0"/>
                 <a:ea typeface="Arial" pitchFamily="34" charset="-122"/>
@@ -7072,7 +7865,7 @@
               </a:rPr>
               <a:t>2.2.3. Recursos Financieros</a:t>
             </a:r>
-            <a:endParaRPr lang="en-US" sz="1450" dirty="0"/>
+            <a:endParaRPr lang="en-US" sz="1350" dirty="0"/>
           </a:p>
         </p:txBody>
       </p:sp>
@@ -7084,18 +7877,18 @@
         </p:nvSpPr>
         <p:spPr>
           <a:xfrm>
-            <a:off x="8293608" y="1920240"/>
-            <a:ext cx="2907792" cy="1097280"/>
+            <a:off x="8293608" y="1874520"/>
+            <a:ext cx="2907792" cy="1143000"/>
           </a:xfrm>
           <a:prstGeom prst="rect">
             <a:avLst/>
           </a:prstGeom>
           <a:solidFill>
-            <a:srgbClr val="EBFBEE"/>
+            <a:srgbClr val="D1FAE5"/>
           </a:solidFill>
           <a:ln w="12700">
             <a:solidFill>
-              <a:srgbClr val="2B8A3E"/>
+              <a:srgbClr val="059669"/>
             </a:solidFill>
             <a:prstDash val="solid"/>
           </a:ln>
@@ -7109,8 +7902,8 @@
         </p:nvSpPr>
         <p:spPr>
           <a:xfrm>
-            <a:off x="8293608" y="1993392"/>
-            <a:ext cx="2907792" cy="502920"/>
+            <a:off x="8293608" y="1938528"/>
+            <a:ext cx="2907792" cy="548640"/>
           </a:xfrm>
           <a:prstGeom prst="rect">
             <a:avLst/>
@@ -7128,7 +7921,7 @@
             <a:r>
               <a:rPr lang="en-US" sz="2800" b="1" dirty="0">
                 <a:solidFill>
-                  <a:srgbClr val="2B8A3E"/>
+                  <a:srgbClr val="059669"/>
                 </a:solidFill>
                 <a:latin typeface="Arial" pitchFamily="34" charset="0"/>
                 <a:ea typeface="Arial" pitchFamily="34" charset="-122"/>
@@ -7148,7 +7941,7 @@
         </p:nvSpPr>
         <p:spPr>
           <a:xfrm>
-            <a:off x="8293608" y="2514600"/>
+            <a:off x="8293608" y="2468880"/>
             <a:ext cx="2907792" cy="411480"/>
           </a:xfrm>
           <a:prstGeom prst="rect">
@@ -7167,13 +7960,13 @@
             <a:r>
               <a:rPr lang="en-US" sz="1050" b="1" dirty="0">
                 <a:solidFill>
-                  <a:srgbClr val="212529"/>
-                </a:solidFill>
-                <a:latin typeface="Arial" pitchFamily="34" charset="0"/>
-                <a:ea typeface="Arial" pitchFamily="34" charset="-122"/>
-                <a:cs typeface="Arial" pitchFamily="34" charset="-120"/>
-              </a:rPr>
-              <a:t>Inversión en Licencias de Software</a:t>
+                  <a:srgbClr val="0F172A"/>
+                </a:solidFill>
+                <a:latin typeface="Arial" pitchFamily="34" charset="0"/>
+                <a:ea typeface="Arial" pitchFamily="34" charset="-122"/>
+                <a:cs typeface="Arial" pitchFamily="34" charset="-120"/>
+              </a:rPr>
+              <a:t>Inversión en Software de Desarrollo</a:t>
             </a:r>
             <a:endParaRPr lang="en-US" sz="1050" dirty="0"/>
           </a:p>
@@ -7204,62 +7997,62 @@
               <a:buNone/>
             </a:pPr>
             <a:r>
-              <a:rPr lang="en-US" sz="1200" b="1" dirty="0">
-                <a:solidFill>
-                  <a:srgbClr val="212529"/>
-                </a:solidFill>
-                <a:latin typeface="Arial" pitchFamily="34" charset="0"/>
-                <a:ea typeface="Arial" pitchFamily="34" charset="-122"/>
-                <a:cs typeface="Arial" pitchFamily="34" charset="-120"/>
-              </a:rPr>
-              <a:t>Tecnologías de Código Abierto:
+              <a:rPr lang="en-US" sz="1150" b="1" dirty="0">
+                <a:solidFill>
+                  <a:srgbClr val="0F172A"/>
+                </a:solidFill>
+                <a:latin typeface="Arial" pitchFamily="34" charset="0"/>
+                <a:ea typeface="Arial" pitchFamily="34" charset="-122"/>
+                <a:cs typeface="Arial" pitchFamily="34" charset="-120"/>
+              </a:rPr>
+              <a:t>Herramientas Open Source:
 </a:t>
             </a:r>
             <a:pPr indent="0" marL="0">
               <a:buNone/>
             </a:pPr>
             <a:r>
-              <a:rPr lang="en-US" sz="1100" dirty="0">
-                <a:solidFill>
-                  <a:srgbClr val="495057"/>
-                </a:solidFill>
-                <a:latin typeface="Arial" pitchFamily="34" charset="0"/>
-                <a:ea typeface="Arial" pitchFamily="34" charset="-122"/>
-                <a:cs typeface="Arial" pitchFamily="34" charset="-120"/>
-              </a:rPr>
-              <a:t>Todas las herramientas y librerías empleadas son Open Source y de uso gratuito.
+              <a:rPr lang="en-US" sz="1050" dirty="0">
+                <a:solidFill>
+                  <a:srgbClr val="475569"/>
+                </a:solidFill>
+                <a:latin typeface="Arial" pitchFamily="34" charset="0"/>
+                <a:ea typeface="Arial" pitchFamily="34" charset="-122"/>
+                <a:cs typeface="Arial" pitchFamily="34" charset="-120"/>
+              </a:rPr>
+              <a:t>Todas las tecnologías empleadas son de código abierto y libres de costo de licencias.
 </a:t>
             </a:r>
             <a:pPr indent="0" marL="0">
               <a:buNone/>
             </a:pPr>
             <a:r>
-              <a:rPr lang="en-US" sz="1200" b="1" dirty="0">
-                <a:solidFill>
-                  <a:srgbClr val="212529"/>
-                </a:solidFill>
-                <a:latin typeface="Arial" pitchFamily="34" charset="0"/>
-                <a:ea typeface="Arial" pitchFamily="34" charset="-122"/>
-                <a:cs typeface="Arial" pitchFamily="34" charset="-120"/>
-              </a:rPr>
-              <a:t>Sostenibilidad:
+              <a:rPr lang="en-US" sz="1150" b="1" dirty="0">
+                <a:solidFill>
+                  <a:srgbClr val="0F172A"/>
+                </a:solidFill>
+                <a:latin typeface="Arial" pitchFamily="34" charset="0"/>
+                <a:ea typeface="Arial" pitchFamily="34" charset="-122"/>
+                <a:cs typeface="Arial" pitchFamily="34" charset="-120"/>
+              </a:rPr>
+              <a:t>Autosostenibilidad:
 </a:t>
             </a:r>
             <a:pPr indent="0" marL="0">
               <a:buNone/>
             </a:pPr>
             <a:r>
-              <a:rPr lang="en-US" sz="1100" dirty="0">
-                <a:solidFill>
-                  <a:srgbClr val="495057"/>
-                </a:solidFill>
-                <a:latin typeface="Arial" pitchFamily="34" charset="0"/>
-                <a:ea typeface="Arial" pitchFamily="34" charset="-122"/>
-                <a:cs typeface="Arial" pitchFamily="34" charset="-120"/>
-              </a:rPr>
-              <a:t>El proyecto no requirió financiamiento externo ni genera costos de mantenimiento para la comunidad.</a:t>
-            </a:r>
-            <a:endParaRPr lang="en-US" sz="1200" dirty="0"/>
+              <a:rPr lang="en-US" sz="1050" dirty="0">
+                <a:solidFill>
+                  <a:srgbClr val="475569"/>
+                </a:solidFill>
+                <a:latin typeface="Arial" pitchFamily="34" charset="0"/>
+                <a:ea typeface="Arial" pitchFamily="34" charset="-122"/>
+                <a:cs typeface="Arial" pitchFamily="34" charset="-120"/>
+              </a:rPr>
+              <a:t>No requirió financiamiento externo, asegurando costo cero para los vecinos de la comunidad.</a:t>
+            </a:r>
+            <a:endParaRPr lang="en-US" sz="1150" dirty="0"/>
           </a:p>
         </p:txBody>
       </p:sp>
@@ -7277,7 +8070,7 @@
     <p:bg>
       <p:bgPr>
         <a:solidFill>
-          <a:srgbClr val="F4F6F8"/>
+          <a:srgbClr val="F8FAFC"/>
         </a:solidFill>
       </p:bgPr>
     </p:bg>
@@ -7329,13 +8122,13 @@
         <p:spPr>
           <a:xfrm>
             <a:off x="731520" y="256032"/>
-            <a:ext cx="91440" cy="530352"/>
+            <a:ext cx="82296" cy="530352"/>
           </a:xfrm>
           <a:prstGeom prst="rect">
             <a:avLst/>
           </a:prstGeom>
           <a:solidFill>
-            <a:srgbClr val="1098AD"/>
+            <a:srgbClr val="0284C7"/>
           </a:solidFill>
           <a:ln/>
         </p:spPr>
@@ -7365,9 +8158,9 @@
               <a:buNone/>
             </a:pPr>
             <a:r>
-              <a:rPr lang="en-US" sz="1050" b="1" dirty="0">
-                <a:solidFill>
-                  <a:srgbClr val="FF922B"/>
+              <a:rPr lang="en-US" sz="1000" b="1" dirty="0">
+                <a:solidFill>
+                  <a:srgbClr val="D97706"/>
                 </a:solidFill>
                 <a:latin typeface="Arial" pitchFamily="34" charset="0"/>
                 <a:ea typeface="Arial" pitchFamily="34" charset="-122"/>
@@ -7375,7 +8168,7 @@
               </a:rPr>
               <a:t>CAPÍTULO 2</a:t>
             </a:r>
-            <a:endParaRPr lang="en-US" sz="1050" dirty="0"/>
+            <a:endParaRPr lang="en-US" sz="1000" dirty="0"/>
           </a:p>
         </p:txBody>
       </p:sp>
@@ -7404,9 +8197,9 @@
               <a:buNone/>
             </a:pPr>
             <a:r>
-              <a:rPr lang="en-US" sz="2200" b="1" dirty="0">
-                <a:solidFill>
-                  <a:srgbClr val="212529"/>
+              <a:rPr lang="en-US" sz="2100" b="1" dirty="0">
+                <a:solidFill>
+                  <a:srgbClr val="0F172A"/>
                 </a:solidFill>
                 <a:latin typeface="Arial" pitchFamily="34" charset="0"/>
                 <a:ea typeface="Arial" pitchFamily="34" charset="-122"/>
@@ -7414,7 +8207,7 @@
               </a:rPr>
               <a:t>2.3. Cálculo de Costos del Proyecto</a:t>
             </a:r>
-            <a:endParaRPr lang="en-US" sz="2200" dirty="0"/>
+            <a:endParaRPr lang="en-US" sz="2100" dirty="0"/>
           </a:p>
         </p:txBody>
       </p:sp>
@@ -7426,7 +8219,7 @@
         </p:nvSpPr>
         <p:spPr>
           <a:xfrm>
-            <a:off x="731520" y="1325880"/>
+            <a:off x="731520" y="1280160"/>
             <a:ext cx="5212080" cy="2423160"/>
           </a:xfrm>
           <a:prstGeom prst="rect">
@@ -7451,14 +8244,14 @@
         </p:nvSpPr>
         <p:spPr>
           <a:xfrm>
-            <a:off x="777240" y="1325880"/>
-            <a:ext cx="5120640" cy="73152"/>
+            <a:off x="768096" y="1280160"/>
+            <a:ext cx="5138928" cy="64008"/>
           </a:xfrm>
           <a:prstGeom prst="rect">
             <a:avLst/>
           </a:prstGeom>
           <a:solidFill>
-            <a:srgbClr val="2B8A3E"/>
+            <a:srgbClr val="059669"/>
           </a:solidFill>
           <a:ln/>
         </p:spPr>
@@ -7471,8 +8264,8 @@
         </p:nvSpPr>
         <p:spPr>
           <a:xfrm>
-            <a:off x="1005840" y="1527048"/>
-            <a:ext cx="4663440" cy="347472"/>
+            <a:off x="987552" y="1481328"/>
+            <a:ext cx="4700016" cy="347472"/>
           </a:xfrm>
           <a:prstGeom prst="rect">
             <a:avLst/>
@@ -7488,9 +8281,9 @@
               <a:buNone/>
             </a:pPr>
             <a:r>
-              <a:rPr lang="en-US" sz="1450" b="1" dirty="0">
-                <a:solidFill>
-                  <a:srgbClr val="2B8A3E"/>
+              <a:rPr lang="en-US" sz="1350" b="1" dirty="0">
+                <a:solidFill>
+                  <a:srgbClr val="059669"/>
                 </a:solidFill>
                 <a:latin typeface="Arial" pitchFamily="34" charset="0"/>
                 <a:ea typeface="Arial" pitchFamily="34" charset="-122"/>
@@ -7498,7 +8291,7 @@
               </a:rPr>
               <a:t>2.3.1. Costo de Inversión (Gasto Inicial)</a:t>
             </a:r>
-            <a:endParaRPr lang="en-US" sz="1450" dirty="0"/>
+            <a:endParaRPr lang="en-US" sz="1350" dirty="0"/>
           </a:p>
         </p:txBody>
       </p:sp>
@@ -7510,8 +8303,8 @@
         </p:nvSpPr>
         <p:spPr>
           <a:xfrm>
-            <a:off x="1005840" y="1965960"/>
-            <a:ext cx="4663440" cy="1645920"/>
+            <a:off x="960120" y="1920240"/>
+            <a:ext cx="4754880" cy="1645920"/>
           </a:xfrm>
           <a:prstGeom prst="rect">
             <a:avLst/>
@@ -7527,9 +8320,9 @@
               <a:buNone/>
             </a:pPr>
             <a:r>
-              <a:rPr lang="en-US" sz="1150" dirty="0">
-                <a:solidFill>
-                  <a:srgbClr val="495057"/>
+              <a:rPr lang="en-US" sz="1100" dirty="0">
+                <a:solidFill>
+                  <a:srgbClr val="475569"/>
                 </a:solidFill>
                 <a:latin typeface="Arial" pitchFamily="34" charset="0"/>
                 <a:ea typeface="Arial" pitchFamily="34" charset="-122"/>
@@ -7541,9 +8334,9 @@
               <a:buNone/>
             </a:pPr>
             <a:r>
-              <a:rPr lang="en-US" sz="1150" b="1" dirty="0">
-                <a:solidFill>
-                  <a:srgbClr val="2B8A3E"/>
+              <a:rPr lang="en-US" sz="1100" b="1" dirty="0">
+                <a:solidFill>
+                  <a:srgbClr val="059669"/>
                 </a:solidFill>
                 <a:latin typeface="Arial" pitchFamily="34" charset="0"/>
                 <a:ea typeface="Arial" pitchFamily="34" charset="-122"/>
@@ -7556,9 +8349,9 @@
               <a:buNone/>
             </a:pPr>
             <a:r>
-              <a:rPr lang="en-US" sz="1150" dirty="0">
-                <a:solidFill>
-                  <a:srgbClr val="495057"/>
+              <a:rPr lang="en-US" sz="1100" dirty="0">
+                <a:solidFill>
+                  <a:srgbClr val="475569"/>
                 </a:solidFill>
                 <a:latin typeface="Arial" pitchFamily="34" charset="0"/>
                 <a:ea typeface="Arial" pitchFamily="34" charset="-122"/>
@@ -7570,9 +8363,9 @@
               <a:buNone/>
             </a:pPr>
             <a:r>
-              <a:rPr lang="en-US" sz="1150" b="1" dirty="0">
-                <a:solidFill>
-                  <a:srgbClr val="212529"/>
+              <a:rPr lang="en-US" sz="1100" b="1" dirty="0">
+                <a:solidFill>
+                  <a:srgbClr val="0F172A"/>
                 </a:solidFill>
                 <a:latin typeface="Arial" pitchFamily="34" charset="0"/>
                 <a:ea typeface="Arial" pitchFamily="34" charset="-122"/>
@@ -7585,15 +8378,15 @@
               <a:buNone/>
             </a:pPr>
             <a:r>
-              <a:rPr lang="en-US" sz="1250" b="1" dirty="0">
-                <a:solidFill>
-                  <a:srgbClr val="0B7285"/>
-                </a:solidFill>
-                <a:latin typeface="Arial" pitchFamily="34" charset="0"/>
-                <a:ea typeface="Arial" pitchFamily="34" charset="-122"/>
-                <a:cs typeface="Arial" pitchFamily="34" charset="-120"/>
-              </a:rPr>
-              <a:t>TOTAL INVERSIÓN INICIAL: </a:t>
+              <a:rPr lang="en-US" sz="1200" b="1" dirty="0">
+                <a:solidFill>
+                  <a:srgbClr val="0284C7"/>
+                </a:solidFill>
+                <a:latin typeface="Arial" pitchFamily="34" charset="0"/>
+                <a:ea typeface="Arial" pitchFamily="34" charset="-122"/>
+                <a:cs typeface="Arial" pitchFamily="34" charset="-120"/>
+              </a:rPr>
+              <a:t>TOTAL INVERSIÓN MATERIAL DIRECTA: </a:t>
             </a:r>
             <a:pPr indent="0" marL="0">
               <a:buNone/>
@@ -7601,7 +8394,7 @@
             <a:r>
               <a:rPr lang="en-US" sz="1300" b="1" dirty="0">
                 <a:solidFill>
-                  <a:srgbClr val="2B8A3E"/>
+                  <a:srgbClr val="059669"/>
                 </a:solidFill>
                 <a:latin typeface="Arial" pitchFamily="34" charset="0"/>
                 <a:ea typeface="Arial" pitchFamily="34" charset="-122"/>
@@ -7609,7 +8402,7 @@
               </a:rPr>
               <a:t>0 Bs. (Autosostenible)</a:t>
             </a:r>
-            <a:endParaRPr lang="en-US" sz="1150" dirty="0"/>
+            <a:endParaRPr lang="en-US" sz="1100" dirty="0"/>
           </a:p>
         </p:txBody>
       </p:sp>
@@ -7621,7 +8414,7 @@
         </p:nvSpPr>
         <p:spPr>
           <a:xfrm>
-            <a:off x="6217920" y="1325880"/>
+            <a:off x="6217920" y="1280160"/>
             <a:ext cx="5212080" cy="2423160"/>
           </a:xfrm>
           <a:prstGeom prst="rect">
@@ -7646,14 +8439,14 @@
         </p:nvSpPr>
         <p:spPr>
           <a:xfrm>
-            <a:off x="6263640" y="1325880"/>
-            <a:ext cx="5120640" cy="73152"/>
+            <a:off x="6254496" y="1280160"/>
+            <a:ext cx="5138928" cy="64008"/>
           </a:xfrm>
           <a:prstGeom prst="rect">
             <a:avLst/>
           </a:prstGeom>
           <a:solidFill>
-            <a:srgbClr val="FF922B"/>
+            <a:srgbClr val="D97706"/>
           </a:solidFill>
           <a:ln/>
         </p:spPr>
@@ -7666,8 +8459,8 @@
         </p:nvSpPr>
         <p:spPr>
           <a:xfrm>
-            <a:off x="6492240" y="1527048"/>
-            <a:ext cx="4663440" cy="347472"/>
+            <a:off x="6473952" y="1481328"/>
+            <a:ext cx="4700016" cy="347472"/>
           </a:xfrm>
           <a:prstGeom prst="rect">
             <a:avLst/>
@@ -7683,9 +8476,9 @@
               <a:buNone/>
             </a:pPr>
             <a:r>
-              <a:rPr lang="en-US" sz="1450" b="1" dirty="0">
-                <a:solidFill>
-                  <a:srgbClr val="0B7285"/>
+              <a:rPr lang="en-US" sz="1350" b="1" dirty="0">
+                <a:solidFill>
+                  <a:srgbClr val="D97706"/>
                 </a:solidFill>
                 <a:latin typeface="Arial" pitchFamily="34" charset="0"/>
                 <a:ea typeface="Arial" pitchFamily="34" charset="-122"/>
@@ -7693,7 +8486,7 @@
               </a:rPr>
               <a:t>2.3.2. Costo de Operación (Mensual)</a:t>
             </a:r>
-            <a:endParaRPr lang="en-US" sz="1450" dirty="0"/>
+            <a:endParaRPr lang="en-US" sz="1350" dirty="0"/>
           </a:p>
         </p:txBody>
       </p:sp>
@@ -7705,8 +8498,8 @@
         </p:nvSpPr>
         <p:spPr>
           <a:xfrm>
-            <a:off x="6492240" y="1965960"/>
-            <a:ext cx="4663440" cy="1645920"/>
+            <a:off x="6446520" y="1920240"/>
+            <a:ext cx="4754880" cy="1645920"/>
           </a:xfrm>
           <a:prstGeom prst="rect">
             <a:avLst/>
@@ -7722,9 +8515,9 @@
               <a:buNone/>
             </a:pPr>
             <a:r>
-              <a:rPr lang="en-US" sz="1150" dirty="0">
-                <a:solidFill>
-                  <a:srgbClr val="495057"/>
+              <a:rPr lang="en-US" sz="1100" dirty="0">
+                <a:solidFill>
+                  <a:srgbClr val="475569"/>
                 </a:solidFill>
                 <a:latin typeface="Arial" pitchFamily="34" charset="0"/>
                 <a:ea typeface="Arial" pitchFamily="34" charset="-122"/>
@@ -7736,9 +8529,9 @@
               <a:buNone/>
             </a:pPr>
             <a:r>
-              <a:rPr lang="en-US" sz="1150" b="1" dirty="0">
-                <a:solidFill>
-                  <a:srgbClr val="212529"/>
+              <a:rPr lang="en-US" sz="1100" b="1" dirty="0">
+                <a:solidFill>
+                  <a:srgbClr val="0F172A"/>
                 </a:solidFill>
                 <a:latin typeface="Arial" pitchFamily="34" charset="0"/>
                 <a:ea typeface="Arial" pitchFamily="34" charset="-122"/>
@@ -7751,23 +8544,23 @@
               <a:buNone/>
             </a:pPr>
             <a:r>
-              <a:rPr lang="en-US" sz="1150" dirty="0">
-                <a:solidFill>
-                  <a:srgbClr val="495057"/>
-                </a:solidFill>
-                <a:latin typeface="Arial" pitchFamily="34" charset="0"/>
-                <a:ea typeface="Arial" pitchFamily="34" charset="-122"/>
-                <a:cs typeface="Arial" pitchFamily="34" charset="-120"/>
-              </a:rPr>
-              <a:t>• Conexión a internet banda ancha: </a:t>
-            </a:r>
-            <a:pPr indent="0" marL="0">
-              <a:buNone/>
-            </a:pPr>
-            <a:r>
-              <a:rPr lang="en-US" sz="1150" b="1" dirty="0">
-                <a:solidFill>
-                  <a:srgbClr val="212529"/>
+              <a:rPr lang="en-US" sz="1100" dirty="0">
+                <a:solidFill>
+                  <a:srgbClr val="475569"/>
+                </a:solidFill>
+                <a:latin typeface="Arial" pitchFamily="34" charset="0"/>
+                <a:ea typeface="Arial" pitchFamily="34" charset="-122"/>
+                <a:cs typeface="Arial" pitchFamily="34" charset="-120"/>
+              </a:rPr>
+              <a:t>• Conexión a internet ilimitado banda ancha: </a:t>
+            </a:r>
+            <a:pPr indent="0" marL="0">
+              <a:buNone/>
+            </a:pPr>
+            <a:r>
+              <a:rPr lang="en-US" sz="1100" b="1" dirty="0">
+                <a:solidFill>
+                  <a:srgbClr val="0F172A"/>
                 </a:solidFill>
                 <a:latin typeface="Arial" pitchFamily="34" charset="0"/>
                 <a:ea typeface="Arial" pitchFamily="34" charset="-122"/>
@@ -7780,23 +8573,23 @@
               <a:buNone/>
             </a:pPr>
             <a:r>
-              <a:rPr lang="en-US" sz="1150" dirty="0">
-                <a:solidFill>
-                  <a:srgbClr val="495057"/>
-                </a:solidFill>
-                <a:latin typeface="Arial" pitchFamily="34" charset="0"/>
-                <a:ea typeface="Arial" pitchFamily="34" charset="-122"/>
-                <a:cs typeface="Arial" pitchFamily="34" charset="-120"/>
-              </a:rPr>
-              <a:t>• Servidor web en la nube (Plan gratuito): </a:t>
-            </a:r>
-            <a:pPr indent="0" marL="0">
-              <a:buNone/>
-            </a:pPr>
-            <a:r>
-              <a:rPr lang="en-US" sz="1150" b="1" dirty="0">
-                <a:solidFill>
-                  <a:srgbClr val="2B8A3E"/>
+              <a:rPr lang="en-US" sz="1100" dirty="0">
+                <a:solidFill>
+                  <a:srgbClr val="475569"/>
+                </a:solidFill>
+                <a:latin typeface="Arial" pitchFamily="34" charset="0"/>
+                <a:ea typeface="Arial" pitchFamily="34" charset="-122"/>
+                <a:cs typeface="Arial" pitchFamily="34" charset="-120"/>
+              </a:rPr>
+              <a:t>• Servidor web en la nube (Plan libre): </a:t>
+            </a:r>
+            <a:pPr indent="0" marL="0">
+              <a:buNone/>
+            </a:pPr>
+            <a:r>
+              <a:rPr lang="en-US" sz="1100" b="1" dirty="0">
+                <a:solidFill>
+                  <a:srgbClr val="059669"/>
                 </a:solidFill>
                 <a:latin typeface="Arial" pitchFamily="34" charset="0"/>
                 <a:ea typeface="Arial" pitchFamily="34" charset="-122"/>
@@ -7809,15 +8602,15 @@
               <a:buNone/>
             </a:pPr>
             <a:r>
-              <a:rPr lang="en-US" sz="1250" b="1" dirty="0">
-                <a:solidFill>
-                  <a:srgbClr val="0B7285"/>
-                </a:solidFill>
-                <a:latin typeface="Arial" pitchFamily="34" charset="0"/>
-                <a:ea typeface="Arial" pitchFamily="34" charset="-122"/>
-                <a:cs typeface="Arial" pitchFamily="34" charset="-120"/>
-              </a:rPr>
-              <a:t>TOTAL OPERACIÓN MENSUAL: </a:t>
+              <a:rPr lang="en-US" sz="1200" b="1" dirty="0">
+                <a:solidFill>
+                  <a:srgbClr val="0284C7"/>
+                </a:solidFill>
+                <a:latin typeface="Arial" pitchFamily="34" charset="0"/>
+                <a:ea typeface="Arial" pitchFamily="34" charset="-122"/>
+                <a:cs typeface="Arial" pitchFamily="34" charset="-120"/>
+              </a:rPr>
+              <a:t>TOTAL COSTO OPERACIÓN MENSUAL: </a:t>
             </a:r>
             <a:pPr indent="0" marL="0">
               <a:buNone/>
@@ -7825,7 +8618,7 @@
             <a:r>
               <a:rPr lang="en-US" sz="1300" b="1" dirty="0">
                 <a:solidFill>
-                  <a:srgbClr val="FF922B"/>
+                  <a:srgbClr val="D97706"/>
                 </a:solidFill>
                 <a:latin typeface="Arial" pitchFamily="34" charset="0"/>
                 <a:ea typeface="Arial" pitchFamily="34" charset="-122"/>
@@ -7833,7 +8626,7 @@
               </a:rPr>
               <a:t>170 Bs. / mes</a:t>
             </a:r>
-            <a:endParaRPr lang="en-US" sz="1150" dirty="0"/>
+            <a:endParaRPr lang="en-US" sz="1100" dirty="0"/>
           </a:p>
         </p:txBody>
       </p:sp>
@@ -7870,14 +8663,14 @@
         </p:nvSpPr>
         <p:spPr>
           <a:xfrm>
-            <a:off x="777240" y="3886200"/>
-            <a:ext cx="5120640" cy="73152"/>
+            <a:off x="768096" y="3886200"/>
+            <a:ext cx="5138928" cy="64008"/>
           </a:xfrm>
           <a:prstGeom prst="rect">
             <a:avLst/>
           </a:prstGeom>
           <a:solidFill>
-            <a:srgbClr val="1098AD"/>
+            <a:srgbClr val="0284C7"/>
           </a:solidFill>
           <a:ln/>
         </p:spPr>
@@ -7890,8 +8683,8 @@
         </p:nvSpPr>
         <p:spPr>
           <a:xfrm>
-            <a:off x="1005840" y="4087368"/>
-            <a:ext cx="4663440" cy="347472"/>
+            <a:off x="987552" y="4087368"/>
+            <a:ext cx="4700016" cy="347472"/>
           </a:xfrm>
           <a:prstGeom prst="rect">
             <a:avLst/>
@@ -7907,9 +8700,9 @@
               <a:buNone/>
             </a:pPr>
             <a:r>
-              <a:rPr lang="en-US" sz="1450" b="1" dirty="0">
-                <a:solidFill>
-                  <a:srgbClr val="0B7285"/>
+              <a:rPr lang="en-US" sz="1350" b="1" dirty="0">
+                <a:solidFill>
+                  <a:srgbClr val="0284C7"/>
                 </a:solidFill>
                 <a:latin typeface="Arial" pitchFamily="34" charset="0"/>
                 <a:ea typeface="Arial" pitchFamily="34" charset="-122"/>
@@ -7917,7 +8710,7 @@
               </a:rPr>
               <a:t>2.3.3. Costos Variables</a:t>
             </a:r>
-            <a:endParaRPr lang="en-US" sz="1450" dirty="0"/>
+            <a:endParaRPr lang="en-US" sz="1350" dirty="0"/>
           </a:p>
         </p:txBody>
       </p:sp>
@@ -7929,8 +8722,8 @@
         </p:nvSpPr>
         <p:spPr>
           <a:xfrm>
-            <a:off x="1005840" y="4526280"/>
-            <a:ext cx="4663440" cy="1645920"/>
+            <a:off x="960120" y="4526280"/>
+            <a:ext cx="4754880" cy="1645920"/>
           </a:xfrm>
           <a:prstGeom prst="rect">
             <a:avLst/>
@@ -7946,52 +8739,52 @@
               <a:buNone/>
             </a:pPr>
             <a:r>
-              <a:rPr lang="en-US" sz="1150" dirty="0">
-                <a:solidFill>
-                  <a:srgbClr val="495057"/>
-                </a:solidFill>
-                <a:latin typeface="Arial" pitchFamily="34" charset="0"/>
-                <a:ea typeface="Arial" pitchFamily="34" charset="-122"/>
-                <a:cs typeface="Arial" pitchFamily="34" charset="-120"/>
-              </a:rPr>
-              <a:t>• Difusión digital en redes sociales (Opcional): </a:t>
-            </a:r>
-            <a:pPr indent="0" marL="0">
-              <a:buNone/>
-            </a:pPr>
-            <a:r>
-              <a:rPr lang="en-US" sz="1150" b="1" dirty="0">
-                <a:solidFill>
-                  <a:srgbClr val="212529"/>
-                </a:solidFill>
-                <a:latin typeface="Arial" pitchFamily="34" charset="0"/>
-                <a:ea typeface="Arial" pitchFamily="34" charset="-122"/>
-                <a:cs typeface="Arial" pitchFamily="34" charset="-120"/>
-              </a:rPr>
-              <a:t>100 Bs.
+              <a:rPr lang="en-US" sz="1100" dirty="0">
+                <a:solidFill>
+                  <a:srgbClr val="475569"/>
+                </a:solidFill>
+                <a:latin typeface="Arial" pitchFamily="34" charset="0"/>
+                <a:ea typeface="Arial" pitchFamily="34" charset="-122"/>
+                <a:cs typeface="Arial" pitchFamily="34" charset="-120"/>
+              </a:rPr>
+              <a:t>• Materiales de impresión y encuadernación: </a:t>
+            </a:r>
+            <a:pPr indent="0" marL="0">
+              <a:buNone/>
+            </a:pPr>
+            <a:r>
+              <a:rPr lang="en-US" sz="1100" b="1" dirty="0">
+                <a:solidFill>
+                  <a:srgbClr val="0F172A"/>
+                </a:solidFill>
+                <a:latin typeface="Arial" pitchFamily="34" charset="0"/>
+                <a:ea typeface="Arial" pitchFamily="34" charset="-122"/>
+                <a:cs typeface="Arial" pitchFamily="34" charset="-120"/>
+              </a:rPr>
+              <a:t>80 Bs.
 </a:t>
             </a:r>
             <a:pPr indent="0" marL="0">
               <a:buNone/>
             </a:pPr>
             <a:r>
-              <a:rPr lang="en-US" sz="1150" dirty="0">
-                <a:solidFill>
-                  <a:srgbClr val="495057"/>
-                </a:solidFill>
-                <a:latin typeface="Arial" pitchFamily="34" charset="0"/>
-                <a:ea typeface="Arial" pitchFamily="34" charset="-122"/>
-                <a:cs typeface="Arial" pitchFamily="34" charset="-120"/>
-              </a:rPr>
-              <a:t>• Materiales de oficina e impresiones de prueba: </a:t>
-            </a:r>
-            <a:pPr indent="0" marL="0">
-              <a:buNone/>
-            </a:pPr>
-            <a:r>
-              <a:rPr lang="en-US" sz="1150" b="1" dirty="0">
-                <a:solidFill>
-                  <a:srgbClr val="212529"/>
+              <a:rPr lang="en-US" sz="1100" dirty="0">
+                <a:solidFill>
+                  <a:srgbClr val="475569"/>
+                </a:solidFill>
+                <a:latin typeface="Arial" pitchFamily="34" charset="0"/>
+                <a:ea typeface="Arial" pitchFamily="34" charset="-122"/>
+                <a:cs typeface="Arial" pitchFamily="34" charset="-120"/>
+              </a:rPr>
+              <a:t>• Publicidad digital en redes sociales (Opcional): </a:t>
+            </a:r>
+            <a:pPr indent="0" marL="0">
+              <a:buNone/>
+            </a:pPr>
+            <a:r>
+              <a:rPr lang="en-US" sz="1100" b="1" dirty="0">
+                <a:solidFill>
+                  <a:srgbClr val="0F172A"/>
                 </a:solidFill>
                 <a:latin typeface="Arial" pitchFamily="34" charset="0"/>
                 <a:ea typeface="Arial" pitchFamily="34" charset="-122"/>
@@ -8004,9 +8797,9 @@
               <a:buNone/>
             </a:pPr>
             <a:r>
-              <a:rPr lang="en-US" sz="1250" b="1" dirty="0">
-                <a:solidFill>
-                  <a:srgbClr val="0B7285"/>
+              <a:rPr lang="en-US" sz="1200" b="1" dirty="0">
+                <a:solidFill>
+                  <a:srgbClr val="0284C7"/>
                 </a:solidFill>
                 <a:latin typeface="Arial" pitchFamily="34" charset="0"/>
                 <a:ea typeface="Arial" pitchFamily="34" charset="-122"/>
@@ -8020,15 +8813,15 @@
             <a:r>
               <a:rPr lang="en-US" sz="1300" b="1" dirty="0">
                 <a:solidFill>
-                  <a:srgbClr val="212529"/>
-                </a:solidFill>
-                <a:latin typeface="Arial" pitchFamily="34" charset="0"/>
-                <a:ea typeface="Arial" pitchFamily="34" charset="-122"/>
-                <a:cs typeface="Arial" pitchFamily="34" charset="-120"/>
-              </a:rPr>
-              <a:t>150 Bs. (Opcionales)</a:t>
-            </a:r>
-            <a:endParaRPr lang="en-US" sz="1150" dirty="0"/>
+                  <a:srgbClr val="0F172A"/>
+                </a:solidFill>
+                <a:latin typeface="Arial" pitchFamily="34" charset="0"/>
+                <a:ea typeface="Arial" pitchFamily="34" charset="-122"/>
+                <a:cs typeface="Arial" pitchFamily="34" charset="-120"/>
+              </a:rPr>
+              <a:t>130 Bs. (Flexibles)</a:t>
+            </a:r>
+            <a:endParaRPr lang="en-US" sz="1100" dirty="0"/>
           </a:p>
         </p:txBody>
       </p:sp>
@@ -8065,14 +8858,14 @@
         </p:nvSpPr>
         <p:spPr>
           <a:xfrm>
-            <a:off x="6263640" y="3886200"/>
-            <a:ext cx="5120640" cy="73152"/>
+            <a:off x="6254496" y="3886200"/>
+            <a:ext cx="5138928" cy="64008"/>
           </a:xfrm>
           <a:prstGeom prst="rect">
             <a:avLst/>
           </a:prstGeom>
           <a:solidFill>
-            <a:srgbClr val="0B7285"/>
+            <a:srgbClr val="0284C7"/>
           </a:solidFill>
           <a:ln/>
         </p:spPr>
@@ -8085,8 +8878,8 @@
         </p:nvSpPr>
         <p:spPr>
           <a:xfrm>
-            <a:off x="6492240" y="4087368"/>
-            <a:ext cx="4663440" cy="347472"/>
+            <a:off x="6473952" y="4087368"/>
+            <a:ext cx="4700016" cy="347472"/>
           </a:xfrm>
           <a:prstGeom prst="rect">
             <a:avLst/>
@@ -8102,9 +8895,9 @@
               <a:buNone/>
             </a:pPr>
             <a:r>
-              <a:rPr lang="en-US" sz="1450" b="1" dirty="0">
-                <a:solidFill>
-                  <a:srgbClr val="0B7285"/>
+              <a:rPr lang="en-US" sz="1350" b="1" dirty="0">
+                <a:solidFill>
+                  <a:srgbClr val="0284C7"/>
                 </a:solidFill>
                 <a:latin typeface="Arial" pitchFamily="34" charset="0"/>
                 <a:ea typeface="Arial" pitchFamily="34" charset="-122"/>
@@ -8112,7 +8905,7 @@
               </a:rPr>
               <a:t>2.3.4. Costos Fijos (Mano de Obra)</a:t>
             </a:r>
-            <a:endParaRPr lang="en-US" sz="1450" dirty="0"/>
+            <a:endParaRPr lang="en-US" sz="1350" dirty="0"/>
           </a:p>
         </p:txBody>
       </p:sp>
@@ -8124,8 +8917,8 @@
         </p:nvSpPr>
         <p:spPr>
           <a:xfrm>
-            <a:off x="6492240" y="4526280"/>
-            <a:ext cx="4663440" cy="1645920"/>
+            <a:off x="6446520" y="4526280"/>
+            <a:ext cx="4754880" cy="1645920"/>
           </a:xfrm>
           <a:prstGeom prst="rect">
             <a:avLst/>
@@ -8141,23 +8934,23 @@
               <a:buNone/>
             </a:pPr>
             <a:r>
-              <a:rPr lang="en-US" sz="1150" dirty="0">
-                <a:solidFill>
-                  <a:srgbClr val="495057"/>
-                </a:solidFill>
-                <a:latin typeface="Arial" pitchFamily="34" charset="0"/>
-                <a:ea typeface="Arial" pitchFamily="34" charset="-122"/>
-                <a:cs typeface="Arial" pitchFamily="34" charset="-120"/>
-              </a:rPr>
-              <a:t>• Horas de trabajo estimadas: </a:t>
-            </a:r>
-            <a:pPr indent="0" marL="0">
-              <a:buNone/>
-            </a:pPr>
-            <a:r>
-              <a:rPr lang="en-US" sz="1150" b="1" dirty="0">
-                <a:solidFill>
-                  <a:srgbClr val="212529"/>
+              <a:rPr lang="en-US" sz="1100" dirty="0">
+                <a:solidFill>
+                  <a:srgbClr val="475569"/>
+                </a:solidFill>
+                <a:latin typeface="Arial" pitchFamily="34" charset="0"/>
+                <a:ea typeface="Arial" pitchFamily="34" charset="-122"/>
+                <a:cs typeface="Arial" pitchFamily="34" charset="-120"/>
+              </a:rPr>
+              <a:t>• Estimación de tiempo técnico invertido: </a:t>
+            </a:r>
+            <a:pPr indent="0" marL="0">
+              <a:buNone/>
+            </a:pPr>
+            <a:r>
+              <a:rPr lang="en-US" sz="1100" b="1" dirty="0">
+                <a:solidFill>
+                  <a:srgbClr val="0F172A"/>
                 </a:solidFill>
                 <a:latin typeface="Arial" pitchFamily="34" charset="0"/>
                 <a:ea typeface="Arial" pitchFamily="34" charset="-122"/>
@@ -8170,23 +8963,23 @@
               <a:buNone/>
             </a:pPr>
             <a:r>
-              <a:rPr lang="en-US" sz="1150" dirty="0">
-                <a:solidFill>
-                  <a:srgbClr val="495057"/>
-                </a:solidFill>
-                <a:latin typeface="Arial" pitchFamily="34" charset="0"/>
-                <a:ea typeface="Arial" pitchFamily="34" charset="-122"/>
-                <a:cs typeface="Arial" pitchFamily="34" charset="-120"/>
-              </a:rPr>
-              <a:t>• Valor hora desarrollador junior (simulado): </a:t>
-            </a:r>
-            <a:pPr indent="0" marL="0">
-              <a:buNone/>
-            </a:pPr>
-            <a:r>
-              <a:rPr lang="en-US" sz="1150" b="1" dirty="0">
-                <a:solidFill>
-                  <a:srgbClr val="212529"/>
+              <a:rPr lang="en-US" sz="1100" dirty="0">
+                <a:solidFill>
+                  <a:srgbClr val="475569"/>
+                </a:solidFill>
+                <a:latin typeface="Arial" pitchFamily="34" charset="0"/>
+                <a:ea typeface="Arial" pitchFamily="34" charset="-122"/>
+                <a:cs typeface="Arial" pitchFamily="34" charset="-120"/>
+              </a:rPr>
+              <a:t>• Valor hora de desarrollador junior (Simulado): </a:t>
+            </a:r>
+            <a:pPr indent="0" marL="0">
+              <a:buNone/>
+            </a:pPr>
+            <a:r>
+              <a:rPr lang="en-US" sz="1100" b="1" dirty="0">
+                <a:solidFill>
+                  <a:srgbClr val="0F172A"/>
                 </a:solidFill>
                 <a:latin typeface="Arial" pitchFamily="34" charset="0"/>
                 <a:ea typeface="Arial" pitchFamily="34" charset="-122"/>
@@ -8199,9 +8992,9 @@
               <a:buNone/>
             </a:pPr>
             <a:r>
-              <a:rPr lang="en-US" sz="1250" b="1" dirty="0">
-                <a:solidFill>
-                  <a:srgbClr val="0B7285"/>
+              <a:rPr lang="en-US" sz="1200" b="1" dirty="0">
+                <a:solidFill>
+                  <a:srgbClr val="0284C7"/>
                 </a:solidFill>
                 <a:latin typeface="Arial" pitchFamily="34" charset="0"/>
                 <a:ea typeface="Arial" pitchFamily="34" charset="-122"/>
@@ -8215,7 +9008,7 @@
             <a:r>
               <a:rPr lang="en-US" sz="1500" b="1" dirty="0">
                 <a:solidFill>
-                  <a:srgbClr val="0B7285"/>
+                  <a:srgbClr val="0284C7"/>
                 </a:solidFill>
                 <a:latin typeface="Arial" pitchFamily="34" charset="0"/>
                 <a:ea typeface="Arial" pitchFamily="34" charset="-122"/>
@@ -8223,7 +9016,7 @@
               </a:rPr>
               <a:t>2,400 Bs.</a:t>
             </a:r>
-            <a:endParaRPr lang="en-US" sz="1150" dirty="0"/>
+            <a:endParaRPr lang="en-US" sz="1100" dirty="0"/>
           </a:p>
         </p:txBody>
       </p:sp>
@@ -8241,7 +9034,7 @@
     <p:bg>
       <p:bgPr>
         <a:solidFill>
-          <a:srgbClr val="F4F6F8"/>
+          <a:srgbClr val="F8FAFC"/>
         </a:solidFill>
       </p:bgPr>
     </p:bg>
@@ -8293,13 +9086,13 @@
         <p:spPr>
           <a:xfrm>
             <a:off x="731520" y="256032"/>
-            <a:ext cx="91440" cy="530352"/>
+            <a:ext cx="82296" cy="530352"/>
           </a:xfrm>
           <a:prstGeom prst="rect">
             <a:avLst/>
           </a:prstGeom>
           <a:solidFill>
-            <a:srgbClr val="1098AD"/>
+            <a:srgbClr val="0284C7"/>
           </a:solidFill>
           <a:ln/>
         </p:spPr>
@@ -8329,9 +9122,9 @@
               <a:buNone/>
             </a:pPr>
             <a:r>
-              <a:rPr lang="en-US" sz="1050" b="1" dirty="0">
-                <a:solidFill>
-                  <a:srgbClr val="FF922B"/>
+              <a:rPr lang="en-US" sz="1000" b="1" dirty="0">
+                <a:solidFill>
+                  <a:srgbClr val="D97706"/>
                 </a:solidFill>
                 <a:latin typeface="Arial" pitchFamily="34" charset="0"/>
                 <a:ea typeface="Arial" pitchFamily="34" charset="-122"/>
@@ -8339,7 +9132,7 @@
               </a:rPr>
               <a:t>DEMOSTRACIÓN</a:t>
             </a:r>
-            <a:endParaRPr lang="en-US" sz="1050" dirty="0"/>
+            <a:endParaRPr lang="en-US" sz="1000" dirty="0"/>
           </a:p>
         </p:txBody>
       </p:sp>
@@ -8368,9 +9161,9 @@
               <a:buNone/>
             </a:pPr>
             <a:r>
-              <a:rPr lang="en-US" sz="2200" b="1" dirty="0">
-                <a:solidFill>
-                  <a:srgbClr val="212529"/>
+              <a:rPr lang="en-US" sz="2100" b="1" dirty="0">
+                <a:solidFill>
+                  <a:srgbClr val="0F172A"/>
                 </a:solidFill>
                 <a:latin typeface="Arial" pitchFamily="34" charset="0"/>
                 <a:ea typeface="Arial" pitchFamily="34" charset="-122"/>
@@ -8378,7 +9171,7 @@
               </a:rPr>
               <a:t>3. ¿Cómo Funciona? - Arquitectura y Roles</a:t>
             </a:r>
-            <a:endParaRPr lang="en-US" sz="2200" dirty="0"/>
+            <a:endParaRPr lang="en-US" sz="2100" dirty="0"/>
           </a:p>
         </p:txBody>
       </p:sp>
@@ -8390,7 +9183,7 @@
         </p:nvSpPr>
         <p:spPr>
           <a:xfrm>
-            <a:off x="731520" y="1261872"/>
+            <a:off x="731520" y="1234440"/>
             <a:ext cx="10698480" cy="960120"/>
           </a:xfrm>
           <a:prstGeom prst="rect">
@@ -8401,7 +9194,7 @@
           </a:solidFill>
           <a:ln w="19050">
             <a:solidFill>
-              <a:srgbClr val="1098AD"/>
+              <a:srgbClr val="0284C7"/>
             </a:solidFill>
             <a:prstDash val="solid"/>
           </a:ln>
@@ -8415,8 +9208,8 @@
         </p:nvSpPr>
         <p:spPr>
           <a:xfrm>
-            <a:off x="1005840" y="1353312"/>
-            <a:ext cx="10149840" cy="228600"/>
+            <a:off x="960120" y="1325880"/>
+            <a:ext cx="10241280" cy="228600"/>
           </a:xfrm>
           <a:prstGeom prst="rect">
             <a:avLst/>
@@ -8432,9 +9225,9 @@
               <a:buNone/>
             </a:pPr>
             <a:r>
-              <a:rPr lang="en-US" sz="1100" b="1" dirty="0">
-                <a:solidFill>
-                  <a:srgbClr val="0B7285"/>
+              <a:rPr lang="en-US" sz="1050" b="1" dirty="0">
+                <a:solidFill>
+                  <a:srgbClr val="0284C7"/>
                 </a:solidFill>
                 <a:latin typeface="Arial" pitchFamily="34" charset="0"/>
                 <a:ea typeface="Arial" pitchFamily="34" charset="-122"/>
@@ -8442,7 +9235,7 @@
               </a:rPr>
               <a:t>ARQUITECTURA CLIENTE-SERVIDOR DESACOPLADA (FULL-STACK):</a:t>
             </a:r>
-            <a:endParaRPr lang="en-US" sz="1100" dirty="0"/>
+            <a:endParaRPr lang="en-US" sz="1050" dirty="0"/>
           </a:p>
         </p:txBody>
       </p:sp>
@@ -8454,8 +9247,8 @@
         </p:nvSpPr>
         <p:spPr>
           <a:xfrm>
-            <a:off x="1005840" y="1591056"/>
-            <a:ext cx="10149840" cy="502920"/>
+            <a:off x="960120" y="1572768"/>
+            <a:ext cx="10241280" cy="502920"/>
           </a:xfrm>
           <a:prstGeom prst="rect">
             <a:avLst/>
@@ -8471,17 +9264,17 @@
               <a:buNone/>
             </a:pPr>
             <a:r>
-              <a:rPr lang="en-US" sz="1150" b="1" dirty="0">
-                <a:solidFill>
-                  <a:srgbClr val="212529"/>
-                </a:solidFill>
-                <a:latin typeface="Arial" pitchFamily="34" charset="0"/>
-                <a:ea typeface="Arial" pitchFamily="34" charset="-122"/>
-                <a:cs typeface="Arial" pitchFamily="34" charset="-120"/>
-              </a:rPr>
-              <a:t>Frontend nativo (HTML5 / CSS3 / JS) ⟷ API REST segura (JSON / multipart) ⟷ Backend (Node.js + Express) ⟷ Base de Datos (SQLite3)</a:t>
-            </a:r>
-            <a:endParaRPr lang="en-US" sz="1150" dirty="0"/>
+              <a:rPr lang="en-US" sz="1100" b="1" dirty="0">
+                <a:solidFill>
+                  <a:srgbClr val="0F172A"/>
+                </a:solidFill>
+                <a:latin typeface="Arial" pitchFamily="34" charset="0"/>
+                <a:ea typeface="Arial" pitchFamily="34" charset="-122"/>
+                <a:cs typeface="Arial" pitchFamily="34" charset="-120"/>
+              </a:rPr>
+              <a:t>Frontend nativo (HTML5 / CSS3 / JS)  ⟷  API REST segura (JSON / Multipart)  ⟷  Servidor Node.js + Express  ⟷  Base de Datos SQLite3</a:t>
+            </a:r>
+            <a:endParaRPr lang="en-US" sz="1100" dirty="0"/>
           </a:p>
         </p:txBody>
       </p:sp>
@@ -8518,14 +9311,14 @@
         </p:nvSpPr>
         <p:spPr>
           <a:xfrm>
-            <a:off x="777240" y="2377440"/>
-            <a:ext cx="3273552" cy="73152"/>
+            <a:off x="768096" y="2377440"/>
+            <a:ext cx="3291840" cy="64008"/>
           </a:xfrm>
           <a:prstGeom prst="rect">
             <a:avLst/>
           </a:prstGeom>
           <a:solidFill>
-            <a:srgbClr val="1098AD"/>
+            <a:srgbClr val="0284C7"/>
           </a:solidFill>
           <a:ln/>
         </p:spPr>
@@ -8538,8 +9331,8 @@
         </p:nvSpPr>
         <p:spPr>
           <a:xfrm>
-            <a:off x="1005840" y="2578608"/>
-            <a:ext cx="2816352" cy="347472"/>
+            <a:off x="987552" y="2578608"/>
+            <a:ext cx="2852928" cy="347472"/>
           </a:xfrm>
           <a:prstGeom prst="rect">
             <a:avLst/>
@@ -8555,9 +9348,9 @@
               <a:buNone/>
             </a:pPr>
             <a:r>
-              <a:rPr lang="en-US" sz="1450" b="1" dirty="0">
-                <a:solidFill>
-                  <a:srgbClr val="0B7285"/>
+              <a:rPr lang="en-US" sz="1350" b="1" dirty="0">
+                <a:solidFill>
+                  <a:srgbClr val="0284C7"/>
                 </a:solidFill>
                 <a:latin typeface="Arial" pitchFamily="34" charset="0"/>
                 <a:ea typeface="Arial" pitchFamily="34" charset="-122"/>
@@ -8565,7 +9358,7 @@
               </a:rPr>
               <a:t>👤 Rol Invitado (Público)</a:t>
             </a:r>
-            <a:endParaRPr lang="en-US" sz="1450" dirty="0"/>
+            <a:endParaRPr lang="en-US" sz="1350" dirty="0"/>
           </a:p>
         </p:txBody>
       </p:sp>
@@ -8594,24 +9387,24 @@
               <a:buNone/>
             </a:pPr>
             <a:r>
-              <a:rPr lang="en-US" sz="1150" b="1" dirty="0">
-                <a:solidFill>
-                  <a:srgbClr val="212529"/>
-                </a:solidFill>
-                <a:latin typeface="Arial" pitchFamily="34" charset="0"/>
-                <a:ea typeface="Arial" pitchFamily="34" charset="-122"/>
-                <a:cs typeface="Arial" pitchFamily="34" charset="-120"/>
-              </a:rPr>
-              <a:t>Modo Observador sin Registro:
+              <a:rPr lang="en-US" sz="1100" b="1" dirty="0">
+                <a:solidFill>
+                  <a:srgbClr val="0F172A"/>
+                </a:solidFill>
+                <a:latin typeface="Arial" pitchFamily="34" charset="0"/>
+                <a:ea typeface="Arial" pitchFamily="34" charset="-122"/>
+                <a:cs typeface="Arial" pitchFamily="34" charset="-120"/>
+              </a:rPr>
+              <a:t>Acceso Directo sin Registro:
 </a:t>
             </a:r>
             <a:pPr indent="0" marL="0">
               <a:buNone/>
             </a:pPr>
             <a:r>
-              <a:rPr lang="en-US" sz="1100" dirty="0">
-                <a:solidFill>
-                  <a:srgbClr val="495057"/>
+              <a:rPr lang="en-US" sz="1050" dirty="0">
+                <a:solidFill>
+                  <a:srgbClr val="475569"/>
                 </a:solidFill>
                 <a:latin typeface="Arial" pitchFamily="34" charset="0"/>
                 <a:ea typeface="Arial" pitchFamily="34" charset="-122"/>
@@ -8619,16 +9412,16 @@
               </a:rPr>
               <a:t>• Explora el catálogo de mascotas perdidas y encontradas.</a:t>
             </a:r>
-            <a:endParaRPr lang="en-US" sz="1150" dirty="0"/>
-          </a:p>
-          <a:p>
-            <a:pPr indent="0" marL="0">
-              <a:buNone/>
-            </a:pPr>
-            <a:r>
-              <a:rPr lang="en-US" sz="1100" dirty="0">
-                <a:solidFill>
-                  <a:srgbClr val="495057"/>
+            <a:endParaRPr lang="en-US" sz="1100" dirty="0"/>
+          </a:p>
+          <a:p>
+            <a:pPr indent="0" marL="0">
+              <a:buNone/>
+            </a:pPr>
+            <a:r>
+              <a:rPr lang="en-US" sz="1050" dirty="0">
+                <a:solidFill>
+                  <a:srgbClr val="475569"/>
                 </a:solidFill>
                 <a:latin typeface="Arial" pitchFamily="34" charset="0"/>
                 <a:ea typeface="Arial" pitchFamily="34" charset="-122"/>
@@ -8636,16 +9429,16 @@
               </a:rPr>
               <a:t>• Utiliza el buscador en tiempo real por zona o nombre.</a:t>
             </a:r>
-            <a:endParaRPr lang="en-US" sz="1150" dirty="0"/>
-          </a:p>
-          <a:p>
-            <a:pPr indent="0" marL="0">
-              <a:buNone/>
-            </a:pPr>
-            <a:r>
-              <a:rPr lang="en-US" sz="1100" dirty="0">
-                <a:solidFill>
-                  <a:srgbClr val="495057"/>
+            <a:endParaRPr lang="en-US" sz="1100" dirty="0"/>
+          </a:p>
+          <a:p>
+            <a:pPr indent="0" marL="0">
+              <a:buNone/>
+            </a:pPr>
+            <a:r>
+              <a:rPr lang="en-US" sz="1050" dirty="0">
+                <a:solidFill>
+                  <a:srgbClr val="475569"/>
                 </a:solidFill>
                 <a:latin typeface="Arial" pitchFamily="34" charset="0"/>
                 <a:ea typeface="Arial" pitchFamily="34" charset="-122"/>
@@ -8653,16 +9446,16 @@
               </a:rPr>
               <a:t>• Visualiza teléfonos de contacto directo para avisar a familias.</a:t>
             </a:r>
-            <a:endParaRPr lang="en-US" sz="1150" dirty="0"/>
-          </a:p>
-          <a:p>
-            <a:pPr indent="0" marL="0">
-              <a:buNone/>
-            </a:pPr>
-            <a:r>
-              <a:rPr lang="en-US" sz="1100" dirty="0">
-                <a:solidFill>
-                  <a:srgbClr val="495057"/>
+            <a:endParaRPr lang="en-US" sz="1100" dirty="0"/>
+          </a:p>
+          <a:p>
+            <a:pPr indent="0" marL="0">
+              <a:buNone/>
+            </a:pPr>
+            <a:r>
+              <a:rPr lang="en-US" sz="1050" dirty="0">
+                <a:solidFill>
+                  <a:srgbClr val="475569"/>
                 </a:solidFill>
                 <a:latin typeface="Arial" pitchFamily="34" charset="0"/>
                 <a:ea typeface="Arial" pitchFamily="34" charset="-122"/>
@@ -8670,7 +9463,7 @@
               </a:rPr>
               <a:t>• Lee comentarios y pistas de la comunidad.</a:t>
             </a:r>
-            <a:endParaRPr lang="en-US" sz="1150" dirty="0"/>
+            <a:endParaRPr lang="en-US" sz="1100" dirty="0"/>
           </a:p>
         </p:txBody>
       </p:sp>
@@ -8707,14 +9500,14 @@
         </p:nvSpPr>
         <p:spPr>
           <a:xfrm>
-            <a:off x="4443984" y="2377440"/>
-            <a:ext cx="3273552" cy="73152"/>
+            <a:off x="4434840" y="2377440"/>
+            <a:ext cx="3291840" cy="64008"/>
           </a:xfrm>
           <a:prstGeom prst="rect">
             <a:avLst/>
           </a:prstGeom>
           <a:solidFill>
-            <a:srgbClr val="FF922B"/>
+            <a:srgbClr val="D97706"/>
           </a:solidFill>
           <a:ln/>
         </p:spPr>
@@ -8727,8 +9520,8 @@
         </p:nvSpPr>
         <p:spPr>
           <a:xfrm>
-            <a:off x="4672584" y="2578608"/>
-            <a:ext cx="2816352" cy="347472"/>
+            <a:off x="4654296" y="2578608"/>
+            <a:ext cx="2852928" cy="347472"/>
           </a:xfrm>
           <a:prstGeom prst="rect">
             <a:avLst/>
@@ -8744,9 +9537,9 @@
               <a:buNone/>
             </a:pPr>
             <a:r>
-              <a:rPr lang="en-US" sz="1450" b="1" dirty="0">
-                <a:solidFill>
-                  <a:srgbClr val="0B7285"/>
+              <a:rPr lang="en-US" sz="1350" b="1" dirty="0">
+                <a:solidFill>
+                  <a:srgbClr val="D97706"/>
                 </a:solidFill>
                 <a:latin typeface="Arial" pitchFamily="34" charset="0"/>
                 <a:ea typeface="Arial" pitchFamily="34" charset="-122"/>
@@ -8754,7 +9547,7 @@
               </a:rPr>
               <a:t>🐾 Usuario Registrado</a:t>
             </a:r>
-            <a:endParaRPr lang="en-US" sz="1450" dirty="0"/>
+            <a:endParaRPr lang="en-US" sz="1350" dirty="0"/>
           </a:p>
         </p:txBody>
       </p:sp>
@@ -8783,9 +9576,9 @@
               <a:buNone/>
             </a:pPr>
             <a:r>
-              <a:rPr lang="en-US" sz="1150" b="1" dirty="0">
-                <a:solidFill>
-                  <a:srgbClr val="212529"/>
+              <a:rPr lang="en-US" sz="1100" b="1" dirty="0">
+                <a:solidFill>
+                  <a:srgbClr val="0F172A"/>
                 </a:solidFill>
                 <a:latin typeface="Arial" pitchFamily="34" charset="0"/>
                 <a:ea typeface="Arial" pitchFamily="34" charset="-122"/>
@@ -8798,9 +9591,9 @@
               <a:buNone/>
             </a:pPr>
             <a:r>
-              <a:rPr lang="en-US" sz="1100" dirty="0">
-                <a:solidFill>
-                  <a:srgbClr val="495057"/>
+              <a:rPr lang="en-US" sz="1050" dirty="0">
+                <a:solidFill>
+                  <a:srgbClr val="475569"/>
                 </a:solidFill>
                 <a:latin typeface="Arial" pitchFamily="34" charset="0"/>
                 <a:ea typeface="Arial" pitchFamily="34" charset="-122"/>
@@ -8808,16 +9601,16 @@
               </a:rPr>
               <a:t>• Registro seguro con token JWT y clave encriptada.</a:t>
             </a:r>
-            <a:endParaRPr lang="en-US" sz="1150" dirty="0"/>
-          </a:p>
-          <a:p>
-            <a:pPr indent="0" marL="0">
-              <a:buNone/>
-            </a:pPr>
-            <a:r>
-              <a:rPr lang="en-US" sz="1100" dirty="0">
-                <a:solidFill>
-                  <a:srgbClr val="495057"/>
+            <a:endParaRPr lang="en-US" sz="1100" dirty="0"/>
+          </a:p>
+          <a:p>
+            <a:pPr indent="0" marL="0">
+              <a:buNone/>
+            </a:pPr>
+            <a:r>
+              <a:rPr lang="en-US" sz="1050" dirty="0">
+                <a:solidFill>
+                  <a:srgbClr val="475569"/>
                 </a:solidFill>
                 <a:latin typeface="Arial" pitchFamily="34" charset="0"/>
                 <a:ea typeface="Arial" pitchFamily="34" charset="-122"/>
@@ -8825,16 +9618,16 @@
               </a:rPr>
               <a:t>• Publica reportes con foto real, zona y recompensa.</a:t>
             </a:r>
-            <a:endParaRPr lang="en-US" sz="1150" dirty="0"/>
-          </a:p>
-          <a:p>
-            <a:pPr indent="0" marL="0">
-              <a:buNone/>
-            </a:pPr>
-            <a:r>
-              <a:rPr lang="en-US" sz="1100" dirty="0">
-                <a:solidFill>
-                  <a:srgbClr val="495057"/>
+            <a:endParaRPr lang="en-US" sz="1100" dirty="0"/>
+          </a:p>
+          <a:p>
+            <a:pPr indent="0" marL="0">
+              <a:buNone/>
+            </a:pPr>
+            <a:r>
+              <a:rPr lang="en-US" sz="1050" dirty="0">
+                <a:solidFill>
+                  <a:srgbClr val="475569"/>
                 </a:solidFill>
                 <a:latin typeface="Arial" pitchFamily="34" charset="0"/>
                 <a:ea typeface="Arial" pitchFamily="34" charset="-122"/>
@@ -8842,16 +9635,16 @@
               </a:rPr>
               <a:t>• Edita sus publicaciones y cambia fotos en vivo.</a:t>
             </a:r>
-            <a:endParaRPr lang="en-US" sz="1150" dirty="0"/>
-          </a:p>
-          <a:p>
-            <a:pPr indent="0" marL="0">
-              <a:buNone/>
-            </a:pPr>
-            <a:r>
-              <a:rPr lang="en-US" sz="1100" dirty="0">
-                <a:solidFill>
-                  <a:srgbClr val="495057"/>
+            <a:endParaRPr lang="en-US" sz="1100" dirty="0"/>
+          </a:p>
+          <a:p>
+            <a:pPr indent="0" marL="0">
+              <a:buNone/>
+            </a:pPr>
+            <a:r>
+              <a:rPr lang="en-US" sz="1050" dirty="0">
+                <a:solidFill>
+                  <a:srgbClr val="475569"/>
                 </a:solidFill>
                 <a:latin typeface="Arial" pitchFamily="34" charset="0"/>
                 <a:ea typeface="Arial" pitchFamily="34" charset="-122"/>
@@ -8859,16 +9652,16 @@
               </a:rPr>
               <a:t>• Alterna estado a "Encontrado" (insignia verde).</a:t>
             </a:r>
-            <a:endParaRPr lang="en-US" sz="1150" dirty="0"/>
-          </a:p>
-          <a:p>
-            <a:pPr indent="0" marL="0">
-              <a:buNone/>
-            </a:pPr>
-            <a:r>
-              <a:rPr lang="en-US" sz="1100" dirty="0">
-                <a:solidFill>
-                  <a:srgbClr val="495057"/>
+            <a:endParaRPr lang="en-US" sz="1100" dirty="0"/>
+          </a:p>
+          <a:p>
+            <a:pPr indent="0" marL="0">
+              <a:buNone/>
+            </a:pPr>
+            <a:r>
+              <a:rPr lang="en-US" sz="1050" dirty="0">
+                <a:solidFill>
+                  <a:srgbClr val="475569"/>
                 </a:solidFill>
                 <a:latin typeface="Arial" pitchFamily="34" charset="0"/>
                 <a:ea typeface="Arial" pitchFamily="34" charset="-122"/>
@@ -8876,7 +9669,7 @@
               </a:rPr>
               <a:t>• Comenta y aporta pistas en otros anuncios.</a:t>
             </a:r>
-            <a:endParaRPr lang="en-US" sz="1150" dirty="0"/>
+            <a:endParaRPr lang="en-US" sz="1100" dirty="0"/>
           </a:p>
         </p:txBody>
       </p:sp>
@@ -8913,14 +9706,14 @@
         </p:nvSpPr>
         <p:spPr>
           <a:xfrm>
-            <a:off x="8110728" y="2377440"/>
-            <a:ext cx="3273552" cy="73152"/>
+            <a:off x="8101584" y="2377440"/>
+            <a:ext cx="3291840" cy="64008"/>
           </a:xfrm>
           <a:prstGeom prst="rect">
             <a:avLst/>
           </a:prstGeom>
           <a:solidFill>
-            <a:srgbClr val="E03131"/>
+            <a:srgbClr val="E11D48"/>
           </a:solidFill>
           <a:ln/>
         </p:spPr>
@@ -8933,8 +9726,8 @@
         </p:nvSpPr>
         <p:spPr>
           <a:xfrm>
-            <a:off x="8339328" y="2578608"/>
-            <a:ext cx="2816352" cy="347472"/>
+            <a:off x="8321040" y="2578608"/>
+            <a:ext cx="2852928" cy="347472"/>
           </a:xfrm>
           <a:prstGeom prst="rect">
             <a:avLst/>
@@ -8950,9 +9743,9 @@
               <a:buNone/>
             </a:pPr>
             <a:r>
-              <a:rPr lang="en-US" sz="1450" b="1" dirty="0">
-                <a:solidFill>
-                  <a:srgbClr val="E03131"/>
+              <a:rPr lang="en-US" sz="1350" b="1" dirty="0">
+                <a:solidFill>
+                  <a:srgbClr val="E11D48"/>
                 </a:solidFill>
                 <a:latin typeface="Arial" pitchFamily="34" charset="0"/>
                 <a:ea typeface="Arial" pitchFamily="34" charset="-122"/>
@@ -8960,7 +9753,7 @@
               </a:rPr>
               <a:t>⚙️ Administrador</a:t>
             </a:r>
-            <a:endParaRPr lang="en-US" sz="1450" dirty="0"/>
+            <a:endParaRPr lang="en-US" sz="1350" dirty="0"/>
           </a:p>
         </p:txBody>
       </p:sp>
@@ -8989,9 +9782,9 @@
               <a:buNone/>
             </a:pPr>
             <a:r>
-              <a:rPr lang="en-US" sz="1150" b="1" dirty="0">
-                <a:solidFill>
-                  <a:srgbClr val="212529"/>
+              <a:rPr lang="en-US" sz="1100" b="1" dirty="0">
+                <a:solidFill>
+                  <a:srgbClr val="0F172A"/>
                 </a:solidFill>
                 <a:latin typeface="Arial" pitchFamily="34" charset="0"/>
                 <a:ea typeface="Arial" pitchFamily="34" charset="-122"/>
@@ -9004,9 +9797,9 @@
               <a:buNone/>
             </a:pPr>
             <a:r>
-              <a:rPr lang="en-US" sz="1100" dirty="0">
-                <a:solidFill>
-                  <a:srgbClr val="495057"/>
+              <a:rPr lang="en-US" sz="1050" dirty="0">
+                <a:solidFill>
+                  <a:srgbClr val="475569"/>
                 </a:solidFill>
                 <a:latin typeface="Arial" pitchFamily="34" charset="0"/>
                 <a:ea typeface="Arial" pitchFamily="34" charset="-122"/>
@@ -9014,16 +9807,16 @@
               </a:rPr>
               <a:t>• Panel de administración protegido con rol admin.</a:t>
             </a:r>
-            <a:endParaRPr lang="en-US" sz="1150" dirty="0"/>
-          </a:p>
-          <a:p>
-            <a:pPr indent="0" marL="0">
-              <a:buNone/>
-            </a:pPr>
-            <a:r>
-              <a:rPr lang="en-US" sz="1100" dirty="0">
-                <a:solidFill>
-                  <a:srgbClr val="495057"/>
+            <a:endParaRPr lang="en-US" sz="1100" dirty="0"/>
+          </a:p>
+          <a:p>
+            <a:pPr indent="0" marL="0">
+              <a:buNone/>
+            </a:pPr>
+            <a:r>
+              <a:rPr lang="en-US" sz="1050" dirty="0">
+                <a:solidFill>
+                  <a:srgbClr val="475569"/>
                 </a:solidFill>
                 <a:latin typeface="Arial" pitchFamily="34" charset="0"/>
                 <a:ea typeface="Arial" pitchFamily="34" charset="-122"/>
@@ -9031,16 +9824,16 @@
               </a:rPr>
               <a:t>• Gestión completa (CRUD) de usuarios del sistema.</a:t>
             </a:r>
-            <a:endParaRPr lang="en-US" sz="1150" dirty="0"/>
-          </a:p>
-          <a:p>
-            <a:pPr indent="0" marL="0">
-              <a:buNone/>
-            </a:pPr>
-            <a:r>
-              <a:rPr lang="en-US" sz="1100" dirty="0">
-                <a:solidFill>
-                  <a:srgbClr val="495057"/>
+            <a:endParaRPr lang="en-US" sz="1100" dirty="0"/>
+          </a:p>
+          <a:p>
+            <a:pPr indent="0" marL="0">
+              <a:buNone/>
+            </a:pPr>
+            <a:r>
+              <a:rPr lang="en-US" sz="1050" dirty="0">
+                <a:solidFill>
+                  <a:srgbClr val="475569"/>
                 </a:solidFill>
                 <a:latin typeface="Arial" pitchFamily="34" charset="0"/>
                 <a:ea typeface="Arial" pitchFamily="34" charset="-122"/>
@@ -9048,16 +9841,16 @@
               </a:rPr>
               <a:t>• Modifica cualquier publicación con errores de datos.</a:t>
             </a:r>
-            <a:endParaRPr lang="en-US" sz="1150" dirty="0"/>
-          </a:p>
-          <a:p>
-            <a:pPr indent="0" marL="0">
-              <a:buNone/>
-            </a:pPr>
-            <a:r>
-              <a:rPr lang="en-US" sz="1100" dirty="0">
-                <a:solidFill>
-                  <a:srgbClr val="495057"/>
+            <a:endParaRPr lang="en-US" sz="1100" dirty="0"/>
+          </a:p>
+          <a:p>
+            <a:pPr indent="0" marL="0">
+              <a:buNone/>
+            </a:pPr>
+            <a:r>
+              <a:rPr lang="en-US" sz="1050" dirty="0">
+                <a:solidFill>
+                  <a:srgbClr val="475569"/>
                 </a:solidFill>
                 <a:latin typeface="Arial" pitchFamily="34" charset="0"/>
                 <a:ea typeface="Arial" pitchFamily="34" charset="-122"/>
@@ -9065,7 +9858,7 @@
               </a:rPr>
               <a:t>• Elimina anuncios falsos o inapropiados para proteger la veracidad del sitio.</a:t>
             </a:r>
-            <a:endParaRPr lang="en-US" sz="1150" dirty="0"/>
+            <a:endParaRPr lang="en-US" sz="1100" dirty="0"/>
           </a:p>
         </p:txBody>
       </p:sp>
@@ -9083,7 +9876,7 @@
     <p:bg>
       <p:bgPr>
         <a:solidFill>
-          <a:srgbClr val="F4F6F8"/>
+          <a:srgbClr val="F8FAFC"/>
         </a:solidFill>
       </p:bgPr>
     </p:bg>
@@ -9135,13 +9928,13 @@
         <p:spPr>
           <a:xfrm>
             <a:off x="731520" y="256032"/>
-            <a:ext cx="91440" cy="530352"/>
+            <a:ext cx="82296" cy="530352"/>
           </a:xfrm>
           <a:prstGeom prst="rect">
             <a:avLst/>
           </a:prstGeom>
           <a:solidFill>
-            <a:srgbClr val="1098AD"/>
+            <a:srgbClr val="0284C7"/>
           </a:solidFill>
           <a:ln/>
         </p:spPr>
@@ -9171,9 +9964,9 @@
               <a:buNone/>
             </a:pPr>
             <a:r>
-              <a:rPr lang="en-US" sz="1050" b="1" dirty="0">
-                <a:solidFill>
-                  <a:srgbClr val="FF922B"/>
+              <a:rPr lang="en-US" sz="1000" b="1" dirty="0">
+                <a:solidFill>
+                  <a:srgbClr val="D97706"/>
                 </a:solidFill>
                 <a:latin typeface="Arial" pitchFamily="34" charset="0"/>
                 <a:ea typeface="Arial" pitchFamily="34" charset="-122"/>
@@ -9181,7 +9974,7 @@
               </a:rPr>
               <a:t>DEMOSTRACIÓN</a:t>
             </a:r>
-            <a:endParaRPr lang="en-US" sz="1050" dirty="0"/>
+            <a:endParaRPr lang="en-US" sz="1000" dirty="0"/>
           </a:p>
         </p:txBody>
       </p:sp>
@@ -9210,9 +10003,9 @@
               <a:buNone/>
             </a:pPr>
             <a:r>
-              <a:rPr lang="en-US" sz="2200" b="1" dirty="0">
-                <a:solidFill>
-                  <a:srgbClr val="212529"/>
+              <a:rPr lang="en-US" sz="2100" b="1" dirty="0">
+                <a:solidFill>
+                  <a:srgbClr val="0F172A"/>
                 </a:solidFill>
                 <a:latin typeface="Arial" pitchFamily="34" charset="0"/>
                 <a:ea typeface="Arial" pitchFamily="34" charset="-122"/>
@@ -9220,7 +10013,7 @@
               </a:rPr>
               <a:t>3. ¿Cómo Funciona? - Innovaciones Técnicas</a:t>
             </a:r>
-            <a:endParaRPr lang="en-US" sz="2200" dirty="0"/>
+            <a:endParaRPr lang="en-US" sz="2100" dirty="0"/>
           </a:p>
         </p:txBody>
       </p:sp>
@@ -9232,7 +10025,7 @@
         </p:nvSpPr>
         <p:spPr>
           <a:xfrm>
-            <a:off x="731520" y="1325880"/>
+            <a:off x="731520" y="1280160"/>
             <a:ext cx="5212080" cy="2423160"/>
           </a:xfrm>
           <a:prstGeom prst="rect">
@@ -9257,14 +10050,14 @@
         </p:nvSpPr>
         <p:spPr>
           <a:xfrm>
-            <a:off x="777240" y="1325880"/>
-            <a:ext cx="5120640" cy="73152"/>
+            <a:off x="768096" y="1280160"/>
+            <a:ext cx="5138928" cy="64008"/>
           </a:xfrm>
           <a:prstGeom prst="rect">
             <a:avLst/>
           </a:prstGeom>
           <a:solidFill>
-            <a:srgbClr val="1098AD"/>
+            <a:srgbClr val="0284C7"/>
           </a:solidFill>
           <a:ln/>
         </p:spPr>
@@ -9277,8 +10070,8 @@
         </p:nvSpPr>
         <p:spPr>
           <a:xfrm>
-            <a:off x="1005840" y="1527048"/>
-            <a:ext cx="4663440" cy="347472"/>
+            <a:off x="987552" y="1481328"/>
+            <a:ext cx="4700016" cy="347472"/>
           </a:xfrm>
           <a:prstGeom prst="rect">
             <a:avLst/>
@@ -9294,9 +10087,9 @@
               <a:buNone/>
             </a:pPr>
             <a:r>
-              <a:rPr lang="en-US" sz="1450" b="1" dirty="0">
-                <a:solidFill>
-                  <a:srgbClr val="0B7285"/>
+              <a:rPr lang="en-US" sz="1350" b="1" dirty="0">
+                <a:solidFill>
+                  <a:srgbClr val="0284C7"/>
                 </a:solidFill>
                 <a:latin typeface="Arial" pitchFamily="34" charset="0"/>
                 <a:ea typeface="Arial" pitchFamily="34" charset="-122"/>
@@ -9304,7 +10097,7 @@
               </a:rPr>
               <a:t>🔍 Buscador Inteligente con Debounce (300 ms)</a:t>
             </a:r>
-            <a:endParaRPr lang="en-US" sz="1450" dirty="0"/>
+            <a:endParaRPr lang="en-US" sz="1350" dirty="0"/>
           </a:p>
         </p:txBody>
       </p:sp>
@@ -9316,8 +10109,8 @@
         </p:nvSpPr>
         <p:spPr>
           <a:xfrm>
-            <a:off x="1005840" y="1965960"/>
-            <a:ext cx="4663440" cy="1645920"/>
+            <a:off x="960120" y="1920240"/>
+            <a:ext cx="4754880" cy="1645920"/>
           </a:xfrm>
           <a:prstGeom prst="rect">
             <a:avLst/>
@@ -9333,9 +10126,9 @@
               <a:buNone/>
             </a:pPr>
             <a:r>
-              <a:rPr lang="en-US" sz="1100" b="1" dirty="0">
-                <a:solidFill>
-                  <a:srgbClr val="212529"/>
+              <a:rPr lang="en-US" sz="1050" b="1" dirty="0">
+                <a:solidFill>
+                  <a:srgbClr val="0F172A"/>
                 </a:solidFill>
                 <a:latin typeface="Arial" pitchFamily="34" charset="0"/>
                 <a:ea typeface="Arial" pitchFamily="34" charset="-122"/>
@@ -9347,9 +10140,9 @@
               <a:buNone/>
             </a:pPr>
             <a:r>
-              <a:rPr lang="en-US" sz="1100" dirty="0">
-                <a:solidFill>
-                  <a:srgbClr val="495057"/>
+              <a:rPr lang="en-US" sz="1050" dirty="0">
+                <a:solidFill>
+                  <a:srgbClr val="475569"/>
                 </a:solidFill>
                 <a:latin typeface="Arial" pitchFamily="34" charset="0"/>
                 <a:ea typeface="Arial" pitchFamily="34" charset="-122"/>
@@ -9362,9 +10155,9 @@
               <a:buNone/>
             </a:pPr>
             <a:r>
-              <a:rPr lang="en-US" sz="1100" b="1" dirty="0">
-                <a:solidFill>
-                  <a:srgbClr val="0B7285"/>
+              <a:rPr lang="en-US" sz="1050" b="1" dirty="0">
+                <a:solidFill>
+                  <a:srgbClr val="0284C7"/>
                 </a:solidFill>
                 <a:latin typeface="Arial" pitchFamily="34" charset="0"/>
                 <a:ea typeface="Arial" pitchFamily="34" charset="-122"/>
@@ -9376,9 +10169,9 @@
               <a:buNone/>
             </a:pPr>
             <a:r>
-              <a:rPr lang="en-US" sz="1100" dirty="0">
-                <a:solidFill>
-                  <a:srgbClr val="495057"/>
+              <a:rPr lang="en-US" sz="1050" dirty="0">
+                <a:solidFill>
+                  <a:srgbClr val="475569"/>
                 </a:solidFill>
                 <a:latin typeface="Arial" pitchFamily="34" charset="0"/>
                 <a:ea typeface="Arial" pitchFamily="34" charset="-122"/>
@@ -9386,7 +10179,7 @@
               </a:rPr>
               <a:t>Espera 300ms tras teclear antes de consultar a la API, reduciendo la carga del servidor en un 70%.</a:t>
             </a:r>
-            <a:endParaRPr lang="en-US" sz="1100" dirty="0"/>
+            <a:endParaRPr lang="en-US" sz="1050" dirty="0"/>
           </a:p>
         </p:txBody>
       </p:sp>
@@ -9398,7 +10191,7 @@
         </p:nvSpPr>
         <p:spPr>
           <a:xfrm>
-            <a:off x="6217920" y="1325880"/>
+            <a:off x="6217920" y="1280160"/>
             <a:ext cx="5212080" cy="2423160"/>
           </a:xfrm>
           <a:prstGeom prst="rect">
@@ -9423,14 +10216,14 @@
         </p:nvSpPr>
         <p:spPr>
           <a:xfrm>
-            <a:off x="6263640" y="1325880"/>
-            <a:ext cx="5120640" cy="73152"/>
+            <a:off x="6254496" y="1280160"/>
+            <a:ext cx="5138928" cy="64008"/>
           </a:xfrm>
           <a:prstGeom prst="rect">
             <a:avLst/>
           </a:prstGeom>
           <a:solidFill>
-            <a:srgbClr val="FF922B"/>
+            <a:srgbClr val="D97706"/>
           </a:solidFill>
           <a:ln/>
         </p:spPr>
@@ -9443,8 +10236,8 @@
         </p:nvSpPr>
         <p:spPr>
           <a:xfrm>
-            <a:off x="6492240" y="1527048"/>
-            <a:ext cx="4663440" cy="347472"/>
+            <a:off x="6473952" y="1481328"/>
+            <a:ext cx="4700016" cy="347472"/>
           </a:xfrm>
           <a:prstGeom prst="rect">
             <a:avLst/>
@@ -9460,9 +10253,9 @@
               <a:buNone/>
             </a:pPr>
             <a:r>
-              <a:rPr lang="en-US" sz="1450" b="1" dirty="0">
-                <a:solidFill>
-                  <a:srgbClr val="0B7285"/>
+              <a:rPr lang="en-US" sz="1350" b="1" dirty="0">
+                <a:solidFill>
+                  <a:srgbClr val="D97706"/>
                 </a:solidFill>
                 <a:latin typeface="Arial" pitchFamily="34" charset="0"/>
                 <a:ea typeface="Arial" pitchFamily="34" charset="-122"/>
@@ -9470,7 +10263,7 @@
               </a:rPr>
               <a:t>📸 Edición Activa y Limpieza en Servidor</a:t>
             </a:r>
-            <a:endParaRPr lang="en-US" sz="1450" dirty="0"/>
+            <a:endParaRPr lang="en-US" sz="1350" dirty="0"/>
           </a:p>
         </p:txBody>
       </p:sp>
@@ -9482,8 +10275,8 @@
         </p:nvSpPr>
         <p:spPr>
           <a:xfrm>
-            <a:off x="6492240" y="1965960"/>
-            <a:ext cx="4663440" cy="1645920"/>
+            <a:off x="6446520" y="1920240"/>
+            <a:ext cx="4754880" cy="1645920"/>
           </a:xfrm>
           <a:prstGeom prst="rect">
             <a:avLst/>
@@ -9499,9 +10292,9 @@
               <a:buNone/>
             </a:pPr>
             <a:r>
-              <a:rPr lang="en-US" sz="1100" b="1" dirty="0">
-                <a:solidFill>
-                  <a:srgbClr val="212529"/>
+              <a:rPr lang="en-US" sz="1050" b="1" dirty="0">
+                <a:solidFill>
+                  <a:srgbClr val="0F172A"/>
                 </a:solidFill>
                 <a:latin typeface="Arial" pitchFamily="34" charset="0"/>
                 <a:ea typeface="Arial" pitchFamily="34" charset="-122"/>
@@ -9513,9 +10306,9 @@
               <a:buNone/>
             </a:pPr>
             <a:r>
-              <a:rPr lang="en-US" sz="1100" dirty="0">
-                <a:solidFill>
-                  <a:srgbClr val="495057"/>
+              <a:rPr lang="en-US" sz="1050" dirty="0">
+                <a:solidFill>
+                  <a:srgbClr val="475569"/>
                 </a:solidFill>
                 <a:latin typeface="Arial" pitchFamily="34" charset="0"/>
                 <a:ea typeface="Arial" pitchFamily="34" charset="-122"/>
@@ -9528,9 +10321,9 @@
               <a:buNone/>
             </a:pPr>
             <a:r>
-              <a:rPr lang="en-US" sz="1100" b="1" dirty="0">
-                <a:solidFill>
-                  <a:srgbClr val="FF922B"/>
+              <a:rPr lang="en-US" sz="1050" b="1" dirty="0">
+                <a:solidFill>
+                  <a:srgbClr val="D97706"/>
                 </a:solidFill>
                 <a:latin typeface="Arial" pitchFamily="34" charset="0"/>
                 <a:ea typeface="Arial" pitchFamily="34" charset="-122"/>
@@ -9542,17 +10335,17 @@
               <a:buNone/>
             </a:pPr>
             <a:r>
-              <a:rPr lang="en-US" sz="1100" dirty="0">
-                <a:solidFill>
-                  <a:srgbClr val="495057"/>
-                </a:solidFill>
-                <a:latin typeface="Arial" pitchFamily="34" charset="0"/>
-                <a:ea typeface="Arial" pitchFamily="34" charset="-122"/>
-                <a:cs typeface="Arial" pitchFamily="34" charset="-120"/>
-              </a:rPr>
-              <a:t>Al cambiar de foto o borrar un anuncio, se elimina físicamente la imagen anterior para no llenar el disco.</a:t>
-            </a:r>
-            <a:endParaRPr lang="en-US" sz="1100" dirty="0"/>
+              <a:rPr lang="en-US" sz="1050" dirty="0">
+                <a:solidFill>
+                  <a:srgbClr val="475569"/>
+                </a:solidFill>
+                <a:latin typeface="Arial" pitchFamily="34" charset="0"/>
+                <a:ea typeface="Arial" pitchFamily="34" charset="-122"/>
+                <a:cs typeface="Arial" pitchFamily="34" charset="-120"/>
+              </a:rPr>
+              <a:t>Al cambiar de foto o borrar un anuncio, se elimina físicamente la imagen anterior para no saturar el disco.</a:t>
+            </a:r>
+            <a:endParaRPr lang="en-US" sz="1050" dirty="0"/>
           </a:p>
         </p:txBody>
       </p:sp>
@@ -9589,14 +10382,14 @@
         </p:nvSpPr>
         <p:spPr>
           <a:xfrm>
-            <a:off x="777240" y="3886200"/>
-            <a:ext cx="5120640" cy="73152"/>
+            <a:off x="768096" y="3886200"/>
+            <a:ext cx="5138928" cy="64008"/>
           </a:xfrm>
           <a:prstGeom prst="rect">
             <a:avLst/>
           </a:prstGeom>
           <a:solidFill>
-            <a:srgbClr val="2B8A3E"/>
+            <a:srgbClr val="059669"/>
           </a:solidFill>
           <a:ln/>
         </p:spPr>
@@ -9609,8 +10402,8 @@
         </p:nvSpPr>
         <p:spPr>
           <a:xfrm>
-            <a:off x="1005840" y="4087368"/>
-            <a:ext cx="4663440" cy="347472"/>
+            <a:off x="987552" y="4087368"/>
+            <a:ext cx="4700016" cy="347472"/>
           </a:xfrm>
           <a:prstGeom prst="rect">
             <a:avLst/>
@@ -9626,9 +10419,9 @@
               <a:buNone/>
             </a:pPr>
             <a:r>
-              <a:rPr lang="en-US" sz="1450" b="1" dirty="0">
-                <a:solidFill>
-                  <a:srgbClr val="2B8A3E"/>
+              <a:rPr lang="en-US" sz="1350" b="1" dirty="0">
+                <a:solidFill>
+                  <a:srgbClr val="059669"/>
                 </a:solidFill>
                 <a:latin typeface="Arial" pitchFamily="34" charset="0"/>
                 <a:ea typeface="Arial" pitchFamily="34" charset="-122"/>
@@ -9636,7 +10429,7 @@
               </a:rPr>
               <a:t>🔒 Seguridad Criptográfica (Bcrypt + JWT)</a:t>
             </a:r>
-            <a:endParaRPr lang="en-US" sz="1450" dirty="0"/>
+            <a:endParaRPr lang="en-US" sz="1350" dirty="0"/>
           </a:p>
         </p:txBody>
       </p:sp>
@@ -9648,8 +10441,8 @@
         </p:nvSpPr>
         <p:spPr>
           <a:xfrm>
-            <a:off x="1005840" y="4526280"/>
-            <a:ext cx="4663440" cy="1645920"/>
+            <a:off x="960120" y="4526280"/>
+            <a:ext cx="4754880" cy="1645920"/>
           </a:xfrm>
           <a:prstGeom prst="rect">
             <a:avLst/>
@@ -9665,9 +10458,9 @@
               <a:buNone/>
             </a:pPr>
             <a:r>
-              <a:rPr lang="en-US" sz="1100" b="1" dirty="0">
-                <a:solidFill>
-                  <a:srgbClr val="212529"/>
+              <a:rPr lang="en-US" sz="1050" b="1" dirty="0">
+                <a:solidFill>
+                  <a:srgbClr val="0F172A"/>
                 </a:solidFill>
                 <a:latin typeface="Arial" pitchFamily="34" charset="0"/>
                 <a:ea typeface="Arial" pitchFamily="34" charset="-122"/>
@@ -9679,9 +10472,9 @@
               <a:buNone/>
             </a:pPr>
             <a:r>
-              <a:rPr lang="en-US" sz="1100" dirty="0">
-                <a:solidFill>
-                  <a:srgbClr val="495057"/>
+              <a:rPr lang="en-US" sz="1050" dirty="0">
+                <a:solidFill>
+                  <a:srgbClr val="475569"/>
                 </a:solidFill>
                 <a:latin typeface="Arial" pitchFamily="34" charset="0"/>
                 <a:ea typeface="Arial" pitchFamily="34" charset="-122"/>
@@ -9694,9 +10487,9 @@
               <a:buNone/>
             </a:pPr>
             <a:r>
-              <a:rPr lang="en-US" sz="1100" b="1" dirty="0">
-                <a:solidFill>
-                  <a:srgbClr val="2B8A3E"/>
+              <a:rPr lang="en-US" sz="1050" b="1" dirty="0">
+                <a:solidFill>
+                  <a:srgbClr val="059669"/>
                 </a:solidFill>
                 <a:latin typeface="Arial" pitchFamily="34" charset="0"/>
                 <a:ea typeface="Arial" pitchFamily="34" charset="-122"/>
@@ -9708,17 +10501,17 @@
               <a:buNone/>
             </a:pPr>
             <a:r>
-              <a:rPr lang="en-US" sz="1100" dirty="0">
-                <a:solidFill>
-                  <a:srgbClr val="495057"/>
-                </a:solidFill>
-                <a:latin typeface="Arial" pitchFamily="34" charset="0"/>
-                <a:ea typeface="Arial" pitchFamily="34" charset="-122"/>
-                <a:cs typeface="Arial" pitchFamily="34" charset="-120"/>
-              </a:rPr>
-              <a:t>Sesiones sin estado firmadas digitalmente con 24 horas de vigencia y control de roles.</a:t>
-            </a:r>
-            <a:endParaRPr lang="en-US" sz="1100" dirty="0"/>
+              <a:rPr lang="en-US" sz="1050" dirty="0">
+                <a:solidFill>
+                  <a:srgbClr val="475569"/>
+                </a:solidFill>
+                <a:latin typeface="Arial" pitchFamily="34" charset="0"/>
+                <a:ea typeface="Arial" pitchFamily="34" charset="-122"/>
+                <a:cs typeface="Arial" pitchFamily="34" charset="-120"/>
+              </a:rPr>
+              <a:t>Sesiones sin estado firmadas digitalmente con 24 horas de vigencia y control estricto de roles.</a:t>
+            </a:r>
+            <a:endParaRPr lang="en-US" sz="1050" dirty="0"/>
           </a:p>
         </p:txBody>
       </p:sp>
@@ -9755,14 +10548,14 @@
         </p:nvSpPr>
         <p:spPr>
           <a:xfrm>
-            <a:off x="6263640" y="3886200"/>
-            <a:ext cx="5120640" cy="73152"/>
+            <a:off x="6254496" y="3886200"/>
+            <a:ext cx="5138928" cy="64008"/>
           </a:xfrm>
           <a:prstGeom prst="rect">
             <a:avLst/>
           </a:prstGeom>
           <a:solidFill>
-            <a:srgbClr val="0B7285"/>
+            <a:srgbClr val="0284C7"/>
           </a:solidFill>
           <a:ln/>
         </p:spPr>
@@ -9775,8 +10568,8 @@
         </p:nvSpPr>
         <p:spPr>
           <a:xfrm>
-            <a:off x="6492240" y="4087368"/>
-            <a:ext cx="4663440" cy="347472"/>
+            <a:off x="6473952" y="4087368"/>
+            <a:ext cx="4700016" cy="347472"/>
           </a:xfrm>
           <a:prstGeom prst="rect">
             <a:avLst/>
@@ -9792,9 +10585,9 @@
               <a:buNone/>
             </a:pPr>
             <a:r>
-              <a:rPr lang="en-US" sz="1450" b="1" dirty="0">
-                <a:solidFill>
-                  <a:srgbClr val="0B7285"/>
+              <a:rPr lang="en-US" sz="1350" b="1" dirty="0">
+                <a:solidFill>
+                  <a:srgbClr val="0284C7"/>
                 </a:solidFill>
                 <a:latin typeface="Arial" pitchFamily="34" charset="0"/>
                 <a:ea typeface="Arial" pitchFamily="34" charset="-122"/>
@@ -9802,7 +10595,7 @@
               </a:rPr>
               <a:t>🗄️ Base de Datos Relacional (SQLite3)</a:t>
             </a:r>
-            <a:endParaRPr lang="en-US" sz="1450" dirty="0"/>
+            <a:endParaRPr lang="en-US" sz="1350" dirty="0"/>
           </a:p>
         </p:txBody>
       </p:sp>
@@ -9814,8 +10607,8 @@
         </p:nvSpPr>
         <p:spPr>
           <a:xfrm>
-            <a:off x="6492240" y="4526280"/>
-            <a:ext cx="4663440" cy="1645920"/>
+            <a:off x="6446520" y="4526280"/>
+            <a:ext cx="4754880" cy="1645920"/>
           </a:xfrm>
           <a:prstGeom prst="rect">
             <a:avLst/>
@@ -9831,9 +10624,9 @@
               <a:buNone/>
             </a:pPr>
             <a:r>
-              <a:rPr lang="en-US" sz="1100" b="1" dirty="0">
-                <a:solidFill>
-                  <a:srgbClr val="212529"/>
+              <a:rPr lang="en-US" sz="1050" b="1" dirty="0">
+                <a:solidFill>
+                  <a:srgbClr val="0F172A"/>
                 </a:solidFill>
                 <a:latin typeface="Arial" pitchFamily="34" charset="0"/>
                 <a:ea typeface="Arial" pitchFamily="34" charset="-122"/>
@@ -9845,9 +10638,9 @@
               <a:buNone/>
             </a:pPr>
             <a:r>
-              <a:rPr lang="en-US" sz="1100" dirty="0">
-                <a:solidFill>
-                  <a:srgbClr val="495057"/>
+              <a:rPr lang="en-US" sz="1050" dirty="0">
+                <a:solidFill>
+                  <a:srgbClr val="475569"/>
                 </a:solidFill>
                 <a:latin typeface="Arial" pitchFamily="34" charset="0"/>
                 <a:ea typeface="Arial" pitchFamily="34" charset="-122"/>
@@ -9860,9 +10653,9 @@
               <a:buNone/>
             </a:pPr>
             <a:r>
-              <a:rPr lang="en-US" sz="1100" b="1" dirty="0">
-                <a:solidFill>
-                  <a:srgbClr val="0B7285"/>
+              <a:rPr lang="en-US" sz="1050" b="1" dirty="0">
+                <a:solidFill>
+                  <a:srgbClr val="0284C7"/>
                 </a:solidFill>
                 <a:latin typeface="Arial" pitchFamily="34" charset="0"/>
                 <a:ea typeface="Arial" pitchFamily="34" charset="-122"/>
@@ -9874,9 +10667,9 @@
               <a:buNone/>
             </a:pPr>
             <a:r>
-              <a:rPr lang="en-US" sz="1100" dirty="0">
-                <a:solidFill>
-                  <a:srgbClr val="495057"/>
+              <a:rPr lang="en-US" sz="1050" dirty="0">
+                <a:solidFill>
+                  <a:srgbClr val="475569"/>
                 </a:solidFill>
                 <a:latin typeface="Arial" pitchFamily="34" charset="0"/>
                 <a:ea typeface="Arial" pitchFamily="34" charset="-122"/>
@@ -9884,7 +10677,7 @@
               </a:rPr>
               <a:t>Prepared Statements con marcadores (?) que bloquean el 100% de ataques SQL Injection.</a:t>
             </a:r>
-            <a:endParaRPr lang="en-US" sz="1100" dirty="0"/>
+            <a:endParaRPr lang="en-US" sz="1050" dirty="0"/>
           </a:p>
         </p:txBody>
       </p:sp>
@@ -9902,7 +10695,7 @@
     <p:bg>
       <p:bgPr>
         <a:solidFill>
-          <a:srgbClr val="F4F6F8"/>
+          <a:srgbClr val="F8FAFC"/>
         </a:solidFill>
       </p:bgPr>
     </p:bg>
@@ -9954,13 +10747,13 @@
         <p:spPr>
           <a:xfrm>
             <a:off x="731520" y="256032"/>
-            <a:ext cx="91440" cy="530352"/>
+            <a:ext cx="82296" cy="530352"/>
           </a:xfrm>
           <a:prstGeom prst="rect">
             <a:avLst/>
           </a:prstGeom>
           <a:solidFill>
-            <a:srgbClr val="1098AD"/>
+            <a:srgbClr val="0284C7"/>
           </a:solidFill>
           <a:ln/>
         </p:spPr>
@@ -9990,9 +10783,9 @@
               <a:buNone/>
             </a:pPr>
             <a:r>
-              <a:rPr lang="en-US" sz="1050" b="1" dirty="0">
-                <a:solidFill>
-                  <a:srgbClr val="FF922B"/>
+              <a:rPr lang="en-US" sz="1000" b="1" dirty="0">
+                <a:solidFill>
+                  <a:srgbClr val="D97706"/>
                 </a:solidFill>
                 <a:latin typeface="Arial" pitchFamily="34" charset="0"/>
                 <a:ea typeface="Arial" pitchFamily="34" charset="-122"/>
@@ -10000,7 +10793,7 @@
               </a:rPr>
               <a:t>CIERRE</a:t>
             </a:r>
-            <a:endParaRPr lang="en-US" sz="1050" dirty="0"/>
+            <a:endParaRPr lang="en-US" sz="1000" dirty="0"/>
           </a:p>
         </p:txBody>
       </p:sp>
@@ -10029,9 +10822,9 @@
               <a:buNone/>
             </a:pPr>
             <a:r>
-              <a:rPr lang="en-US" sz="2200" b="1" dirty="0">
-                <a:solidFill>
-                  <a:srgbClr val="212529"/>
+              <a:rPr lang="en-US" sz="2100" b="1" dirty="0">
+                <a:solidFill>
+                  <a:srgbClr val="0F172A"/>
                 </a:solidFill>
                 <a:latin typeface="Arial" pitchFamily="34" charset="0"/>
                 <a:ea typeface="Arial" pitchFamily="34" charset="-122"/>
@@ -10039,7 +10832,7 @@
               </a:rPr>
               <a:t>Conclusiones y Proyección Futura</a:t>
             </a:r>
-            <a:endParaRPr lang="en-US" sz="2200" dirty="0"/>
+            <a:endParaRPr lang="en-US" sz="2100" dirty="0"/>
           </a:p>
         </p:txBody>
       </p:sp>
@@ -10051,8 +10844,8 @@
         </p:nvSpPr>
         <p:spPr>
           <a:xfrm>
-            <a:off x="731520" y="1325880"/>
-            <a:ext cx="5212080" cy="4983480"/>
+            <a:off x="731520" y="1280160"/>
+            <a:ext cx="5120640" cy="5029200"/>
           </a:xfrm>
           <a:prstGeom prst="rect">
             <a:avLst/>
@@ -10076,14 +10869,14 @@
         </p:nvSpPr>
         <p:spPr>
           <a:xfrm>
-            <a:off x="777240" y="1325880"/>
-            <a:ext cx="5120640" cy="73152"/>
+            <a:off x="768096" y="1280160"/>
+            <a:ext cx="5047488" cy="64008"/>
           </a:xfrm>
           <a:prstGeom prst="rect">
             <a:avLst/>
           </a:prstGeom>
           <a:solidFill>
-            <a:srgbClr val="0B7285"/>
+            <a:srgbClr val="0284C7"/>
           </a:solidFill>
           <a:ln/>
         </p:spPr>
@@ -10096,8 +10889,8 @@
         </p:nvSpPr>
         <p:spPr>
           <a:xfrm>
-            <a:off x="1005840" y="1527048"/>
-            <a:ext cx="4663440" cy="347472"/>
+            <a:off x="987552" y="1481328"/>
+            <a:ext cx="4608576" cy="347472"/>
           </a:xfrm>
           <a:prstGeom prst="rect">
             <a:avLst/>
@@ -10113,9 +10906,9 @@
               <a:buNone/>
             </a:pPr>
             <a:r>
-              <a:rPr lang="en-US" sz="1450" b="1" dirty="0">
-                <a:solidFill>
-                  <a:srgbClr val="0B7285"/>
+              <a:rPr lang="en-US" sz="1350" b="1" dirty="0">
+                <a:solidFill>
+                  <a:srgbClr val="0284C7"/>
                 </a:solidFill>
                 <a:latin typeface="Arial" pitchFamily="34" charset="0"/>
                 <a:ea typeface="Arial" pitchFamily="34" charset="-122"/>
@@ -10123,7 +10916,7 @@
               </a:rPr>
               <a:t>Conclusiones del Proyecto</a:t>
             </a:r>
-            <a:endParaRPr lang="en-US" sz="1450" dirty="0"/>
+            <a:endParaRPr lang="en-US" sz="1350" dirty="0"/>
           </a:p>
         </p:txBody>
       </p:sp>
@@ -10135,8 +10928,8 @@
         </p:nvSpPr>
         <p:spPr>
           <a:xfrm>
-            <a:off x="1005840" y="1965960"/>
-            <a:ext cx="4663440" cy="4023360"/>
+            <a:off x="960120" y="1874520"/>
+            <a:ext cx="4663440" cy="4114800"/>
           </a:xfrm>
           <a:prstGeom prst="rect">
             <a:avLst/>
@@ -10152,9 +10945,9 @@
               <a:buNone/>
             </a:pPr>
             <a:r>
-              <a:rPr lang="en-US" sz="1250" b="1" dirty="0">
-                <a:solidFill>
-                  <a:srgbClr val="0B7285"/>
+              <a:rPr lang="en-US" sz="1200" b="1" dirty="0">
+                <a:solidFill>
+                  <a:srgbClr val="0284C7"/>
                 </a:solidFill>
                 <a:latin typeface="Arial" pitchFamily="34" charset="0"/>
                 <a:ea typeface="Arial" pitchFamily="34" charset="-122"/>
@@ -10167,9 +10960,9 @@
               <a:buNone/>
             </a:pPr>
             <a:r>
-              <a:rPr lang="en-US" sz="1150" dirty="0">
-                <a:solidFill>
-                  <a:srgbClr val="495057"/>
+              <a:rPr lang="en-US" sz="1100" dirty="0">
+                <a:solidFill>
+                  <a:srgbClr val="475569"/>
                 </a:solidFill>
                 <a:latin typeface="Arial" pitchFamily="34" charset="0"/>
                 <a:ea typeface="Arial" pitchFamily="34" charset="-122"/>
@@ -10182,9 +10975,9 @@
               <a:buNone/>
             </a:pPr>
             <a:r>
-              <a:rPr lang="en-US" sz="1250" b="1" dirty="0">
-                <a:solidFill>
-                  <a:srgbClr val="0B7285"/>
+              <a:rPr lang="en-US" sz="1200" b="1" dirty="0">
+                <a:solidFill>
+                  <a:srgbClr val="0284C7"/>
                 </a:solidFill>
                 <a:latin typeface="Arial" pitchFamily="34" charset="0"/>
                 <a:ea typeface="Arial" pitchFamily="34" charset="-122"/>
@@ -10197,9 +10990,9 @@
               <a:buNone/>
             </a:pPr>
             <a:r>
-              <a:rPr lang="en-US" sz="1150" dirty="0">
-                <a:solidFill>
-                  <a:srgbClr val="495057"/>
+              <a:rPr lang="en-US" sz="1100" dirty="0">
+                <a:solidFill>
+                  <a:srgbClr val="475569"/>
                 </a:solidFill>
                 <a:latin typeface="Arial" pitchFamily="34" charset="0"/>
                 <a:ea typeface="Arial" pitchFamily="34" charset="-122"/>
@@ -10212,9 +11005,9 @@
               <a:buNone/>
             </a:pPr>
             <a:r>
-              <a:rPr lang="en-US" sz="1250" b="1" dirty="0">
-                <a:solidFill>
-                  <a:srgbClr val="0B7285"/>
+              <a:rPr lang="en-US" sz="1200" b="1" dirty="0">
+                <a:solidFill>
+                  <a:srgbClr val="0284C7"/>
                 </a:solidFill>
                 <a:latin typeface="Arial" pitchFamily="34" charset="0"/>
                 <a:ea typeface="Arial" pitchFamily="34" charset="-122"/>
@@ -10227,9 +11020,9 @@
               <a:buNone/>
             </a:pPr>
             <a:r>
-              <a:rPr lang="en-US" sz="1150" dirty="0">
-                <a:solidFill>
-                  <a:srgbClr val="495057"/>
+              <a:rPr lang="en-US" sz="1100" dirty="0">
+                <a:solidFill>
+                  <a:srgbClr val="475569"/>
                 </a:solidFill>
                 <a:latin typeface="Arial" pitchFamily="34" charset="0"/>
                 <a:ea typeface="Arial" pitchFamily="34" charset="-122"/>
@@ -10237,7 +11030,7 @@
               </a:rPr>
               <a:t>Demuestra las competencias adquiridas en Sistemas Informáticos para crear software profesional a costo cero.</a:t>
             </a:r>
-            <a:endParaRPr lang="en-US" sz="1250" dirty="0"/>
+            <a:endParaRPr lang="en-US" sz="1200" dirty="0"/>
           </a:p>
         </p:txBody>
       </p:sp>
@@ -10249,8 +11042,8 @@
         </p:nvSpPr>
         <p:spPr>
           <a:xfrm>
-            <a:off x="6217920" y="1325880"/>
-            <a:ext cx="5212080" cy="4983480"/>
+            <a:off x="6126480" y="1280160"/>
+            <a:ext cx="5303520" cy="5029200"/>
           </a:xfrm>
           <a:prstGeom prst="rect">
             <a:avLst/>
@@ -10274,14 +11067,14 @@
         </p:nvSpPr>
         <p:spPr>
           <a:xfrm>
-            <a:off x="6263640" y="1325880"/>
-            <a:ext cx="5120640" cy="73152"/>
+            <a:off x="6163056" y="1280160"/>
+            <a:ext cx="5230368" cy="64008"/>
           </a:xfrm>
           <a:prstGeom prst="rect">
             <a:avLst/>
           </a:prstGeom>
           <a:solidFill>
-            <a:srgbClr val="FF922B"/>
+            <a:srgbClr val="D97706"/>
           </a:solidFill>
           <a:ln/>
         </p:spPr>
@@ -10294,8 +11087,8 @@
         </p:nvSpPr>
         <p:spPr>
           <a:xfrm>
-            <a:off x="6492240" y="1527048"/>
-            <a:ext cx="4663440" cy="347472"/>
+            <a:off x="6382512" y="1481328"/>
+            <a:ext cx="4791456" cy="347472"/>
           </a:xfrm>
           <a:prstGeom prst="rect">
             <a:avLst/>
@@ -10311,9 +11104,9 @@
               <a:buNone/>
             </a:pPr>
             <a:r>
-              <a:rPr lang="en-US" sz="1450" b="1" dirty="0">
-                <a:solidFill>
-                  <a:srgbClr val="0B7285"/>
+              <a:rPr lang="en-US" sz="1350" b="1" dirty="0">
+                <a:solidFill>
+                  <a:srgbClr val="D97706"/>
                 </a:solidFill>
                 <a:latin typeface="Arial" pitchFamily="34" charset="0"/>
                 <a:ea typeface="Arial" pitchFamily="34" charset="-122"/>
@@ -10321,7 +11114,7 @@
               </a:rPr>
               <a:t>Estrategia de Mejora y Proyección</a:t>
             </a:r>
-            <a:endParaRPr lang="en-US" sz="1450" dirty="0"/>
+            <a:endParaRPr lang="en-US" sz="1350" dirty="0"/>
           </a:p>
         </p:txBody>
       </p:sp>
@@ -10333,8 +11126,8 @@
         </p:nvSpPr>
         <p:spPr>
           <a:xfrm>
-            <a:off x="6492240" y="1965960"/>
-            <a:ext cx="4663440" cy="4023360"/>
+            <a:off x="6355080" y="1874520"/>
+            <a:ext cx="4846320" cy="4114800"/>
           </a:xfrm>
           <a:prstGeom prst="rect">
             <a:avLst/>
@@ -10350,9 +11143,9 @@
               <a:buNone/>
             </a:pPr>
             <a:r>
-              <a:rPr lang="en-US" sz="1250" b="1" dirty="0">
-                <a:solidFill>
-                  <a:srgbClr val="FF922B"/>
+              <a:rPr lang="en-US" sz="1200" b="1" dirty="0">
+                <a:solidFill>
+                  <a:srgbClr val="D97706"/>
                 </a:solidFill>
                 <a:latin typeface="Arial" pitchFamily="34" charset="0"/>
                 <a:ea typeface="Arial" pitchFamily="34" charset="-122"/>
@@ -10365,9 +11158,9 @@
               <a:buNone/>
             </a:pPr>
             <a:r>
-              <a:rPr lang="en-US" sz="1150" dirty="0">
-                <a:solidFill>
-                  <a:srgbClr val="495057"/>
+              <a:rPr lang="en-US" sz="1100" dirty="0">
+                <a:solidFill>
+                  <a:srgbClr val="475569"/>
                 </a:solidFill>
                 <a:latin typeface="Arial" pitchFamily="34" charset="0"/>
                 <a:ea typeface="Arial" pitchFamily="34" charset="-122"/>
@@ -10381,9 +11174,9 @@
               <a:buNone/>
             </a:pPr>
             <a:r>
-              <a:rPr lang="en-US" sz="1250" b="1" dirty="0">
-                <a:solidFill>
-                  <a:srgbClr val="FF922B"/>
+              <a:rPr lang="en-US" sz="1200" b="1" dirty="0">
+                <a:solidFill>
+                  <a:srgbClr val="D97706"/>
                 </a:solidFill>
                 <a:latin typeface="Arial" pitchFamily="34" charset="0"/>
                 <a:ea typeface="Arial" pitchFamily="34" charset="-122"/>
@@ -10396,9 +11189,9 @@
               <a:buNone/>
             </a:pPr>
             <a:r>
-              <a:rPr lang="en-US" sz="1150" dirty="0">
-                <a:solidFill>
-                  <a:srgbClr val="495057"/>
+              <a:rPr lang="en-US" sz="1100" dirty="0">
+                <a:solidFill>
+                  <a:srgbClr val="475569"/>
                 </a:solidFill>
                 <a:latin typeface="Arial" pitchFamily="34" charset="0"/>
                 <a:ea typeface="Arial" pitchFamily="34" charset="-122"/>
@@ -10406,16 +11199,16 @@
               </a:rPr>
               <a:t>• Transformar la web en una Progressive Web App (PWA) instalable directamente en Android e iOS.</a:t>
             </a:r>
-            <a:endParaRPr lang="en-US" sz="1250" dirty="0"/>
-          </a:p>
-          <a:p>
-            <a:pPr indent="0" marL="0">
-              <a:buNone/>
-            </a:pPr>
-            <a:r>
-              <a:rPr lang="en-US" sz="1150" dirty="0">
-                <a:solidFill>
-                  <a:srgbClr val="495057"/>
+            <a:endParaRPr lang="en-US" sz="1200" dirty="0"/>
+          </a:p>
+          <a:p>
+            <a:pPr indent="0" marL="0">
+              <a:buNone/>
+            </a:pPr>
+            <a:r>
+              <a:rPr lang="en-US" sz="1100" dirty="0">
+                <a:solidFill>
+                  <a:srgbClr val="475569"/>
                 </a:solidFill>
                 <a:latin typeface="Arial" pitchFamily="34" charset="0"/>
                 <a:ea typeface="Arial" pitchFamily="34" charset="-122"/>
@@ -10423,7 +11216,7 @@
               </a:rPr>
               <a:t>• Sistema de notificaciones push automáticas cuando se reporte una mascota perdida en el barrio del usuario.</a:t>
             </a:r>
-            <a:endParaRPr lang="en-US" sz="1250" dirty="0"/>
+            <a:endParaRPr lang="en-US" sz="1200" dirty="0"/>
           </a:p>
         </p:txBody>
       </p:sp>
